--- a/decks/Immuno_02_Autoimmune-Serology.pptx
+++ b/decks/Immuno_02_Autoimmune-Serology.pptx
@@ -26,9 +26,13 @@
     <p:sldId id="274" r:id="rId20"/>
     <p:sldId id="275" r:id="rId21"/>
     <p:sldId id="276" r:id="rId22"/>
+    <p:sldId id="277" r:id="rId23"/>
+    <p:sldId id="278" r:id="rId24"/>
+    <p:sldId id="279" r:id="rId25"/>
+    <p:sldId id="280" r:id="rId26"/>
   </p:sldIdLst>
   <p:notesMasterIdLst>
-    <p:notesMasterId r:id="rId23"/>
+    <p:notesMasterId r:id="rId27"/>
   </p:notesMasterIdLst>
   <p:sldSz cx="12191695" cy="6858000"/>
   <p:notesSz cx="6858000" cy="12191695"/>
@@ -1690,6 +1694,358 @@
             <a:fld id="{F7021451-1387-4CA6-816F-3879F97B5CBC}" type="slidenum">
               <a:rPr lang="en-US"/>
               <a:t>21</a:t>
+            </a:fld>
+            <a:endParaRPr lang="en-US"/>
+          </a:p>
+        </p:txBody>
+      </p:sp>
+    </p:spTree>
+    <p:extLst>
+      <p:ext uri="{BB962C8B-B14F-4D97-AF65-F5344CB8AC3E}">
+        <p14:creationId xmlns:p14="http://schemas.microsoft.com/office/powerpoint/2010/main" val="1024086991"/>
+      </p:ext>
+    </p:extLst>
+  </p:cSld>
+  <p:clrMapOvr>
+    <a:masterClrMapping/>
+  </p:clrMapOvr>
+</p:notes>
+</file>
+
+<file path=ppt/notesSlides/notesSlide22.xml><?xml version="1.0" encoding="utf-8"?>
+<p:notes xmlns:a="http://schemas.openxmlformats.org/drawingml/2006/main" xmlns:r="http://schemas.openxmlformats.org/officeDocument/2006/relationships" xmlns:p="http://schemas.openxmlformats.org/presentationml/2006/main">
+  <p:cSld>
+    <p:spTree>
+      <p:nvGrpSpPr>
+        <p:cNvPr id="1" name=""/>
+        <p:cNvGrpSpPr/>
+        <p:nvPr/>
+      </p:nvGrpSpPr>
+      <p:grpSpPr>
+        <a:xfrm>
+          <a:off x="0" y="0"/>
+          <a:ext cx="0" cy="0"/>
+          <a:chOff x="0" y="0"/>
+          <a:chExt cx="0" cy="0"/>
+        </a:xfrm>
+      </p:grpSpPr>
+      <p:sp>
+        <p:nvSpPr>
+          <p:cNvPr id="2" name="Slide Image Placeholder 1"/>
+          <p:cNvSpPr>
+            <a:spLocks noGrp="1" noRot="1" noChangeAspect="1"/>
+          </p:cNvSpPr>
+          <p:nvPr>
+            <p:ph type="sldImg"/>
+          </p:nvPr>
+        </p:nvSpPr>
+        <p:spPr/>
+      </p:sp>
+      <p:sp>
+        <p:nvSpPr>
+          <p:cNvPr id="3" name="Notes Placeholder 2"/>
+          <p:cNvSpPr>
+            <a:spLocks noGrp="1"/>
+          </p:cNvSpPr>
+          <p:nvPr>
+            <p:ph type="body" idx="1"/>
+          </p:nvPr>
+        </p:nvSpPr>
+        <p:spPr/>
+        <p:txBody>
+          <a:bodyPr/>
+          <a:lstStyle/>
+          <a:p>
+            <a:r>
+              <a:rPr lang="en-US" dirty="0"/>
+              <a:t/>
+            </a:r>
+            <a:endParaRPr lang="en-US" dirty="0"/>
+          </a:p>
+        </p:txBody>
+      </p:sp>
+      <p:sp>
+        <p:nvSpPr>
+          <p:cNvPr id="4" name="Slide Number Placeholder 3"/>
+          <p:cNvSpPr>
+            <a:spLocks noGrp="1"/>
+          </p:cNvSpPr>
+          <p:nvPr>
+            <p:ph type="sldNum" sz="quarter" idx="10"/>
+          </p:nvPr>
+        </p:nvSpPr>
+        <p:spPr/>
+        <p:txBody>
+          <a:bodyPr/>
+          <a:lstStyle/>
+          <a:p>
+            <a:fld id="{F7021451-1387-4CA6-816F-3879F97B5CBC}" type="slidenum">
+              <a:rPr lang="en-US"/>
+              <a:t>22</a:t>
+            </a:fld>
+            <a:endParaRPr lang="en-US"/>
+          </a:p>
+        </p:txBody>
+      </p:sp>
+    </p:spTree>
+    <p:extLst>
+      <p:ext uri="{BB962C8B-B14F-4D97-AF65-F5344CB8AC3E}">
+        <p14:creationId xmlns:p14="http://schemas.microsoft.com/office/powerpoint/2010/main" val="1024086991"/>
+      </p:ext>
+    </p:extLst>
+  </p:cSld>
+  <p:clrMapOvr>
+    <a:masterClrMapping/>
+  </p:clrMapOvr>
+</p:notes>
+</file>
+
+<file path=ppt/notesSlides/notesSlide23.xml><?xml version="1.0" encoding="utf-8"?>
+<p:notes xmlns:a="http://schemas.openxmlformats.org/drawingml/2006/main" xmlns:r="http://schemas.openxmlformats.org/officeDocument/2006/relationships" xmlns:p="http://schemas.openxmlformats.org/presentationml/2006/main">
+  <p:cSld>
+    <p:spTree>
+      <p:nvGrpSpPr>
+        <p:cNvPr id="1" name=""/>
+        <p:cNvGrpSpPr/>
+        <p:nvPr/>
+      </p:nvGrpSpPr>
+      <p:grpSpPr>
+        <a:xfrm>
+          <a:off x="0" y="0"/>
+          <a:ext cx="0" cy="0"/>
+          <a:chOff x="0" y="0"/>
+          <a:chExt cx="0" cy="0"/>
+        </a:xfrm>
+      </p:grpSpPr>
+      <p:sp>
+        <p:nvSpPr>
+          <p:cNvPr id="2" name="Slide Image Placeholder 1"/>
+          <p:cNvSpPr>
+            <a:spLocks noGrp="1" noRot="1" noChangeAspect="1"/>
+          </p:cNvSpPr>
+          <p:nvPr>
+            <p:ph type="sldImg"/>
+          </p:nvPr>
+        </p:nvSpPr>
+        <p:spPr/>
+      </p:sp>
+      <p:sp>
+        <p:nvSpPr>
+          <p:cNvPr id="3" name="Notes Placeholder 2"/>
+          <p:cNvSpPr>
+            <a:spLocks noGrp="1"/>
+          </p:cNvSpPr>
+          <p:nvPr>
+            <p:ph type="body" idx="1"/>
+          </p:nvPr>
+        </p:nvSpPr>
+        <p:spPr/>
+        <p:txBody>
+          <a:bodyPr/>
+          <a:lstStyle/>
+          <a:p>
+            <a:r>
+              <a:rPr lang="en-US" dirty="0"/>
+              <a:t/>
+            </a:r>
+            <a:endParaRPr lang="en-US" dirty="0"/>
+          </a:p>
+        </p:txBody>
+      </p:sp>
+      <p:sp>
+        <p:nvSpPr>
+          <p:cNvPr id="4" name="Slide Number Placeholder 3"/>
+          <p:cNvSpPr>
+            <a:spLocks noGrp="1"/>
+          </p:cNvSpPr>
+          <p:nvPr>
+            <p:ph type="sldNum" sz="quarter" idx="10"/>
+          </p:nvPr>
+        </p:nvSpPr>
+        <p:spPr/>
+        <p:txBody>
+          <a:bodyPr/>
+          <a:lstStyle/>
+          <a:p>
+            <a:fld id="{F7021451-1387-4CA6-816F-3879F97B5CBC}" type="slidenum">
+              <a:rPr lang="en-US"/>
+              <a:t>23</a:t>
+            </a:fld>
+            <a:endParaRPr lang="en-US"/>
+          </a:p>
+        </p:txBody>
+      </p:sp>
+    </p:spTree>
+    <p:extLst>
+      <p:ext uri="{BB962C8B-B14F-4D97-AF65-F5344CB8AC3E}">
+        <p14:creationId xmlns:p14="http://schemas.microsoft.com/office/powerpoint/2010/main" val="1024086991"/>
+      </p:ext>
+    </p:extLst>
+  </p:cSld>
+  <p:clrMapOvr>
+    <a:masterClrMapping/>
+  </p:clrMapOvr>
+</p:notes>
+</file>
+
+<file path=ppt/notesSlides/notesSlide24.xml><?xml version="1.0" encoding="utf-8"?>
+<p:notes xmlns:a="http://schemas.openxmlformats.org/drawingml/2006/main" xmlns:r="http://schemas.openxmlformats.org/officeDocument/2006/relationships" xmlns:p="http://schemas.openxmlformats.org/presentationml/2006/main">
+  <p:cSld>
+    <p:spTree>
+      <p:nvGrpSpPr>
+        <p:cNvPr id="1" name=""/>
+        <p:cNvGrpSpPr/>
+        <p:nvPr/>
+      </p:nvGrpSpPr>
+      <p:grpSpPr>
+        <a:xfrm>
+          <a:off x="0" y="0"/>
+          <a:ext cx="0" cy="0"/>
+          <a:chOff x="0" y="0"/>
+          <a:chExt cx="0" cy="0"/>
+        </a:xfrm>
+      </p:grpSpPr>
+      <p:sp>
+        <p:nvSpPr>
+          <p:cNvPr id="2" name="Slide Image Placeholder 1"/>
+          <p:cNvSpPr>
+            <a:spLocks noGrp="1" noRot="1" noChangeAspect="1"/>
+          </p:cNvSpPr>
+          <p:nvPr>
+            <p:ph type="sldImg"/>
+          </p:nvPr>
+        </p:nvSpPr>
+        <p:spPr/>
+      </p:sp>
+      <p:sp>
+        <p:nvSpPr>
+          <p:cNvPr id="3" name="Notes Placeholder 2"/>
+          <p:cNvSpPr>
+            <a:spLocks noGrp="1"/>
+          </p:cNvSpPr>
+          <p:nvPr>
+            <p:ph type="body" idx="1"/>
+          </p:nvPr>
+        </p:nvSpPr>
+        <p:spPr/>
+        <p:txBody>
+          <a:bodyPr/>
+          <a:lstStyle/>
+          <a:p>
+            <a:r>
+              <a:rPr lang="en-US" dirty="0"/>
+              <a:t/>
+            </a:r>
+            <a:endParaRPr lang="en-US" dirty="0"/>
+          </a:p>
+        </p:txBody>
+      </p:sp>
+      <p:sp>
+        <p:nvSpPr>
+          <p:cNvPr id="4" name="Slide Number Placeholder 3"/>
+          <p:cNvSpPr>
+            <a:spLocks noGrp="1"/>
+          </p:cNvSpPr>
+          <p:nvPr>
+            <p:ph type="sldNum" sz="quarter" idx="10"/>
+          </p:nvPr>
+        </p:nvSpPr>
+        <p:spPr/>
+        <p:txBody>
+          <a:bodyPr/>
+          <a:lstStyle/>
+          <a:p>
+            <a:fld id="{F7021451-1387-4CA6-816F-3879F97B5CBC}" type="slidenum">
+              <a:rPr lang="en-US"/>
+              <a:t>24</a:t>
+            </a:fld>
+            <a:endParaRPr lang="en-US"/>
+          </a:p>
+        </p:txBody>
+      </p:sp>
+    </p:spTree>
+    <p:extLst>
+      <p:ext uri="{BB962C8B-B14F-4D97-AF65-F5344CB8AC3E}">
+        <p14:creationId xmlns:p14="http://schemas.microsoft.com/office/powerpoint/2010/main" val="1024086991"/>
+      </p:ext>
+    </p:extLst>
+  </p:cSld>
+  <p:clrMapOvr>
+    <a:masterClrMapping/>
+  </p:clrMapOvr>
+</p:notes>
+</file>
+
+<file path=ppt/notesSlides/notesSlide25.xml><?xml version="1.0" encoding="utf-8"?>
+<p:notes xmlns:a="http://schemas.openxmlformats.org/drawingml/2006/main" xmlns:r="http://schemas.openxmlformats.org/officeDocument/2006/relationships" xmlns:p="http://schemas.openxmlformats.org/presentationml/2006/main">
+  <p:cSld>
+    <p:spTree>
+      <p:nvGrpSpPr>
+        <p:cNvPr id="1" name=""/>
+        <p:cNvGrpSpPr/>
+        <p:nvPr/>
+      </p:nvGrpSpPr>
+      <p:grpSpPr>
+        <a:xfrm>
+          <a:off x="0" y="0"/>
+          <a:ext cx="0" cy="0"/>
+          <a:chOff x="0" y="0"/>
+          <a:chExt cx="0" cy="0"/>
+        </a:xfrm>
+      </p:grpSpPr>
+      <p:sp>
+        <p:nvSpPr>
+          <p:cNvPr id="2" name="Slide Image Placeholder 1"/>
+          <p:cNvSpPr>
+            <a:spLocks noGrp="1" noRot="1" noChangeAspect="1"/>
+          </p:cNvSpPr>
+          <p:nvPr>
+            <p:ph type="sldImg"/>
+          </p:nvPr>
+        </p:nvSpPr>
+        <p:spPr/>
+      </p:sp>
+      <p:sp>
+        <p:nvSpPr>
+          <p:cNvPr id="3" name="Notes Placeholder 2"/>
+          <p:cNvSpPr>
+            <a:spLocks noGrp="1"/>
+          </p:cNvSpPr>
+          <p:nvPr>
+            <p:ph type="body" idx="1"/>
+          </p:nvPr>
+        </p:nvSpPr>
+        <p:spPr/>
+        <p:txBody>
+          <a:bodyPr/>
+          <a:lstStyle/>
+          <a:p>
+            <a:r>
+              <a:rPr lang="en-US" dirty="0"/>
+              <a:t/>
+            </a:r>
+            <a:endParaRPr lang="en-US" dirty="0"/>
+          </a:p>
+        </p:txBody>
+      </p:sp>
+      <p:sp>
+        <p:nvSpPr>
+          <p:cNvPr id="4" name="Slide Number Placeholder 3"/>
+          <p:cNvSpPr>
+            <a:spLocks noGrp="1"/>
+          </p:cNvSpPr>
+          <p:nvPr>
+            <p:ph type="sldNum" sz="quarter" idx="10"/>
+          </p:nvPr>
+        </p:nvSpPr>
+        <p:spPr/>
+        <p:txBody>
+          <a:bodyPr/>
+          <a:lstStyle/>
+          <a:p>
+            <a:fld id="{F7021451-1387-4CA6-816F-3879F97B5CBC}" type="slidenum">
+              <a:rPr lang="en-US"/>
+              <a:t>25</a:t>
             </a:fld>
             <a:endParaRPr lang="en-US"/>
           </a:p>
@@ -2893,7 +3249,7 @@
                 <a:ea typeface="Calibri" pitchFamily="34" charset="-122"/>
                 <a:cs typeface="Calibri" pitchFamily="34" charset="-120"/>
               </a:rPr>
-              <a:t>ANA, ENA, ANCA, Antiphospholipid, and Complement</a:t>
+              <a:t>ANA Patterns, Specific Autoantibodies, and Complement</a:t>
             </a:r>
             <a:endParaRPr lang="en-US" sz="1900" dirty="0"/>
           </a:p>
@@ -3085,7 +3441,7 @@
                 <a:ea typeface="Calibri" pitchFamily="34" charset="-122"/>
                 <a:cs typeface="Calibri" pitchFamily="34" charset="-120"/>
               </a:rPr>
-              <a:t>IMMUNOLOGY &amp; SEROLOGY   ·   ANCA</a:t>
+              <a:t>IMMUNOLOGY &amp; SEROLOGY   ·   COMPLEMENT</a:t>
             </a:r>
             <a:endParaRPr lang="en-US" sz="1100" dirty="0"/>
           </a:p>
@@ -3124,7 +3480,7 @@
                 <a:ea typeface="Calibri" pitchFamily="34" charset="-122"/>
                 <a:cs typeface="Calibri" pitchFamily="34" charset="-120"/>
               </a:rPr>
-              <a:t>ANCA in Vasculitis</a:t>
+              <a:t>Complement Pathways and Testing</a:t>
             </a:r>
             <a:endParaRPr lang="en-US" sz="3000" dirty="0"/>
           </a:p>
@@ -3138,18 +3494,23 @@
         </p:nvSpPr>
         <p:spPr>
           <a:xfrm>
-            <a:off x="566928" y="1517904"/>
-            <a:ext cx="5346040" cy="4114800"/>
+            <a:off x="1066648" y="1481328"/>
+            <a:ext cx="10058400" cy="4187952"/>
           </a:xfrm>
           <a:prstGeom prst="roundRect">
             <a:avLst>
-              <a:gd name="adj" fmla="val 2000"/>
+              <a:gd name="adj" fmla="val 1965"/>
             </a:avLst>
           </a:prstGeom>
           <a:solidFill>
-            <a:srgbClr val="F1E8F7"/>
+            <a:srgbClr val="FFFFFF"/>
           </a:solidFill>
-          <a:ln/>
+          <a:ln w="12700">
+            <a:solidFill>
+              <a:srgbClr val="DCE4EC"/>
+            </a:solidFill>
+            <a:prstDash val="solid"/>
+          </a:ln>
           <a:effectLst>
             <a:outerShdw sx="100000" sy="100000" kx="0" ky="0" algn="bl" rotWithShape="0" blurRad="88900" dist="25400" dir="5400000">
               <a:srgbClr val="22303C">
@@ -3159,55 +3520,40 @@
           </a:effectLst>
         </p:spPr>
       </p:sp>
-      <p:sp>
-        <p:nvSpPr>
-          <p:cNvPr id="5" name="Text 3"/>
-          <p:cNvSpPr/>
-          <p:nvPr/>
-        </p:nvSpPr>
-        <p:spPr>
-          <a:xfrm>
-            <a:off x="804672" y="1682496"/>
-            <a:ext cx="4888840" cy="274320"/>
-          </a:xfrm>
-          <a:prstGeom prst="rect">
-            <a:avLst/>
-          </a:prstGeom>
-          <a:noFill/>
-          <a:ln/>
-        </p:spPr>
-        <p:txBody>
-          <a:bodyPr wrap="square" lIns="0" tIns="0" rIns="0" bIns="0" rtlCol="0" anchor="ctr"/>
-          <a:lstStyle/>
-          <a:p>
-            <a:pPr indent="0" marL="0">
-              <a:buNone/>
-            </a:pPr>
-            <a:r>
-              <a:rPr lang="en-US" sz="1200" b="1" spc="100" kern="0" dirty="0">
-                <a:solidFill>
-                  <a:srgbClr val="4A1269"/>
-                </a:solidFill>
-                <a:latin typeface="Calibri" pitchFamily="34" charset="0"/>
-                <a:ea typeface="Calibri" pitchFamily="34" charset="-122"/>
-                <a:cs typeface="Calibri" pitchFamily="34" charset="-120"/>
-              </a:rPr>
-              <a:t>PATTERNS AND TARGETS</a:t>
-            </a:r>
-            <a:endParaRPr lang="en-US" sz="1200" dirty="0"/>
-          </a:p>
-        </p:txBody>
-      </p:sp>
-      <p:sp>
-        <p:nvSpPr>
-          <p:cNvPr id="6" name="Text 4"/>
-          <p:cNvSpPr/>
-          <p:nvPr/>
-        </p:nvSpPr>
-        <p:spPr>
-          <a:xfrm>
-            <a:off x="804672" y="2029968"/>
-            <a:ext cx="4870552" cy="3474720"/>
+      <p:pic>
+        <p:nvPicPr>
+          <p:cNvPr id="5" name="Image 0" descr="/tmp/cp_work2/art/immuno_complement.png">    </p:cNvPr>
+          <p:cNvPicPr>
+            <a:picLocks noChangeAspect="1"/>
+          </p:cNvPicPr>
+          <p:nvPr/>
+        </p:nvPicPr>
+        <p:blipFill>
+          <a:blip r:embed="rId1"/>
+          <a:stretch>
+            <a:fillRect/>
+          </a:stretch>
+        </p:blipFill>
+        <p:spPr>
+          <a:xfrm>
+            <a:off x="1194664" y="1609344"/>
+            <a:ext cx="9802368" cy="3931920"/>
+          </a:xfrm>
+          <a:prstGeom prst="rect">
+            <a:avLst/>
+          </a:prstGeom>
+        </p:spPr>
+      </p:pic>
+      <p:sp>
+        <p:nvSpPr>
+          <p:cNvPr id="6" name="Text 3"/>
+          <p:cNvSpPr/>
+          <p:nvPr/>
+        </p:nvSpPr>
+        <p:spPr>
+          <a:xfrm>
+            <a:off x="566928" y="5742432"/>
+            <a:ext cx="11057839" cy="365760"/>
           </a:xfrm>
           <a:prstGeom prst="rect">
             <a:avLst/>
@@ -3219,268 +3565,27 @@
           <a:bodyPr wrap="square" lIns="0" tIns="0" rIns="0" bIns="0" rtlCol="0" anchor="t"/>
           <a:lstStyle/>
           <a:p>
-            <a:pPr algn="l" marL="177800" indent="-177800">
-              <a:spcAft>
-                <a:spcPts val="900"/>
-              </a:spcAft>
-              <a:buSzPct val="100000"/>
-              <a:buChar char="•"/>
-            </a:pPr>
-            <a:r>
-              <a:rPr lang="en-US" sz="1250" b="1" dirty="0">
-                <a:solidFill>
-                  <a:srgbClr val="1B2A38"/>
-                </a:solidFill>
-                <a:latin typeface="Calibri" pitchFamily="34" charset="0"/>
-                <a:ea typeface="Calibri" pitchFamily="34" charset="-122"/>
-                <a:cs typeface="Calibri" pitchFamily="34" charset="-120"/>
-              </a:rPr>
-              <a:t>c-ANCA → PR3 (proteinase-3): granulomatosis with polyangiitis.</a:t>
-            </a:r>
-            <a:endParaRPr lang="en-US" sz="1250" dirty="0"/>
-          </a:p>
-          <a:p>
-            <a:pPr algn="l" marL="177800" indent="-177800">
-              <a:spcAft>
-                <a:spcPts val="900"/>
-              </a:spcAft>
-              <a:buSzPct val="100000"/>
-              <a:buChar char="•"/>
-            </a:pPr>
-            <a:r>
-              <a:rPr lang="en-US" sz="1250" dirty="0">
-                <a:solidFill>
-                  <a:srgbClr val="33444F"/>
-                </a:solidFill>
-                <a:latin typeface="Calibri" pitchFamily="34" charset="0"/>
-                <a:ea typeface="Calibri" pitchFamily="34" charset="-122"/>
-                <a:cs typeface="Calibri" pitchFamily="34" charset="-120"/>
-              </a:rPr>
-              <a:t>p-ANCA → MPO (myeloperoxidase): microscopic polyangiitis, eosinophilic GPA.</a:t>
-            </a:r>
-            <a:endParaRPr lang="en-US" sz="1250" dirty="0"/>
-          </a:p>
-          <a:p>
-            <a:pPr algn="l" marL="177800" indent="-177800">
-              <a:spcAft>
-                <a:spcPts val="900"/>
-              </a:spcAft>
-              <a:buSzPct val="100000"/>
-              <a:buChar char="•"/>
-            </a:pPr>
-            <a:r>
-              <a:rPr lang="en-US" sz="1250" dirty="0">
-                <a:solidFill>
-                  <a:srgbClr val="33444F"/>
-                </a:solidFill>
-                <a:latin typeface="Calibri" pitchFamily="34" charset="0"/>
-                <a:ea typeface="Calibri" pitchFamily="34" charset="-122"/>
-                <a:cs typeface="Calibri" pitchFamily="34" charset="-120"/>
-              </a:rPr>
-              <a:t>Screen by IFA, confirm/identify with PR3 and MPO immunoassays.</a:t>
-            </a:r>
-            <a:endParaRPr lang="en-US" sz="1250" dirty="0"/>
-          </a:p>
-          <a:p>
-            <a:pPr algn="l" marL="177800" indent="-177800">
-              <a:spcAft>
-                <a:spcPts val="900"/>
-              </a:spcAft>
-              <a:buSzPct val="100000"/>
-              <a:buChar char="•"/>
-            </a:pPr>
-            <a:r>
-              <a:rPr lang="en-US" sz="1250" dirty="0">
-                <a:solidFill>
-                  <a:srgbClr val="33444F"/>
-                </a:solidFill>
-                <a:latin typeface="Calibri" pitchFamily="34" charset="0"/>
-                <a:ea typeface="Calibri" pitchFamily="34" charset="-122"/>
-                <a:cs typeface="Calibri" pitchFamily="34" charset="-120"/>
-              </a:rPr>
-              <a:t>Test when small-vessel vasculitis is suspected, not as a routine screen.</a:t>
-            </a:r>
-            <a:endParaRPr lang="en-US" sz="1250" dirty="0"/>
-          </a:p>
-        </p:txBody>
-      </p:sp>
-      <p:sp>
-        <p:nvSpPr>
-          <p:cNvPr id="7" name="Shape 5"/>
-          <p:cNvSpPr/>
-          <p:nvPr/>
-        </p:nvSpPr>
-        <p:spPr>
-          <a:xfrm>
-            <a:off x="6278728" y="1517904"/>
-            <a:ext cx="5346040" cy="4114800"/>
-          </a:xfrm>
-          <a:prstGeom prst="roundRect">
-            <a:avLst>
-              <a:gd name="adj" fmla="val 2000"/>
-            </a:avLst>
-          </a:prstGeom>
-          <a:solidFill>
-            <a:srgbClr val="F1E8F7"/>
-          </a:solidFill>
-          <a:ln/>
-          <a:effectLst>
-            <a:outerShdw sx="100000" sy="100000" kx="0" ky="0" algn="bl" rotWithShape="0" blurRad="88900" dist="25400" dir="5400000">
-              <a:srgbClr val="22303C">
-                <a:alpha val="12000"/>
-              </a:srgbClr>
-            </a:outerShdw>
-          </a:effectLst>
-        </p:spPr>
-      </p:sp>
-      <p:sp>
-        <p:nvSpPr>
-          <p:cNvPr id="8" name="Text 6"/>
-          <p:cNvSpPr/>
-          <p:nvPr/>
-        </p:nvSpPr>
-        <p:spPr>
-          <a:xfrm>
-            <a:off x="6516472" y="1682496"/>
-            <a:ext cx="4888840" cy="274320"/>
-          </a:xfrm>
-          <a:prstGeom prst="rect">
-            <a:avLst/>
-          </a:prstGeom>
-          <a:noFill/>
-          <a:ln/>
-        </p:spPr>
-        <p:txBody>
-          <a:bodyPr wrap="square" lIns="0" tIns="0" rIns="0" bIns="0" rtlCol="0" anchor="ctr"/>
-          <a:lstStyle/>
-          <a:p>
-            <a:pPr indent="0" marL="0">
-              <a:buNone/>
-            </a:pPr>
-            <a:r>
-              <a:rPr lang="en-US" sz="1200" b="1" spc="100" kern="0" dirty="0">
-                <a:solidFill>
-                  <a:srgbClr val="4A1269"/>
-                </a:solidFill>
-                <a:latin typeface="Calibri" pitchFamily="34" charset="0"/>
-                <a:ea typeface="Calibri" pitchFamily="34" charset="-122"/>
-                <a:cs typeface="Calibri" pitchFamily="34" charset="-120"/>
-              </a:rPr>
-              <a:t>INTERPRETATION</a:t>
-            </a:r>
-            <a:endParaRPr lang="en-US" sz="1200" dirty="0"/>
-          </a:p>
-        </p:txBody>
-      </p:sp>
-      <p:sp>
-        <p:nvSpPr>
-          <p:cNvPr id="9" name="Text 7"/>
-          <p:cNvSpPr/>
-          <p:nvPr/>
-        </p:nvSpPr>
-        <p:spPr>
-          <a:xfrm>
-            <a:off x="6516472" y="2029968"/>
-            <a:ext cx="4870552" cy="3474720"/>
-          </a:xfrm>
-          <a:prstGeom prst="rect">
-            <a:avLst/>
-          </a:prstGeom>
-          <a:noFill/>
-          <a:ln/>
-        </p:spPr>
-        <p:txBody>
-          <a:bodyPr wrap="square" lIns="0" tIns="0" rIns="0" bIns="0" rtlCol="0" anchor="t"/>
-          <a:lstStyle/>
-          <a:p>
-            <a:pPr algn="l" marL="177800" indent="-177800">
-              <a:spcAft>
-                <a:spcPts val="900"/>
-              </a:spcAft>
-              <a:buSzPct val="100000"/>
-              <a:buChar char="•"/>
-            </a:pPr>
-            <a:r>
-              <a:rPr lang="en-US" sz="1250" b="1" dirty="0">
-                <a:solidFill>
-                  <a:srgbClr val="1B2A38"/>
-                </a:solidFill>
-                <a:latin typeface="Calibri" pitchFamily="34" charset="0"/>
-                <a:ea typeface="Calibri" pitchFamily="34" charset="-122"/>
-                <a:cs typeface="Calibri" pitchFamily="34" charset="-120"/>
-              </a:rPr>
-              <a:t>Combine IFA pattern with antigen-specific results for specificity.</a:t>
-            </a:r>
-            <a:endParaRPr lang="en-US" sz="1250" dirty="0"/>
-          </a:p>
-          <a:p>
-            <a:pPr algn="l" marL="177800" indent="-177800">
-              <a:spcAft>
-                <a:spcPts val="900"/>
-              </a:spcAft>
-              <a:buSzPct val="100000"/>
-              <a:buChar char="•"/>
-            </a:pPr>
-            <a:r>
-              <a:rPr lang="en-US" sz="1250" dirty="0">
-                <a:solidFill>
-                  <a:srgbClr val="33444F"/>
-                </a:solidFill>
-                <a:latin typeface="Calibri" pitchFamily="34" charset="0"/>
-                <a:ea typeface="Calibri" pitchFamily="34" charset="-122"/>
-                <a:cs typeface="Calibri" pitchFamily="34" charset="-120"/>
-              </a:rPr>
-              <a:t>Drug-induced ANCA (often high-titer MPO) occurs with certain drugs.</a:t>
-            </a:r>
-            <a:endParaRPr lang="en-US" sz="1250" dirty="0"/>
-          </a:p>
-          <a:p>
-            <a:pPr algn="l" marL="177800" indent="-177800">
-              <a:spcAft>
-                <a:spcPts val="900"/>
-              </a:spcAft>
-              <a:buSzPct val="100000"/>
-              <a:buChar char="•"/>
-            </a:pPr>
-            <a:r>
-              <a:rPr lang="en-US" sz="1250" dirty="0">
-                <a:solidFill>
-                  <a:srgbClr val="33444F"/>
-                </a:solidFill>
-                <a:latin typeface="Calibri" pitchFamily="34" charset="0"/>
-                <a:ea typeface="Calibri" pitchFamily="34" charset="-122"/>
-                <a:cs typeface="Calibri" pitchFamily="34" charset="-120"/>
-              </a:rPr>
-              <a:t>Titers may reflect activity but treat the patient, not the number.</a:t>
-            </a:r>
-            <a:endParaRPr lang="en-US" sz="1250" dirty="0"/>
-          </a:p>
-          <a:p>
-            <a:pPr algn="l" marL="177800" indent="-177800">
-              <a:spcAft>
-                <a:spcPts val="900"/>
-              </a:spcAft>
-              <a:buSzPct val="100000"/>
-              <a:buChar char="•"/>
-            </a:pPr>
-            <a:r>
-              <a:rPr lang="en-US" sz="1250" dirty="0">
-                <a:solidFill>
-                  <a:srgbClr val="33444F"/>
-                </a:solidFill>
-                <a:latin typeface="Calibri" pitchFamily="34" charset="0"/>
-                <a:ea typeface="Calibri" pitchFamily="34" charset="-122"/>
-                <a:cs typeface="Calibri" pitchFamily="34" charset="-120"/>
-              </a:rPr>
-              <a:t>Atypical p-ANCA occurs in IBD and other conditions.</a:t>
-            </a:r>
-            <a:endParaRPr lang="en-US" sz="1250" dirty="0"/>
-          </a:p>
-        </p:txBody>
-      </p:sp>
-      <p:sp>
-        <p:nvSpPr>
-          <p:cNvPr id="10" name="Text 8"/>
+            <a:pPr algn="ctr" indent="0" marL="0">
+              <a:buNone/>
+            </a:pPr>
+            <a:r>
+              <a:rPr lang="en-US" sz="1150" i="1" dirty="0">
+                <a:solidFill>
+                  <a:srgbClr val="6B7B8A"/>
+                </a:solidFill>
+                <a:latin typeface="Calibri" pitchFamily="34" charset="0"/>
+                <a:ea typeface="Calibri" pitchFamily="34" charset="-122"/>
+                <a:cs typeface="Calibri" pitchFamily="34" charset="-120"/>
+              </a:rPr>
+              <a:t>Original schematic. CH50 screens the classical pathway; low C3/C4 reflects consumption in active immune-complex disease.</a:t>
+            </a:r>
+            <a:endParaRPr lang="en-US" sz="1150" dirty="0"/>
+          </a:p>
+        </p:txBody>
+      </p:sp>
+      <p:sp>
+        <p:nvSpPr>
+          <p:cNvPr id="7" name="Text 4"/>
           <p:cNvSpPr/>
           <p:nvPr/>
         </p:nvSpPr>
@@ -3519,7 +3624,7 @@
       </p:sp>
       <p:sp>
         <p:nvSpPr>
-          <p:cNvPr id="11" name="Text 9"/>
+          <p:cNvPr id="8" name="Text 5"/>
           <p:cNvSpPr/>
           <p:nvPr/>
         </p:nvSpPr>
@@ -3649,7 +3754,7 @@
                 <a:ea typeface="Calibri" pitchFamily="34" charset="-122"/>
                 <a:cs typeface="Calibri" pitchFamily="34" charset="-120"/>
               </a:rPr>
-              <a:t>IMMUNOLOGY &amp; SEROLOGY   ·   APS &amp; COMPLEMENT</a:t>
+              <a:t>IMMUNOLOGY &amp; SEROLOGY   ·   COMPLEMENT</a:t>
             </a:r>
             <a:endParaRPr lang="en-US" sz="1100" dirty="0"/>
           </a:p>
@@ -3688,7 +3793,7 @@
                 <a:ea typeface="Calibri" pitchFamily="34" charset="-122"/>
                 <a:cs typeface="Calibri" pitchFamily="34" charset="-120"/>
               </a:rPr>
-              <a:t>Antiphospholipid &amp; Complement</a:t>
+              <a:t>Using Complement</a:t>
             </a:r>
             <a:endParaRPr lang="en-US" sz="3000" dirty="0"/>
           </a:p>
@@ -3756,7 +3861,7 @@
                 <a:ea typeface="Calibri" pitchFamily="34" charset="-122"/>
                 <a:cs typeface="Calibri" pitchFamily="34" charset="-120"/>
               </a:rPr>
-              <a:t>ANTIPHOSPHOLIPID SYNDROME</a:t>
+              <a:t>ACTIVITY &amp; CONSUMPTION</a:t>
             </a:r>
             <a:endParaRPr lang="en-US" sz="1200" dirty="0"/>
           </a:p>
@@ -3799,7 +3904,7 @@
                 <a:ea typeface="Calibri" pitchFamily="34" charset="-122"/>
                 <a:cs typeface="Calibri" pitchFamily="34" charset="-120"/>
               </a:rPr>
-              <a:t>Laboratory criteria (persistent ≥ 12 weeks): lupus anticoagulant, anticardiolipin, and/or anti-β₂-glycoprotein I.</a:t>
+              <a:t>Low C3 and C4 indicate complement consumption — active immune-complex disease (e.g., lupus nephritis flare).</a:t>
             </a:r>
             <a:endParaRPr lang="en-US" sz="1250" dirty="0"/>
           </a:p>
@@ -3820,7 +3925,7 @@
                 <a:ea typeface="Calibri" pitchFamily="34" charset="-122"/>
                 <a:cs typeface="Calibri" pitchFamily="34" charset="-120"/>
               </a:rPr>
-              <a:t>Lupus anticoagulant is a clotting-based assay (see Coagulation lecture).</a:t>
+              <a:t>CH50 screens the integrity of the classical pathway.</a:t>
             </a:r>
             <a:endParaRPr lang="en-US" sz="1250" dirty="0"/>
           </a:p>
@@ -3841,7 +3946,7 @@
                 <a:ea typeface="Calibri" pitchFamily="34" charset="-122"/>
                 <a:cs typeface="Calibri" pitchFamily="34" charset="-120"/>
               </a:rPr>
-              <a:t>Associated with thrombosis and pregnancy morbidity.</a:t>
+              <a:t>A very low/absent CH50 suggests a component deficiency.</a:t>
             </a:r>
             <a:endParaRPr lang="en-US" sz="1250" dirty="0"/>
           </a:p>
@@ -3862,7 +3967,7 @@
                 <a:ea typeface="Calibri" pitchFamily="34" charset="-122"/>
                 <a:cs typeface="Calibri" pitchFamily="34" charset="-120"/>
               </a:rPr>
-              <a:t>DOACs and acute clot can confound LA testing.</a:t>
+              <a:t>Trend complement to monitor disease activity.</a:t>
             </a:r>
             <a:endParaRPr lang="en-US" sz="1250" dirty="0"/>
           </a:p>
@@ -3885,7 +3990,7 @@
             </a:avLst>
           </a:prstGeom>
           <a:solidFill>
-            <a:srgbClr val="F1E8F7"/>
+            <a:srgbClr val="F1E9F7"/>
           </a:solidFill>
           <a:ln/>
           <a:effectLst>
@@ -3930,7 +4035,7 @@
                 <a:ea typeface="Calibri" pitchFamily="34" charset="-122"/>
                 <a:cs typeface="Calibri" pitchFamily="34" charset="-120"/>
               </a:rPr>
-              <a:t>COMPLEMENT</a:t>
+              <a:t>DEFICIENCY</a:t>
             </a:r>
             <a:endParaRPr lang="en-US" sz="1200" dirty="0"/>
           </a:p>
@@ -3973,7 +4078,7 @@
                 <a:ea typeface="Calibri" pitchFamily="34" charset="-122"/>
                 <a:cs typeface="Calibri" pitchFamily="34" charset="-120"/>
               </a:rPr>
-              <a:t>Low C3/C4 indicate consumption — useful in active SLE and some glomerulonephritides.</a:t>
+              <a:t>Early classical-pathway deficiencies predispose to lupus-like disease; terminal deficiencies to Neisseria infection.</a:t>
             </a:r>
             <a:endParaRPr lang="en-US" sz="1250" dirty="0"/>
           </a:p>
@@ -3994,7 +4099,7 @@
                 <a:ea typeface="Calibri" pitchFamily="34" charset="-122"/>
                 <a:cs typeface="Calibri" pitchFamily="34" charset="-120"/>
               </a:rPr>
-              <a:t>CH50 screens the classical pathway integrity (very low → component deficiency).</a:t>
+              <a:t>AH50 evaluates the alternative pathway.</a:t>
             </a:r>
             <a:endParaRPr lang="en-US" sz="1250" dirty="0"/>
           </a:p>
@@ -4015,7 +4120,7 @@
                 <a:ea typeface="Calibri" pitchFamily="34" charset="-122"/>
                 <a:cs typeface="Calibri" pitchFamily="34" charset="-120"/>
               </a:rPr>
-              <a:t>Trend complement with disease activity in lupus nephritis.</a:t>
+              <a:t>Distinguish acquired consumption from inherited deficiency.</a:t>
             </a:r>
             <a:endParaRPr lang="en-US" sz="1250" dirty="0"/>
           </a:p>
@@ -4036,7 +4141,7 @@
                 <a:ea typeface="Calibri" pitchFamily="34" charset="-122"/>
                 <a:cs typeface="Calibri" pitchFamily="34" charset="-120"/>
               </a:rPr>
-              <a:t>Genetic complement deficiencies predispose to Neisseria infection.</a:t>
+              <a:t>Correlate with the clinical syndrome.</a:t>
             </a:r>
             <a:endParaRPr lang="en-US" sz="1250" dirty="0"/>
           </a:p>
@@ -4159,6 +4264,570 @@
 <file path=ppt/slides/slide12.xml><?xml version="1.0" encoding="utf-8"?>
 <p:sld xmlns:a="http://schemas.openxmlformats.org/drawingml/2006/main" xmlns:r="http://schemas.openxmlformats.org/officeDocument/2006/relationships" xmlns:p="http://schemas.openxmlformats.org/presentationml/2006/main">
   <p:cSld name="Slide 12">
+    <p:bg>
+      <p:bgPr>
+        <a:solidFill>
+          <a:srgbClr val="FFFFFF"/>
+        </a:solidFill>
+      </p:bgPr>
+    </p:bg>
+    <p:spTree>
+      <p:nvGrpSpPr>
+        <p:cNvPr id="1" name=""/>
+        <p:cNvGrpSpPr/>
+        <p:nvPr/>
+      </p:nvGrpSpPr>
+      <p:grpSpPr>
+        <a:xfrm>
+          <a:off x="0" y="0"/>
+          <a:ext cx="0" cy="0"/>
+          <a:chOff x="0" y="0"/>
+          <a:chExt cx="0" cy="0"/>
+        </a:xfrm>
+      </p:grpSpPr>
+      <p:sp>
+        <p:nvSpPr>
+          <p:cNvPr id="2" name="Text 0"/>
+          <p:cNvSpPr/>
+          <p:nvPr/>
+        </p:nvSpPr>
+        <p:spPr>
+          <a:xfrm>
+            <a:off x="566928" y="329184"/>
+            <a:ext cx="10515600" cy="310896"/>
+          </a:xfrm>
+          <a:prstGeom prst="rect">
+            <a:avLst/>
+          </a:prstGeom>
+          <a:noFill/>
+          <a:ln/>
+        </p:spPr>
+        <p:txBody>
+          <a:bodyPr wrap="square" lIns="0" tIns="0" rIns="0" bIns="0" rtlCol="0" anchor="ctr"/>
+          <a:lstStyle/>
+          <a:p>
+            <a:pPr algn="l" indent="0" marL="0">
+              <a:buNone/>
+            </a:pPr>
+            <a:r>
+              <a:rPr lang="en-US" sz="1100" b="1" spc="150" kern="0" dirty="0">
+                <a:solidFill>
+                  <a:srgbClr val="6A1B9A"/>
+                </a:solidFill>
+                <a:latin typeface="Calibri" pitchFamily="34" charset="0"/>
+                <a:ea typeface="Calibri" pitchFamily="34" charset="-122"/>
+                <a:cs typeface="Calibri" pitchFamily="34" charset="-120"/>
+              </a:rPr>
+              <a:t>IMMUNOLOGY &amp; SEROLOGY   ·   ANCA</a:t>
+            </a:r>
+            <a:endParaRPr lang="en-US" sz="1100" dirty="0"/>
+          </a:p>
+        </p:txBody>
+      </p:sp>
+      <p:sp>
+        <p:nvSpPr>
+          <p:cNvPr id="3" name="Text 1"/>
+          <p:cNvSpPr/>
+          <p:nvPr/>
+        </p:nvSpPr>
+        <p:spPr>
+          <a:xfrm>
+            <a:off x="566928" y="713232"/>
+            <a:ext cx="11064240" cy="749808"/>
+          </a:xfrm>
+          <a:prstGeom prst="rect">
+            <a:avLst/>
+          </a:prstGeom>
+          <a:noFill/>
+          <a:ln/>
+        </p:spPr>
+        <p:txBody>
+          <a:bodyPr wrap="square" lIns="0" tIns="0" rIns="0" bIns="0" rtlCol="0" anchor="ctr"/>
+          <a:lstStyle/>
+          <a:p>
+            <a:pPr algn="l" indent="0" marL="0">
+              <a:buNone/>
+            </a:pPr>
+            <a:r>
+              <a:rPr lang="en-US" sz="3000" b="1" dirty="0">
+                <a:solidFill>
+                  <a:srgbClr val="0E3A5F"/>
+                </a:solidFill>
+                <a:latin typeface="Calibri" pitchFamily="34" charset="0"/>
+                <a:ea typeface="Calibri" pitchFamily="34" charset="-122"/>
+                <a:cs typeface="Calibri" pitchFamily="34" charset="-120"/>
+              </a:rPr>
+              <a:t>ANCA in Vasculitis</a:t>
+            </a:r>
+            <a:endParaRPr lang="en-US" sz="3000" dirty="0"/>
+          </a:p>
+        </p:txBody>
+      </p:sp>
+      <p:sp>
+        <p:nvSpPr>
+          <p:cNvPr id="4" name="Shape 2"/>
+          <p:cNvSpPr/>
+          <p:nvPr/>
+        </p:nvSpPr>
+        <p:spPr>
+          <a:xfrm>
+            <a:off x="566928" y="1517904"/>
+            <a:ext cx="5346040" cy="4114800"/>
+          </a:xfrm>
+          <a:prstGeom prst="roundRect">
+            <a:avLst>
+              <a:gd name="adj" fmla="val 2000"/>
+            </a:avLst>
+          </a:prstGeom>
+          <a:solidFill>
+            <a:srgbClr val="F1E8F7"/>
+          </a:solidFill>
+          <a:ln/>
+          <a:effectLst>
+            <a:outerShdw sx="100000" sy="100000" kx="0" ky="0" algn="bl" rotWithShape="0" blurRad="88900" dist="25400" dir="5400000">
+              <a:srgbClr val="22303C">
+                <a:alpha val="12000"/>
+              </a:srgbClr>
+            </a:outerShdw>
+          </a:effectLst>
+        </p:spPr>
+      </p:sp>
+      <p:sp>
+        <p:nvSpPr>
+          <p:cNvPr id="5" name="Text 3"/>
+          <p:cNvSpPr/>
+          <p:nvPr/>
+        </p:nvSpPr>
+        <p:spPr>
+          <a:xfrm>
+            <a:off x="804672" y="1682496"/>
+            <a:ext cx="4888840" cy="274320"/>
+          </a:xfrm>
+          <a:prstGeom prst="rect">
+            <a:avLst/>
+          </a:prstGeom>
+          <a:noFill/>
+          <a:ln/>
+        </p:spPr>
+        <p:txBody>
+          <a:bodyPr wrap="square" lIns="0" tIns="0" rIns="0" bIns="0" rtlCol="0" anchor="ctr"/>
+          <a:lstStyle/>
+          <a:p>
+            <a:pPr indent="0" marL="0">
+              <a:buNone/>
+            </a:pPr>
+            <a:r>
+              <a:rPr lang="en-US" sz="1200" b="1" spc="100" kern="0" dirty="0">
+                <a:solidFill>
+                  <a:srgbClr val="4A1269"/>
+                </a:solidFill>
+                <a:latin typeface="Calibri" pitchFamily="34" charset="0"/>
+                <a:ea typeface="Calibri" pitchFamily="34" charset="-122"/>
+                <a:cs typeface="Calibri" pitchFamily="34" charset="-120"/>
+              </a:rPr>
+              <a:t>PATTERNS AND TARGETS</a:t>
+            </a:r>
+            <a:endParaRPr lang="en-US" sz="1200" dirty="0"/>
+          </a:p>
+        </p:txBody>
+      </p:sp>
+      <p:sp>
+        <p:nvSpPr>
+          <p:cNvPr id="6" name="Text 4"/>
+          <p:cNvSpPr/>
+          <p:nvPr/>
+        </p:nvSpPr>
+        <p:spPr>
+          <a:xfrm>
+            <a:off x="804672" y="2029968"/>
+            <a:ext cx="4870552" cy="3474720"/>
+          </a:xfrm>
+          <a:prstGeom prst="rect">
+            <a:avLst/>
+          </a:prstGeom>
+          <a:noFill/>
+          <a:ln/>
+        </p:spPr>
+        <p:txBody>
+          <a:bodyPr wrap="square" lIns="0" tIns="0" rIns="0" bIns="0" rtlCol="0" anchor="t"/>
+          <a:lstStyle/>
+          <a:p>
+            <a:pPr algn="l" marL="177800" indent="-177800">
+              <a:spcAft>
+                <a:spcPts val="900"/>
+              </a:spcAft>
+              <a:buSzPct val="100000"/>
+              <a:buChar char="•"/>
+            </a:pPr>
+            <a:r>
+              <a:rPr lang="en-US" sz="1250" b="1" dirty="0">
+                <a:solidFill>
+                  <a:srgbClr val="1B2A38"/>
+                </a:solidFill>
+                <a:latin typeface="Calibri" pitchFamily="34" charset="0"/>
+                <a:ea typeface="Calibri" pitchFamily="34" charset="-122"/>
+                <a:cs typeface="Calibri" pitchFamily="34" charset="-120"/>
+              </a:rPr>
+              <a:t>c-ANCA → anti-PR3 (granulomatosis with polyangiitis); p-ANCA → anti-MPO (microscopic polyangiitis, EGPA).</a:t>
+            </a:r>
+            <a:endParaRPr lang="en-US" sz="1250" dirty="0"/>
+          </a:p>
+          <a:p>
+            <a:pPr algn="l" marL="177800" indent="-177800">
+              <a:spcAft>
+                <a:spcPts val="900"/>
+              </a:spcAft>
+              <a:buSzPct val="100000"/>
+              <a:buChar char="•"/>
+            </a:pPr>
+            <a:r>
+              <a:rPr lang="en-US" sz="1250" dirty="0">
+                <a:solidFill>
+                  <a:srgbClr val="33444F"/>
+                </a:solidFill>
+                <a:latin typeface="Calibri" pitchFamily="34" charset="0"/>
+                <a:ea typeface="Calibri" pitchFamily="34" charset="-122"/>
+                <a:cs typeface="Calibri" pitchFamily="34" charset="-120"/>
+              </a:rPr>
+              <a:t>IIF screen plus antigen-specific (PR3/MPO) confirmation.</a:t>
+            </a:r>
+            <a:endParaRPr lang="en-US" sz="1250" dirty="0"/>
+          </a:p>
+          <a:p>
+            <a:pPr algn="l" marL="177800" indent="-177800">
+              <a:spcAft>
+                <a:spcPts val="900"/>
+              </a:spcAft>
+              <a:buSzPct val="100000"/>
+              <a:buChar char="•"/>
+            </a:pPr>
+            <a:r>
+              <a:rPr lang="en-US" sz="1250" dirty="0">
+                <a:solidFill>
+                  <a:srgbClr val="33444F"/>
+                </a:solidFill>
+                <a:latin typeface="Calibri" pitchFamily="34" charset="0"/>
+                <a:ea typeface="Calibri" pitchFamily="34" charset="-122"/>
+                <a:cs typeface="Calibri" pitchFamily="34" charset="-120"/>
+              </a:rPr>
+              <a:t>Titers may parallel disease activity.</a:t>
+            </a:r>
+            <a:endParaRPr lang="en-US" sz="1250" dirty="0"/>
+          </a:p>
+          <a:p>
+            <a:pPr algn="l" marL="177800" indent="-177800">
+              <a:spcAft>
+                <a:spcPts val="900"/>
+              </a:spcAft>
+              <a:buSzPct val="100000"/>
+              <a:buChar char="•"/>
+            </a:pPr>
+            <a:r>
+              <a:rPr lang="en-US" sz="1250" dirty="0">
+                <a:solidFill>
+                  <a:srgbClr val="33444F"/>
+                </a:solidFill>
+                <a:latin typeface="Calibri" pitchFamily="34" charset="0"/>
+                <a:ea typeface="Calibri" pitchFamily="34" charset="-122"/>
+                <a:cs typeface="Calibri" pitchFamily="34" charset="-120"/>
+              </a:rPr>
+              <a:t>Interpret in the clinical vasculitis context.</a:t>
+            </a:r>
+            <a:endParaRPr lang="en-US" sz="1250" dirty="0"/>
+          </a:p>
+        </p:txBody>
+      </p:sp>
+      <p:sp>
+        <p:nvSpPr>
+          <p:cNvPr id="7" name="Shape 5"/>
+          <p:cNvSpPr/>
+          <p:nvPr/>
+        </p:nvSpPr>
+        <p:spPr>
+          <a:xfrm>
+            <a:off x="6278728" y="1517904"/>
+            <a:ext cx="5346040" cy="4114800"/>
+          </a:xfrm>
+          <a:prstGeom prst="roundRect">
+            <a:avLst>
+              <a:gd name="adj" fmla="val 2000"/>
+            </a:avLst>
+          </a:prstGeom>
+          <a:solidFill>
+            <a:srgbClr val="F1E9F7"/>
+          </a:solidFill>
+          <a:ln/>
+          <a:effectLst>
+            <a:outerShdw sx="100000" sy="100000" kx="0" ky="0" algn="bl" rotWithShape="0" blurRad="88900" dist="25400" dir="5400000">
+              <a:srgbClr val="22303C">
+                <a:alpha val="12000"/>
+              </a:srgbClr>
+            </a:outerShdw>
+          </a:effectLst>
+        </p:spPr>
+      </p:sp>
+      <p:sp>
+        <p:nvSpPr>
+          <p:cNvPr id="8" name="Text 6"/>
+          <p:cNvSpPr/>
+          <p:nvPr/>
+        </p:nvSpPr>
+        <p:spPr>
+          <a:xfrm>
+            <a:off x="6516472" y="1682496"/>
+            <a:ext cx="4888840" cy="274320"/>
+          </a:xfrm>
+          <a:prstGeom prst="rect">
+            <a:avLst/>
+          </a:prstGeom>
+          <a:noFill/>
+          <a:ln/>
+        </p:spPr>
+        <p:txBody>
+          <a:bodyPr wrap="square" lIns="0" tIns="0" rIns="0" bIns="0" rtlCol="0" anchor="ctr"/>
+          <a:lstStyle/>
+          <a:p>
+            <a:pPr indent="0" marL="0">
+              <a:buNone/>
+            </a:pPr>
+            <a:r>
+              <a:rPr lang="en-US" sz="1200" b="1" spc="100" kern="0" dirty="0">
+                <a:solidFill>
+                  <a:srgbClr val="4A1269"/>
+                </a:solidFill>
+                <a:latin typeface="Calibri" pitchFamily="34" charset="0"/>
+                <a:ea typeface="Calibri" pitchFamily="34" charset="-122"/>
+                <a:cs typeface="Calibri" pitchFamily="34" charset="-120"/>
+              </a:rPr>
+              <a:t>CAVEATS</a:t>
+            </a:r>
+            <a:endParaRPr lang="en-US" sz="1200" dirty="0"/>
+          </a:p>
+        </p:txBody>
+      </p:sp>
+      <p:sp>
+        <p:nvSpPr>
+          <p:cNvPr id="9" name="Text 7"/>
+          <p:cNvSpPr/>
+          <p:nvPr/>
+        </p:nvSpPr>
+        <p:spPr>
+          <a:xfrm>
+            <a:off x="6516472" y="2029968"/>
+            <a:ext cx="4870552" cy="3474720"/>
+          </a:xfrm>
+          <a:prstGeom prst="rect">
+            <a:avLst/>
+          </a:prstGeom>
+          <a:noFill/>
+          <a:ln/>
+        </p:spPr>
+        <p:txBody>
+          <a:bodyPr wrap="square" lIns="0" tIns="0" rIns="0" bIns="0" rtlCol="0" anchor="t"/>
+          <a:lstStyle/>
+          <a:p>
+            <a:pPr algn="l" marL="177800" indent="-177800">
+              <a:spcAft>
+                <a:spcPts val="900"/>
+              </a:spcAft>
+              <a:buSzPct val="100000"/>
+              <a:buChar char="•"/>
+            </a:pPr>
+            <a:r>
+              <a:rPr lang="en-US" sz="1250" b="1" dirty="0">
+                <a:solidFill>
+                  <a:srgbClr val="1B2A38"/>
+                </a:solidFill>
+                <a:latin typeface="Calibri" pitchFamily="34" charset="0"/>
+                <a:ea typeface="Calibri" pitchFamily="34" charset="-122"/>
+                <a:cs typeface="Calibri" pitchFamily="34" charset="-120"/>
+              </a:rPr>
+              <a:t>Atypical p-ANCA occurs in IBD and other conditions — not all ANCA means vasculitis.</a:t>
+            </a:r>
+            <a:endParaRPr lang="en-US" sz="1250" dirty="0"/>
+          </a:p>
+          <a:p>
+            <a:pPr algn="l" marL="177800" indent="-177800">
+              <a:spcAft>
+                <a:spcPts val="900"/>
+              </a:spcAft>
+              <a:buSzPct val="100000"/>
+              <a:buChar char="•"/>
+            </a:pPr>
+            <a:r>
+              <a:rPr lang="en-US" sz="1250" dirty="0">
+                <a:solidFill>
+                  <a:srgbClr val="33444F"/>
+                </a:solidFill>
+                <a:latin typeface="Calibri" pitchFamily="34" charset="0"/>
+                <a:ea typeface="Calibri" pitchFamily="34" charset="-122"/>
+                <a:cs typeface="Calibri" pitchFamily="34" charset="-120"/>
+              </a:rPr>
+              <a:t>Drug-induced ANCA can occur.</a:t>
+            </a:r>
+            <a:endParaRPr lang="en-US" sz="1250" dirty="0"/>
+          </a:p>
+          <a:p>
+            <a:pPr algn="l" marL="177800" indent="-177800">
+              <a:spcAft>
+                <a:spcPts val="900"/>
+              </a:spcAft>
+              <a:buSzPct val="100000"/>
+              <a:buChar char="•"/>
+            </a:pPr>
+            <a:r>
+              <a:rPr lang="en-US" sz="1250" dirty="0">
+                <a:solidFill>
+                  <a:srgbClr val="33444F"/>
+                </a:solidFill>
+                <a:latin typeface="Calibri" pitchFamily="34" charset="0"/>
+                <a:ea typeface="Calibri" pitchFamily="34" charset="-122"/>
+                <a:cs typeface="Calibri" pitchFamily="34" charset="-120"/>
+              </a:rPr>
+              <a:t>Combine serology with biopsy where indicated.</a:t>
+            </a:r>
+            <a:endParaRPr lang="en-US" sz="1250" dirty="0"/>
+          </a:p>
+          <a:p>
+            <a:pPr algn="l" marL="177800" indent="-177800">
+              <a:spcAft>
+                <a:spcPts val="900"/>
+              </a:spcAft>
+              <a:buSzPct val="100000"/>
+              <a:buChar char="•"/>
+            </a:pPr>
+            <a:r>
+              <a:rPr lang="en-US" sz="1250" dirty="0">
+                <a:solidFill>
+                  <a:srgbClr val="33444F"/>
+                </a:solidFill>
+                <a:latin typeface="Calibri" pitchFamily="34" charset="0"/>
+                <a:ea typeface="Calibri" pitchFamily="34" charset="-122"/>
+                <a:cs typeface="Calibri" pitchFamily="34" charset="-120"/>
+              </a:rPr>
+              <a:t>Avoid testing without clinical suspicion.</a:t>
+            </a:r>
+            <a:endParaRPr lang="en-US" sz="1250" dirty="0"/>
+          </a:p>
+        </p:txBody>
+      </p:sp>
+      <p:sp>
+        <p:nvSpPr>
+          <p:cNvPr id="10" name="Text 8"/>
+          <p:cNvSpPr/>
+          <p:nvPr/>
+        </p:nvSpPr>
+        <p:spPr>
+          <a:xfrm>
+            <a:off x="566928" y="6473952"/>
+            <a:ext cx="7772400" cy="274320"/>
+          </a:xfrm>
+          <a:prstGeom prst="rect">
+            <a:avLst/>
+          </a:prstGeom>
+          <a:noFill/>
+          <a:ln/>
+        </p:spPr>
+        <p:txBody>
+          <a:bodyPr wrap="square" lIns="0" tIns="0" rIns="0" bIns="0" rtlCol="0" anchor="ctr"/>
+          <a:lstStyle/>
+          <a:p>
+            <a:pPr algn="l" indent="0" marL="0">
+              <a:buNone/>
+            </a:pPr>
+            <a:r>
+              <a:rPr lang="en-US" sz="850" dirty="0">
+                <a:solidFill>
+                  <a:srgbClr val="9AA8B4"/>
+                </a:solidFill>
+                <a:latin typeface="Calibri" pitchFamily="34" charset="0"/>
+                <a:ea typeface="Calibri" pitchFamily="34" charset="-122"/>
+                <a:cs typeface="Calibri" pitchFamily="34" charset="-120"/>
+              </a:rPr>
+              <a:t>Makassed General Hospital  ·  Department of Laboratory Medicine</a:t>
+            </a:r>
+            <a:endParaRPr lang="en-US" sz="850" dirty="0"/>
+          </a:p>
+        </p:txBody>
+      </p:sp>
+      <p:sp>
+        <p:nvSpPr>
+          <p:cNvPr id="11" name="Text 9"/>
+          <p:cNvSpPr/>
+          <p:nvPr/>
+        </p:nvSpPr>
+        <p:spPr>
+          <a:xfrm>
+            <a:off x="9814255" y="6473952"/>
+            <a:ext cx="1828800" cy="274320"/>
+          </a:xfrm>
+          <a:prstGeom prst="rect">
+            <a:avLst/>
+          </a:prstGeom>
+          <a:noFill/>
+          <a:ln/>
+        </p:spPr>
+        <p:txBody>
+          <a:bodyPr wrap="square" lIns="0" tIns="0" rIns="0" bIns="0" rtlCol="0" anchor="ctr"/>
+          <a:lstStyle/>
+          <a:p>
+            <a:pPr algn="r" indent="0" marL="0">
+              <a:buNone/>
+            </a:pPr>
+            <a:r>
+              <a:rPr lang="en-US" sz="850" dirty="0">
+                <a:solidFill>
+                  <a:srgbClr val="9AA8B4"/>
+                </a:solidFill>
+                <a:latin typeface="Calibri" pitchFamily="34" charset="0"/>
+                <a:ea typeface="Calibri" pitchFamily="34" charset="-122"/>
+                <a:cs typeface="Calibri" pitchFamily="34" charset="-120"/>
+              </a:rPr>
+              <a:t>CP Lecture Series</a:t>
+            </a:r>
+            <a:pPr algn="r" indent="0" marL="0">
+              <a:buNone/>
+            </a:pPr>
+            <a:r>
+              <a:rPr lang="en-US" sz="850" dirty="0">
+                <a:solidFill>
+                  <a:srgbClr val="DCE4EC"/>
+                </a:solidFill>
+                <a:latin typeface="Calibri" pitchFamily="34" charset="0"/>
+                <a:ea typeface="Calibri" pitchFamily="34" charset="-122"/>
+                <a:cs typeface="Calibri" pitchFamily="34" charset="-120"/>
+              </a:rPr>
+              <a:t>   ·   </a:t>
+            </a:r>
+            <a:pPr algn="r" indent="0" marL="0">
+              <a:buNone/>
+            </a:pPr>
+            <a:r>
+              <a:rPr lang="en-US" sz="850" b="1" dirty="0">
+                <a:solidFill>
+                  <a:srgbClr val="6A1B9A"/>
+                </a:solidFill>
+                <a:latin typeface="Calibri" pitchFamily="34" charset="0"/>
+                <a:ea typeface="Calibri" pitchFamily="34" charset="-122"/>
+                <a:cs typeface="Calibri" pitchFamily="34" charset="-120"/>
+              </a:rPr>
+              <a:t>10</a:t>
+            </a:r>
+            <a:endParaRPr lang="en-US" sz="850" dirty="0"/>
+          </a:p>
+        </p:txBody>
+      </p:sp>
+    </p:spTree>
+  </p:cSld>
+  <p:clrMapOvr>
+    <a:masterClrMapping/>
+  </p:clrMapOvr>
+</p:sld>
+</file>
+
+<file path=ppt/slides/slide13.xml><?xml version="1.0" encoding="utf-8"?>
+<p:sld xmlns:a="http://schemas.openxmlformats.org/drawingml/2006/main" xmlns:r="http://schemas.openxmlformats.org/officeDocument/2006/relationships" xmlns:p="http://schemas.openxmlformats.org/presentationml/2006/main">
+  <p:cSld name="Slide 13">
     <p:bg>
       <p:bgPr>
         <a:solidFill>
@@ -4338,439 +5007,6 @@
               <a:t>Cases &amp; Board Review</a:t>
             </a:r>
             <a:endParaRPr lang="en-US" sz="3800" dirty="0"/>
-          </a:p>
-        </p:txBody>
-      </p:sp>
-    </p:spTree>
-  </p:cSld>
-  <p:clrMapOvr>
-    <a:masterClrMapping/>
-  </p:clrMapOvr>
-</p:sld>
-</file>
-
-<file path=ppt/slides/slide13.xml><?xml version="1.0" encoding="utf-8"?>
-<p:sld xmlns:a="http://schemas.openxmlformats.org/drawingml/2006/main" xmlns:r="http://schemas.openxmlformats.org/officeDocument/2006/relationships" xmlns:p="http://schemas.openxmlformats.org/presentationml/2006/main">
-  <p:cSld name="Slide 13">
-    <p:bg>
-      <p:bgPr>
-        <a:solidFill>
-          <a:srgbClr val="FFFFFF"/>
-        </a:solidFill>
-      </p:bgPr>
-    </p:bg>
-    <p:spTree>
-      <p:nvGrpSpPr>
-        <p:cNvPr id="1" name=""/>
-        <p:cNvGrpSpPr/>
-        <p:nvPr/>
-      </p:nvGrpSpPr>
-      <p:grpSpPr>
-        <a:xfrm>
-          <a:off x="0" y="0"/>
-          <a:ext cx="0" cy="0"/>
-          <a:chOff x="0" y="0"/>
-          <a:chExt cx="0" cy="0"/>
-        </a:xfrm>
-      </p:grpSpPr>
-      <p:sp>
-        <p:nvSpPr>
-          <p:cNvPr id="2" name="Text 0"/>
-          <p:cNvSpPr/>
-          <p:nvPr/>
-        </p:nvSpPr>
-        <p:spPr>
-          <a:xfrm>
-            <a:off x="566928" y="329184"/>
-            <a:ext cx="10515600" cy="310896"/>
-          </a:xfrm>
-          <a:prstGeom prst="rect">
-            <a:avLst/>
-          </a:prstGeom>
-          <a:noFill/>
-          <a:ln/>
-        </p:spPr>
-        <p:txBody>
-          <a:bodyPr wrap="square" lIns="0" tIns="0" rIns="0" bIns="0" rtlCol="0" anchor="ctr"/>
-          <a:lstStyle/>
-          <a:p>
-            <a:pPr algn="l" indent="0" marL="0">
-              <a:buNone/>
-            </a:pPr>
-            <a:r>
-              <a:rPr lang="en-US" sz="1100" b="1" spc="150" kern="0" dirty="0">
-                <a:solidFill>
-                  <a:srgbClr val="6A1B9A"/>
-                </a:solidFill>
-                <a:latin typeface="Calibri" pitchFamily="34" charset="0"/>
-                <a:ea typeface="Calibri" pitchFamily="34" charset="-122"/>
-                <a:cs typeface="Calibri" pitchFamily="34" charset="-120"/>
-              </a:rPr>
-              <a:t>IMMUNOLOGY &amp; SEROLOGY   ·   CASE 1</a:t>
-            </a:r>
-            <a:endParaRPr lang="en-US" sz="1100" dirty="0"/>
-          </a:p>
-        </p:txBody>
-      </p:sp>
-      <p:sp>
-        <p:nvSpPr>
-          <p:cNvPr id="3" name="Text 1"/>
-          <p:cNvSpPr/>
-          <p:nvPr/>
-        </p:nvSpPr>
-        <p:spPr>
-          <a:xfrm>
-            <a:off x="566928" y="713232"/>
-            <a:ext cx="11064240" cy="749808"/>
-          </a:xfrm>
-          <a:prstGeom prst="rect">
-            <a:avLst/>
-          </a:prstGeom>
-          <a:noFill/>
-          <a:ln/>
-        </p:spPr>
-        <p:txBody>
-          <a:bodyPr wrap="square" lIns="0" tIns="0" rIns="0" bIns="0" rtlCol="0" anchor="ctr"/>
-          <a:lstStyle/>
-          <a:p>
-            <a:pPr algn="l" indent="0" marL="0">
-              <a:buNone/>
-            </a:pPr>
-            <a:r>
-              <a:rPr lang="en-US" sz="3000" b="1" dirty="0">
-                <a:solidFill>
-                  <a:srgbClr val="0E3A5F"/>
-                </a:solidFill>
-                <a:latin typeface="Calibri" pitchFamily="34" charset="0"/>
-                <a:ea typeface="Calibri" pitchFamily="34" charset="-122"/>
-                <a:cs typeface="Calibri" pitchFamily="34" charset="-120"/>
-              </a:rPr>
-              <a:t>Case 1</a:t>
-            </a:r>
-            <a:endParaRPr lang="en-US" sz="3000" dirty="0"/>
-          </a:p>
-        </p:txBody>
-      </p:sp>
-      <p:sp>
-        <p:nvSpPr>
-          <p:cNvPr id="4" name="Shape 2"/>
-          <p:cNvSpPr/>
-          <p:nvPr/>
-        </p:nvSpPr>
-        <p:spPr>
-          <a:xfrm>
-            <a:off x="566928" y="1517904"/>
-            <a:ext cx="11057839" cy="2788920"/>
-          </a:xfrm>
-          <a:prstGeom prst="roundRect">
-            <a:avLst>
-              <a:gd name="adj" fmla="val 2951"/>
-            </a:avLst>
-          </a:prstGeom>
-          <a:solidFill>
-            <a:srgbClr val="F1E8F7"/>
-          </a:solidFill>
-          <a:ln/>
-          <a:effectLst>
-            <a:outerShdw sx="100000" sy="100000" kx="0" ky="0" algn="bl" rotWithShape="0" blurRad="88900" dist="25400" dir="5400000">
-              <a:srgbClr val="22303C">
-                <a:alpha val="12000"/>
-              </a:srgbClr>
-            </a:outerShdw>
-          </a:effectLst>
-        </p:spPr>
-      </p:sp>
-      <p:sp>
-        <p:nvSpPr>
-          <p:cNvPr id="5" name="Text 3"/>
-          <p:cNvSpPr/>
-          <p:nvPr/>
-        </p:nvSpPr>
-        <p:spPr>
-          <a:xfrm>
-            <a:off x="841248" y="1700784"/>
-            <a:ext cx="5486400" cy="292608"/>
-          </a:xfrm>
-          <a:prstGeom prst="rect">
-            <a:avLst/>
-          </a:prstGeom>
-          <a:noFill/>
-          <a:ln/>
-        </p:spPr>
-        <p:txBody>
-          <a:bodyPr wrap="square" lIns="0" tIns="0" rIns="0" bIns="0" rtlCol="0" anchor="ctr"/>
-          <a:lstStyle/>
-          <a:p>
-            <a:pPr indent="0" marL="0">
-              <a:buNone/>
-            </a:pPr>
-            <a:r>
-              <a:rPr lang="en-US" sz="1100" b="1" spc="150" kern="0" dirty="0">
-                <a:solidFill>
-                  <a:srgbClr val="6A1B9A"/>
-                </a:solidFill>
-                <a:latin typeface="Calibri" pitchFamily="34" charset="0"/>
-                <a:ea typeface="Calibri" pitchFamily="34" charset="-122"/>
-                <a:cs typeface="Calibri" pitchFamily="34" charset="-120"/>
-              </a:rPr>
-              <a:t>CLINICAL VIGNETTE</a:t>
-            </a:r>
-            <a:endParaRPr lang="en-US" sz="1100" dirty="0"/>
-          </a:p>
-        </p:txBody>
-      </p:sp>
-      <p:sp>
-        <p:nvSpPr>
-          <p:cNvPr id="6" name="Text 4"/>
-          <p:cNvSpPr/>
-          <p:nvPr/>
-        </p:nvSpPr>
-        <p:spPr>
-          <a:xfrm>
-            <a:off x="841248" y="2029968"/>
-            <a:ext cx="10509199" cy="2148840"/>
-          </a:xfrm>
-          <a:prstGeom prst="rect">
-            <a:avLst/>
-          </a:prstGeom>
-          <a:noFill/>
-          <a:ln/>
-        </p:spPr>
-        <p:txBody>
-          <a:bodyPr wrap="square" lIns="0" tIns="0" rIns="0" bIns="0" rtlCol="0" anchor="t"/>
-          <a:lstStyle/>
-          <a:p>
-            <a:pPr algn="l" indent="0" marL="0">
-              <a:lnSpc>
-                <a:spcPct val="108000"/>
-              </a:lnSpc>
-              <a:buNone/>
-            </a:pPr>
-            <a:r>
-              <a:rPr lang="en-US" sz="1450" dirty="0">
-                <a:solidFill>
-                  <a:srgbClr val="33444F"/>
-                </a:solidFill>
-                <a:latin typeface="Calibri" pitchFamily="34" charset="0"/>
-                <a:ea typeface="Calibri" pitchFamily="34" charset="-122"/>
-                <a:cs typeface="Calibri" pitchFamily="34" charset="-120"/>
-              </a:rPr>
-              <a:t>A young woman with arthralgias, a malar rash, and nephritis has a high-titer homogeneous ANA. Reflex testing shows positive anti-dsDNA and anti-Sm, with low C3 and C4.</a:t>
-            </a:r>
-            <a:endParaRPr lang="en-US" sz="1450" dirty="0"/>
-          </a:p>
-        </p:txBody>
-      </p:sp>
-      <p:sp>
-        <p:nvSpPr>
-          <p:cNvPr id="7" name="Shape 5"/>
-          <p:cNvSpPr/>
-          <p:nvPr/>
-        </p:nvSpPr>
-        <p:spPr>
-          <a:xfrm>
-            <a:off x="566928" y="4553712"/>
-            <a:ext cx="11057839" cy="1325880"/>
-          </a:xfrm>
-          <a:prstGeom prst="roundRect">
-            <a:avLst>
-              <a:gd name="adj" fmla="val 6207"/>
-            </a:avLst>
-          </a:prstGeom>
-          <a:solidFill>
-            <a:srgbClr val="0E3A5F"/>
-          </a:solidFill>
-          <a:ln/>
-          <a:effectLst>
-            <a:outerShdw sx="100000" sy="100000" kx="0" ky="0" algn="bl" rotWithShape="0" blurRad="88900" dist="25400" dir="5400000">
-              <a:srgbClr val="22303C">
-                <a:alpha val="12000"/>
-              </a:srgbClr>
-            </a:outerShdw>
-          </a:effectLst>
-        </p:spPr>
-      </p:sp>
-      <p:sp>
-        <p:nvSpPr>
-          <p:cNvPr id="8" name="Text 6"/>
-          <p:cNvSpPr/>
-          <p:nvPr/>
-        </p:nvSpPr>
-        <p:spPr>
-          <a:xfrm>
-            <a:off x="822960" y="4681728"/>
-            <a:ext cx="640080" cy="960120"/>
-          </a:xfrm>
-          <a:prstGeom prst="rect">
-            <a:avLst/>
-          </a:prstGeom>
-          <a:noFill/>
-          <a:ln/>
-        </p:spPr>
-        <p:txBody>
-          <a:bodyPr wrap="square" lIns="0" tIns="0" rIns="0" bIns="0" rtlCol="0" anchor="ctr"/>
-          <a:lstStyle/>
-          <a:p>
-            <a:pPr algn="ctr" indent="0" marL="0">
-              <a:buNone/>
-            </a:pPr>
-            <a:r>
-              <a:rPr lang="en-US" sz="4000" b="1" dirty="0">
-                <a:solidFill>
-                  <a:srgbClr val="6A1B9A"/>
-                </a:solidFill>
-                <a:latin typeface="Calibri" pitchFamily="34" charset="0"/>
-                <a:ea typeface="Calibri" pitchFamily="34" charset="-122"/>
-                <a:cs typeface="Calibri" pitchFamily="34" charset="-120"/>
-              </a:rPr>
-              <a:t>?</a:t>
-            </a:r>
-            <a:endParaRPr lang="en-US" sz="4000" dirty="0"/>
-          </a:p>
-        </p:txBody>
-      </p:sp>
-      <p:sp>
-        <p:nvSpPr>
-          <p:cNvPr id="9" name="Text 7"/>
-          <p:cNvSpPr/>
-          <p:nvPr/>
-        </p:nvSpPr>
-        <p:spPr>
-          <a:xfrm>
-            <a:off x="1618488" y="4553712"/>
-            <a:ext cx="9686239" cy="1325880"/>
-          </a:xfrm>
-          <a:prstGeom prst="rect">
-            <a:avLst/>
-          </a:prstGeom>
-          <a:noFill/>
-          <a:ln/>
-        </p:spPr>
-        <p:txBody>
-          <a:bodyPr wrap="square" lIns="0" tIns="0" rIns="0" bIns="0" rtlCol="0" anchor="ctr"/>
-          <a:lstStyle/>
-          <a:p>
-            <a:pPr algn="l" indent="0" marL="0">
-              <a:buNone/>
-            </a:pPr>
-            <a:r>
-              <a:rPr lang="en-US" sz="1500" b="1" dirty="0">
-                <a:solidFill>
-                  <a:srgbClr val="FFFFFF"/>
-                </a:solidFill>
-                <a:latin typeface="Calibri" pitchFamily="34" charset="0"/>
-                <a:ea typeface="Calibri" pitchFamily="34" charset="-122"/>
-                <a:cs typeface="Calibri" pitchFamily="34" charset="-120"/>
-              </a:rPr>
-              <a:t>What is the diagnosis and which results are most specific?</a:t>
-            </a:r>
-            <a:endParaRPr lang="en-US" sz="1500" dirty="0"/>
-          </a:p>
-        </p:txBody>
-      </p:sp>
-      <p:sp>
-        <p:nvSpPr>
-          <p:cNvPr id="10" name="Text 8"/>
-          <p:cNvSpPr/>
-          <p:nvPr/>
-        </p:nvSpPr>
-        <p:spPr>
-          <a:xfrm>
-            <a:off x="566928" y="6473952"/>
-            <a:ext cx="7772400" cy="274320"/>
-          </a:xfrm>
-          <a:prstGeom prst="rect">
-            <a:avLst/>
-          </a:prstGeom>
-          <a:noFill/>
-          <a:ln/>
-        </p:spPr>
-        <p:txBody>
-          <a:bodyPr wrap="square" lIns="0" tIns="0" rIns="0" bIns="0" rtlCol="0" anchor="ctr"/>
-          <a:lstStyle/>
-          <a:p>
-            <a:pPr algn="l" indent="0" marL="0">
-              <a:buNone/>
-            </a:pPr>
-            <a:r>
-              <a:rPr lang="en-US" sz="850" dirty="0">
-                <a:solidFill>
-                  <a:srgbClr val="9AA8B4"/>
-                </a:solidFill>
-                <a:latin typeface="Calibri" pitchFamily="34" charset="0"/>
-                <a:ea typeface="Calibri" pitchFamily="34" charset="-122"/>
-                <a:cs typeface="Calibri" pitchFamily="34" charset="-120"/>
-              </a:rPr>
-              <a:t>Makassed General Hospital  ·  Department of Laboratory Medicine</a:t>
-            </a:r>
-            <a:endParaRPr lang="en-US" sz="850" dirty="0"/>
-          </a:p>
-        </p:txBody>
-      </p:sp>
-      <p:sp>
-        <p:nvSpPr>
-          <p:cNvPr id="11" name="Text 9"/>
-          <p:cNvSpPr/>
-          <p:nvPr/>
-        </p:nvSpPr>
-        <p:spPr>
-          <a:xfrm>
-            <a:off x="9814255" y="6473952"/>
-            <a:ext cx="1828800" cy="274320"/>
-          </a:xfrm>
-          <a:prstGeom prst="rect">
-            <a:avLst/>
-          </a:prstGeom>
-          <a:noFill/>
-          <a:ln/>
-        </p:spPr>
-        <p:txBody>
-          <a:bodyPr wrap="square" lIns="0" tIns="0" rIns="0" bIns="0" rtlCol="0" anchor="ctr"/>
-          <a:lstStyle/>
-          <a:p>
-            <a:pPr algn="r" indent="0" marL="0">
-              <a:buNone/>
-            </a:pPr>
-            <a:r>
-              <a:rPr lang="en-US" sz="850" dirty="0">
-                <a:solidFill>
-                  <a:srgbClr val="9AA8B4"/>
-                </a:solidFill>
-                <a:latin typeface="Calibri" pitchFamily="34" charset="0"/>
-                <a:ea typeface="Calibri" pitchFamily="34" charset="-122"/>
-                <a:cs typeface="Calibri" pitchFamily="34" charset="-120"/>
-              </a:rPr>
-              <a:t>CP Lecture Series</a:t>
-            </a:r>
-            <a:pPr algn="r" indent="0" marL="0">
-              <a:buNone/>
-            </a:pPr>
-            <a:r>
-              <a:rPr lang="en-US" sz="850" dirty="0">
-                <a:solidFill>
-                  <a:srgbClr val="DCE4EC"/>
-                </a:solidFill>
-                <a:latin typeface="Calibri" pitchFamily="34" charset="0"/>
-                <a:ea typeface="Calibri" pitchFamily="34" charset="-122"/>
-                <a:cs typeface="Calibri" pitchFamily="34" charset="-120"/>
-              </a:rPr>
-              <a:t>   ·   </a:t>
-            </a:r>
-            <a:pPr algn="r" indent="0" marL="0">
-              <a:buNone/>
-            </a:pPr>
-            <a:r>
-              <a:rPr lang="en-US" sz="850" b="1" dirty="0">
-                <a:solidFill>
-                  <a:srgbClr val="6A1B9A"/>
-                </a:solidFill>
-                <a:latin typeface="Calibri" pitchFamily="34" charset="0"/>
-                <a:ea typeface="Calibri" pitchFamily="34" charset="-122"/>
-                <a:cs typeface="Calibri" pitchFamily="34" charset="-120"/>
-              </a:rPr>
-              <a:t>10</a:t>
-            </a:r>
-            <a:endParaRPr lang="en-US" sz="850" dirty="0"/>
           </a:p>
         </p:txBody>
       </p:sp>
@@ -4839,7 +5075,7 @@
                 <a:ea typeface="Calibri" pitchFamily="34" charset="-122"/>
                 <a:cs typeface="Calibri" pitchFamily="34" charset="-120"/>
               </a:rPr>
-              <a:t>IMMUNOLOGY &amp; SEROLOGY   ·   CASE 1  ·  RESOLUTION</a:t>
+              <a:t>IMMUNOLOGY &amp; SEROLOGY   ·   CASE 1</a:t>
             </a:r>
             <a:endParaRPr lang="en-US" sz="1100" dirty="0"/>
           </a:p>
@@ -4878,7 +5114,7 @@
                 <a:ea typeface="Calibri" pitchFamily="34" charset="-122"/>
                 <a:cs typeface="Calibri" pitchFamily="34" charset="-120"/>
               </a:rPr>
-              <a:t>Case 1: Systemic Lupus Erythematosus</a:t>
+              <a:t>Case 1</a:t>
             </a:r>
             <a:endParaRPr lang="en-US" sz="3000" dirty="0"/>
           </a:p>
@@ -4886,124 +5122,18 @@
       </p:sp>
       <p:sp>
         <p:nvSpPr>
-          <p:cNvPr id="4" name="Text 2"/>
-          <p:cNvSpPr/>
-          <p:nvPr/>
-        </p:nvSpPr>
-        <p:spPr>
-          <a:xfrm>
-            <a:off x="566928" y="1554480"/>
-            <a:ext cx="6413547" cy="4023360"/>
-          </a:xfrm>
-          <a:prstGeom prst="rect">
-            <a:avLst/>
-          </a:prstGeom>
-          <a:noFill/>
-          <a:ln/>
-        </p:spPr>
-        <p:txBody>
-          <a:bodyPr wrap="square" lIns="0" tIns="0" rIns="0" bIns="0" rtlCol="0" anchor="t"/>
-          <a:lstStyle/>
-          <a:p>
-            <a:pPr algn="l" marL="177800" indent="-177800">
-              <a:spcAft>
-                <a:spcPts val="900"/>
-              </a:spcAft>
-              <a:buSzPct val="100000"/>
-              <a:buChar char="•"/>
-            </a:pPr>
-            <a:r>
-              <a:rPr lang="en-US" sz="1400" b="1" dirty="0">
-                <a:solidFill>
-                  <a:srgbClr val="1B2A38"/>
-                </a:solidFill>
-                <a:latin typeface="Calibri" pitchFamily="34" charset="0"/>
-                <a:ea typeface="Calibri" pitchFamily="34" charset="-122"/>
-                <a:cs typeface="Calibri" pitchFamily="34" charset="-120"/>
-              </a:rPr>
-              <a:t>Clinical SLE supported by a high-titer ANA and specific antibodies.</a:t>
-            </a:r>
-            <a:endParaRPr lang="en-US" sz="1400" dirty="0"/>
-          </a:p>
-          <a:p>
-            <a:pPr algn="l" marL="177800" indent="-177800">
-              <a:spcAft>
-                <a:spcPts val="900"/>
-              </a:spcAft>
-              <a:buSzPct val="100000"/>
-              <a:buChar char="•"/>
-            </a:pPr>
-            <a:r>
-              <a:rPr lang="en-US" sz="1400" dirty="0">
-                <a:solidFill>
-                  <a:srgbClr val="33444F"/>
-                </a:solidFill>
-                <a:latin typeface="Calibri" pitchFamily="34" charset="0"/>
-                <a:ea typeface="Calibri" pitchFamily="34" charset="-122"/>
-                <a:cs typeface="Calibri" pitchFamily="34" charset="-120"/>
-              </a:rPr>
-              <a:t>Anti-dsDNA and anti-Sm are highly SPECIFIC for SLE; anti-dsDNA correlates with activity/nephritis.</a:t>
-            </a:r>
-            <a:endParaRPr lang="en-US" sz="1400" dirty="0"/>
-          </a:p>
-          <a:p>
-            <a:pPr algn="l" marL="177800" indent="-177800">
-              <a:spcAft>
-                <a:spcPts val="900"/>
-              </a:spcAft>
-              <a:buSzPct val="100000"/>
-              <a:buChar char="•"/>
-            </a:pPr>
-            <a:r>
-              <a:rPr lang="en-US" sz="1400" dirty="0">
-                <a:solidFill>
-                  <a:srgbClr val="33444F"/>
-                </a:solidFill>
-                <a:latin typeface="Calibri" pitchFamily="34" charset="0"/>
-                <a:ea typeface="Calibri" pitchFamily="34" charset="-122"/>
-                <a:cs typeface="Calibri" pitchFamily="34" charset="-120"/>
-              </a:rPr>
-              <a:t>Low C3/C4 indicate complement consumption in active disease.</a:t>
-            </a:r>
-            <a:endParaRPr lang="en-US" sz="1400" dirty="0"/>
-          </a:p>
-          <a:p>
-            <a:pPr algn="l" marL="177800" indent="-177800">
-              <a:spcAft>
-                <a:spcPts val="900"/>
-              </a:spcAft>
-              <a:buSzPct val="100000"/>
-              <a:buChar char="•"/>
-            </a:pPr>
-            <a:r>
-              <a:rPr lang="en-US" sz="1400" dirty="0">
-                <a:solidFill>
-                  <a:srgbClr val="33444F"/>
-                </a:solidFill>
-                <a:latin typeface="Calibri" pitchFamily="34" charset="0"/>
-                <a:ea typeface="Calibri" pitchFamily="34" charset="-122"/>
-                <a:cs typeface="Calibri" pitchFamily="34" charset="-120"/>
-              </a:rPr>
-              <a:t>Follow anti-dsDNA and complement (not ANA) for activity.</a:t>
-            </a:r>
-            <a:endParaRPr lang="en-US" sz="1400" dirty="0"/>
-          </a:p>
-        </p:txBody>
-      </p:sp>
-      <p:sp>
-        <p:nvSpPr>
-          <p:cNvPr id="5" name="Shape 3"/>
-          <p:cNvSpPr/>
-          <p:nvPr/>
-        </p:nvSpPr>
-        <p:spPr>
-          <a:xfrm>
-            <a:off x="7422788" y="1554480"/>
-            <a:ext cx="4201979" cy="3977640"/>
+          <p:cNvPr id="4" name="Shape 2"/>
+          <p:cNvSpPr/>
+          <p:nvPr/>
+        </p:nvSpPr>
+        <p:spPr>
+          <a:xfrm>
+            <a:off x="566928" y="1517904"/>
+            <a:ext cx="11057839" cy="2788920"/>
           </a:xfrm>
           <a:prstGeom prst="roundRect">
             <a:avLst>
-              <a:gd name="adj" fmla="val 2069"/>
+              <a:gd name="adj" fmla="val 2951"/>
             </a:avLst>
           </a:prstGeom>
           <a:solidFill>
@@ -5021,53 +5151,53 @@
       </p:sp>
       <p:sp>
         <p:nvSpPr>
+          <p:cNvPr id="5" name="Text 3"/>
+          <p:cNvSpPr/>
+          <p:nvPr/>
+        </p:nvSpPr>
+        <p:spPr>
+          <a:xfrm>
+            <a:off x="841248" y="1700784"/>
+            <a:ext cx="5486400" cy="292608"/>
+          </a:xfrm>
+          <a:prstGeom prst="rect">
+            <a:avLst/>
+          </a:prstGeom>
+          <a:noFill/>
+          <a:ln/>
+        </p:spPr>
+        <p:txBody>
+          <a:bodyPr wrap="square" lIns="0" tIns="0" rIns="0" bIns="0" rtlCol="0" anchor="ctr"/>
+          <a:lstStyle/>
+          <a:p>
+            <a:pPr indent="0" marL="0">
+              <a:buNone/>
+            </a:pPr>
+            <a:r>
+              <a:rPr lang="en-US" sz="1100" b="1" spc="150" kern="0" dirty="0">
+                <a:solidFill>
+                  <a:srgbClr val="6A1B9A"/>
+                </a:solidFill>
+                <a:latin typeface="Calibri" pitchFamily="34" charset="0"/>
+                <a:ea typeface="Calibri" pitchFamily="34" charset="-122"/>
+                <a:cs typeface="Calibri" pitchFamily="34" charset="-120"/>
+              </a:rPr>
+              <a:t>CLINICAL VIGNETTE</a:t>
+            </a:r>
+            <a:endParaRPr lang="en-US" sz="1100" dirty="0"/>
+          </a:p>
+        </p:txBody>
+      </p:sp>
+      <p:sp>
+        <p:nvSpPr>
           <p:cNvPr id="6" name="Text 4"/>
           <p:cNvSpPr/>
           <p:nvPr/>
         </p:nvSpPr>
         <p:spPr>
           <a:xfrm>
-            <a:off x="7660532" y="1755648"/>
-            <a:ext cx="3744779" cy="310896"/>
-          </a:xfrm>
-          <a:prstGeom prst="rect">
-            <a:avLst/>
-          </a:prstGeom>
-          <a:noFill/>
-          <a:ln/>
-        </p:spPr>
-        <p:txBody>
-          <a:bodyPr wrap="square" lIns="0" tIns="0" rIns="0" bIns="0" rtlCol="0" anchor="ctr"/>
-          <a:lstStyle/>
-          <a:p>
-            <a:pPr indent="0" marL="0">
-              <a:buNone/>
-            </a:pPr>
-            <a:r>
-              <a:rPr lang="en-US" sz="1100" b="1" spc="140" kern="0" dirty="0">
-                <a:solidFill>
-                  <a:srgbClr val="6A1B9A"/>
-                </a:solidFill>
-                <a:latin typeface="Calibri" pitchFamily="34" charset="0"/>
-                <a:ea typeface="Calibri" pitchFamily="34" charset="-122"/>
-                <a:cs typeface="Calibri" pitchFamily="34" charset="-120"/>
-              </a:rPr>
-              <a:t>TEACHING POINT</a:t>
-            </a:r>
-            <a:endParaRPr lang="en-US" sz="1100" dirty="0"/>
-          </a:p>
-        </p:txBody>
-      </p:sp>
-      <p:sp>
-        <p:nvSpPr>
-          <p:cNvPr id="7" name="Text 5"/>
-          <p:cNvSpPr/>
-          <p:nvPr/>
-        </p:nvSpPr>
-        <p:spPr>
-          <a:xfrm>
-            <a:off x="7660532" y="2121408"/>
-            <a:ext cx="3726491" cy="3291840"/>
+            <a:off x="841248" y="2029968"/>
+            <a:ext cx="10509199" cy="2148840"/>
           </a:xfrm>
           <a:prstGeom prst="rect">
             <a:avLst/>
@@ -5081,12 +5211,12 @@
           <a:p>
             <a:pPr algn="l" indent="0" marL="0">
               <a:lnSpc>
-                <a:spcPct val="110000"/>
+                <a:spcPct val="108000"/>
               </a:lnSpc>
               <a:buNone/>
             </a:pPr>
             <a:r>
-              <a:rPr lang="en-US" sz="1350" dirty="0">
+              <a:rPr lang="en-US" sz="1450" dirty="0">
                 <a:solidFill>
                   <a:srgbClr val="33444F"/>
                 </a:solidFill>
@@ -5094,15 +5224,122 @@
                 <a:ea typeface="Calibri" pitchFamily="34" charset="-122"/>
                 <a:cs typeface="Calibri" pitchFamily="34" charset="-120"/>
               </a:rPr>
-              <a:t>ANA screens; anti-dsDNA and anti-Sm confirm SLE specificity; complement and anti-dsDNA track activity — ANA titer does not.</a:t>
-            </a:r>
-            <a:endParaRPr lang="en-US" sz="1350" dirty="0"/>
-          </a:p>
-        </p:txBody>
+              <a:t>A young woman with arthralgias, rash, and proteinuria has a high-titer homogeneous ANA, positive dsDNA, and low C3/C4.</a:t>
+            </a:r>
+            <a:endParaRPr lang="en-US" sz="1450" dirty="0"/>
+          </a:p>
+        </p:txBody>
+      </p:sp>
+      <p:sp>
+        <p:nvSpPr>
+          <p:cNvPr id="7" name="Shape 5"/>
+          <p:cNvSpPr/>
+          <p:nvPr/>
+        </p:nvSpPr>
+        <p:spPr>
+          <a:xfrm>
+            <a:off x="566928" y="4553712"/>
+            <a:ext cx="11057839" cy="1325880"/>
+          </a:xfrm>
+          <a:prstGeom prst="roundRect">
+            <a:avLst>
+              <a:gd name="adj" fmla="val 6207"/>
+            </a:avLst>
+          </a:prstGeom>
+          <a:solidFill>
+            <a:srgbClr val="0E3A5F"/>
+          </a:solidFill>
+          <a:ln/>
+          <a:effectLst>
+            <a:outerShdw sx="100000" sy="100000" kx="0" ky="0" algn="bl" rotWithShape="0" blurRad="88900" dist="25400" dir="5400000">
+              <a:srgbClr val="22303C">
+                <a:alpha val="12000"/>
+              </a:srgbClr>
+            </a:outerShdw>
+          </a:effectLst>
+        </p:spPr>
       </p:sp>
       <p:sp>
         <p:nvSpPr>
           <p:cNvPr id="8" name="Text 6"/>
+          <p:cNvSpPr/>
+          <p:nvPr/>
+        </p:nvSpPr>
+        <p:spPr>
+          <a:xfrm>
+            <a:off x="822960" y="4681728"/>
+            <a:ext cx="640080" cy="960120"/>
+          </a:xfrm>
+          <a:prstGeom prst="rect">
+            <a:avLst/>
+          </a:prstGeom>
+          <a:noFill/>
+          <a:ln/>
+        </p:spPr>
+        <p:txBody>
+          <a:bodyPr wrap="square" lIns="0" tIns="0" rIns="0" bIns="0" rtlCol="0" anchor="ctr"/>
+          <a:lstStyle/>
+          <a:p>
+            <a:pPr algn="ctr" indent="0" marL="0">
+              <a:buNone/>
+            </a:pPr>
+            <a:r>
+              <a:rPr lang="en-US" sz="4000" b="1" dirty="0">
+                <a:solidFill>
+                  <a:srgbClr val="6A1B9A"/>
+                </a:solidFill>
+                <a:latin typeface="Calibri" pitchFamily="34" charset="0"/>
+                <a:ea typeface="Calibri" pitchFamily="34" charset="-122"/>
+                <a:cs typeface="Calibri" pitchFamily="34" charset="-120"/>
+              </a:rPr>
+              <a:t>?</a:t>
+            </a:r>
+            <a:endParaRPr lang="en-US" sz="4000" dirty="0"/>
+          </a:p>
+        </p:txBody>
+      </p:sp>
+      <p:sp>
+        <p:nvSpPr>
+          <p:cNvPr id="9" name="Text 7"/>
+          <p:cNvSpPr/>
+          <p:nvPr/>
+        </p:nvSpPr>
+        <p:spPr>
+          <a:xfrm>
+            <a:off x="1618488" y="4553712"/>
+            <a:ext cx="9686239" cy="1325880"/>
+          </a:xfrm>
+          <a:prstGeom prst="rect">
+            <a:avLst/>
+          </a:prstGeom>
+          <a:noFill/>
+          <a:ln/>
+        </p:spPr>
+        <p:txBody>
+          <a:bodyPr wrap="square" lIns="0" tIns="0" rIns="0" bIns="0" rtlCol="0" anchor="ctr"/>
+          <a:lstStyle/>
+          <a:p>
+            <a:pPr algn="l" indent="0" marL="0">
+              <a:buNone/>
+            </a:pPr>
+            <a:r>
+              <a:rPr lang="en-US" sz="1500" b="1" dirty="0">
+                <a:solidFill>
+                  <a:srgbClr val="FFFFFF"/>
+                </a:solidFill>
+                <a:latin typeface="Calibri" pitchFamily="34" charset="0"/>
+                <a:ea typeface="Calibri" pitchFamily="34" charset="-122"/>
+                <a:cs typeface="Calibri" pitchFamily="34" charset="-120"/>
+              </a:rPr>
+              <a:t>What is the unifying interpretation?</a:t>
+            </a:r>
+            <a:endParaRPr lang="en-US" sz="1500" dirty="0"/>
+          </a:p>
+        </p:txBody>
+      </p:sp>
+      <p:sp>
+        <p:nvSpPr>
+          <p:cNvPr id="10" name="Text 8"/>
           <p:cNvSpPr/>
           <p:nvPr/>
         </p:nvSpPr>
@@ -5141,7 +5378,7 @@
       </p:sp>
       <p:sp>
         <p:nvSpPr>
-          <p:cNvPr id="9" name="Text 7"/>
+          <p:cNvPr id="11" name="Text 9"/>
           <p:cNvSpPr/>
           <p:nvPr/>
         </p:nvSpPr>
@@ -5271,7 +5508,7 @@
                 <a:ea typeface="Calibri" pitchFamily="34" charset="-122"/>
                 <a:cs typeface="Calibri" pitchFamily="34" charset="-120"/>
               </a:rPr>
-              <a:t>IMMUNOLOGY &amp; SEROLOGY   ·   CASE 2</a:t>
+              <a:t>IMMUNOLOGY &amp; SEROLOGY   ·   CASE 1  ·  RESOLUTION</a:t>
             </a:r>
             <a:endParaRPr lang="en-US" sz="1100" dirty="0"/>
           </a:p>
@@ -5310,7 +5547,7 @@
                 <a:ea typeface="Calibri" pitchFamily="34" charset="-122"/>
                 <a:cs typeface="Calibri" pitchFamily="34" charset="-120"/>
               </a:rPr>
-              <a:t>Case 2</a:t>
+              <a:t>Case 1: Active Lupus Nephritis</a:t>
             </a:r>
             <a:endParaRPr lang="en-US" sz="3000" dirty="0"/>
           </a:p>
@@ -5318,18 +5555,124 @@
       </p:sp>
       <p:sp>
         <p:nvSpPr>
-          <p:cNvPr id="4" name="Shape 2"/>
-          <p:cNvSpPr/>
-          <p:nvPr/>
-        </p:nvSpPr>
-        <p:spPr>
-          <a:xfrm>
-            <a:off x="566928" y="1517904"/>
-            <a:ext cx="11057839" cy="2788920"/>
+          <p:cNvPr id="4" name="Text 2"/>
+          <p:cNvSpPr/>
+          <p:nvPr/>
+        </p:nvSpPr>
+        <p:spPr>
+          <a:xfrm>
+            <a:off x="566928" y="1554480"/>
+            <a:ext cx="6413547" cy="4023360"/>
+          </a:xfrm>
+          <a:prstGeom prst="rect">
+            <a:avLst/>
+          </a:prstGeom>
+          <a:noFill/>
+          <a:ln/>
+        </p:spPr>
+        <p:txBody>
+          <a:bodyPr wrap="square" lIns="0" tIns="0" rIns="0" bIns="0" rtlCol="0" anchor="t"/>
+          <a:lstStyle/>
+          <a:p>
+            <a:pPr algn="l" marL="177800" indent="-177800">
+              <a:spcAft>
+                <a:spcPts val="900"/>
+              </a:spcAft>
+              <a:buSzPct val="100000"/>
+              <a:buChar char="•"/>
+            </a:pPr>
+            <a:r>
+              <a:rPr lang="en-US" sz="1400" b="1" dirty="0">
+                <a:solidFill>
+                  <a:srgbClr val="1B2A38"/>
+                </a:solidFill>
+                <a:latin typeface="Calibri" pitchFamily="34" charset="0"/>
+                <a:ea typeface="Calibri" pitchFamily="34" charset="-122"/>
+                <a:cs typeface="Calibri" pitchFamily="34" charset="-120"/>
+              </a:rPr>
+              <a:t>High-titer ANA with anti-dsDNA and low complement supports active SLE with renal involvement.</a:t>
+            </a:r>
+            <a:endParaRPr lang="en-US" sz="1400" dirty="0"/>
+          </a:p>
+          <a:p>
+            <a:pPr algn="l" marL="177800" indent="-177800">
+              <a:spcAft>
+                <a:spcPts val="900"/>
+              </a:spcAft>
+              <a:buSzPct val="100000"/>
+              <a:buChar char="•"/>
+            </a:pPr>
+            <a:r>
+              <a:rPr lang="en-US" sz="1400" dirty="0">
+                <a:solidFill>
+                  <a:srgbClr val="33444F"/>
+                </a:solidFill>
+                <a:latin typeface="Calibri" pitchFamily="34" charset="0"/>
+                <a:ea typeface="Calibri" pitchFamily="34" charset="-122"/>
+                <a:cs typeface="Calibri" pitchFamily="34" charset="-120"/>
+              </a:rPr>
+              <a:t>Anti-dsDNA is specific for SLE and tracks nephritis.</a:t>
+            </a:r>
+            <a:endParaRPr lang="en-US" sz="1400" dirty="0"/>
+          </a:p>
+          <a:p>
+            <a:pPr algn="l" marL="177800" indent="-177800">
+              <a:spcAft>
+                <a:spcPts val="900"/>
+              </a:spcAft>
+              <a:buSzPct val="100000"/>
+              <a:buChar char="•"/>
+            </a:pPr>
+            <a:r>
+              <a:rPr lang="en-US" sz="1400" dirty="0">
+                <a:solidFill>
+                  <a:srgbClr val="33444F"/>
+                </a:solidFill>
+                <a:latin typeface="Calibri" pitchFamily="34" charset="0"/>
+                <a:ea typeface="Calibri" pitchFamily="34" charset="-122"/>
+                <a:cs typeface="Calibri" pitchFamily="34" charset="-120"/>
+              </a:rPr>
+              <a:t>Falling C3/C4 reflects complement consumption in a flare.</a:t>
+            </a:r>
+            <a:endParaRPr lang="en-US" sz="1400" dirty="0"/>
+          </a:p>
+          <a:p>
+            <a:pPr algn="l" marL="177800" indent="-177800">
+              <a:spcAft>
+                <a:spcPts val="900"/>
+              </a:spcAft>
+              <a:buSzPct val="100000"/>
+              <a:buChar char="•"/>
+            </a:pPr>
+            <a:r>
+              <a:rPr lang="en-US" sz="1400" dirty="0">
+                <a:solidFill>
+                  <a:srgbClr val="33444F"/>
+                </a:solidFill>
+                <a:latin typeface="Calibri" pitchFamily="34" charset="0"/>
+                <a:ea typeface="Calibri" pitchFamily="34" charset="-122"/>
+                <a:cs typeface="Calibri" pitchFamily="34" charset="-120"/>
+              </a:rPr>
+              <a:t>Trend dsDNA and complement to monitor activity.</a:t>
+            </a:r>
+            <a:endParaRPr lang="en-US" sz="1400" dirty="0"/>
+          </a:p>
+        </p:txBody>
+      </p:sp>
+      <p:sp>
+        <p:nvSpPr>
+          <p:cNvPr id="5" name="Shape 3"/>
+          <p:cNvSpPr/>
+          <p:nvPr/>
+        </p:nvSpPr>
+        <p:spPr>
+          <a:xfrm>
+            <a:off x="7422788" y="1554480"/>
+            <a:ext cx="4201979" cy="3977640"/>
           </a:xfrm>
           <a:prstGeom prst="roundRect">
             <a:avLst>
-              <a:gd name="adj" fmla="val 2951"/>
+              <a:gd name="adj" fmla="val 2069"/>
             </a:avLst>
           </a:prstGeom>
           <a:solidFill>
@@ -5347,14 +5690,14 @@
       </p:sp>
       <p:sp>
         <p:nvSpPr>
-          <p:cNvPr id="5" name="Text 3"/>
-          <p:cNvSpPr/>
-          <p:nvPr/>
-        </p:nvSpPr>
-        <p:spPr>
-          <a:xfrm>
-            <a:off x="841248" y="1700784"/>
-            <a:ext cx="5486400" cy="292608"/>
+          <p:cNvPr id="6" name="Text 4"/>
+          <p:cNvSpPr/>
+          <p:nvPr/>
+        </p:nvSpPr>
+        <p:spPr>
+          <a:xfrm>
+            <a:off x="7660532" y="1755648"/>
+            <a:ext cx="3744779" cy="310896"/>
           </a:xfrm>
           <a:prstGeom prst="rect">
             <a:avLst/>
@@ -5370,7 +5713,7 @@
               <a:buNone/>
             </a:pPr>
             <a:r>
-              <a:rPr lang="en-US" sz="1100" b="1" spc="150" kern="0" dirty="0">
+              <a:rPr lang="en-US" sz="1100" b="1" spc="140" kern="0" dirty="0">
                 <a:solidFill>
                   <a:srgbClr val="6A1B9A"/>
                 </a:solidFill>
@@ -5378,7 +5721,7 @@
                 <a:ea typeface="Calibri" pitchFamily="34" charset="-122"/>
                 <a:cs typeface="Calibri" pitchFamily="34" charset="-120"/>
               </a:rPr>
-              <a:t>CLINICAL VIGNETTE</a:t>
+              <a:t>TEACHING POINT</a:t>
             </a:r>
             <a:endParaRPr lang="en-US" sz="1100" dirty="0"/>
           </a:p>
@@ -5386,14 +5729,14 @@
       </p:sp>
       <p:sp>
         <p:nvSpPr>
-          <p:cNvPr id="6" name="Text 4"/>
-          <p:cNvSpPr/>
-          <p:nvPr/>
-        </p:nvSpPr>
-        <p:spPr>
-          <a:xfrm>
-            <a:off x="841248" y="2029968"/>
-            <a:ext cx="10509199" cy="2148840"/>
+          <p:cNvPr id="7" name="Text 5"/>
+          <p:cNvSpPr/>
+          <p:nvPr/>
+        </p:nvSpPr>
+        <p:spPr>
+          <a:xfrm>
+            <a:off x="7660532" y="2121408"/>
+            <a:ext cx="3726491" cy="3291840"/>
           </a:xfrm>
           <a:prstGeom prst="rect">
             <a:avLst/>
@@ -5407,12 +5750,12 @@
           <a:p>
             <a:pPr algn="l" indent="0" marL="0">
               <a:lnSpc>
-                <a:spcPct val="108000"/>
+                <a:spcPct val="110000"/>
               </a:lnSpc>
               <a:buNone/>
             </a:pPr>
             <a:r>
-              <a:rPr lang="en-US" sz="1450" dirty="0">
+              <a:rPr lang="en-US" sz="1350" dirty="0">
                 <a:solidFill>
                   <a:srgbClr val="33444F"/>
                 </a:solidFill>
@@ -5420,122 +5763,15 @@
                 <a:ea typeface="Calibri" pitchFamily="34" charset="-122"/>
                 <a:cs typeface="Calibri" pitchFamily="34" charset="-120"/>
               </a:rPr>
-              <a:t>A patient with hemoptysis, sinus disease, and rapidly progressive glomerulonephritis has a c-ANCA pattern with positive PR3 antibodies.</a:t>
-            </a:r>
-            <a:endParaRPr lang="en-US" sz="1450" dirty="0"/>
-          </a:p>
-        </p:txBody>
-      </p:sp>
-      <p:sp>
-        <p:nvSpPr>
-          <p:cNvPr id="7" name="Shape 5"/>
-          <p:cNvSpPr/>
-          <p:nvPr/>
-        </p:nvSpPr>
-        <p:spPr>
-          <a:xfrm>
-            <a:off x="566928" y="4553712"/>
-            <a:ext cx="11057839" cy="1325880"/>
-          </a:xfrm>
-          <a:prstGeom prst="roundRect">
-            <a:avLst>
-              <a:gd name="adj" fmla="val 6207"/>
-            </a:avLst>
-          </a:prstGeom>
-          <a:solidFill>
-            <a:srgbClr val="0E3A5F"/>
-          </a:solidFill>
-          <a:ln/>
-          <a:effectLst>
-            <a:outerShdw sx="100000" sy="100000" kx="0" ky="0" algn="bl" rotWithShape="0" blurRad="88900" dist="25400" dir="5400000">
-              <a:srgbClr val="22303C">
-                <a:alpha val="12000"/>
-              </a:srgbClr>
-            </a:outerShdw>
-          </a:effectLst>
-        </p:spPr>
+              <a:t>The triad of anti-dsDNA positivity and low complement signals active, often renal, lupus — and serves as a monitoring tool.</a:t>
+            </a:r>
+            <a:endParaRPr lang="en-US" sz="1350" dirty="0"/>
+          </a:p>
+        </p:txBody>
       </p:sp>
       <p:sp>
         <p:nvSpPr>
           <p:cNvPr id="8" name="Text 6"/>
-          <p:cNvSpPr/>
-          <p:nvPr/>
-        </p:nvSpPr>
-        <p:spPr>
-          <a:xfrm>
-            <a:off x="822960" y="4681728"/>
-            <a:ext cx="640080" cy="960120"/>
-          </a:xfrm>
-          <a:prstGeom prst="rect">
-            <a:avLst/>
-          </a:prstGeom>
-          <a:noFill/>
-          <a:ln/>
-        </p:spPr>
-        <p:txBody>
-          <a:bodyPr wrap="square" lIns="0" tIns="0" rIns="0" bIns="0" rtlCol="0" anchor="ctr"/>
-          <a:lstStyle/>
-          <a:p>
-            <a:pPr algn="ctr" indent="0" marL="0">
-              <a:buNone/>
-            </a:pPr>
-            <a:r>
-              <a:rPr lang="en-US" sz="4000" b="1" dirty="0">
-                <a:solidFill>
-                  <a:srgbClr val="6A1B9A"/>
-                </a:solidFill>
-                <a:latin typeface="Calibri" pitchFamily="34" charset="0"/>
-                <a:ea typeface="Calibri" pitchFamily="34" charset="-122"/>
-                <a:cs typeface="Calibri" pitchFamily="34" charset="-120"/>
-              </a:rPr>
-              <a:t>?</a:t>
-            </a:r>
-            <a:endParaRPr lang="en-US" sz="4000" dirty="0"/>
-          </a:p>
-        </p:txBody>
-      </p:sp>
-      <p:sp>
-        <p:nvSpPr>
-          <p:cNvPr id="9" name="Text 7"/>
-          <p:cNvSpPr/>
-          <p:nvPr/>
-        </p:nvSpPr>
-        <p:spPr>
-          <a:xfrm>
-            <a:off x="1618488" y="4553712"/>
-            <a:ext cx="9686239" cy="1325880"/>
-          </a:xfrm>
-          <a:prstGeom prst="rect">
-            <a:avLst/>
-          </a:prstGeom>
-          <a:noFill/>
-          <a:ln/>
-        </p:spPr>
-        <p:txBody>
-          <a:bodyPr wrap="square" lIns="0" tIns="0" rIns="0" bIns="0" rtlCol="0" anchor="ctr"/>
-          <a:lstStyle/>
-          <a:p>
-            <a:pPr algn="l" indent="0" marL="0">
-              <a:buNone/>
-            </a:pPr>
-            <a:r>
-              <a:rPr lang="en-US" sz="1500" b="1" dirty="0">
-                <a:solidFill>
-                  <a:srgbClr val="FFFFFF"/>
-                </a:solidFill>
-                <a:latin typeface="Calibri" pitchFamily="34" charset="0"/>
-                <a:ea typeface="Calibri" pitchFamily="34" charset="-122"/>
-                <a:cs typeface="Calibri" pitchFamily="34" charset="-120"/>
-              </a:rPr>
-              <a:t>What is the likely diagnosis and serologic interpretation?</a:t>
-            </a:r>
-            <a:endParaRPr lang="en-US" sz="1500" dirty="0"/>
-          </a:p>
-        </p:txBody>
-      </p:sp>
-      <p:sp>
-        <p:nvSpPr>
-          <p:cNvPr id="10" name="Text 8"/>
           <p:cNvSpPr/>
           <p:nvPr/>
         </p:nvSpPr>
@@ -5574,7 +5810,7 @@
       </p:sp>
       <p:sp>
         <p:nvSpPr>
-          <p:cNvPr id="11" name="Text 9"/>
+          <p:cNvPr id="9" name="Text 7"/>
           <p:cNvSpPr/>
           <p:nvPr/>
         </p:nvSpPr>
@@ -5704,7 +5940,7 @@
                 <a:ea typeface="Calibri" pitchFamily="34" charset="-122"/>
                 <a:cs typeface="Calibri" pitchFamily="34" charset="-120"/>
               </a:rPr>
-              <a:t>IMMUNOLOGY &amp; SEROLOGY   ·   CASE 2  ·  RESOLUTION</a:t>
+              <a:t>IMMUNOLOGY &amp; SEROLOGY   ·   CASE 2</a:t>
             </a:r>
             <a:endParaRPr lang="en-US" sz="1100" dirty="0"/>
           </a:p>
@@ -5743,7 +5979,7 @@
                 <a:ea typeface="Calibri" pitchFamily="34" charset="-122"/>
                 <a:cs typeface="Calibri" pitchFamily="34" charset="-120"/>
               </a:rPr>
-              <a:t>Case 2: PR3-ANCA Vasculitis (GPA)</a:t>
+              <a:t>Case 2</a:t>
             </a:r>
             <a:endParaRPr lang="en-US" sz="3000" dirty="0"/>
           </a:p>
@@ -5751,124 +5987,18 @@
       </p:sp>
       <p:sp>
         <p:nvSpPr>
-          <p:cNvPr id="4" name="Text 2"/>
-          <p:cNvSpPr/>
-          <p:nvPr/>
-        </p:nvSpPr>
-        <p:spPr>
-          <a:xfrm>
-            <a:off x="566928" y="1554480"/>
-            <a:ext cx="6413547" cy="4023360"/>
-          </a:xfrm>
-          <a:prstGeom prst="rect">
-            <a:avLst/>
-          </a:prstGeom>
-          <a:noFill/>
-          <a:ln/>
-        </p:spPr>
-        <p:txBody>
-          <a:bodyPr wrap="square" lIns="0" tIns="0" rIns="0" bIns="0" rtlCol="0" anchor="t"/>
-          <a:lstStyle/>
-          <a:p>
-            <a:pPr algn="l" marL="177800" indent="-177800">
-              <a:spcAft>
-                <a:spcPts val="900"/>
-              </a:spcAft>
-              <a:buSzPct val="100000"/>
-              <a:buChar char="•"/>
-            </a:pPr>
-            <a:r>
-              <a:rPr lang="en-US" sz="1400" b="1" dirty="0">
-                <a:solidFill>
-                  <a:srgbClr val="1B2A38"/>
-                </a:solidFill>
-                <a:latin typeface="Calibri" pitchFamily="34" charset="0"/>
-                <a:ea typeface="Calibri" pitchFamily="34" charset="-122"/>
-                <a:cs typeface="Calibri" pitchFamily="34" charset="-120"/>
-              </a:rPr>
-              <a:t>c-ANCA with PR3 positivity supports granulomatosis with polyangiitis (GPA).</a:t>
-            </a:r>
-            <a:endParaRPr lang="en-US" sz="1400" dirty="0"/>
-          </a:p>
-          <a:p>
-            <a:pPr algn="l" marL="177800" indent="-177800">
-              <a:spcAft>
-                <a:spcPts val="900"/>
-              </a:spcAft>
-              <a:buSzPct val="100000"/>
-              <a:buChar char="•"/>
-            </a:pPr>
-            <a:r>
-              <a:rPr lang="en-US" sz="1400" dirty="0">
-                <a:solidFill>
-                  <a:srgbClr val="33444F"/>
-                </a:solidFill>
-                <a:latin typeface="Calibri" pitchFamily="34" charset="0"/>
-                <a:ea typeface="Calibri" pitchFamily="34" charset="-122"/>
-                <a:cs typeface="Calibri" pitchFamily="34" charset="-120"/>
-              </a:rPr>
-              <a:t>The clinical triad (upper airway, lung, kidney) fits.</a:t>
-            </a:r>
-            <a:endParaRPr lang="en-US" sz="1400" dirty="0"/>
-          </a:p>
-          <a:p>
-            <a:pPr algn="l" marL="177800" indent="-177800">
-              <a:spcAft>
-                <a:spcPts val="900"/>
-              </a:spcAft>
-              <a:buSzPct val="100000"/>
-              <a:buChar char="•"/>
-            </a:pPr>
-            <a:r>
-              <a:rPr lang="en-US" sz="1400" dirty="0">
-                <a:solidFill>
-                  <a:srgbClr val="33444F"/>
-                </a:solidFill>
-                <a:latin typeface="Calibri" pitchFamily="34" charset="0"/>
-                <a:ea typeface="Calibri" pitchFamily="34" charset="-122"/>
-                <a:cs typeface="Calibri" pitchFamily="34" charset="-120"/>
-              </a:rPr>
-              <a:t>Confirm IFA pattern with the PR3 antigen-specific assay.</a:t>
-            </a:r>
-            <a:endParaRPr lang="en-US" sz="1400" dirty="0"/>
-          </a:p>
-          <a:p>
-            <a:pPr algn="l" marL="177800" indent="-177800">
-              <a:spcAft>
-                <a:spcPts val="900"/>
-              </a:spcAft>
-              <a:buSzPct val="100000"/>
-              <a:buChar char="•"/>
-            </a:pPr>
-            <a:r>
-              <a:rPr lang="en-US" sz="1400" dirty="0">
-                <a:solidFill>
-                  <a:srgbClr val="33444F"/>
-                </a:solidFill>
-                <a:latin typeface="Calibri" pitchFamily="34" charset="0"/>
-                <a:ea typeface="Calibri" pitchFamily="34" charset="-122"/>
-                <a:cs typeface="Calibri" pitchFamily="34" charset="-120"/>
-              </a:rPr>
-              <a:t>Serology supports, but biopsy and clinical context establish the diagnosis.</a:t>
-            </a:r>
-            <a:endParaRPr lang="en-US" sz="1400" dirty="0"/>
-          </a:p>
-        </p:txBody>
-      </p:sp>
-      <p:sp>
-        <p:nvSpPr>
-          <p:cNvPr id="5" name="Shape 3"/>
-          <p:cNvSpPr/>
-          <p:nvPr/>
-        </p:nvSpPr>
-        <p:spPr>
-          <a:xfrm>
-            <a:off x="7422788" y="1554480"/>
-            <a:ext cx="4201979" cy="3977640"/>
+          <p:cNvPr id="4" name="Shape 2"/>
+          <p:cNvSpPr/>
+          <p:nvPr/>
+        </p:nvSpPr>
+        <p:spPr>
+          <a:xfrm>
+            <a:off x="566928" y="1517904"/>
+            <a:ext cx="11057839" cy="2788920"/>
           </a:xfrm>
           <a:prstGeom prst="roundRect">
             <a:avLst>
-              <a:gd name="adj" fmla="val 2069"/>
+              <a:gd name="adj" fmla="val 2951"/>
             </a:avLst>
           </a:prstGeom>
           <a:solidFill>
@@ -5886,53 +6016,53 @@
       </p:sp>
       <p:sp>
         <p:nvSpPr>
+          <p:cNvPr id="5" name="Text 3"/>
+          <p:cNvSpPr/>
+          <p:nvPr/>
+        </p:nvSpPr>
+        <p:spPr>
+          <a:xfrm>
+            <a:off x="841248" y="1700784"/>
+            <a:ext cx="5486400" cy="292608"/>
+          </a:xfrm>
+          <a:prstGeom prst="rect">
+            <a:avLst/>
+          </a:prstGeom>
+          <a:noFill/>
+          <a:ln/>
+        </p:spPr>
+        <p:txBody>
+          <a:bodyPr wrap="square" lIns="0" tIns="0" rIns="0" bIns="0" rtlCol="0" anchor="ctr"/>
+          <a:lstStyle/>
+          <a:p>
+            <a:pPr indent="0" marL="0">
+              <a:buNone/>
+            </a:pPr>
+            <a:r>
+              <a:rPr lang="en-US" sz="1100" b="1" spc="150" kern="0" dirty="0">
+                <a:solidFill>
+                  <a:srgbClr val="6A1B9A"/>
+                </a:solidFill>
+                <a:latin typeface="Calibri" pitchFamily="34" charset="0"/>
+                <a:ea typeface="Calibri" pitchFamily="34" charset="-122"/>
+                <a:cs typeface="Calibri" pitchFamily="34" charset="-120"/>
+              </a:rPr>
+              <a:t>CLINICAL VIGNETTE</a:t>
+            </a:r>
+            <a:endParaRPr lang="en-US" sz="1100" dirty="0"/>
+          </a:p>
+        </p:txBody>
+      </p:sp>
+      <p:sp>
+        <p:nvSpPr>
           <p:cNvPr id="6" name="Text 4"/>
           <p:cNvSpPr/>
           <p:nvPr/>
         </p:nvSpPr>
         <p:spPr>
           <a:xfrm>
-            <a:off x="7660532" y="1755648"/>
-            <a:ext cx="3744779" cy="310896"/>
-          </a:xfrm>
-          <a:prstGeom prst="rect">
-            <a:avLst/>
-          </a:prstGeom>
-          <a:noFill/>
-          <a:ln/>
-        </p:spPr>
-        <p:txBody>
-          <a:bodyPr wrap="square" lIns="0" tIns="0" rIns="0" bIns="0" rtlCol="0" anchor="ctr"/>
-          <a:lstStyle/>
-          <a:p>
-            <a:pPr indent="0" marL="0">
-              <a:buNone/>
-            </a:pPr>
-            <a:r>
-              <a:rPr lang="en-US" sz="1100" b="1" spc="140" kern="0" dirty="0">
-                <a:solidFill>
-                  <a:srgbClr val="6A1B9A"/>
-                </a:solidFill>
-                <a:latin typeface="Calibri" pitchFamily="34" charset="0"/>
-                <a:ea typeface="Calibri" pitchFamily="34" charset="-122"/>
-                <a:cs typeface="Calibri" pitchFamily="34" charset="-120"/>
-              </a:rPr>
-              <a:t>TEACHING POINT</a:t>
-            </a:r>
-            <a:endParaRPr lang="en-US" sz="1100" dirty="0"/>
-          </a:p>
-        </p:txBody>
-      </p:sp>
-      <p:sp>
-        <p:nvSpPr>
-          <p:cNvPr id="7" name="Text 5"/>
-          <p:cNvSpPr/>
-          <p:nvPr/>
-        </p:nvSpPr>
-        <p:spPr>
-          <a:xfrm>
-            <a:off x="7660532" y="2121408"/>
-            <a:ext cx="3726491" cy="3291840"/>
+            <a:off x="841248" y="2029968"/>
+            <a:ext cx="10509199" cy="2148840"/>
           </a:xfrm>
           <a:prstGeom prst="rect">
             <a:avLst/>
@@ -5946,12 +6076,12 @@
           <a:p>
             <a:pPr algn="l" indent="0" marL="0">
               <a:lnSpc>
-                <a:spcPct val="110000"/>
+                <a:spcPct val="108000"/>
               </a:lnSpc>
               <a:buNone/>
             </a:pPr>
             <a:r>
-              <a:rPr lang="en-US" sz="1350" dirty="0">
+              <a:rPr lang="en-US" sz="1450" dirty="0">
                 <a:solidFill>
                   <a:srgbClr val="33444F"/>
                 </a:solidFill>
@@ -5959,15 +6089,122 @@
                 <a:ea typeface="Calibri" pitchFamily="34" charset="-122"/>
                 <a:cs typeface="Calibri" pitchFamily="34" charset="-120"/>
               </a:rPr>
-              <a:t>c-ANCA/PR3 → GPA; p-ANCA/MPO → microscopic polyangiitis / EGPA. Pair the IFA pattern with the antigen-specific result.</a:t>
-            </a:r>
-            <a:endParaRPr lang="en-US" sz="1350" dirty="0"/>
-          </a:p>
-        </p:txBody>
+              <a:t>A healthy 70-year-old has a low-titer speckled ANA found on a screen ordered without specific symptoms.</a:t>
+            </a:r>
+            <a:endParaRPr lang="en-US" sz="1450" dirty="0"/>
+          </a:p>
+        </p:txBody>
+      </p:sp>
+      <p:sp>
+        <p:nvSpPr>
+          <p:cNvPr id="7" name="Shape 5"/>
+          <p:cNvSpPr/>
+          <p:nvPr/>
+        </p:nvSpPr>
+        <p:spPr>
+          <a:xfrm>
+            <a:off x="566928" y="4553712"/>
+            <a:ext cx="11057839" cy="1325880"/>
+          </a:xfrm>
+          <a:prstGeom prst="roundRect">
+            <a:avLst>
+              <a:gd name="adj" fmla="val 6207"/>
+            </a:avLst>
+          </a:prstGeom>
+          <a:solidFill>
+            <a:srgbClr val="0E3A5F"/>
+          </a:solidFill>
+          <a:ln/>
+          <a:effectLst>
+            <a:outerShdw sx="100000" sy="100000" kx="0" ky="0" algn="bl" rotWithShape="0" blurRad="88900" dist="25400" dir="5400000">
+              <a:srgbClr val="22303C">
+                <a:alpha val="12000"/>
+              </a:srgbClr>
+            </a:outerShdw>
+          </a:effectLst>
+        </p:spPr>
       </p:sp>
       <p:sp>
         <p:nvSpPr>
           <p:cNvPr id="8" name="Text 6"/>
+          <p:cNvSpPr/>
+          <p:nvPr/>
+        </p:nvSpPr>
+        <p:spPr>
+          <a:xfrm>
+            <a:off x="822960" y="4681728"/>
+            <a:ext cx="640080" cy="960120"/>
+          </a:xfrm>
+          <a:prstGeom prst="rect">
+            <a:avLst/>
+          </a:prstGeom>
+          <a:noFill/>
+          <a:ln/>
+        </p:spPr>
+        <p:txBody>
+          <a:bodyPr wrap="square" lIns="0" tIns="0" rIns="0" bIns="0" rtlCol="0" anchor="ctr"/>
+          <a:lstStyle/>
+          <a:p>
+            <a:pPr algn="ctr" indent="0" marL="0">
+              <a:buNone/>
+            </a:pPr>
+            <a:r>
+              <a:rPr lang="en-US" sz="4000" b="1" dirty="0">
+                <a:solidFill>
+                  <a:srgbClr val="6A1B9A"/>
+                </a:solidFill>
+                <a:latin typeface="Calibri" pitchFamily="34" charset="0"/>
+                <a:ea typeface="Calibri" pitchFamily="34" charset="-122"/>
+                <a:cs typeface="Calibri" pitchFamily="34" charset="-120"/>
+              </a:rPr>
+              <a:t>?</a:t>
+            </a:r>
+            <a:endParaRPr lang="en-US" sz="4000" dirty="0"/>
+          </a:p>
+        </p:txBody>
+      </p:sp>
+      <p:sp>
+        <p:nvSpPr>
+          <p:cNvPr id="9" name="Text 7"/>
+          <p:cNvSpPr/>
+          <p:nvPr/>
+        </p:nvSpPr>
+        <p:spPr>
+          <a:xfrm>
+            <a:off x="1618488" y="4553712"/>
+            <a:ext cx="9686239" cy="1325880"/>
+          </a:xfrm>
+          <a:prstGeom prst="rect">
+            <a:avLst/>
+          </a:prstGeom>
+          <a:noFill/>
+          <a:ln/>
+        </p:spPr>
+        <p:txBody>
+          <a:bodyPr wrap="square" lIns="0" tIns="0" rIns="0" bIns="0" rtlCol="0" anchor="ctr"/>
+          <a:lstStyle/>
+          <a:p>
+            <a:pPr algn="l" indent="0" marL="0">
+              <a:buNone/>
+            </a:pPr>
+            <a:r>
+              <a:rPr lang="en-US" sz="1500" b="1" dirty="0">
+                <a:solidFill>
+                  <a:srgbClr val="FFFFFF"/>
+                </a:solidFill>
+                <a:latin typeface="Calibri" pitchFamily="34" charset="0"/>
+                <a:ea typeface="Calibri" pitchFamily="34" charset="-122"/>
+                <a:cs typeface="Calibri" pitchFamily="34" charset="-120"/>
+              </a:rPr>
+              <a:t>How should this be interpreted?</a:t>
+            </a:r>
+            <a:endParaRPr lang="en-US" sz="1500" dirty="0"/>
+          </a:p>
+        </p:txBody>
+      </p:sp>
+      <p:sp>
+        <p:nvSpPr>
+          <p:cNvPr id="10" name="Text 8"/>
           <p:cNvSpPr/>
           <p:nvPr/>
         </p:nvSpPr>
@@ -6006,7 +6243,7 @@
       </p:sp>
       <p:sp>
         <p:nvSpPr>
-          <p:cNvPr id="9" name="Text 7"/>
+          <p:cNvPr id="11" name="Text 9"/>
           <p:cNvSpPr/>
           <p:nvPr/>
         </p:nvSpPr>
@@ -6136,7 +6373,7 @@
                 <a:ea typeface="Calibri" pitchFamily="34" charset="-122"/>
                 <a:cs typeface="Calibri" pitchFamily="34" charset="-120"/>
               </a:rPr>
-              <a:t>IMMUNOLOGY &amp; SEROLOGY   ·   BOARD REVIEW  ·  Q1</a:t>
+              <a:t>IMMUNOLOGY &amp; SEROLOGY   ·   CASE 2  ·  RESOLUTION</a:t>
             </a:r>
             <a:endParaRPr lang="en-US" sz="1100" dirty="0"/>
           </a:p>
@@ -6167,7 +6404,7 @@
               <a:buNone/>
             </a:pPr>
             <a:r>
-              <a:rPr lang="en-US" sz="2600" b="1" dirty="0">
+              <a:rPr lang="en-US" sz="3000" b="1" dirty="0">
                 <a:solidFill>
                   <a:srgbClr val="0E3A5F"/>
                 </a:solidFill>
@@ -6175,9 +6412,9 @@
                 <a:ea typeface="Calibri" pitchFamily="34" charset="-122"/>
                 <a:cs typeface="Calibri" pitchFamily="34" charset="-120"/>
               </a:rPr>
-              <a:t>Board-Style Review</a:t>
-            </a:r>
-            <a:endParaRPr lang="en-US" sz="2600" dirty="0"/>
+              <a:t>Case 2: Low-Titer ANA in a Well Patient</a:t>
+            </a:r>
+            <a:endParaRPr lang="en-US" sz="3000" dirty="0"/>
           </a:p>
         </p:txBody>
       </p:sp>
@@ -6189,8 +6426,8 @@
         </p:nvSpPr>
         <p:spPr>
           <a:xfrm>
-            <a:off x="566928" y="1417320"/>
-            <a:ext cx="11057839" cy="914400"/>
+            <a:off x="566928" y="1554480"/>
+            <a:ext cx="6413547" cy="4023360"/>
           </a:xfrm>
           <a:prstGeom prst="rect">
             <a:avLst/>
@@ -6202,14 +6439,15 @@
           <a:bodyPr wrap="square" lIns="0" tIns="0" rIns="0" bIns="0" rtlCol="0" anchor="t"/>
           <a:lstStyle/>
           <a:p>
-            <a:pPr algn="l" indent="0" marL="0">
-              <a:lnSpc>
-                <a:spcPct val="105000"/>
-              </a:lnSpc>
-              <a:buNone/>
-            </a:pPr>
-            <a:r>
-              <a:rPr lang="en-US" sz="1450" b="1" dirty="0">
+            <a:pPr algn="l" marL="177800" indent="-177800">
+              <a:spcAft>
+                <a:spcPts val="900"/>
+              </a:spcAft>
+              <a:buSzPct val="100000"/>
+              <a:buChar char="•"/>
+            </a:pPr>
+            <a:r>
+              <a:rPr lang="en-US" sz="1400" b="1" dirty="0">
                 <a:solidFill>
                   <a:srgbClr val="1B2A38"/>
                 </a:solidFill>
@@ -6217,41 +6455,20 @@
                 <a:ea typeface="Calibri" pitchFamily="34" charset="-122"/>
                 <a:cs typeface="Calibri" pitchFamily="34" charset="-120"/>
               </a:rPr>
-              <a:t>Which antibody is most specific for systemic lupus erythematosus?</a:t>
-            </a:r>
-            <a:endParaRPr lang="en-US" sz="1450" dirty="0"/>
-          </a:p>
-        </p:txBody>
-      </p:sp>
-      <p:sp>
-        <p:nvSpPr>
-          <p:cNvPr id="5" name="Text 3"/>
-          <p:cNvSpPr/>
-          <p:nvPr/>
-        </p:nvSpPr>
-        <p:spPr>
-          <a:xfrm>
-            <a:off x="658368" y="2395728"/>
-            <a:ext cx="6192390" cy="3017520"/>
-          </a:xfrm>
-          <a:prstGeom prst="rect">
-            <a:avLst/>
-          </a:prstGeom>
-          <a:noFill/>
-          <a:ln/>
-        </p:spPr>
-        <p:txBody>
-          <a:bodyPr wrap="square" lIns="0" tIns="0" rIns="0" bIns="0" rtlCol="0" anchor="t"/>
-          <a:lstStyle/>
-          <a:p>
-            <a:pPr algn="l" indent="0" marL="0">
+              <a:t>Low-titer ANA is common in healthy older adults and is not diagnostic of autoimmune disease.</a:t>
+            </a:r>
+            <a:endParaRPr lang="en-US" sz="1400" dirty="0"/>
+          </a:p>
+          <a:p>
+            <a:pPr algn="l" marL="177800" indent="-177800">
               <a:spcAft>
-                <a:spcPts val="600"/>
+                <a:spcPts val="900"/>
               </a:spcAft>
-              <a:buNone/>
-            </a:pPr>
-            <a:r>
-              <a:rPr lang="en-US" sz="1350" dirty="0">
+              <a:buSzPct val="100000"/>
+              <a:buChar char="•"/>
+            </a:pPr>
+            <a:r>
+              <a:rPr lang="en-US" sz="1400" dirty="0">
                 <a:solidFill>
                   <a:srgbClr val="33444F"/>
                 </a:solidFill>
@@ -6259,39 +6476,41 @@
                 <a:ea typeface="Calibri" pitchFamily="34" charset="-122"/>
                 <a:cs typeface="Calibri" pitchFamily="34" charset="-120"/>
               </a:rPr>
-              <a:t>A. ANA</a:t>
-            </a:r>
-            <a:endParaRPr lang="en-US" sz="1350" dirty="0"/>
-          </a:p>
-          <a:p>
-            <a:pPr algn="l" indent="0" marL="0">
+              <a:t>Without symptoms, it has low predictive value.</a:t>
+            </a:r>
+            <a:endParaRPr lang="en-US" sz="1400" dirty="0"/>
+          </a:p>
+          <a:p>
+            <a:pPr algn="l" marL="177800" indent="-177800">
               <a:spcAft>
-                <a:spcPts val="600"/>
+                <a:spcPts val="900"/>
               </a:spcAft>
-              <a:buNone/>
-            </a:pPr>
-            <a:r>
-              <a:rPr lang="en-US" sz="1350" b="1" dirty="0">
-                <a:solidFill>
-                  <a:srgbClr val="4A1269"/>
-                </a:solidFill>
-                <a:latin typeface="Calibri" pitchFamily="34" charset="0"/>
-                <a:ea typeface="Calibri" pitchFamily="34" charset="-122"/>
-                <a:cs typeface="Calibri" pitchFamily="34" charset="-120"/>
-              </a:rPr>
-              <a:t>B. Anti-Sm</a:t>
-            </a:r>
-            <a:endParaRPr lang="en-US" sz="1350" dirty="0"/>
-          </a:p>
-          <a:p>
-            <a:pPr algn="l" indent="0" marL="0">
+              <a:buSzPct val="100000"/>
+              <a:buChar char="•"/>
+            </a:pPr>
+            <a:r>
+              <a:rPr lang="en-US" sz="1400" dirty="0">
+                <a:solidFill>
+                  <a:srgbClr val="33444F"/>
+                </a:solidFill>
+                <a:latin typeface="Calibri" pitchFamily="34" charset="0"/>
+                <a:ea typeface="Calibri" pitchFamily="34" charset="-122"/>
+                <a:cs typeface="Calibri" pitchFamily="34" charset="-120"/>
+              </a:rPr>
+              <a:t>Avoid a cascade of specific tests in the absence of clinical features.</a:t>
+            </a:r>
+            <a:endParaRPr lang="en-US" sz="1400" dirty="0"/>
+          </a:p>
+          <a:p>
+            <a:pPr algn="l" marL="177800" indent="-177800">
               <a:spcAft>
-                <a:spcPts val="600"/>
+                <a:spcPts val="900"/>
               </a:spcAft>
-              <a:buNone/>
-            </a:pPr>
-            <a:r>
-              <a:rPr lang="en-US" sz="1350" dirty="0">
+              <a:buSzPct val="100000"/>
+              <a:buChar char="•"/>
+            </a:pPr>
+            <a:r>
+              <a:rPr lang="en-US" sz="1400" dirty="0">
                 <a:solidFill>
                   <a:srgbClr val="33444F"/>
                 </a:solidFill>
@@ -6299,66 +6518,26 @@
                 <a:ea typeface="Calibri" pitchFamily="34" charset="-122"/>
                 <a:cs typeface="Calibri" pitchFamily="34" charset="-120"/>
               </a:rPr>
-              <a:t>C. Rheumatoid factor</a:t>
-            </a:r>
-            <a:endParaRPr lang="en-US" sz="1350" dirty="0"/>
-          </a:p>
-          <a:p>
-            <a:pPr algn="l" indent="0" marL="0">
-              <a:spcAft>
-                <a:spcPts val="600"/>
-              </a:spcAft>
-              <a:buNone/>
-            </a:pPr>
-            <a:r>
-              <a:rPr lang="en-US" sz="1350" dirty="0">
-                <a:solidFill>
-                  <a:srgbClr val="33444F"/>
-                </a:solidFill>
-                <a:latin typeface="Calibri" pitchFamily="34" charset="0"/>
-                <a:ea typeface="Calibri" pitchFamily="34" charset="-122"/>
-                <a:cs typeface="Calibri" pitchFamily="34" charset="-120"/>
-              </a:rPr>
-              <a:t>D. Anti-SSA</a:t>
-            </a:r>
-            <a:endParaRPr lang="en-US" sz="1350" dirty="0"/>
-          </a:p>
-          <a:p>
-            <a:pPr algn="l" indent="0" marL="0">
-              <a:spcAft>
-                <a:spcPts val="600"/>
-              </a:spcAft>
-              <a:buNone/>
-            </a:pPr>
-            <a:r>
-              <a:rPr lang="en-US" sz="1350" dirty="0">
-                <a:solidFill>
-                  <a:srgbClr val="33444F"/>
-                </a:solidFill>
-                <a:latin typeface="Calibri" pitchFamily="34" charset="0"/>
-                <a:ea typeface="Calibri" pitchFamily="34" charset="-122"/>
-                <a:cs typeface="Calibri" pitchFamily="34" charset="-120"/>
-              </a:rPr>
-              <a:t>E. Anti-centromere</a:t>
-            </a:r>
-            <a:endParaRPr lang="en-US" sz="1350" dirty="0"/>
-          </a:p>
-        </p:txBody>
-      </p:sp>
-      <p:sp>
-        <p:nvSpPr>
-          <p:cNvPr id="6" name="Shape 4"/>
-          <p:cNvSpPr/>
-          <p:nvPr/>
-        </p:nvSpPr>
-        <p:spPr>
-          <a:xfrm>
-            <a:off x="7201632" y="2395728"/>
-            <a:ext cx="4423136" cy="3246120"/>
+              <a:t>Reassure and correlate clinically.</a:t>
+            </a:r>
+            <a:endParaRPr lang="en-US" sz="1400" dirty="0"/>
+          </a:p>
+        </p:txBody>
+      </p:sp>
+      <p:sp>
+        <p:nvSpPr>
+          <p:cNvPr id="5" name="Shape 3"/>
+          <p:cNvSpPr/>
+          <p:nvPr/>
+        </p:nvSpPr>
+        <p:spPr>
+          <a:xfrm>
+            <a:off x="7422788" y="1554480"/>
+            <a:ext cx="4201979" cy="3977640"/>
           </a:xfrm>
           <a:prstGeom prst="roundRect">
             <a:avLst>
-              <a:gd name="adj" fmla="val 2535"/>
+              <a:gd name="adj" fmla="val 2069"/>
             </a:avLst>
           </a:prstGeom>
           <a:solidFill>
@@ -6376,67 +6555,53 @@
       </p:sp>
       <p:sp>
         <p:nvSpPr>
+          <p:cNvPr id="6" name="Text 4"/>
+          <p:cNvSpPr/>
+          <p:nvPr/>
+        </p:nvSpPr>
+        <p:spPr>
+          <a:xfrm>
+            <a:off x="7660532" y="1755648"/>
+            <a:ext cx="3744779" cy="310896"/>
+          </a:xfrm>
+          <a:prstGeom prst="rect">
+            <a:avLst/>
+          </a:prstGeom>
+          <a:noFill/>
+          <a:ln/>
+        </p:spPr>
+        <p:txBody>
+          <a:bodyPr wrap="square" lIns="0" tIns="0" rIns="0" bIns="0" rtlCol="0" anchor="ctr"/>
+          <a:lstStyle/>
+          <a:p>
+            <a:pPr indent="0" marL="0">
+              <a:buNone/>
+            </a:pPr>
+            <a:r>
+              <a:rPr lang="en-US" sz="1100" b="1" spc="140" kern="0" dirty="0">
+                <a:solidFill>
+                  <a:srgbClr val="6A1B9A"/>
+                </a:solidFill>
+                <a:latin typeface="Calibri" pitchFamily="34" charset="0"/>
+                <a:ea typeface="Calibri" pitchFamily="34" charset="-122"/>
+                <a:cs typeface="Calibri" pitchFamily="34" charset="-120"/>
+              </a:rPr>
+              <a:t>TEACHING POINT</a:t>
+            </a:r>
+            <a:endParaRPr lang="en-US" sz="1100" dirty="0"/>
+          </a:p>
+        </p:txBody>
+      </p:sp>
+      <p:sp>
+        <p:nvSpPr>
           <p:cNvPr id="7" name="Text 5"/>
           <p:cNvSpPr/>
           <p:nvPr/>
         </p:nvSpPr>
         <p:spPr>
           <a:xfrm>
-            <a:off x="7439376" y="2578608"/>
-            <a:ext cx="3965936" cy="457200"/>
-          </a:xfrm>
-          <a:prstGeom prst="rect">
-            <a:avLst/>
-          </a:prstGeom>
-          <a:noFill/>
-          <a:ln/>
-        </p:spPr>
-        <p:txBody>
-          <a:bodyPr wrap="square" lIns="0" tIns="0" rIns="0" bIns="0" rtlCol="0" anchor="ctr"/>
-          <a:lstStyle/>
-          <a:p>
-            <a:pPr indent="0" marL="0">
-              <a:buNone/>
-            </a:pPr>
-            <a:r>
-              <a:rPr lang="en-US" sz="1500" b="1" dirty="0">
-                <a:solidFill>
-                  <a:srgbClr val="6A1B9A"/>
-                </a:solidFill>
-                <a:latin typeface="Calibri" pitchFamily="34" charset="0"/>
-                <a:ea typeface="Calibri" pitchFamily="34" charset="-122"/>
-                <a:cs typeface="Calibri" pitchFamily="34" charset="-120"/>
-              </a:rPr>
-              <a:t>ANSWER  </a:t>
-            </a:r>
-            <a:pPr indent="0" marL="0">
-              <a:buNone/>
-            </a:pPr>
-            <a:r>
-              <a:rPr lang="en-US" sz="1500" b="1" dirty="0">
-                <a:solidFill>
-                  <a:srgbClr val="1B2A38"/>
-                </a:solidFill>
-                <a:latin typeface="Calibri" pitchFamily="34" charset="0"/>
-                <a:ea typeface="Calibri" pitchFamily="34" charset="-122"/>
-                <a:cs typeface="Calibri" pitchFamily="34" charset="-120"/>
-              </a:rPr>
-              <a:t>B — Anti-Sm</a:t>
-            </a:r>
-            <a:endParaRPr lang="en-US" sz="1500" dirty="0"/>
-          </a:p>
-        </p:txBody>
-      </p:sp>
-      <p:sp>
-        <p:nvSpPr>
-          <p:cNvPr id="8" name="Text 6"/>
-          <p:cNvSpPr/>
-          <p:nvPr/>
-        </p:nvSpPr>
-        <p:spPr>
-          <a:xfrm>
-            <a:off x="7439376" y="3127248"/>
-            <a:ext cx="3947648" cy="2377440"/>
+            <a:off x="7660532" y="2121408"/>
+            <a:ext cx="3726491" cy="3291840"/>
           </a:xfrm>
           <a:prstGeom prst="rect">
             <a:avLst/>
@@ -6450,12 +6615,12 @@
           <a:p>
             <a:pPr algn="l" indent="0" marL="0">
               <a:lnSpc>
-                <a:spcPct val="108000"/>
+                <a:spcPct val="110000"/>
               </a:lnSpc>
               <a:buNone/>
             </a:pPr>
             <a:r>
-              <a:rPr lang="en-US" sz="1250" dirty="0">
+              <a:rPr lang="en-US" sz="1350" dirty="0">
                 <a:solidFill>
                   <a:srgbClr val="33444F"/>
                 </a:solidFill>
@@ -6463,15 +6628,15 @@
                 <a:ea typeface="Calibri" pitchFamily="34" charset="-122"/>
                 <a:cs typeface="Calibri" pitchFamily="34" charset="-120"/>
               </a:rPr>
-              <a:t>Anti-Sm (and anti-dsDNA) are highly specific for SLE. ANA is sensitive but not specific; anti-SSA and anti-centromere associate with other conditions.</a:t>
-            </a:r>
-            <a:endParaRPr lang="en-US" sz="1250" dirty="0"/>
-          </a:p>
-        </p:txBody>
-      </p:sp>
-      <p:sp>
-        <p:nvSpPr>
-          <p:cNvPr id="9" name="Text 7"/>
+              <a:t>Order ANA only with a pretest suspicion of connective-tissue disease — indiscriminate testing yields meaningless low-titer positives.</a:t>
+            </a:r>
+            <a:endParaRPr lang="en-US" sz="1350" dirty="0"/>
+          </a:p>
+        </p:txBody>
+      </p:sp>
+      <p:sp>
+        <p:nvSpPr>
+          <p:cNvPr id="8" name="Text 6"/>
           <p:cNvSpPr/>
           <p:nvPr/>
         </p:nvSpPr>
@@ -6510,7 +6675,7 @@
       </p:sp>
       <p:sp>
         <p:nvSpPr>
-          <p:cNvPr id="10" name="Text 8"/>
+          <p:cNvPr id="9" name="Text 7"/>
           <p:cNvSpPr/>
           <p:nvPr/>
         </p:nvSpPr>
@@ -6640,7 +6805,7 @@
                 <a:ea typeface="Calibri" pitchFamily="34" charset="-122"/>
                 <a:cs typeface="Calibri" pitchFamily="34" charset="-120"/>
               </a:rPr>
-              <a:t>IMMUNOLOGY &amp; SEROLOGY   ·   BOARD REVIEW  ·  Q2</a:t>
+              <a:t>IMMUNOLOGY &amp; SEROLOGY   ·   CASE 3</a:t>
             </a:r>
             <a:endParaRPr lang="en-US" sz="1100" dirty="0"/>
           </a:p>
@@ -6671,7 +6836,7 @@
               <a:buNone/>
             </a:pPr>
             <a:r>
-              <a:rPr lang="en-US" sz="2600" b="1" dirty="0">
+              <a:rPr lang="en-US" sz="3000" b="1" dirty="0">
                 <a:solidFill>
                   <a:srgbClr val="0E3A5F"/>
                 </a:solidFill>
@@ -6679,190 +6844,26 @@
                 <a:ea typeface="Calibri" pitchFamily="34" charset="-122"/>
                 <a:cs typeface="Calibri" pitchFamily="34" charset="-120"/>
               </a:rPr>
-              <a:t>Board-Style Review</a:t>
-            </a:r>
-            <a:endParaRPr lang="en-US" sz="2600" dirty="0"/>
-          </a:p>
-        </p:txBody>
-      </p:sp>
-      <p:sp>
-        <p:nvSpPr>
-          <p:cNvPr id="4" name="Text 2"/>
-          <p:cNvSpPr/>
-          <p:nvPr/>
-        </p:nvSpPr>
-        <p:spPr>
-          <a:xfrm>
-            <a:off x="566928" y="1417320"/>
-            <a:ext cx="11057839" cy="914400"/>
-          </a:xfrm>
-          <a:prstGeom prst="rect">
-            <a:avLst/>
-          </a:prstGeom>
-          <a:noFill/>
-          <a:ln/>
-        </p:spPr>
-        <p:txBody>
-          <a:bodyPr wrap="square" lIns="0" tIns="0" rIns="0" bIns="0" rtlCol="0" anchor="t"/>
-          <a:lstStyle/>
-          <a:p>
-            <a:pPr algn="l" indent="0" marL="0">
-              <a:lnSpc>
-                <a:spcPct val="105000"/>
-              </a:lnSpc>
-              <a:buNone/>
-            </a:pPr>
-            <a:r>
-              <a:rPr lang="en-US" sz="1450" b="1" dirty="0">
-                <a:solidFill>
-                  <a:srgbClr val="1B2A38"/>
-                </a:solidFill>
-                <a:latin typeface="Calibri" pitchFamily="34" charset="0"/>
-                <a:ea typeface="Calibri" pitchFamily="34" charset="-122"/>
-                <a:cs typeface="Calibri" pitchFamily="34" charset="-120"/>
-              </a:rPr>
-              <a:t>A c-ANCA pattern corresponds to which antigen specificity?</a:t>
-            </a:r>
-            <a:endParaRPr lang="en-US" sz="1450" dirty="0"/>
-          </a:p>
-        </p:txBody>
-      </p:sp>
-      <p:sp>
-        <p:nvSpPr>
-          <p:cNvPr id="5" name="Text 3"/>
-          <p:cNvSpPr/>
-          <p:nvPr/>
-        </p:nvSpPr>
-        <p:spPr>
-          <a:xfrm>
-            <a:off x="658368" y="2395728"/>
-            <a:ext cx="6192390" cy="3017520"/>
-          </a:xfrm>
-          <a:prstGeom prst="rect">
-            <a:avLst/>
-          </a:prstGeom>
-          <a:noFill/>
-          <a:ln/>
-        </p:spPr>
-        <p:txBody>
-          <a:bodyPr wrap="square" lIns="0" tIns="0" rIns="0" bIns="0" rtlCol="0" anchor="t"/>
-          <a:lstStyle/>
-          <a:p>
-            <a:pPr algn="l" indent="0" marL="0">
-              <a:spcAft>
-                <a:spcPts val="600"/>
-              </a:spcAft>
-              <a:buNone/>
-            </a:pPr>
-            <a:r>
-              <a:rPr lang="en-US" sz="1350" dirty="0">
-                <a:solidFill>
-                  <a:srgbClr val="33444F"/>
-                </a:solidFill>
-                <a:latin typeface="Calibri" pitchFamily="34" charset="0"/>
-                <a:ea typeface="Calibri" pitchFamily="34" charset="-122"/>
-                <a:cs typeface="Calibri" pitchFamily="34" charset="-120"/>
-              </a:rPr>
-              <a:t>A. Myeloperoxidase (MPO)</a:t>
-            </a:r>
-            <a:endParaRPr lang="en-US" sz="1350" dirty="0"/>
-          </a:p>
-          <a:p>
-            <a:pPr algn="l" indent="0" marL="0">
-              <a:spcAft>
-                <a:spcPts val="600"/>
-              </a:spcAft>
-              <a:buNone/>
-            </a:pPr>
-            <a:r>
-              <a:rPr lang="en-US" sz="1350" b="1" dirty="0">
-                <a:solidFill>
-                  <a:srgbClr val="4A1269"/>
-                </a:solidFill>
-                <a:latin typeface="Calibri" pitchFamily="34" charset="0"/>
-                <a:ea typeface="Calibri" pitchFamily="34" charset="-122"/>
-                <a:cs typeface="Calibri" pitchFamily="34" charset="-120"/>
-              </a:rPr>
-              <a:t>B. Proteinase-3 (PR3)</a:t>
-            </a:r>
-            <a:endParaRPr lang="en-US" sz="1350" dirty="0"/>
-          </a:p>
-          <a:p>
-            <a:pPr algn="l" indent="0" marL="0">
-              <a:spcAft>
-                <a:spcPts val="600"/>
-              </a:spcAft>
-              <a:buNone/>
-            </a:pPr>
-            <a:r>
-              <a:rPr lang="en-US" sz="1350" dirty="0">
-                <a:solidFill>
-                  <a:srgbClr val="33444F"/>
-                </a:solidFill>
-                <a:latin typeface="Calibri" pitchFamily="34" charset="0"/>
-                <a:ea typeface="Calibri" pitchFamily="34" charset="-122"/>
-                <a:cs typeface="Calibri" pitchFamily="34" charset="-120"/>
-              </a:rPr>
-              <a:t>C. dsDNA</a:t>
-            </a:r>
-            <a:endParaRPr lang="en-US" sz="1350" dirty="0"/>
-          </a:p>
-          <a:p>
-            <a:pPr algn="l" indent="0" marL="0">
-              <a:spcAft>
-                <a:spcPts val="600"/>
-              </a:spcAft>
-              <a:buNone/>
-            </a:pPr>
-            <a:r>
-              <a:rPr lang="en-US" sz="1350" dirty="0">
-                <a:solidFill>
-                  <a:srgbClr val="33444F"/>
-                </a:solidFill>
-                <a:latin typeface="Calibri" pitchFamily="34" charset="0"/>
-                <a:ea typeface="Calibri" pitchFamily="34" charset="-122"/>
-                <a:cs typeface="Calibri" pitchFamily="34" charset="-120"/>
-              </a:rPr>
-              <a:t>D. Histone</a:t>
-            </a:r>
-            <a:endParaRPr lang="en-US" sz="1350" dirty="0"/>
-          </a:p>
-          <a:p>
-            <a:pPr algn="l" indent="0" marL="0">
-              <a:spcAft>
-                <a:spcPts val="600"/>
-              </a:spcAft>
-              <a:buNone/>
-            </a:pPr>
-            <a:r>
-              <a:rPr lang="en-US" sz="1350" dirty="0">
-                <a:solidFill>
-                  <a:srgbClr val="33444F"/>
-                </a:solidFill>
-                <a:latin typeface="Calibri" pitchFamily="34" charset="0"/>
-                <a:ea typeface="Calibri" pitchFamily="34" charset="-122"/>
-                <a:cs typeface="Calibri" pitchFamily="34" charset="-120"/>
-              </a:rPr>
-              <a:t>E. Topoisomerase</a:t>
-            </a:r>
-            <a:endParaRPr lang="en-US" sz="1350" dirty="0"/>
-          </a:p>
-        </p:txBody>
-      </p:sp>
-      <p:sp>
-        <p:nvSpPr>
-          <p:cNvPr id="6" name="Shape 4"/>
-          <p:cNvSpPr/>
-          <p:nvPr/>
-        </p:nvSpPr>
-        <p:spPr>
-          <a:xfrm>
-            <a:off x="7201632" y="2395728"/>
-            <a:ext cx="4423136" cy="3246120"/>
+              <a:t>Case 3</a:t>
+            </a:r>
+            <a:endParaRPr lang="en-US" sz="3000" dirty="0"/>
+          </a:p>
+        </p:txBody>
+      </p:sp>
+      <p:sp>
+        <p:nvSpPr>
+          <p:cNvPr id="4" name="Shape 2"/>
+          <p:cNvSpPr/>
+          <p:nvPr/>
+        </p:nvSpPr>
+        <p:spPr>
+          <a:xfrm>
+            <a:off x="566928" y="1517904"/>
+            <a:ext cx="11057839" cy="2788920"/>
           </a:xfrm>
           <a:prstGeom prst="roundRect">
             <a:avLst>
-              <a:gd name="adj" fmla="val 2535"/>
+              <a:gd name="adj" fmla="val 2951"/>
             </a:avLst>
           </a:prstGeom>
           <a:solidFill>
@@ -6880,14 +6881,14 @@
       </p:sp>
       <p:sp>
         <p:nvSpPr>
-          <p:cNvPr id="7" name="Text 5"/>
-          <p:cNvSpPr/>
-          <p:nvPr/>
-        </p:nvSpPr>
-        <p:spPr>
-          <a:xfrm>
-            <a:off x="7439376" y="2578608"/>
-            <a:ext cx="3965936" cy="457200"/>
+          <p:cNvPr id="5" name="Text 3"/>
+          <p:cNvSpPr/>
+          <p:nvPr/>
+        </p:nvSpPr>
+        <p:spPr>
+          <a:xfrm>
+            <a:off x="841248" y="1700784"/>
+            <a:ext cx="5486400" cy="292608"/>
           </a:xfrm>
           <a:prstGeom prst="rect">
             <a:avLst/>
@@ -6903,7 +6904,7 @@
               <a:buNone/>
             </a:pPr>
             <a:r>
-              <a:rPr lang="en-US" sz="1500" b="1" dirty="0">
+              <a:rPr lang="en-US" sz="1100" b="1" spc="150" kern="0" dirty="0">
                 <a:solidFill>
                   <a:srgbClr val="6A1B9A"/>
                 </a:solidFill>
@@ -6911,36 +6912,22 @@
                 <a:ea typeface="Calibri" pitchFamily="34" charset="-122"/>
                 <a:cs typeface="Calibri" pitchFamily="34" charset="-120"/>
               </a:rPr>
-              <a:t>ANSWER  </a:t>
-            </a:r>
-            <a:pPr indent="0" marL="0">
-              <a:buNone/>
-            </a:pPr>
-            <a:r>
-              <a:rPr lang="en-US" sz="1500" b="1" dirty="0">
-                <a:solidFill>
-                  <a:srgbClr val="1B2A38"/>
-                </a:solidFill>
-                <a:latin typeface="Calibri" pitchFamily="34" charset="0"/>
-                <a:ea typeface="Calibri" pitchFamily="34" charset="-122"/>
-                <a:cs typeface="Calibri" pitchFamily="34" charset="-120"/>
-              </a:rPr>
-              <a:t>B — Proteinase-3 (PR3)</a:t>
-            </a:r>
-            <a:endParaRPr lang="en-US" sz="1500" dirty="0"/>
-          </a:p>
-        </p:txBody>
-      </p:sp>
-      <p:sp>
-        <p:nvSpPr>
-          <p:cNvPr id="8" name="Text 6"/>
-          <p:cNvSpPr/>
-          <p:nvPr/>
-        </p:nvSpPr>
-        <p:spPr>
-          <a:xfrm>
-            <a:off x="7439376" y="3127248"/>
-            <a:ext cx="3947648" cy="2377440"/>
+              <a:t>CLINICAL VIGNETTE</a:t>
+            </a:r>
+            <a:endParaRPr lang="en-US" sz="1100" dirty="0"/>
+          </a:p>
+        </p:txBody>
+      </p:sp>
+      <p:sp>
+        <p:nvSpPr>
+          <p:cNvPr id="6" name="Text 4"/>
+          <p:cNvSpPr/>
+          <p:nvPr/>
+        </p:nvSpPr>
+        <p:spPr>
+          <a:xfrm>
+            <a:off x="841248" y="2029968"/>
+            <a:ext cx="10509199" cy="2148840"/>
           </a:xfrm>
           <a:prstGeom prst="rect">
             <a:avLst/>
@@ -6959,7 +6946,7 @@
               <a:buNone/>
             </a:pPr>
             <a:r>
-              <a:rPr lang="en-US" sz="1250" dirty="0">
+              <a:rPr lang="en-US" sz="1450" dirty="0">
                 <a:solidFill>
                   <a:srgbClr val="33444F"/>
                 </a:solidFill>
@@ -6967,15 +6954,122 @@
                 <a:ea typeface="Calibri" pitchFamily="34" charset="-122"/>
                 <a:cs typeface="Calibri" pitchFamily="34" charset="-120"/>
               </a:rPr>
-              <a:t>c-ANCA targets PR3 (classically GPA); p-ANCA targets MPO (microscopic polyangiitis, EGPA).</a:t>
-            </a:r>
-            <a:endParaRPr lang="en-US" sz="1250" dirty="0"/>
+              <a:t>A patient with sinusitis, hemoptysis, and acute kidney injury is c-ANCA positive with anti-PR3 antibodies.</a:t>
+            </a:r>
+            <a:endParaRPr lang="en-US" sz="1450" dirty="0"/>
+          </a:p>
+        </p:txBody>
+      </p:sp>
+      <p:sp>
+        <p:nvSpPr>
+          <p:cNvPr id="7" name="Shape 5"/>
+          <p:cNvSpPr/>
+          <p:nvPr/>
+        </p:nvSpPr>
+        <p:spPr>
+          <a:xfrm>
+            <a:off x="566928" y="4553712"/>
+            <a:ext cx="11057839" cy="1325880"/>
+          </a:xfrm>
+          <a:prstGeom prst="roundRect">
+            <a:avLst>
+              <a:gd name="adj" fmla="val 6207"/>
+            </a:avLst>
+          </a:prstGeom>
+          <a:solidFill>
+            <a:srgbClr val="0E3A5F"/>
+          </a:solidFill>
+          <a:ln/>
+          <a:effectLst>
+            <a:outerShdw sx="100000" sy="100000" kx="0" ky="0" algn="bl" rotWithShape="0" blurRad="88900" dist="25400" dir="5400000">
+              <a:srgbClr val="22303C">
+                <a:alpha val="12000"/>
+              </a:srgbClr>
+            </a:outerShdw>
+          </a:effectLst>
+        </p:spPr>
+      </p:sp>
+      <p:sp>
+        <p:nvSpPr>
+          <p:cNvPr id="8" name="Text 6"/>
+          <p:cNvSpPr/>
+          <p:nvPr/>
+        </p:nvSpPr>
+        <p:spPr>
+          <a:xfrm>
+            <a:off x="822960" y="4681728"/>
+            <a:ext cx="640080" cy="960120"/>
+          </a:xfrm>
+          <a:prstGeom prst="rect">
+            <a:avLst/>
+          </a:prstGeom>
+          <a:noFill/>
+          <a:ln/>
+        </p:spPr>
+        <p:txBody>
+          <a:bodyPr wrap="square" lIns="0" tIns="0" rIns="0" bIns="0" rtlCol="0" anchor="ctr"/>
+          <a:lstStyle/>
+          <a:p>
+            <a:pPr algn="ctr" indent="0" marL="0">
+              <a:buNone/>
+            </a:pPr>
+            <a:r>
+              <a:rPr lang="en-US" sz="4000" b="1" dirty="0">
+                <a:solidFill>
+                  <a:srgbClr val="6A1B9A"/>
+                </a:solidFill>
+                <a:latin typeface="Calibri" pitchFamily="34" charset="0"/>
+                <a:ea typeface="Calibri" pitchFamily="34" charset="-122"/>
+                <a:cs typeface="Calibri" pitchFamily="34" charset="-120"/>
+              </a:rPr>
+              <a:t>?</a:t>
+            </a:r>
+            <a:endParaRPr lang="en-US" sz="4000" dirty="0"/>
           </a:p>
         </p:txBody>
       </p:sp>
       <p:sp>
         <p:nvSpPr>
           <p:cNvPr id="9" name="Text 7"/>
+          <p:cNvSpPr/>
+          <p:nvPr/>
+        </p:nvSpPr>
+        <p:spPr>
+          <a:xfrm>
+            <a:off x="1618488" y="4553712"/>
+            <a:ext cx="9686239" cy="1325880"/>
+          </a:xfrm>
+          <a:prstGeom prst="rect">
+            <a:avLst/>
+          </a:prstGeom>
+          <a:noFill/>
+          <a:ln/>
+        </p:spPr>
+        <p:txBody>
+          <a:bodyPr wrap="square" lIns="0" tIns="0" rIns="0" bIns="0" rtlCol="0" anchor="ctr"/>
+          <a:lstStyle/>
+          <a:p>
+            <a:pPr algn="l" indent="0" marL="0">
+              <a:buNone/>
+            </a:pPr>
+            <a:r>
+              <a:rPr lang="en-US" sz="1500" b="1" dirty="0">
+                <a:solidFill>
+                  <a:srgbClr val="FFFFFF"/>
+                </a:solidFill>
+                <a:latin typeface="Calibri" pitchFamily="34" charset="0"/>
+                <a:ea typeface="Calibri" pitchFamily="34" charset="-122"/>
+                <a:cs typeface="Calibri" pitchFamily="34" charset="-120"/>
+              </a:rPr>
+              <a:t>What does this serology indicate?</a:t>
+            </a:r>
+            <a:endParaRPr lang="en-US" sz="1500" dirty="0"/>
+          </a:p>
+        </p:txBody>
+      </p:sp>
+      <p:sp>
+        <p:nvSpPr>
+          <p:cNvPr id="10" name="Text 8"/>
           <p:cNvSpPr/>
           <p:nvPr/>
         </p:nvSpPr>
@@ -7014,7 +7108,7 @@
       </p:sp>
       <p:sp>
         <p:nvSpPr>
-          <p:cNvPr id="10" name="Text 8"/>
+          <p:cNvPr id="11" name="Text 9"/>
           <p:cNvSpPr/>
           <p:nvPr/>
         </p:nvSpPr>
@@ -7144,7 +7238,7 @@
                 <a:ea typeface="Calibri" pitchFamily="34" charset="-122"/>
                 <a:cs typeface="Calibri" pitchFamily="34" charset="-120"/>
               </a:rPr>
-              <a:t>IMMUNOLOGY &amp; SEROLOGY   ·   BOARD REVIEW  ·  Q3</a:t>
+              <a:t>IMMUNOLOGY &amp; SEROLOGY   ·   CASE 3  ·  RESOLUTION</a:t>
             </a:r>
             <a:endParaRPr lang="en-US" sz="1100" dirty="0"/>
           </a:p>
@@ -7175,7 +7269,7 @@
               <a:buNone/>
             </a:pPr>
             <a:r>
-              <a:rPr lang="en-US" sz="2600" b="1" dirty="0">
+              <a:rPr lang="en-US" sz="3000" b="1" dirty="0">
                 <a:solidFill>
                   <a:srgbClr val="0E3A5F"/>
                 </a:solidFill>
@@ -7183,9 +7277,9 @@
                 <a:ea typeface="Calibri" pitchFamily="34" charset="-122"/>
                 <a:cs typeface="Calibri" pitchFamily="34" charset="-120"/>
               </a:rPr>
-              <a:t>Board-Style Review</a:t>
-            </a:r>
-            <a:endParaRPr lang="en-US" sz="2600" dirty="0"/>
+              <a:t>Case 3: PR3-ANCA Vasculitis</a:t>
+            </a:r>
+            <a:endParaRPr lang="en-US" sz="3000" dirty="0"/>
           </a:p>
         </p:txBody>
       </p:sp>
@@ -7197,8 +7291,8 @@
         </p:nvSpPr>
         <p:spPr>
           <a:xfrm>
-            <a:off x="566928" y="1417320"/>
-            <a:ext cx="11057839" cy="914400"/>
+            <a:off x="566928" y="1554480"/>
+            <a:ext cx="6413547" cy="4023360"/>
           </a:xfrm>
           <a:prstGeom prst="rect">
             <a:avLst/>
@@ -7210,14 +7304,15 @@
           <a:bodyPr wrap="square" lIns="0" tIns="0" rIns="0" bIns="0" rtlCol="0" anchor="t"/>
           <a:lstStyle/>
           <a:p>
-            <a:pPr algn="l" indent="0" marL="0">
-              <a:lnSpc>
-                <a:spcPct val="105000"/>
-              </a:lnSpc>
-              <a:buNone/>
-            </a:pPr>
-            <a:r>
-              <a:rPr lang="en-US" sz="1450" b="1" dirty="0">
+            <a:pPr algn="l" marL="177800" indent="-177800">
+              <a:spcAft>
+                <a:spcPts val="900"/>
+              </a:spcAft>
+              <a:buSzPct val="100000"/>
+              <a:buChar char="•"/>
+            </a:pPr>
+            <a:r>
+              <a:rPr lang="en-US" sz="1400" b="1" dirty="0">
                 <a:solidFill>
                   <a:srgbClr val="1B2A38"/>
                 </a:solidFill>
@@ -7225,41 +7320,20 @@
                 <a:ea typeface="Calibri" pitchFamily="34" charset="-122"/>
                 <a:cs typeface="Calibri" pitchFamily="34" charset="-120"/>
               </a:rPr>
-              <a:t>Which tests best track disease activity in lupus nephritis?</a:t>
-            </a:r>
-            <a:endParaRPr lang="en-US" sz="1450" dirty="0"/>
-          </a:p>
-        </p:txBody>
-      </p:sp>
-      <p:sp>
-        <p:nvSpPr>
-          <p:cNvPr id="5" name="Text 3"/>
-          <p:cNvSpPr/>
-          <p:nvPr/>
-        </p:nvSpPr>
-        <p:spPr>
-          <a:xfrm>
-            <a:off x="658368" y="2395728"/>
-            <a:ext cx="6192390" cy="3017520"/>
-          </a:xfrm>
-          <a:prstGeom prst="rect">
-            <a:avLst/>
-          </a:prstGeom>
-          <a:noFill/>
-          <a:ln/>
-        </p:spPr>
-        <p:txBody>
-          <a:bodyPr wrap="square" lIns="0" tIns="0" rIns="0" bIns="0" rtlCol="0" anchor="t"/>
-          <a:lstStyle/>
-          <a:p>
-            <a:pPr algn="l" indent="0" marL="0">
+              <a:t>c-ANCA/anti-PR3 with this triad supports granulomatosis with polyangiitis.</a:t>
+            </a:r>
+            <a:endParaRPr lang="en-US" sz="1400" dirty="0"/>
+          </a:p>
+          <a:p>
+            <a:pPr algn="l" marL="177800" indent="-177800">
               <a:spcAft>
-                <a:spcPts val="600"/>
+                <a:spcPts val="900"/>
               </a:spcAft>
-              <a:buNone/>
-            </a:pPr>
-            <a:r>
-              <a:rPr lang="en-US" sz="1350" dirty="0">
+              <a:buSzPct val="100000"/>
+              <a:buChar char="•"/>
+            </a:pPr>
+            <a:r>
+              <a:rPr lang="en-US" sz="1400" dirty="0">
                 <a:solidFill>
                   <a:srgbClr val="33444F"/>
                 </a:solidFill>
@@ -7267,19 +7341,20 @@
                 <a:ea typeface="Calibri" pitchFamily="34" charset="-122"/>
                 <a:cs typeface="Calibri" pitchFamily="34" charset="-120"/>
               </a:rPr>
-              <a:t>A. ANA titer</a:t>
-            </a:r>
-            <a:endParaRPr lang="en-US" sz="1350" dirty="0"/>
-          </a:p>
-          <a:p>
-            <a:pPr algn="l" indent="0" marL="0">
+              <a:t>Antigen-specific PR3 confirmation strengthens the IIF screen.</a:t>
+            </a:r>
+            <a:endParaRPr lang="en-US" sz="1400" dirty="0"/>
+          </a:p>
+          <a:p>
+            <a:pPr algn="l" marL="177800" indent="-177800">
               <a:spcAft>
-                <a:spcPts val="600"/>
+                <a:spcPts val="900"/>
               </a:spcAft>
-              <a:buNone/>
-            </a:pPr>
-            <a:r>
-              <a:rPr lang="en-US" sz="1350" dirty="0">
+              <a:buSzPct val="100000"/>
+              <a:buChar char="•"/>
+            </a:pPr>
+            <a:r>
+              <a:rPr lang="en-US" sz="1400" dirty="0">
                 <a:solidFill>
                   <a:srgbClr val="33444F"/>
                 </a:solidFill>
@@ -7287,39 +7362,20 @@
                 <a:ea typeface="Calibri" pitchFamily="34" charset="-122"/>
                 <a:cs typeface="Calibri" pitchFamily="34" charset="-120"/>
               </a:rPr>
-              <a:t>B. Anti-Sm titer</a:t>
-            </a:r>
-            <a:endParaRPr lang="en-US" sz="1350" dirty="0"/>
-          </a:p>
-          <a:p>
-            <a:pPr algn="l" indent="0" marL="0">
+              <a:t>Tissue biopsy confirms where feasible.</a:t>
+            </a:r>
+            <a:endParaRPr lang="en-US" sz="1400" dirty="0"/>
+          </a:p>
+          <a:p>
+            <a:pPr algn="l" marL="177800" indent="-177800">
               <a:spcAft>
-                <a:spcPts val="600"/>
+                <a:spcPts val="900"/>
               </a:spcAft>
-              <a:buNone/>
-            </a:pPr>
-            <a:r>
-              <a:rPr lang="en-US" sz="1350" b="1" dirty="0">
-                <a:solidFill>
-                  <a:srgbClr val="4A1269"/>
-                </a:solidFill>
-                <a:latin typeface="Calibri" pitchFamily="34" charset="0"/>
-                <a:ea typeface="Calibri" pitchFamily="34" charset="-122"/>
-                <a:cs typeface="Calibri" pitchFamily="34" charset="-120"/>
-              </a:rPr>
-              <a:t>C. Anti-dsDNA and complement (C3/C4)</a:t>
-            </a:r>
-            <a:endParaRPr lang="en-US" sz="1350" dirty="0"/>
-          </a:p>
-          <a:p>
-            <a:pPr algn="l" indent="0" marL="0">
-              <a:spcAft>
-                <a:spcPts val="600"/>
-              </a:spcAft>
-              <a:buNone/>
-            </a:pPr>
-            <a:r>
-              <a:rPr lang="en-US" sz="1350" dirty="0">
+              <a:buSzPct val="100000"/>
+              <a:buChar char="•"/>
+            </a:pPr>
+            <a:r>
+              <a:rPr lang="en-US" sz="1400" dirty="0">
                 <a:solidFill>
                   <a:srgbClr val="33444F"/>
                 </a:solidFill>
@@ -7327,46 +7383,26 @@
                 <a:ea typeface="Calibri" pitchFamily="34" charset="-122"/>
                 <a:cs typeface="Calibri" pitchFamily="34" charset="-120"/>
               </a:rPr>
-              <a:t>D. Rheumatoid factor</a:t>
-            </a:r>
-            <a:endParaRPr lang="en-US" sz="1350" dirty="0"/>
-          </a:p>
-          <a:p>
-            <a:pPr algn="l" indent="0" marL="0">
-              <a:spcAft>
-                <a:spcPts val="600"/>
-              </a:spcAft>
-              <a:buNone/>
-            </a:pPr>
-            <a:r>
-              <a:rPr lang="en-US" sz="1350" dirty="0">
-                <a:solidFill>
-                  <a:srgbClr val="33444F"/>
-                </a:solidFill>
-                <a:latin typeface="Calibri" pitchFamily="34" charset="0"/>
-                <a:ea typeface="Calibri" pitchFamily="34" charset="-122"/>
-                <a:cs typeface="Calibri" pitchFamily="34" charset="-120"/>
-              </a:rPr>
-              <a:t>E. ESR alone</a:t>
-            </a:r>
-            <a:endParaRPr lang="en-US" sz="1350" dirty="0"/>
-          </a:p>
-        </p:txBody>
-      </p:sp>
-      <p:sp>
-        <p:nvSpPr>
-          <p:cNvPr id="6" name="Shape 4"/>
-          <p:cNvSpPr/>
-          <p:nvPr/>
-        </p:nvSpPr>
-        <p:spPr>
-          <a:xfrm>
-            <a:off x="7201632" y="2395728"/>
-            <a:ext cx="4423136" cy="3246120"/>
+              <a:t>Serology supports diagnosis and monitoring.</a:t>
+            </a:r>
+            <a:endParaRPr lang="en-US" sz="1400" dirty="0"/>
+          </a:p>
+        </p:txBody>
+      </p:sp>
+      <p:sp>
+        <p:nvSpPr>
+          <p:cNvPr id="5" name="Shape 3"/>
+          <p:cNvSpPr/>
+          <p:nvPr/>
+        </p:nvSpPr>
+        <p:spPr>
+          <a:xfrm>
+            <a:off x="7422788" y="1554480"/>
+            <a:ext cx="4201979" cy="3977640"/>
           </a:xfrm>
           <a:prstGeom prst="roundRect">
             <a:avLst>
-              <a:gd name="adj" fmla="val 2535"/>
+              <a:gd name="adj" fmla="val 2069"/>
             </a:avLst>
           </a:prstGeom>
           <a:solidFill>
@@ -7384,67 +7420,53 @@
       </p:sp>
       <p:sp>
         <p:nvSpPr>
+          <p:cNvPr id="6" name="Text 4"/>
+          <p:cNvSpPr/>
+          <p:nvPr/>
+        </p:nvSpPr>
+        <p:spPr>
+          <a:xfrm>
+            <a:off x="7660532" y="1755648"/>
+            <a:ext cx="3744779" cy="310896"/>
+          </a:xfrm>
+          <a:prstGeom prst="rect">
+            <a:avLst/>
+          </a:prstGeom>
+          <a:noFill/>
+          <a:ln/>
+        </p:spPr>
+        <p:txBody>
+          <a:bodyPr wrap="square" lIns="0" tIns="0" rIns="0" bIns="0" rtlCol="0" anchor="ctr"/>
+          <a:lstStyle/>
+          <a:p>
+            <a:pPr indent="0" marL="0">
+              <a:buNone/>
+            </a:pPr>
+            <a:r>
+              <a:rPr lang="en-US" sz="1100" b="1" spc="140" kern="0" dirty="0">
+                <a:solidFill>
+                  <a:srgbClr val="6A1B9A"/>
+                </a:solidFill>
+                <a:latin typeface="Calibri" pitchFamily="34" charset="0"/>
+                <a:ea typeface="Calibri" pitchFamily="34" charset="-122"/>
+                <a:cs typeface="Calibri" pitchFamily="34" charset="-120"/>
+              </a:rPr>
+              <a:t>TEACHING POINT</a:t>
+            </a:r>
+            <a:endParaRPr lang="en-US" sz="1100" dirty="0"/>
+          </a:p>
+        </p:txBody>
+      </p:sp>
+      <p:sp>
+        <p:nvSpPr>
           <p:cNvPr id="7" name="Text 5"/>
           <p:cNvSpPr/>
           <p:nvPr/>
         </p:nvSpPr>
         <p:spPr>
           <a:xfrm>
-            <a:off x="7439376" y="2578608"/>
-            <a:ext cx="3965936" cy="457200"/>
-          </a:xfrm>
-          <a:prstGeom prst="rect">
-            <a:avLst/>
-          </a:prstGeom>
-          <a:noFill/>
-          <a:ln/>
-        </p:spPr>
-        <p:txBody>
-          <a:bodyPr wrap="square" lIns="0" tIns="0" rIns="0" bIns="0" rtlCol="0" anchor="ctr"/>
-          <a:lstStyle/>
-          <a:p>
-            <a:pPr indent="0" marL="0">
-              <a:buNone/>
-            </a:pPr>
-            <a:r>
-              <a:rPr lang="en-US" sz="1500" b="1" dirty="0">
-                <a:solidFill>
-                  <a:srgbClr val="6A1B9A"/>
-                </a:solidFill>
-                <a:latin typeface="Calibri" pitchFamily="34" charset="0"/>
-                <a:ea typeface="Calibri" pitchFamily="34" charset="-122"/>
-                <a:cs typeface="Calibri" pitchFamily="34" charset="-120"/>
-              </a:rPr>
-              <a:t>ANSWER  </a:t>
-            </a:r>
-            <a:pPr indent="0" marL="0">
-              <a:buNone/>
-            </a:pPr>
-            <a:r>
-              <a:rPr lang="en-US" sz="1500" b="1" dirty="0">
-                <a:solidFill>
-                  <a:srgbClr val="1B2A38"/>
-                </a:solidFill>
-                <a:latin typeface="Calibri" pitchFamily="34" charset="0"/>
-                <a:ea typeface="Calibri" pitchFamily="34" charset="-122"/>
-                <a:cs typeface="Calibri" pitchFamily="34" charset="-120"/>
-              </a:rPr>
-              <a:t>C — Anti-dsDNA and complement</a:t>
-            </a:r>
-            <a:endParaRPr lang="en-US" sz="1500" dirty="0"/>
-          </a:p>
-        </p:txBody>
-      </p:sp>
-      <p:sp>
-        <p:nvSpPr>
-          <p:cNvPr id="8" name="Text 6"/>
-          <p:cNvSpPr/>
-          <p:nvPr/>
-        </p:nvSpPr>
-        <p:spPr>
-          <a:xfrm>
-            <a:off x="7439376" y="3127248"/>
-            <a:ext cx="3947648" cy="2377440"/>
+            <a:off x="7660532" y="2121408"/>
+            <a:ext cx="3726491" cy="3291840"/>
           </a:xfrm>
           <a:prstGeom prst="rect">
             <a:avLst/>
@@ -7458,12 +7480,12 @@
           <a:p>
             <a:pPr algn="l" indent="0" marL="0">
               <a:lnSpc>
-                <a:spcPct val="108000"/>
+                <a:spcPct val="110000"/>
               </a:lnSpc>
               <a:buNone/>
             </a:pPr>
             <a:r>
-              <a:rPr lang="en-US" sz="1250" dirty="0">
+              <a:rPr lang="en-US" sz="1350" dirty="0">
                 <a:solidFill>
                   <a:srgbClr val="33444F"/>
                 </a:solidFill>
@@ -7471,15 +7493,15 @@
                 <a:ea typeface="Calibri" pitchFamily="34" charset="-122"/>
                 <a:cs typeface="Calibri" pitchFamily="34" charset="-120"/>
               </a:rPr>
-              <a:t>Anti-dsDNA rises and C3/C4 fall with active lupus (especially nephritis). ANA and anti-Sm titers are not used to follow activity.</a:t>
-            </a:r>
-            <a:endParaRPr lang="en-US" sz="1250" dirty="0"/>
-          </a:p>
-        </p:txBody>
-      </p:sp>
-      <p:sp>
-        <p:nvSpPr>
-          <p:cNvPr id="9" name="Text 7"/>
+              <a:t>c-ANCA/PR3 in an upper-airway + pulmonary-renal syndrome points to GPA; confirm with antigen-specific testing and biopsy.</a:t>
+            </a:r>
+            <a:endParaRPr lang="en-US" sz="1350" dirty="0"/>
+          </a:p>
+        </p:txBody>
+      </p:sp>
+      <p:sp>
+        <p:nvSpPr>
+          <p:cNvPr id="8" name="Text 6"/>
           <p:cNvSpPr/>
           <p:nvPr/>
         </p:nvSpPr>
@@ -7518,7 +7540,7 @@
       </p:sp>
       <p:sp>
         <p:nvSpPr>
-          <p:cNvPr id="10" name="Text 8"/>
+          <p:cNvPr id="9" name="Text 7"/>
           <p:cNvSpPr/>
           <p:nvPr/>
         </p:nvSpPr>
@@ -7794,7 +7816,7 @@
                 <a:ea typeface="Calibri" pitchFamily="34" charset="-122"/>
                 <a:cs typeface="Calibri" pitchFamily="34" charset="-120"/>
               </a:rPr>
-              <a:t>A sensitive screen for SLE — but common in healthy people too</a:t>
+              <a:t>A sensitive screen — but not specific for any one disease</a:t>
             </a:r>
             <a:endParaRPr lang="en-US" sz="1150" dirty="0"/>
           </a:p>
@@ -7901,7 +7923,7 @@
                 <a:ea typeface="Calibri" pitchFamily="34" charset="-122"/>
                 <a:cs typeface="Calibri" pitchFamily="34" charset="-120"/>
               </a:rPr>
-              <a:t>The IFA pattern points to the antigen and the disease</a:t>
+              <a:t>IIF pattern points toward specific antibodies</a:t>
             </a:r>
             <a:endParaRPr lang="en-US" sz="1150" dirty="0"/>
           </a:p>
@@ -7969,7 +7991,7 @@
                 <a:ea typeface="Calibri" pitchFamily="34" charset="-122"/>
                 <a:cs typeface="Calibri" pitchFamily="34" charset="-120"/>
               </a:rPr>
-              <a:t>Pretest</a:t>
+              <a:t>Complement</a:t>
             </a:r>
             <a:endParaRPr lang="en-US" sz="3600" dirty="0"/>
           </a:p>
@@ -8008,7 +8030,7 @@
                 <a:ea typeface="Calibri" pitchFamily="34" charset="-122"/>
                 <a:cs typeface="Calibri" pitchFamily="34" charset="-120"/>
               </a:rPr>
-              <a:t>Order autoantibodies for a reason, not as a panel reflex</a:t>
+              <a:t>Low C3/C4 tracks active immune-complex disease</a:t>
             </a:r>
             <a:endParaRPr lang="en-US" sz="1150" dirty="0"/>
           </a:p>
@@ -8079,7 +8101,7 @@
                 <a:ea typeface="Calibri" pitchFamily="34" charset="-122"/>
                 <a:cs typeface="Calibri" pitchFamily="34" charset="-120"/>
               </a:rPr>
-              <a:t>Autoimmune serology is where pretest probability and pattern recognition meet. ANA, ENA, ANCA, antiphospholipid, and complement tests are powerful when targeted and misleading when ordered indiscriminately.</a:t>
+              <a:t>Autoimmune serology is a tiered, pattern-based discipline: a sensitive ANA screen, then specific autoantibodies, interpreted with complement and the clinical picture. Misuse drives false alarms and unnecessary referrals.</a:t>
             </a:r>
             <a:endParaRPr lang="en-US" sz="1450" dirty="0"/>
           </a:p>
@@ -8122,7 +8144,7 @@
                 <a:ea typeface="Calibri" pitchFamily="34" charset="-122"/>
                 <a:cs typeface="Calibri" pitchFamily="34" charset="-120"/>
               </a:rPr>
-              <a:t>A positive ANA without clinical features is frequently a false alarm — specificity comes from the pattern and reflex antibodies.</a:t>
+              <a:t>ANA is a screen, not a diagnosis — specific antibodies and clinical context turn a positive ANA into meaning.</a:t>
             </a:r>
             <a:endParaRPr lang="en-US" sz="1300" dirty="0"/>
           </a:p>
@@ -8248,7 +8270,7 @@
     <p:bg>
       <p:bgPr>
         <a:solidFill>
-          <a:srgbClr val="0A2A45"/>
+          <a:srgbClr val="FFFFFF"/>
         </a:solidFill>
       </p:bgPr>
     </p:bg>
@@ -8275,7 +8297,7 @@
         <p:spPr>
           <a:xfrm>
             <a:off x="566928" y="329184"/>
-            <a:ext cx="10058400" cy="310896"/>
+            <a:ext cx="10515600" cy="310896"/>
           </a:xfrm>
           <a:prstGeom prst="rect">
             <a:avLst/>
@@ -8287,7 +8309,7 @@
           <a:bodyPr wrap="square" lIns="0" tIns="0" rIns="0" bIns="0" rtlCol="0" anchor="ctr"/>
           <a:lstStyle/>
           <a:p>
-            <a:pPr indent="0" marL="0">
+            <a:pPr algn="l" indent="0" marL="0">
               <a:buNone/>
             </a:pPr>
             <a:r>
@@ -8299,7 +8321,7 @@
                 <a:ea typeface="Calibri" pitchFamily="34" charset="-122"/>
                 <a:cs typeface="Calibri" pitchFamily="34" charset="-120"/>
               </a:rPr>
-              <a:t>IMMUNOLOGY &amp; SEROLOGY</a:t>
+              <a:t>IMMUNOLOGY &amp; SEROLOGY   ·   BOARD REVIEW  ·  Q1</a:t>
             </a:r>
             <a:endParaRPr lang="en-US" sz="1100" dirty="0"/>
           </a:p>
@@ -8313,8 +8335,8 @@
         </p:nvSpPr>
         <p:spPr>
           <a:xfrm>
-            <a:off x="566928" y="676656"/>
-            <a:ext cx="10972800" cy="749808"/>
+            <a:off x="566928" y="713232"/>
+            <a:ext cx="11064240" cy="749808"/>
           </a:xfrm>
           <a:prstGeom prst="rect">
             <a:avLst/>
@@ -8326,62 +8348,206 @@
           <a:bodyPr wrap="square" lIns="0" tIns="0" rIns="0" bIns="0" rtlCol="0" anchor="ctr"/>
           <a:lstStyle/>
           <a:p>
-            <a:pPr indent="0" marL="0">
-              <a:buNone/>
-            </a:pPr>
-            <a:r>
-              <a:rPr lang="en-US" sz="3000" b="1" dirty="0">
-                <a:solidFill>
-                  <a:srgbClr val="FFFFFF"/>
-                </a:solidFill>
-                <a:latin typeface="Calibri" pitchFamily="34" charset="0"/>
-                <a:ea typeface="Calibri" pitchFamily="34" charset="-122"/>
-                <a:cs typeface="Calibri" pitchFamily="34" charset="-120"/>
-              </a:rPr>
-              <a:t>Key Take-Home Points</a:t>
-            </a:r>
-            <a:endParaRPr lang="en-US" sz="3000" dirty="0"/>
-          </a:p>
-        </p:txBody>
-      </p:sp>
-      <p:sp>
-        <p:nvSpPr>
-          <p:cNvPr id="4" name="Shape 2"/>
-          <p:cNvSpPr/>
-          <p:nvPr/>
-        </p:nvSpPr>
-        <p:spPr>
-          <a:xfrm>
-            <a:off x="566928" y="1517904"/>
-            <a:ext cx="11057839" cy="841248"/>
+            <a:pPr algn="l" indent="0" marL="0">
+              <a:buNone/>
+            </a:pPr>
+            <a:r>
+              <a:rPr lang="en-US" sz="2600" b="1" dirty="0">
+                <a:solidFill>
+                  <a:srgbClr val="0E3A5F"/>
+                </a:solidFill>
+                <a:latin typeface="Calibri" pitchFamily="34" charset="0"/>
+                <a:ea typeface="Calibri" pitchFamily="34" charset="-122"/>
+                <a:cs typeface="Calibri" pitchFamily="34" charset="-120"/>
+              </a:rPr>
+              <a:t>Board-Style Review</a:t>
+            </a:r>
+            <a:endParaRPr lang="en-US" sz="2600" dirty="0"/>
+          </a:p>
+        </p:txBody>
+      </p:sp>
+      <p:sp>
+        <p:nvSpPr>
+          <p:cNvPr id="4" name="Text 2"/>
+          <p:cNvSpPr/>
+          <p:nvPr/>
+        </p:nvSpPr>
+        <p:spPr>
+          <a:xfrm>
+            <a:off x="566928" y="1417320"/>
+            <a:ext cx="11057839" cy="914400"/>
+          </a:xfrm>
+          <a:prstGeom prst="rect">
+            <a:avLst/>
+          </a:prstGeom>
+          <a:noFill/>
+          <a:ln/>
+        </p:spPr>
+        <p:txBody>
+          <a:bodyPr wrap="square" lIns="0" tIns="0" rIns="0" bIns="0" rtlCol="0" anchor="t"/>
+          <a:lstStyle/>
+          <a:p>
+            <a:pPr algn="l" indent="0" marL="0">
+              <a:lnSpc>
+                <a:spcPct val="105000"/>
+              </a:lnSpc>
+              <a:buNone/>
+            </a:pPr>
+            <a:r>
+              <a:rPr lang="en-US" sz="1450" b="1" dirty="0">
+                <a:solidFill>
+                  <a:srgbClr val="1B2A38"/>
+                </a:solidFill>
+                <a:latin typeface="Calibri" pitchFamily="34" charset="0"/>
+                <a:ea typeface="Calibri" pitchFamily="34" charset="-122"/>
+                <a:cs typeface="Calibri" pitchFamily="34" charset="-120"/>
+              </a:rPr>
+              <a:t>Which autoantibody is most specific for SLE and tracks nephritis activity?</a:t>
+            </a:r>
+            <a:endParaRPr lang="en-US" sz="1450" dirty="0"/>
+          </a:p>
+        </p:txBody>
+      </p:sp>
+      <p:sp>
+        <p:nvSpPr>
+          <p:cNvPr id="5" name="Text 3"/>
+          <p:cNvSpPr/>
+          <p:nvPr/>
+        </p:nvSpPr>
+        <p:spPr>
+          <a:xfrm>
+            <a:off x="658368" y="2395728"/>
+            <a:ext cx="6192390" cy="3017520"/>
+          </a:xfrm>
+          <a:prstGeom prst="rect">
+            <a:avLst/>
+          </a:prstGeom>
+          <a:noFill/>
+          <a:ln/>
+        </p:spPr>
+        <p:txBody>
+          <a:bodyPr wrap="square" lIns="0" tIns="0" rIns="0" bIns="0" rtlCol="0" anchor="t"/>
+          <a:lstStyle/>
+          <a:p>
+            <a:pPr algn="l" indent="0" marL="0">
+              <a:spcAft>
+                <a:spcPts val="600"/>
+              </a:spcAft>
+              <a:buNone/>
+            </a:pPr>
+            <a:r>
+              <a:rPr lang="en-US" sz="1350" dirty="0">
+                <a:solidFill>
+                  <a:srgbClr val="33444F"/>
+                </a:solidFill>
+                <a:latin typeface="Calibri" pitchFamily="34" charset="0"/>
+                <a:ea typeface="Calibri" pitchFamily="34" charset="-122"/>
+                <a:cs typeface="Calibri" pitchFamily="34" charset="-120"/>
+              </a:rPr>
+              <a:t>A. Anti-SSA</a:t>
+            </a:r>
+            <a:endParaRPr lang="en-US" sz="1350" dirty="0"/>
+          </a:p>
+          <a:p>
+            <a:pPr algn="l" indent="0" marL="0">
+              <a:spcAft>
+                <a:spcPts val="600"/>
+              </a:spcAft>
+              <a:buNone/>
+            </a:pPr>
+            <a:r>
+              <a:rPr lang="en-US" sz="1350" b="1" dirty="0">
+                <a:solidFill>
+                  <a:srgbClr val="4A1269"/>
+                </a:solidFill>
+                <a:latin typeface="Calibri" pitchFamily="34" charset="0"/>
+                <a:ea typeface="Calibri" pitchFamily="34" charset="-122"/>
+                <a:cs typeface="Calibri" pitchFamily="34" charset="-120"/>
+              </a:rPr>
+              <a:t>B. Anti-dsDNA</a:t>
+            </a:r>
+            <a:endParaRPr lang="en-US" sz="1350" dirty="0"/>
+          </a:p>
+          <a:p>
+            <a:pPr algn="l" indent="0" marL="0">
+              <a:spcAft>
+                <a:spcPts val="600"/>
+              </a:spcAft>
+              <a:buNone/>
+            </a:pPr>
+            <a:r>
+              <a:rPr lang="en-US" sz="1350" dirty="0">
+                <a:solidFill>
+                  <a:srgbClr val="33444F"/>
+                </a:solidFill>
+                <a:latin typeface="Calibri" pitchFamily="34" charset="0"/>
+                <a:ea typeface="Calibri" pitchFamily="34" charset="-122"/>
+                <a:cs typeface="Calibri" pitchFamily="34" charset="-120"/>
+              </a:rPr>
+              <a:t>C. ANA (homogeneous)</a:t>
+            </a:r>
+            <a:endParaRPr lang="en-US" sz="1350" dirty="0"/>
+          </a:p>
+          <a:p>
+            <a:pPr algn="l" indent="0" marL="0">
+              <a:spcAft>
+                <a:spcPts val="600"/>
+              </a:spcAft>
+              <a:buNone/>
+            </a:pPr>
+            <a:r>
+              <a:rPr lang="en-US" sz="1350" dirty="0">
+                <a:solidFill>
+                  <a:srgbClr val="33444F"/>
+                </a:solidFill>
+                <a:latin typeface="Calibri" pitchFamily="34" charset="0"/>
+                <a:ea typeface="Calibri" pitchFamily="34" charset="-122"/>
+                <a:cs typeface="Calibri" pitchFamily="34" charset="-120"/>
+              </a:rPr>
+              <a:t>D. Anti-centromere</a:t>
+            </a:r>
+            <a:endParaRPr lang="en-US" sz="1350" dirty="0"/>
+          </a:p>
+          <a:p>
+            <a:pPr algn="l" indent="0" marL="0">
+              <a:spcAft>
+                <a:spcPts val="600"/>
+              </a:spcAft>
+              <a:buNone/>
+            </a:pPr>
+            <a:r>
+              <a:rPr lang="en-US" sz="1350" dirty="0">
+                <a:solidFill>
+                  <a:srgbClr val="33444F"/>
+                </a:solidFill>
+                <a:latin typeface="Calibri" pitchFamily="34" charset="0"/>
+                <a:ea typeface="Calibri" pitchFamily="34" charset="-122"/>
+                <a:cs typeface="Calibri" pitchFamily="34" charset="-120"/>
+              </a:rPr>
+              <a:t>E. Rheumatoid factor</a:t>
+            </a:r>
+            <a:endParaRPr lang="en-US" sz="1350" dirty="0"/>
+          </a:p>
+        </p:txBody>
+      </p:sp>
+      <p:sp>
+        <p:nvSpPr>
+          <p:cNvPr id="6" name="Shape 4"/>
+          <p:cNvSpPr/>
+          <p:nvPr/>
+        </p:nvSpPr>
+        <p:spPr>
+          <a:xfrm>
+            <a:off x="7201632" y="2395728"/>
+            <a:ext cx="4423136" cy="3246120"/>
           </a:xfrm>
           <a:prstGeom prst="roundRect">
             <a:avLst>
-              <a:gd name="adj" fmla="val 7609"/>
+              <a:gd name="adj" fmla="val 2535"/>
             </a:avLst>
           </a:prstGeom>
           <a:solidFill>
-            <a:srgbClr val="143651"/>
-          </a:solidFill>
-          <a:ln/>
-        </p:spPr>
-      </p:sp>
-      <p:sp>
-        <p:nvSpPr>
-          <p:cNvPr id="5" name="Shape 3"/>
-          <p:cNvSpPr/>
-          <p:nvPr/>
-        </p:nvSpPr>
-        <p:spPr>
-          <a:xfrm>
-            <a:off x="749808" y="1755648"/>
-            <a:ext cx="365760" cy="365760"/>
-          </a:xfrm>
-          <a:prstGeom prst="ellipse">
-            <a:avLst/>
-          </a:prstGeom>
-          <a:solidFill>
-            <a:srgbClr val="6A1B9A"/>
+            <a:srgbClr val="F1E8F7"/>
           </a:solidFill>
           <a:ln/>
           <a:effectLst>
@@ -8395,14 +8561,14 @@
       </p:sp>
       <p:sp>
         <p:nvSpPr>
-          <p:cNvPr id="6" name="Text 4"/>
-          <p:cNvSpPr/>
-          <p:nvPr/>
-        </p:nvSpPr>
-        <p:spPr>
-          <a:xfrm>
-            <a:off x="749808" y="1755648"/>
-            <a:ext cx="365760" cy="365760"/>
+          <p:cNvPr id="7" name="Text 5"/>
+          <p:cNvSpPr/>
+          <p:nvPr/>
+        </p:nvSpPr>
+        <p:spPr>
+          <a:xfrm>
+            <a:off x="7439376" y="2578608"/>
+            <a:ext cx="3965936" cy="457200"/>
           </a:xfrm>
           <a:prstGeom prst="rect">
             <a:avLst/>
@@ -8414,19 +8580,33 @@
           <a:bodyPr wrap="square" lIns="0" tIns="0" rIns="0" bIns="0" rtlCol="0" anchor="ctr"/>
           <a:lstStyle/>
           <a:p>
-            <a:pPr algn="ctr" indent="0" marL="0">
+            <a:pPr indent="0" marL="0">
               <a:buNone/>
             </a:pPr>
             <a:r>
               <a:rPr lang="en-US" sz="1500" b="1" dirty="0">
                 <a:solidFill>
-                  <a:srgbClr val="FFFFFF"/>
-                </a:solidFill>
-                <a:latin typeface="Calibri" pitchFamily="34" charset="0"/>
-                <a:ea typeface="Calibri" pitchFamily="34" charset="-122"/>
-                <a:cs typeface="Calibri" pitchFamily="34" charset="-120"/>
-              </a:rPr>
-              <a:t>1</a:t>
+                  <a:srgbClr val="6A1B9A"/>
+                </a:solidFill>
+                <a:latin typeface="Calibri" pitchFamily="34" charset="0"/>
+                <a:ea typeface="Calibri" pitchFamily="34" charset="-122"/>
+                <a:cs typeface="Calibri" pitchFamily="34" charset="-120"/>
+              </a:rPr>
+              <a:t>ANSWER  </a:t>
+            </a:r>
+            <a:pPr indent="0" marL="0">
+              <a:buNone/>
+            </a:pPr>
+            <a:r>
+              <a:rPr lang="en-US" sz="1500" b="1" dirty="0">
+                <a:solidFill>
+                  <a:srgbClr val="1B2A38"/>
+                </a:solidFill>
+                <a:latin typeface="Calibri" pitchFamily="34" charset="0"/>
+                <a:ea typeface="Calibri" pitchFamily="34" charset="-122"/>
+                <a:cs typeface="Calibri" pitchFamily="34" charset="-120"/>
+              </a:rPr>
+              <a:t>B — Anti-dsDNA</a:t>
             </a:r>
             <a:endParaRPr lang="en-US" sz="1500" dirty="0"/>
           </a:p>
@@ -8434,14 +8614,56 @@
       </p:sp>
       <p:sp>
         <p:nvSpPr>
-          <p:cNvPr id="7" name="Text 5"/>
-          <p:cNvSpPr/>
-          <p:nvPr/>
-        </p:nvSpPr>
-        <p:spPr>
-          <a:xfrm>
-            <a:off x="1280160" y="1517904"/>
-            <a:ext cx="10143439" cy="841248"/>
+          <p:cNvPr id="8" name="Text 6"/>
+          <p:cNvSpPr/>
+          <p:nvPr/>
+        </p:nvSpPr>
+        <p:spPr>
+          <a:xfrm>
+            <a:off x="7439376" y="3127248"/>
+            <a:ext cx="3947648" cy="2377440"/>
+          </a:xfrm>
+          <a:prstGeom prst="rect">
+            <a:avLst/>
+          </a:prstGeom>
+          <a:noFill/>
+          <a:ln/>
+        </p:spPr>
+        <p:txBody>
+          <a:bodyPr wrap="square" lIns="0" tIns="0" rIns="0" bIns="0" rtlCol="0" anchor="t"/>
+          <a:lstStyle/>
+          <a:p>
+            <a:pPr algn="l" indent="0" marL="0">
+              <a:lnSpc>
+                <a:spcPct val="108000"/>
+              </a:lnSpc>
+              <a:buNone/>
+            </a:pPr>
+            <a:r>
+              <a:rPr lang="en-US" sz="1250" dirty="0">
+                <a:solidFill>
+                  <a:srgbClr val="33444F"/>
+                </a:solidFill>
+                <a:latin typeface="Calibri" pitchFamily="34" charset="0"/>
+                <a:ea typeface="Calibri" pitchFamily="34" charset="-122"/>
+                <a:cs typeface="Calibri" pitchFamily="34" charset="-120"/>
+              </a:rPr>
+              <a:t>Anti-dsDNA is specific for SLE and correlates with disease/renal activity; ANA is sensitive but not specific.</a:t>
+            </a:r>
+            <a:endParaRPr lang="en-US" sz="1250" dirty="0"/>
+          </a:p>
+        </p:txBody>
+      </p:sp>
+      <p:sp>
+        <p:nvSpPr>
+          <p:cNvPr id="9" name="Text 7"/>
+          <p:cNvSpPr/>
+          <p:nvPr/>
+        </p:nvSpPr>
+        <p:spPr>
+          <a:xfrm>
+            <a:off x="566928" y="6473952"/>
+            <a:ext cx="7772400" cy="274320"/>
           </a:xfrm>
           <a:prstGeom prst="rect">
             <a:avLst/>
@@ -8457,68 +8679,19 @@
               <a:buNone/>
             </a:pPr>
             <a:r>
-              <a:rPr lang="en-US" sz="1350" dirty="0">
-                <a:solidFill>
-                  <a:srgbClr val="E7EEF4"/>
-                </a:solidFill>
-                <a:latin typeface="Calibri" pitchFamily="34" charset="0"/>
-                <a:ea typeface="Calibri" pitchFamily="34" charset="-122"/>
-                <a:cs typeface="Calibri" pitchFamily="34" charset="-120"/>
-              </a:rPr>
-              <a:t>ANA is a sensitive SLE screen but common in healthy people — the IFA pattern and reflex antibodies provide specificity.</a:t>
-            </a:r>
-            <a:endParaRPr lang="en-US" sz="1350" dirty="0"/>
-          </a:p>
-        </p:txBody>
-      </p:sp>
-      <p:sp>
-        <p:nvSpPr>
-          <p:cNvPr id="8" name="Shape 6"/>
-          <p:cNvSpPr/>
-          <p:nvPr/>
-        </p:nvSpPr>
-        <p:spPr>
-          <a:xfrm>
-            <a:off x="566928" y="2505456"/>
-            <a:ext cx="11057839" cy="841248"/>
-          </a:xfrm>
-          <a:prstGeom prst="roundRect">
-            <a:avLst>
-              <a:gd name="adj" fmla="val 7609"/>
-            </a:avLst>
-          </a:prstGeom>
-          <a:solidFill>
-            <a:srgbClr val="143651"/>
-          </a:solidFill>
-          <a:ln/>
-        </p:spPr>
-      </p:sp>
-      <p:sp>
-        <p:nvSpPr>
-          <p:cNvPr id="9" name="Shape 7"/>
-          <p:cNvSpPr/>
-          <p:nvPr/>
-        </p:nvSpPr>
-        <p:spPr>
-          <a:xfrm>
-            <a:off x="749808" y="2743200"/>
-            <a:ext cx="365760" cy="365760"/>
-          </a:xfrm>
-          <a:prstGeom prst="ellipse">
-            <a:avLst/>
-          </a:prstGeom>
-          <a:solidFill>
-            <a:srgbClr val="6A1B9A"/>
-          </a:solidFill>
-          <a:ln/>
-          <a:effectLst>
-            <a:outerShdw sx="100000" sy="100000" kx="0" ky="0" algn="bl" rotWithShape="0" blurRad="88900" dist="25400" dir="5400000">
-              <a:srgbClr val="22303C">
-                <a:alpha val="12000"/>
-              </a:srgbClr>
-            </a:outerShdw>
-          </a:effectLst>
-        </p:spPr>
+              <a:rPr lang="en-US" sz="850" dirty="0">
+                <a:solidFill>
+                  <a:srgbClr val="9AA8B4"/>
+                </a:solidFill>
+                <a:latin typeface="Calibri" pitchFamily="34" charset="0"/>
+                <a:ea typeface="Calibri" pitchFamily="34" charset="-122"/>
+                <a:cs typeface="Calibri" pitchFamily="34" charset="-120"/>
+              </a:rPr>
+              <a:t>Makassed General Hospital  ·  Department of Laboratory Medicine</a:t>
+            </a:r>
+            <a:endParaRPr lang="en-US" sz="850" dirty="0"/>
+          </a:p>
+        </p:txBody>
       </p:sp>
       <p:sp>
         <p:nvSpPr>
@@ -8528,8 +8701,8 @@
         </p:nvSpPr>
         <p:spPr>
           <a:xfrm>
-            <a:off x="749808" y="2743200"/>
-            <a:ext cx="365760" cy="365760"/>
+            <a:off x="9814255" y="6473952"/>
+            <a:ext cx="1828800" cy="274320"/>
           </a:xfrm>
           <a:prstGeom prst="rect">
             <a:avLst/>
@@ -8541,504 +8714,34 @@
           <a:bodyPr wrap="square" lIns="0" tIns="0" rIns="0" bIns="0" rtlCol="0" anchor="ctr"/>
           <a:lstStyle/>
           <a:p>
-            <a:pPr algn="ctr" indent="0" marL="0">
-              <a:buNone/>
-            </a:pPr>
-            <a:r>
-              <a:rPr lang="en-US" sz="1500" b="1" dirty="0">
-                <a:solidFill>
-                  <a:srgbClr val="FFFFFF"/>
-                </a:solidFill>
-                <a:latin typeface="Calibri" pitchFamily="34" charset="0"/>
-                <a:ea typeface="Calibri" pitchFamily="34" charset="-122"/>
-                <a:cs typeface="Calibri" pitchFamily="34" charset="-120"/>
-              </a:rPr>
-              <a:t>2</a:t>
-            </a:r>
-            <a:endParaRPr lang="en-US" sz="1500" dirty="0"/>
-          </a:p>
-        </p:txBody>
-      </p:sp>
-      <p:sp>
-        <p:nvSpPr>
-          <p:cNvPr id="11" name="Text 9"/>
-          <p:cNvSpPr/>
-          <p:nvPr/>
-        </p:nvSpPr>
-        <p:spPr>
-          <a:xfrm>
-            <a:off x="1280160" y="2505456"/>
-            <a:ext cx="10143439" cy="841248"/>
-          </a:xfrm>
-          <a:prstGeom prst="rect">
-            <a:avLst/>
-          </a:prstGeom>
-          <a:noFill/>
-          <a:ln/>
-        </p:spPr>
-        <p:txBody>
-          <a:bodyPr wrap="square" lIns="0" tIns="0" rIns="0" bIns="0" rtlCol="0" anchor="ctr"/>
-          <a:lstStyle/>
-          <a:p>
-            <a:pPr algn="l" indent="0" marL="0">
-              <a:buNone/>
-            </a:pPr>
-            <a:r>
-              <a:rPr lang="en-US" sz="1350" dirty="0">
-                <a:solidFill>
-                  <a:srgbClr val="E7EEF4"/>
-                </a:solidFill>
-                <a:latin typeface="Calibri" pitchFamily="34" charset="0"/>
-                <a:ea typeface="Calibri" pitchFamily="34" charset="-122"/>
-                <a:cs typeface="Calibri" pitchFamily="34" charset="-120"/>
-              </a:rPr>
-              <a:t>Anti-dsDNA and anti-Sm are specific for SLE; anti-dsDNA and complement track activity (ANA does not).</a:t>
-            </a:r>
-            <a:endParaRPr lang="en-US" sz="1350" dirty="0"/>
-          </a:p>
-        </p:txBody>
-      </p:sp>
-      <p:sp>
-        <p:nvSpPr>
-          <p:cNvPr id="12" name="Shape 10"/>
-          <p:cNvSpPr/>
-          <p:nvPr/>
-        </p:nvSpPr>
-        <p:spPr>
-          <a:xfrm>
-            <a:off x="566928" y="3493008"/>
-            <a:ext cx="11057839" cy="841248"/>
-          </a:xfrm>
-          <a:prstGeom prst="roundRect">
-            <a:avLst>
-              <a:gd name="adj" fmla="val 7609"/>
-            </a:avLst>
-          </a:prstGeom>
-          <a:solidFill>
-            <a:srgbClr val="143651"/>
-          </a:solidFill>
-          <a:ln/>
-        </p:spPr>
-      </p:sp>
-      <p:sp>
-        <p:nvSpPr>
-          <p:cNvPr id="13" name="Shape 11"/>
-          <p:cNvSpPr/>
-          <p:nvPr/>
-        </p:nvSpPr>
-        <p:spPr>
-          <a:xfrm>
-            <a:off x="749808" y="3730752"/>
-            <a:ext cx="365760" cy="365760"/>
-          </a:xfrm>
-          <a:prstGeom prst="ellipse">
-            <a:avLst/>
-          </a:prstGeom>
-          <a:solidFill>
-            <a:srgbClr val="6A1B9A"/>
-          </a:solidFill>
-          <a:ln/>
-          <a:effectLst>
-            <a:outerShdw sx="100000" sy="100000" kx="0" ky="0" algn="bl" rotWithShape="0" blurRad="88900" dist="25400" dir="5400000">
-              <a:srgbClr val="22303C">
-                <a:alpha val="12000"/>
-              </a:srgbClr>
-            </a:outerShdw>
-          </a:effectLst>
-        </p:spPr>
-      </p:sp>
-      <p:sp>
-        <p:nvSpPr>
-          <p:cNvPr id="14" name="Text 12"/>
-          <p:cNvSpPr/>
-          <p:nvPr/>
-        </p:nvSpPr>
-        <p:spPr>
-          <a:xfrm>
-            <a:off x="749808" y="3730752"/>
-            <a:ext cx="365760" cy="365760"/>
-          </a:xfrm>
-          <a:prstGeom prst="rect">
-            <a:avLst/>
-          </a:prstGeom>
-          <a:noFill/>
-          <a:ln/>
-        </p:spPr>
-        <p:txBody>
-          <a:bodyPr wrap="square" lIns="0" tIns="0" rIns="0" bIns="0" rtlCol="0" anchor="ctr"/>
-          <a:lstStyle/>
-          <a:p>
-            <a:pPr algn="ctr" indent="0" marL="0">
-              <a:buNone/>
-            </a:pPr>
-            <a:r>
-              <a:rPr lang="en-US" sz="1500" b="1" dirty="0">
-                <a:solidFill>
-                  <a:srgbClr val="FFFFFF"/>
-                </a:solidFill>
-                <a:latin typeface="Calibri" pitchFamily="34" charset="0"/>
-                <a:ea typeface="Calibri" pitchFamily="34" charset="-122"/>
-                <a:cs typeface="Calibri" pitchFamily="34" charset="-120"/>
-              </a:rPr>
-              <a:t>3</a:t>
-            </a:r>
-            <a:endParaRPr lang="en-US" sz="1500" dirty="0"/>
-          </a:p>
-        </p:txBody>
-      </p:sp>
-      <p:sp>
-        <p:nvSpPr>
-          <p:cNvPr id="15" name="Text 13"/>
-          <p:cNvSpPr/>
-          <p:nvPr/>
-        </p:nvSpPr>
-        <p:spPr>
-          <a:xfrm>
-            <a:off x="1280160" y="3493008"/>
-            <a:ext cx="10143439" cy="841248"/>
-          </a:xfrm>
-          <a:prstGeom prst="rect">
-            <a:avLst/>
-          </a:prstGeom>
-          <a:noFill/>
-          <a:ln/>
-        </p:spPr>
-        <p:txBody>
-          <a:bodyPr wrap="square" lIns="0" tIns="0" rIns="0" bIns="0" rtlCol="0" anchor="ctr"/>
-          <a:lstStyle/>
-          <a:p>
-            <a:pPr algn="l" indent="0" marL="0">
-              <a:buNone/>
-            </a:pPr>
-            <a:r>
-              <a:rPr lang="en-US" sz="1350" dirty="0">
-                <a:solidFill>
-                  <a:srgbClr val="E7EEF4"/>
-                </a:solidFill>
-                <a:latin typeface="Calibri" pitchFamily="34" charset="0"/>
-                <a:ea typeface="Calibri" pitchFamily="34" charset="-122"/>
-                <a:cs typeface="Calibri" pitchFamily="34" charset="-120"/>
-              </a:rPr>
-              <a:t>c-ANCA/PR3 → GPA; p-ANCA/MPO → microscopic polyangiitis / EGPA.</a:t>
-            </a:r>
-            <a:endParaRPr lang="en-US" sz="1350" dirty="0"/>
-          </a:p>
-        </p:txBody>
-      </p:sp>
-      <p:sp>
-        <p:nvSpPr>
-          <p:cNvPr id="16" name="Shape 14"/>
-          <p:cNvSpPr/>
-          <p:nvPr/>
-        </p:nvSpPr>
-        <p:spPr>
-          <a:xfrm>
-            <a:off x="566928" y="4480560"/>
-            <a:ext cx="11057839" cy="841248"/>
-          </a:xfrm>
-          <a:prstGeom prst="roundRect">
-            <a:avLst>
-              <a:gd name="adj" fmla="val 7609"/>
-            </a:avLst>
-          </a:prstGeom>
-          <a:solidFill>
-            <a:srgbClr val="143651"/>
-          </a:solidFill>
-          <a:ln/>
-        </p:spPr>
-      </p:sp>
-      <p:sp>
-        <p:nvSpPr>
-          <p:cNvPr id="17" name="Shape 15"/>
-          <p:cNvSpPr/>
-          <p:nvPr/>
-        </p:nvSpPr>
-        <p:spPr>
-          <a:xfrm>
-            <a:off x="749808" y="4718304"/>
-            <a:ext cx="365760" cy="365760"/>
-          </a:xfrm>
-          <a:prstGeom prst="ellipse">
-            <a:avLst/>
-          </a:prstGeom>
-          <a:solidFill>
-            <a:srgbClr val="6A1B9A"/>
-          </a:solidFill>
-          <a:ln/>
-          <a:effectLst>
-            <a:outerShdw sx="100000" sy="100000" kx="0" ky="0" algn="bl" rotWithShape="0" blurRad="88900" dist="25400" dir="5400000">
-              <a:srgbClr val="22303C">
-                <a:alpha val="12000"/>
-              </a:srgbClr>
-            </a:outerShdw>
-          </a:effectLst>
-        </p:spPr>
-      </p:sp>
-      <p:sp>
-        <p:nvSpPr>
-          <p:cNvPr id="18" name="Text 16"/>
-          <p:cNvSpPr/>
-          <p:nvPr/>
-        </p:nvSpPr>
-        <p:spPr>
-          <a:xfrm>
-            <a:off x="749808" y="4718304"/>
-            <a:ext cx="365760" cy="365760"/>
-          </a:xfrm>
-          <a:prstGeom prst="rect">
-            <a:avLst/>
-          </a:prstGeom>
-          <a:noFill/>
-          <a:ln/>
-        </p:spPr>
-        <p:txBody>
-          <a:bodyPr wrap="square" lIns="0" tIns="0" rIns="0" bIns="0" rtlCol="0" anchor="ctr"/>
-          <a:lstStyle/>
-          <a:p>
-            <a:pPr algn="ctr" indent="0" marL="0">
-              <a:buNone/>
-            </a:pPr>
-            <a:r>
-              <a:rPr lang="en-US" sz="1500" b="1" dirty="0">
-                <a:solidFill>
-                  <a:srgbClr val="FFFFFF"/>
-                </a:solidFill>
-                <a:latin typeface="Calibri" pitchFamily="34" charset="0"/>
-                <a:ea typeface="Calibri" pitchFamily="34" charset="-122"/>
-                <a:cs typeface="Calibri" pitchFamily="34" charset="-120"/>
-              </a:rPr>
-              <a:t>4</a:t>
-            </a:r>
-            <a:endParaRPr lang="en-US" sz="1500" dirty="0"/>
-          </a:p>
-        </p:txBody>
-      </p:sp>
-      <p:sp>
-        <p:nvSpPr>
-          <p:cNvPr id="19" name="Text 17"/>
-          <p:cNvSpPr/>
-          <p:nvPr/>
-        </p:nvSpPr>
-        <p:spPr>
-          <a:xfrm>
-            <a:off x="1280160" y="4480560"/>
-            <a:ext cx="10143439" cy="841248"/>
-          </a:xfrm>
-          <a:prstGeom prst="rect">
-            <a:avLst/>
-          </a:prstGeom>
-          <a:noFill/>
-          <a:ln/>
-        </p:spPr>
-        <p:txBody>
-          <a:bodyPr wrap="square" lIns="0" tIns="0" rIns="0" bIns="0" rtlCol="0" anchor="ctr"/>
-          <a:lstStyle/>
-          <a:p>
-            <a:pPr algn="l" indent="0" marL="0">
-              <a:buNone/>
-            </a:pPr>
-            <a:r>
-              <a:rPr lang="en-US" sz="1350" dirty="0">
-                <a:solidFill>
-                  <a:srgbClr val="E7EEF4"/>
-                </a:solidFill>
-                <a:latin typeface="Calibri" pitchFamily="34" charset="0"/>
-                <a:ea typeface="Calibri" pitchFamily="34" charset="-122"/>
-                <a:cs typeface="Calibri" pitchFamily="34" charset="-120"/>
-              </a:rPr>
-              <a:t>Antiphospholipid criteria require persistent lupus anticoagulant, anticardiolipin, or anti-β₂-GPI.</a:t>
-            </a:r>
-            <a:endParaRPr lang="en-US" sz="1350" dirty="0"/>
-          </a:p>
-        </p:txBody>
-      </p:sp>
-      <p:sp>
-        <p:nvSpPr>
-          <p:cNvPr id="20" name="Shape 18"/>
-          <p:cNvSpPr/>
-          <p:nvPr/>
-        </p:nvSpPr>
-        <p:spPr>
-          <a:xfrm>
-            <a:off x="566928" y="5468112"/>
-            <a:ext cx="11057839" cy="841248"/>
-          </a:xfrm>
-          <a:prstGeom prst="roundRect">
-            <a:avLst>
-              <a:gd name="adj" fmla="val 7609"/>
-            </a:avLst>
-          </a:prstGeom>
-          <a:solidFill>
-            <a:srgbClr val="143651"/>
-          </a:solidFill>
-          <a:ln/>
-        </p:spPr>
-      </p:sp>
-      <p:sp>
-        <p:nvSpPr>
-          <p:cNvPr id="21" name="Shape 19"/>
-          <p:cNvSpPr/>
-          <p:nvPr/>
-        </p:nvSpPr>
-        <p:spPr>
-          <a:xfrm>
-            <a:off x="749808" y="5705856"/>
-            <a:ext cx="365760" cy="365760"/>
-          </a:xfrm>
-          <a:prstGeom prst="ellipse">
-            <a:avLst/>
-          </a:prstGeom>
-          <a:solidFill>
-            <a:srgbClr val="6A1B9A"/>
-          </a:solidFill>
-          <a:ln/>
-          <a:effectLst>
-            <a:outerShdw sx="100000" sy="100000" kx="0" ky="0" algn="bl" rotWithShape="0" blurRad="88900" dist="25400" dir="5400000">
-              <a:srgbClr val="22303C">
-                <a:alpha val="12000"/>
-              </a:srgbClr>
-            </a:outerShdw>
-          </a:effectLst>
-        </p:spPr>
-      </p:sp>
-      <p:sp>
-        <p:nvSpPr>
-          <p:cNvPr id="22" name="Text 20"/>
-          <p:cNvSpPr/>
-          <p:nvPr/>
-        </p:nvSpPr>
-        <p:spPr>
-          <a:xfrm>
-            <a:off x="749808" y="5705856"/>
-            <a:ext cx="365760" cy="365760"/>
-          </a:xfrm>
-          <a:prstGeom prst="rect">
-            <a:avLst/>
-          </a:prstGeom>
-          <a:noFill/>
-          <a:ln/>
-        </p:spPr>
-        <p:txBody>
-          <a:bodyPr wrap="square" lIns="0" tIns="0" rIns="0" bIns="0" rtlCol="0" anchor="ctr"/>
-          <a:lstStyle/>
-          <a:p>
-            <a:pPr algn="ctr" indent="0" marL="0">
-              <a:buNone/>
-            </a:pPr>
-            <a:r>
-              <a:rPr lang="en-US" sz="1500" b="1" dirty="0">
-                <a:solidFill>
-                  <a:srgbClr val="FFFFFF"/>
-                </a:solidFill>
-                <a:latin typeface="Calibri" pitchFamily="34" charset="0"/>
-                <a:ea typeface="Calibri" pitchFamily="34" charset="-122"/>
-                <a:cs typeface="Calibri" pitchFamily="34" charset="-120"/>
-              </a:rPr>
-              <a:t>5</a:t>
-            </a:r>
-            <a:endParaRPr lang="en-US" sz="1500" dirty="0"/>
-          </a:p>
-        </p:txBody>
-      </p:sp>
-      <p:sp>
-        <p:nvSpPr>
-          <p:cNvPr id="23" name="Text 21"/>
-          <p:cNvSpPr/>
-          <p:nvPr/>
-        </p:nvSpPr>
-        <p:spPr>
-          <a:xfrm>
-            <a:off x="1280160" y="5468112"/>
-            <a:ext cx="10143439" cy="841248"/>
-          </a:xfrm>
-          <a:prstGeom prst="rect">
-            <a:avLst/>
-          </a:prstGeom>
-          <a:noFill/>
-          <a:ln/>
-        </p:spPr>
-        <p:txBody>
-          <a:bodyPr wrap="square" lIns="0" tIns="0" rIns="0" bIns="0" rtlCol="0" anchor="ctr"/>
-          <a:lstStyle/>
-          <a:p>
-            <a:pPr algn="l" indent="0" marL="0">
-              <a:buNone/>
-            </a:pPr>
-            <a:r>
-              <a:rPr lang="en-US" sz="1350" dirty="0">
-                <a:solidFill>
-                  <a:srgbClr val="E7EEF4"/>
-                </a:solidFill>
-                <a:latin typeface="Calibri" pitchFamily="34" charset="0"/>
-                <a:ea typeface="Calibri" pitchFamily="34" charset="-122"/>
-                <a:cs typeface="Calibri" pitchFamily="34" charset="-120"/>
-              </a:rPr>
-              <a:t>Order autoantibodies for a clinical reason; don’t repeat known-positive ANA to follow disease.</a:t>
-            </a:r>
-            <a:endParaRPr lang="en-US" sz="1350" dirty="0"/>
-          </a:p>
-        </p:txBody>
-      </p:sp>
-      <p:sp>
-        <p:nvSpPr>
-          <p:cNvPr id="24" name="Text 22"/>
-          <p:cNvSpPr/>
-          <p:nvPr/>
-        </p:nvSpPr>
-        <p:spPr>
-          <a:xfrm>
-            <a:off x="566928" y="6473952"/>
-            <a:ext cx="8229600" cy="274320"/>
-          </a:xfrm>
-          <a:prstGeom prst="rect">
-            <a:avLst/>
-          </a:prstGeom>
-          <a:noFill/>
-          <a:ln/>
-        </p:spPr>
-        <p:txBody>
-          <a:bodyPr wrap="square" lIns="0" tIns="0" rIns="0" bIns="0" rtlCol="0" anchor="ctr"/>
-          <a:lstStyle/>
-          <a:p>
-            <a:pPr indent="0" marL="0">
+            <a:pPr algn="r" indent="0" marL="0">
               <a:buNone/>
             </a:pPr>
             <a:r>
               <a:rPr lang="en-US" sz="850" dirty="0">
                 <a:solidFill>
-                  <a:srgbClr val="5E7488"/>
-                </a:solidFill>
-                <a:latin typeface="Calibri" pitchFamily="34" charset="0"/>
-                <a:ea typeface="Calibri" pitchFamily="34" charset="-122"/>
-                <a:cs typeface="Calibri" pitchFamily="34" charset="-120"/>
-              </a:rPr>
-              <a:t>Makassed General Hospital  ·  Department of Laboratory Medicine</a:t>
-            </a:r>
-            <a:endParaRPr lang="en-US" sz="850" dirty="0"/>
-          </a:p>
-        </p:txBody>
-      </p:sp>
-      <p:sp>
-        <p:nvSpPr>
-          <p:cNvPr id="25" name="Text 23"/>
-          <p:cNvSpPr/>
-          <p:nvPr/>
-        </p:nvSpPr>
-        <p:spPr>
-          <a:xfrm>
-            <a:off x="11002975" y="6473952"/>
-            <a:ext cx="640080" cy="274320"/>
-          </a:xfrm>
-          <a:prstGeom prst="rect">
-            <a:avLst/>
-          </a:prstGeom>
-          <a:noFill/>
-          <a:ln/>
-        </p:spPr>
-        <p:txBody>
-          <a:bodyPr wrap="square" lIns="0" tIns="0" rIns="0" bIns="0" rtlCol="0" anchor="ctr"/>
-          <a:lstStyle/>
-          <a:p>
+                  <a:srgbClr val="9AA8B4"/>
+                </a:solidFill>
+                <a:latin typeface="Calibri" pitchFamily="34" charset="0"/>
+                <a:ea typeface="Calibri" pitchFamily="34" charset="-122"/>
+                <a:cs typeface="Calibri" pitchFamily="34" charset="-120"/>
+              </a:rPr>
+              <a:t>CP Lecture Series</a:t>
+            </a:r>
+            <a:pPr algn="r" indent="0" marL="0">
+              <a:buNone/>
+            </a:pPr>
+            <a:r>
+              <a:rPr lang="en-US" sz="850" dirty="0">
+                <a:solidFill>
+                  <a:srgbClr val="DCE4EC"/>
+                </a:solidFill>
+                <a:latin typeface="Calibri" pitchFamily="34" charset="0"/>
+                <a:ea typeface="Calibri" pitchFamily="34" charset="-122"/>
+                <a:cs typeface="Calibri" pitchFamily="34" charset="-120"/>
+              </a:rPr>
+              <a:t>   ·   </a:t>
+            </a:r>
             <a:pPr algn="r" indent="0" marL="0">
               <a:buNone/>
             </a:pPr>
@@ -9122,6 +8825,2341 @@
                 <a:ea typeface="Calibri" pitchFamily="34" charset="-122"/>
                 <a:cs typeface="Calibri" pitchFamily="34" charset="-120"/>
               </a:rPr>
+              <a:t>IMMUNOLOGY &amp; SEROLOGY   ·   BOARD REVIEW  ·  Q2</a:t>
+            </a:r>
+            <a:endParaRPr lang="en-US" sz="1100" dirty="0"/>
+          </a:p>
+        </p:txBody>
+      </p:sp>
+      <p:sp>
+        <p:nvSpPr>
+          <p:cNvPr id="3" name="Text 1"/>
+          <p:cNvSpPr/>
+          <p:nvPr/>
+        </p:nvSpPr>
+        <p:spPr>
+          <a:xfrm>
+            <a:off x="566928" y="713232"/>
+            <a:ext cx="11064240" cy="749808"/>
+          </a:xfrm>
+          <a:prstGeom prst="rect">
+            <a:avLst/>
+          </a:prstGeom>
+          <a:noFill/>
+          <a:ln/>
+        </p:spPr>
+        <p:txBody>
+          <a:bodyPr wrap="square" lIns="0" tIns="0" rIns="0" bIns="0" rtlCol="0" anchor="ctr"/>
+          <a:lstStyle/>
+          <a:p>
+            <a:pPr algn="l" indent="0" marL="0">
+              <a:buNone/>
+            </a:pPr>
+            <a:r>
+              <a:rPr lang="en-US" sz="2600" b="1" dirty="0">
+                <a:solidFill>
+                  <a:srgbClr val="0E3A5F"/>
+                </a:solidFill>
+                <a:latin typeface="Calibri" pitchFamily="34" charset="0"/>
+                <a:ea typeface="Calibri" pitchFamily="34" charset="-122"/>
+                <a:cs typeface="Calibri" pitchFamily="34" charset="-120"/>
+              </a:rPr>
+              <a:t>Board-Style Review</a:t>
+            </a:r>
+            <a:endParaRPr lang="en-US" sz="2600" dirty="0"/>
+          </a:p>
+        </p:txBody>
+      </p:sp>
+      <p:sp>
+        <p:nvSpPr>
+          <p:cNvPr id="4" name="Text 2"/>
+          <p:cNvSpPr/>
+          <p:nvPr/>
+        </p:nvSpPr>
+        <p:spPr>
+          <a:xfrm>
+            <a:off x="566928" y="1417320"/>
+            <a:ext cx="11057839" cy="914400"/>
+          </a:xfrm>
+          <a:prstGeom prst="rect">
+            <a:avLst/>
+          </a:prstGeom>
+          <a:noFill/>
+          <a:ln/>
+        </p:spPr>
+        <p:txBody>
+          <a:bodyPr wrap="square" lIns="0" tIns="0" rIns="0" bIns="0" rtlCol="0" anchor="t"/>
+          <a:lstStyle/>
+          <a:p>
+            <a:pPr algn="l" indent="0" marL="0">
+              <a:lnSpc>
+                <a:spcPct val="105000"/>
+              </a:lnSpc>
+              <a:buNone/>
+            </a:pPr>
+            <a:r>
+              <a:rPr lang="en-US" sz="1450" b="1" dirty="0">
+                <a:solidFill>
+                  <a:srgbClr val="1B2A38"/>
+                </a:solidFill>
+                <a:latin typeface="Calibri" pitchFamily="34" charset="0"/>
+                <a:ea typeface="Calibri" pitchFamily="34" charset="-122"/>
+                <a:cs typeface="Calibri" pitchFamily="34" charset="-120"/>
+              </a:rPr>
+              <a:t>Low C3 and C4 in an autoimmune flare indicate:</a:t>
+            </a:r>
+            <a:endParaRPr lang="en-US" sz="1450" dirty="0"/>
+          </a:p>
+        </p:txBody>
+      </p:sp>
+      <p:sp>
+        <p:nvSpPr>
+          <p:cNvPr id="5" name="Text 3"/>
+          <p:cNvSpPr/>
+          <p:nvPr/>
+        </p:nvSpPr>
+        <p:spPr>
+          <a:xfrm>
+            <a:off x="658368" y="2395728"/>
+            <a:ext cx="6192390" cy="3017520"/>
+          </a:xfrm>
+          <a:prstGeom prst="rect">
+            <a:avLst/>
+          </a:prstGeom>
+          <a:noFill/>
+          <a:ln/>
+        </p:spPr>
+        <p:txBody>
+          <a:bodyPr wrap="square" lIns="0" tIns="0" rIns="0" bIns="0" rtlCol="0" anchor="t"/>
+          <a:lstStyle/>
+          <a:p>
+            <a:pPr algn="l" indent="0" marL="0">
+              <a:spcAft>
+                <a:spcPts val="600"/>
+              </a:spcAft>
+              <a:buNone/>
+            </a:pPr>
+            <a:r>
+              <a:rPr lang="en-US" sz="1350" dirty="0">
+                <a:solidFill>
+                  <a:srgbClr val="33444F"/>
+                </a:solidFill>
+                <a:latin typeface="Calibri" pitchFamily="34" charset="0"/>
+                <a:ea typeface="Calibri" pitchFamily="34" charset="-122"/>
+                <a:cs typeface="Calibri" pitchFamily="34" charset="-120"/>
+              </a:rPr>
+              <a:t>A. Complement deficiency only</a:t>
+            </a:r>
+            <a:endParaRPr lang="en-US" sz="1350" dirty="0"/>
+          </a:p>
+          <a:p>
+            <a:pPr algn="l" indent="0" marL="0">
+              <a:spcAft>
+                <a:spcPts val="600"/>
+              </a:spcAft>
+              <a:buNone/>
+            </a:pPr>
+            <a:r>
+              <a:rPr lang="en-US" sz="1350" b="1" dirty="0">
+                <a:solidFill>
+                  <a:srgbClr val="4A1269"/>
+                </a:solidFill>
+                <a:latin typeface="Calibri" pitchFamily="34" charset="0"/>
+                <a:ea typeface="Calibri" pitchFamily="34" charset="-122"/>
+                <a:cs typeface="Calibri" pitchFamily="34" charset="-120"/>
+              </a:rPr>
+              <a:t>B. Complement consumption in active immune-complex disease</a:t>
+            </a:r>
+            <a:endParaRPr lang="en-US" sz="1350" dirty="0"/>
+          </a:p>
+          <a:p>
+            <a:pPr algn="l" indent="0" marL="0">
+              <a:spcAft>
+                <a:spcPts val="600"/>
+              </a:spcAft>
+              <a:buNone/>
+            </a:pPr>
+            <a:r>
+              <a:rPr lang="en-US" sz="1350" dirty="0">
+                <a:solidFill>
+                  <a:srgbClr val="33444F"/>
+                </a:solidFill>
+                <a:latin typeface="Calibri" pitchFamily="34" charset="0"/>
+                <a:ea typeface="Calibri" pitchFamily="34" charset="-122"/>
+                <a:cs typeface="Calibri" pitchFamily="34" charset="-120"/>
+              </a:rPr>
+              <a:t>C. Laboratory error</a:t>
+            </a:r>
+            <a:endParaRPr lang="en-US" sz="1350" dirty="0"/>
+          </a:p>
+          <a:p>
+            <a:pPr algn="l" indent="0" marL="0">
+              <a:spcAft>
+                <a:spcPts val="600"/>
+              </a:spcAft>
+              <a:buNone/>
+            </a:pPr>
+            <a:r>
+              <a:rPr lang="en-US" sz="1350" dirty="0">
+                <a:solidFill>
+                  <a:srgbClr val="33444F"/>
+                </a:solidFill>
+                <a:latin typeface="Calibri" pitchFamily="34" charset="0"/>
+                <a:ea typeface="Calibri" pitchFamily="34" charset="-122"/>
+                <a:cs typeface="Calibri" pitchFamily="34" charset="-120"/>
+              </a:rPr>
+              <a:t>D. Hypergammaglobulinemia</a:t>
+            </a:r>
+            <a:endParaRPr lang="en-US" sz="1350" dirty="0"/>
+          </a:p>
+          <a:p>
+            <a:pPr algn="l" indent="0" marL="0">
+              <a:spcAft>
+                <a:spcPts val="600"/>
+              </a:spcAft>
+              <a:buNone/>
+            </a:pPr>
+            <a:r>
+              <a:rPr lang="en-US" sz="1350" dirty="0">
+                <a:solidFill>
+                  <a:srgbClr val="33444F"/>
+                </a:solidFill>
+                <a:latin typeface="Calibri" pitchFamily="34" charset="0"/>
+                <a:ea typeface="Calibri" pitchFamily="34" charset="-122"/>
+                <a:cs typeface="Calibri" pitchFamily="34" charset="-120"/>
+              </a:rPr>
+              <a:t>E. Liver synthetic failure exclusively</a:t>
+            </a:r>
+            <a:endParaRPr lang="en-US" sz="1350" dirty="0"/>
+          </a:p>
+        </p:txBody>
+      </p:sp>
+      <p:sp>
+        <p:nvSpPr>
+          <p:cNvPr id="6" name="Shape 4"/>
+          <p:cNvSpPr/>
+          <p:nvPr/>
+        </p:nvSpPr>
+        <p:spPr>
+          <a:xfrm>
+            <a:off x="7201632" y="2395728"/>
+            <a:ext cx="4423136" cy="3246120"/>
+          </a:xfrm>
+          <a:prstGeom prst="roundRect">
+            <a:avLst>
+              <a:gd name="adj" fmla="val 2535"/>
+            </a:avLst>
+          </a:prstGeom>
+          <a:solidFill>
+            <a:srgbClr val="F1E8F7"/>
+          </a:solidFill>
+          <a:ln/>
+          <a:effectLst>
+            <a:outerShdw sx="100000" sy="100000" kx="0" ky="0" algn="bl" rotWithShape="0" blurRad="88900" dist="25400" dir="5400000">
+              <a:srgbClr val="22303C">
+                <a:alpha val="12000"/>
+              </a:srgbClr>
+            </a:outerShdw>
+          </a:effectLst>
+        </p:spPr>
+      </p:sp>
+      <p:sp>
+        <p:nvSpPr>
+          <p:cNvPr id="7" name="Text 5"/>
+          <p:cNvSpPr/>
+          <p:nvPr/>
+        </p:nvSpPr>
+        <p:spPr>
+          <a:xfrm>
+            <a:off x="7439376" y="2578608"/>
+            <a:ext cx="3965936" cy="457200"/>
+          </a:xfrm>
+          <a:prstGeom prst="rect">
+            <a:avLst/>
+          </a:prstGeom>
+          <a:noFill/>
+          <a:ln/>
+        </p:spPr>
+        <p:txBody>
+          <a:bodyPr wrap="square" lIns="0" tIns="0" rIns="0" bIns="0" rtlCol="0" anchor="ctr"/>
+          <a:lstStyle/>
+          <a:p>
+            <a:pPr indent="0" marL="0">
+              <a:buNone/>
+            </a:pPr>
+            <a:r>
+              <a:rPr lang="en-US" sz="1500" b="1" dirty="0">
+                <a:solidFill>
+                  <a:srgbClr val="6A1B9A"/>
+                </a:solidFill>
+                <a:latin typeface="Calibri" pitchFamily="34" charset="0"/>
+                <a:ea typeface="Calibri" pitchFamily="34" charset="-122"/>
+                <a:cs typeface="Calibri" pitchFamily="34" charset="-120"/>
+              </a:rPr>
+              <a:t>ANSWER  </a:t>
+            </a:r>
+            <a:pPr indent="0" marL="0">
+              <a:buNone/>
+            </a:pPr>
+            <a:r>
+              <a:rPr lang="en-US" sz="1500" b="1" dirty="0">
+                <a:solidFill>
+                  <a:srgbClr val="1B2A38"/>
+                </a:solidFill>
+                <a:latin typeface="Calibri" pitchFamily="34" charset="0"/>
+                <a:ea typeface="Calibri" pitchFamily="34" charset="-122"/>
+                <a:cs typeface="Calibri" pitchFamily="34" charset="-120"/>
+              </a:rPr>
+              <a:t>B — Consumption in active disease</a:t>
+            </a:r>
+            <a:endParaRPr lang="en-US" sz="1500" dirty="0"/>
+          </a:p>
+        </p:txBody>
+      </p:sp>
+      <p:sp>
+        <p:nvSpPr>
+          <p:cNvPr id="8" name="Text 6"/>
+          <p:cNvSpPr/>
+          <p:nvPr/>
+        </p:nvSpPr>
+        <p:spPr>
+          <a:xfrm>
+            <a:off x="7439376" y="3127248"/>
+            <a:ext cx="3947648" cy="2377440"/>
+          </a:xfrm>
+          <a:prstGeom prst="rect">
+            <a:avLst/>
+          </a:prstGeom>
+          <a:noFill/>
+          <a:ln/>
+        </p:spPr>
+        <p:txBody>
+          <a:bodyPr wrap="square" lIns="0" tIns="0" rIns="0" bIns="0" rtlCol="0" anchor="t"/>
+          <a:lstStyle/>
+          <a:p>
+            <a:pPr algn="l" indent="0" marL="0">
+              <a:lnSpc>
+                <a:spcPct val="108000"/>
+              </a:lnSpc>
+              <a:buNone/>
+            </a:pPr>
+            <a:r>
+              <a:rPr lang="en-US" sz="1250" dirty="0">
+                <a:solidFill>
+                  <a:srgbClr val="33444F"/>
+                </a:solidFill>
+                <a:latin typeface="Calibri" pitchFamily="34" charset="0"/>
+                <a:ea typeface="Calibri" pitchFamily="34" charset="-122"/>
+                <a:cs typeface="Calibri" pitchFamily="34" charset="-120"/>
+              </a:rPr>
+              <a:t>Immune-complex disease (e.g., lupus nephritis) consumes complement, lowering C3/C4; trending them monitors activity.</a:t>
+            </a:r>
+            <a:endParaRPr lang="en-US" sz="1250" dirty="0"/>
+          </a:p>
+        </p:txBody>
+      </p:sp>
+      <p:sp>
+        <p:nvSpPr>
+          <p:cNvPr id="9" name="Text 7"/>
+          <p:cNvSpPr/>
+          <p:nvPr/>
+        </p:nvSpPr>
+        <p:spPr>
+          <a:xfrm>
+            <a:off x="566928" y="6473952"/>
+            <a:ext cx="7772400" cy="274320"/>
+          </a:xfrm>
+          <a:prstGeom prst="rect">
+            <a:avLst/>
+          </a:prstGeom>
+          <a:noFill/>
+          <a:ln/>
+        </p:spPr>
+        <p:txBody>
+          <a:bodyPr wrap="square" lIns="0" tIns="0" rIns="0" bIns="0" rtlCol="0" anchor="ctr"/>
+          <a:lstStyle/>
+          <a:p>
+            <a:pPr algn="l" indent="0" marL="0">
+              <a:buNone/>
+            </a:pPr>
+            <a:r>
+              <a:rPr lang="en-US" sz="850" dirty="0">
+                <a:solidFill>
+                  <a:srgbClr val="9AA8B4"/>
+                </a:solidFill>
+                <a:latin typeface="Calibri" pitchFamily="34" charset="0"/>
+                <a:ea typeface="Calibri" pitchFamily="34" charset="-122"/>
+                <a:cs typeface="Calibri" pitchFamily="34" charset="-120"/>
+              </a:rPr>
+              <a:t>Makassed General Hospital  ·  Department of Laboratory Medicine</a:t>
+            </a:r>
+            <a:endParaRPr lang="en-US" sz="850" dirty="0"/>
+          </a:p>
+        </p:txBody>
+      </p:sp>
+      <p:sp>
+        <p:nvSpPr>
+          <p:cNvPr id="10" name="Text 8"/>
+          <p:cNvSpPr/>
+          <p:nvPr/>
+        </p:nvSpPr>
+        <p:spPr>
+          <a:xfrm>
+            <a:off x="9814255" y="6473952"/>
+            <a:ext cx="1828800" cy="274320"/>
+          </a:xfrm>
+          <a:prstGeom prst="rect">
+            <a:avLst/>
+          </a:prstGeom>
+          <a:noFill/>
+          <a:ln/>
+        </p:spPr>
+        <p:txBody>
+          <a:bodyPr wrap="square" lIns="0" tIns="0" rIns="0" bIns="0" rtlCol="0" anchor="ctr"/>
+          <a:lstStyle/>
+          <a:p>
+            <a:pPr algn="r" indent="0" marL="0">
+              <a:buNone/>
+            </a:pPr>
+            <a:r>
+              <a:rPr lang="en-US" sz="850" dirty="0">
+                <a:solidFill>
+                  <a:srgbClr val="9AA8B4"/>
+                </a:solidFill>
+                <a:latin typeface="Calibri" pitchFamily="34" charset="0"/>
+                <a:ea typeface="Calibri" pitchFamily="34" charset="-122"/>
+                <a:cs typeface="Calibri" pitchFamily="34" charset="-120"/>
+              </a:rPr>
+              <a:t>CP Lecture Series</a:t>
+            </a:r>
+            <a:pPr algn="r" indent="0" marL="0">
+              <a:buNone/>
+            </a:pPr>
+            <a:r>
+              <a:rPr lang="en-US" sz="850" dirty="0">
+                <a:solidFill>
+                  <a:srgbClr val="DCE4EC"/>
+                </a:solidFill>
+                <a:latin typeface="Calibri" pitchFamily="34" charset="0"/>
+                <a:ea typeface="Calibri" pitchFamily="34" charset="-122"/>
+                <a:cs typeface="Calibri" pitchFamily="34" charset="-120"/>
+              </a:rPr>
+              <a:t>   ·   </a:t>
+            </a:r>
+            <a:pPr algn="r" indent="0" marL="0">
+              <a:buNone/>
+            </a:pPr>
+            <a:r>
+              <a:rPr lang="en-US" sz="850" b="1" dirty="0">
+                <a:solidFill>
+                  <a:srgbClr val="6A1B9A"/>
+                </a:solidFill>
+                <a:latin typeface="Calibri" pitchFamily="34" charset="0"/>
+                <a:ea typeface="Calibri" pitchFamily="34" charset="-122"/>
+                <a:cs typeface="Calibri" pitchFamily="34" charset="-120"/>
+              </a:rPr>
+              <a:t>18</a:t>
+            </a:r>
+            <a:endParaRPr lang="en-US" sz="850" dirty="0"/>
+          </a:p>
+        </p:txBody>
+      </p:sp>
+    </p:spTree>
+  </p:cSld>
+  <p:clrMapOvr>
+    <a:masterClrMapping/>
+  </p:clrMapOvr>
+</p:sld>
+</file>
+
+<file path=ppt/slides/slide22.xml><?xml version="1.0" encoding="utf-8"?>
+<p:sld xmlns:a="http://schemas.openxmlformats.org/drawingml/2006/main" xmlns:r="http://schemas.openxmlformats.org/officeDocument/2006/relationships" xmlns:p="http://schemas.openxmlformats.org/presentationml/2006/main">
+  <p:cSld name="Slide 22">
+    <p:bg>
+      <p:bgPr>
+        <a:solidFill>
+          <a:srgbClr val="FFFFFF"/>
+        </a:solidFill>
+      </p:bgPr>
+    </p:bg>
+    <p:spTree>
+      <p:nvGrpSpPr>
+        <p:cNvPr id="1" name=""/>
+        <p:cNvGrpSpPr/>
+        <p:nvPr/>
+      </p:nvGrpSpPr>
+      <p:grpSpPr>
+        <a:xfrm>
+          <a:off x="0" y="0"/>
+          <a:ext cx="0" cy="0"/>
+          <a:chOff x="0" y="0"/>
+          <a:chExt cx="0" cy="0"/>
+        </a:xfrm>
+      </p:grpSpPr>
+      <p:sp>
+        <p:nvSpPr>
+          <p:cNvPr id="2" name="Text 0"/>
+          <p:cNvSpPr/>
+          <p:nvPr/>
+        </p:nvSpPr>
+        <p:spPr>
+          <a:xfrm>
+            <a:off x="566928" y="329184"/>
+            <a:ext cx="10515600" cy="310896"/>
+          </a:xfrm>
+          <a:prstGeom prst="rect">
+            <a:avLst/>
+          </a:prstGeom>
+          <a:noFill/>
+          <a:ln/>
+        </p:spPr>
+        <p:txBody>
+          <a:bodyPr wrap="square" lIns="0" tIns="0" rIns="0" bIns="0" rtlCol="0" anchor="ctr"/>
+          <a:lstStyle/>
+          <a:p>
+            <a:pPr algn="l" indent="0" marL="0">
+              <a:buNone/>
+            </a:pPr>
+            <a:r>
+              <a:rPr lang="en-US" sz="1100" b="1" spc="150" kern="0" dirty="0">
+                <a:solidFill>
+                  <a:srgbClr val="6A1B9A"/>
+                </a:solidFill>
+                <a:latin typeface="Calibri" pitchFamily="34" charset="0"/>
+                <a:ea typeface="Calibri" pitchFamily="34" charset="-122"/>
+                <a:cs typeface="Calibri" pitchFamily="34" charset="-120"/>
+              </a:rPr>
+              <a:t>IMMUNOLOGY &amp; SEROLOGY   ·   BOARD REVIEW  ·  Q3</a:t>
+            </a:r>
+            <a:endParaRPr lang="en-US" sz="1100" dirty="0"/>
+          </a:p>
+        </p:txBody>
+      </p:sp>
+      <p:sp>
+        <p:nvSpPr>
+          <p:cNvPr id="3" name="Text 1"/>
+          <p:cNvSpPr/>
+          <p:nvPr/>
+        </p:nvSpPr>
+        <p:spPr>
+          <a:xfrm>
+            <a:off x="566928" y="713232"/>
+            <a:ext cx="11064240" cy="749808"/>
+          </a:xfrm>
+          <a:prstGeom prst="rect">
+            <a:avLst/>
+          </a:prstGeom>
+          <a:noFill/>
+          <a:ln/>
+        </p:spPr>
+        <p:txBody>
+          <a:bodyPr wrap="square" lIns="0" tIns="0" rIns="0" bIns="0" rtlCol="0" anchor="ctr"/>
+          <a:lstStyle/>
+          <a:p>
+            <a:pPr algn="l" indent="0" marL="0">
+              <a:buNone/>
+            </a:pPr>
+            <a:r>
+              <a:rPr lang="en-US" sz="2600" b="1" dirty="0">
+                <a:solidFill>
+                  <a:srgbClr val="0E3A5F"/>
+                </a:solidFill>
+                <a:latin typeface="Calibri" pitchFamily="34" charset="0"/>
+                <a:ea typeface="Calibri" pitchFamily="34" charset="-122"/>
+                <a:cs typeface="Calibri" pitchFamily="34" charset="-120"/>
+              </a:rPr>
+              <a:t>Board-Style Review</a:t>
+            </a:r>
+            <a:endParaRPr lang="en-US" sz="2600" dirty="0"/>
+          </a:p>
+        </p:txBody>
+      </p:sp>
+      <p:sp>
+        <p:nvSpPr>
+          <p:cNvPr id="4" name="Text 2"/>
+          <p:cNvSpPr/>
+          <p:nvPr/>
+        </p:nvSpPr>
+        <p:spPr>
+          <a:xfrm>
+            <a:off x="566928" y="1417320"/>
+            <a:ext cx="11057839" cy="914400"/>
+          </a:xfrm>
+          <a:prstGeom prst="rect">
+            <a:avLst/>
+          </a:prstGeom>
+          <a:noFill/>
+          <a:ln/>
+        </p:spPr>
+        <p:txBody>
+          <a:bodyPr wrap="square" lIns="0" tIns="0" rIns="0" bIns="0" rtlCol="0" anchor="t"/>
+          <a:lstStyle/>
+          <a:p>
+            <a:pPr algn="l" indent="0" marL="0">
+              <a:lnSpc>
+                <a:spcPct val="105000"/>
+              </a:lnSpc>
+              <a:buNone/>
+            </a:pPr>
+            <a:r>
+              <a:rPr lang="en-US" sz="1450" b="1" dirty="0">
+                <a:solidFill>
+                  <a:srgbClr val="1B2A38"/>
+                </a:solidFill>
+                <a:latin typeface="Calibri" pitchFamily="34" charset="0"/>
+                <a:ea typeface="Calibri" pitchFamily="34" charset="-122"/>
+                <a:cs typeface="Calibri" pitchFamily="34" charset="-120"/>
+              </a:rPr>
+              <a:t>A centromere ANA pattern is most associated with:</a:t>
+            </a:r>
+            <a:endParaRPr lang="en-US" sz="1450" dirty="0"/>
+          </a:p>
+        </p:txBody>
+      </p:sp>
+      <p:sp>
+        <p:nvSpPr>
+          <p:cNvPr id="5" name="Text 3"/>
+          <p:cNvSpPr/>
+          <p:nvPr/>
+        </p:nvSpPr>
+        <p:spPr>
+          <a:xfrm>
+            <a:off x="658368" y="2395728"/>
+            <a:ext cx="6192390" cy="3017520"/>
+          </a:xfrm>
+          <a:prstGeom prst="rect">
+            <a:avLst/>
+          </a:prstGeom>
+          <a:noFill/>
+          <a:ln/>
+        </p:spPr>
+        <p:txBody>
+          <a:bodyPr wrap="square" lIns="0" tIns="0" rIns="0" bIns="0" rtlCol="0" anchor="t"/>
+          <a:lstStyle/>
+          <a:p>
+            <a:pPr algn="l" indent="0" marL="0">
+              <a:spcAft>
+                <a:spcPts val="600"/>
+              </a:spcAft>
+              <a:buNone/>
+            </a:pPr>
+            <a:r>
+              <a:rPr lang="en-US" sz="1350" dirty="0">
+                <a:solidFill>
+                  <a:srgbClr val="33444F"/>
+                </a:solidFill>
+                <a:latin typeface="Calibri" pitchFamily="34" charset="0"/>
+                <a:ea typeface="Calibri" pitchFamily="34" charset="-122"/>
+                <a:cs typeface="Calibri" pitchFamily="34" charset="-120"/>
+              </a:rPr>
+              <a:t>A. Diffuse systemic sclerosis</a:t>
+            </a:r>
+            <a:endParaRPr lang="en-US" sz="1350" dirty="0"/>
+          </a:p>
+          <a:p>
+            <a:pPr algn="l" indent="0" marL="0">
+              <a:spcAft>
+                <a:spcPts val="600"/>
+              </a:spcAft>
+              <a:buNone/>
+            </a:pPr>
+            <a:r>
+              <a:rPr lang="en-US" sz="1350" b="1" dirty="0">
+                <a:solidFill>
+                  <a:srgbClr val="4A1269"/>
+                </a:solidFill>
+                <a:latin typeface="Calibri" pitchFamily="34" charset="0"/>
+                <a:ea typeface="Calibri" pitchFamily="34" charset="-122"/>
+                <a:cs typeface="Calibri" pitchFamily="34" charset="-120"/>
+              </a:rPr>
+              <a:t>B. Limited systemic sclerosis (CREST)</a:t>
+            </a:r>
+            <a:endParaRPr lang="en-US" sz="1350" dirty="0"/>
+          </a:p>
+          <a:p>
+            <a:pPr algn="l" indent="0" marL="0">
+              <a:spcAft>
+                <a:spcPts val="600"/>
+              </a:spcAft>
+              <a:buNone/>
+            </a:pPr>
+            <a:r>
+              <a:rPr lang="en-US" sz="1350" dirty="0">
+                <a:solidFill>
+                  <a:srgbClr val="33444F"/>
+                </a:solidFill>
+                <a:latin typeface="Calibri" pitchFamily="34" charset="0"/>
+                <a:ea typeface="Calibri" pitchFamily="34" charset="-122"/>
+                <a:cs typeface="Calibri" pitchFamily="34" charset="-120"/>
+              </a:rPr>
+              <a:t>C. Polymyositis</a:t>
+            </a:r>
+            <a:endParaRPr lang="en-US" sz="1350" dirty="0"/>
+          </a:p>
+          <a:p>
+            <a:pPr algn="l" indent="0" marL="0">
+              <a:spcAft>
+                <a:spcPts val="600"/>
+              </a:spcAft>
+              <a:buNone/>
+            </a:pPr>
+            <a:r>
+              <a:rPr lang="en-US" sz="1350" dirty="0">
+                <a:solidFill>
+                  <a:srgbClr val="33444F"/>
+                </a:solidFill>
+                <a:latin typeface="Calibri" pitchFamily="34" charset="0"/>
+                <a:ea typeface="Calibri" pitchFamily="34" charset="-122"/>
+                <a:cs typeface="Calibri" pitchFamily="34" charset="-120"/>
+              </a:rPr>
+              <a:t>D. Rheumatoid arthritis</a:t>
+            </a:r>
+            <a:endParaRPr lang="en-US" sz="1350" dirty="0"/>
+          </a:p>
+          <a:p>
+            <a:pPr algn="l" indent="0" marL="0">
+              <a:spcAft>
+                <a:spcPts val="600"/>
+              </a:spcAft>
+              <a:buNone/>
+            </a:pPr>
+            <a:r>
+              <a:rPr lang="en-US" sz="1350" dirty="0">
+                <a:solidFill>
+                  <a:srgbClr val="33444F"/>
+                </a:solidFill>
+                <a:latin typeface="Calibri" pitchFamily="34" charset="0"/>
+                <a:ea typeface="Calibri" pitchFamily="34" charset="-122"/>
+                <a:cs typeface="Calibri" pitchFamily="34" charset="-120"/>
+              </a:rPr>
+              <a:t>E. Mixed connective tissue disease</a:t>
+            </a:r>
+            <a:endParaRPr lang="en-US" sz="1350" dirty="0"/>
+          </a:p>
+        </p:txBody>
+      </p:sp>
+      <p:sp>
+        <p:nvSpPr>
+          <p:cNvPr id="6" name="Shape 4"/>
+          <p:cNvSpPr/>
+          <p:nvPr/>
+        </p:nvSpPr>
+        <p:spPr>
+          <a:xfrm>
+            <a:off x="7201632" y="2395728"/>
+            <a:ext cx="4423136" cy="3246120"/>
+          </a:xfrm>
+          <a:prstGeom prst="roundRect">
+            <a:avLst>
+              <a:gd name="adj" fmla="val 2535"/>
+            </a:avLst>
+          </a:prstGeom>
+          <a:solidFill>
+            <a:srgbClr val="F1E8F7"/>
+          </a:solidFill>
+          <a:ln/>
+          <a:effectLst>
+            <a:outerShdw sx="100000" sy="100000" kx="0" ky="0" algn="bl" rotWithShape="0" blurRad="88900" dist="25400" dir="5400000">
+              <a:srgbClr val="22303C">
+                <a:alpha val="12000"/>
+              </a:srgbClr>
+            </a:outerShdw>
+          </a:effectLst>
+        </p:spPr>
+      </p:sp>
+      <p:sp>
+        <p:nvSpPr>
+          <p:cNvPr id="7" name="Text 5"/>
+          <p:cNvSpPr/>
+          <p:nvPr/>
+        </p:nvSpPr>
+        <p:spPr>
+          <a:xfrm>
+            <a:off x="7439376" y="2578608"/>
+            <a:ext cx="3965936" cy="457200"/>
+          </a:xfrm>
+          <a:prstGeom prst="rect">
+            <a:avLst/>
+          </a:prstGeom>
+          <a:noFill/>
+          <a:ln/>
+        </p:spPr>
+        <p:txBody>
+          <a:bodyPr wrap="square" lIns="0" tIns="0" rIns="0" bIns="0" rtlCol="0" anchor="ctr"/>
+          <a:lstStyle/>
+          <a:p>
+            <a:pPr indent="0" marL="0">
+              <a:buNone/>
+            </a:pPr>
+            <a:r>
+              <a:rPr lang="en-US" sz="1500" b="1" dirty="0">
+                <a:solidFill>
+                  <a:srgbClr val="6A1B9A"/>
+                </a:solidFill>
+                <a:latin typeface="Calibri" pitchFamily="34" charset="0"/>
+                <a:ea typeface="Calibri" pitchFamily="34" charset="-122"/>
+                <a:cs typeface="Calibri" pitchFamily="34" charset="-120"/>
+              </a:rPr>
+              <a:t>ANSWER  </a:t>
+            </a:r>
+            <a:pPr indent="0" marL="0">
+              <a:buNone/>
+            </a:pPr>
+            <a:r>
+              <a:rPr lang="en-US" sz="1500" b="1" dirty="0">
+                <a:solidFill>
+                  <a:srgbClr val="1B2A38"/>
+                </a:solidFill>
+                <a:latin typeface="Calibri" pitchFamily="34" charset="0"/>
+                <a:ea typeface="Calibri" pitchFamily="34" charset="-122"/>
+                <a:cs typeface="Calibri" pitchFamily="34" charset="-120"/>
+              </a:rPr>
+              <a:t>B — Limited systemic sclerosis (CREST)</a:t>
+            </a:r>
+            <a:endParaRPr lang="en-US" sz="1500" dirty="0"/>
+          </a:p>
+        </p:txBody>
+      </p:sp>
+      <p:sp>
+        <p:nvSpPr>
+          <p:cNvPr id="8" name="Text 6"/>
+          <p:cNvSpPr/>
+          <p:nvPr/>
+        </p:nvSpPr>
+        <p:spPr>
+          <a:xfrm>
+            <a:off x="7439376" y="3127248"/>
+            <a:ext cx="3947648" cy="2377440"/>
+          </a:xfrm>
+          <a:prstGeom prst="rect">
+            <a:avLst/>
+          </a:prstGeom>
+          <a:noFill/>
+          <a:ln/>
+        </p:spPr>
+        <p:txBody>
+          <a:bodyPr wrap="square" lIns="0" tIns="0" rIns="0" bIns="0" rtlCol="0" anchor="t"/>
+          <a:lstStyle/>
+          <a:p>
+            <a:pPr algn="l" indent="0" marL="0">
+              <a:lnSpc>
+                <a:spcPct val="108000"/>
+              </a:lnSpc>
+              <a:buNone/>
+            </a:pPr>
+            <a:r>
+              <a:rPr lang="en-US" sz="1250" dirty="0">
+                <a:solidFill>
+                  <a:srgbClr val="33444F"/>
+                </a:solidFill>
+                <a:latin typeface="Calibri" pitchFamily="34" charset="0"/>
+                <a:ea typeface="Calibri" pitchFamily="34" charset="-122"/>
+                <a:cs typeface="Calibri" pitchFamily="34" charset="-120"/>
+              </a:rPr>
+              <a:t>The centromere pattern is characteristic of limited cutaneous systemic sclerosis.</a:t>
+            </a:r>
+            <a:endParaRPr lang="en-US" sz="1250" dirty="0"/>
+          </a:p>
+        </p:txBody>
+      </p:sp>
+      <p:sp>
+        <p:nvSpPr>
+          <p:cNvPr id="9" name="Text 7"/>
+          <p:cNvSpPr/>
+          <p:nvPr/>
+        </p:nvSpPr>
+        <p:spPr>
+          <a:xfrm>
+            <a:off x="566928" y="6473952"/>
+            <a:ext cx="7772400" cy="274320"/>
+          </a:xfrm>
+          <a:prstGeom prst="rect">
+            <a:avLst/>
+          </a:prstGeom>
+          <a:noFill/>
+          <a:ln/>
+        </p:spPr>
+        <p:txBody>
+          <a:bodyPr wrap="square" lIns="0" tIns="0" rIns="0" bIns="0" rtlCol="0" anchor="ctr"/>
+          <a:lstStyle/>
+          <a:p>
+            <a:pPr algn="l" indent="0" marL="0">
+              <a:buNone/>
+            </a:pPr>
+            <a:r>
+              <a:rPr lang="en-US" sz="850" dirty="0">
+                <a:solidFill>
+                  <a:srgbClr val="9AA8B4"/>
+                </a:solidFill>
+                <a:latin typeface="Calibri" pitchFamily="34" charset="0"/>
+                <a:ea typeface="Calibri" pitchFamily="34" charset="-122"/>
+                <a:cs typeface="Calibri" pitchFamily="34" charset="-120"/>
+              </a:rPr>
+              <a:t>Makassed General Hospital  ·  Department of Laboratory Medicine</a:t>
+            </a:r>
+            <a:endParaRPr lang="en-US" sz="850" dirty="0"/>
+          </a:p>
+        </p:txBody>
+      </p:sp>
+      <p:sp>
+        <p:nvSpPr>
+          <p:cNvPr id="10" name="Text 8"/>
+          <p:cNvSpPr/>
+          <p:nvPr/>
+        </p:nvSpPr>
+        <p:spPr>
+          <a:xfrm>
+            <a:off x="9814255" y="6473952"/>
+            <a:ext cx="1828800" cy="274320"/>
+          </a:xfrm>
+          <a:prstGeom prst="rect">
+            <a:avLst/>
+          </a:prstGeom>
+          <a:noFill/>
+          <a:ln/>
+        </p:spPr>
+        <p:txBody>
+          <a:bodyPr wrap="square" lIns="0" tIns="0" rIns="0" bIns="0" rtlCol="0" anchor="ctr"/>
+          <a:lstStyle/>
+          <a:p>
+            <a:pPr algn="r" indent="0" marL="0">
+              <a:buNone/>
+            </a:pPr>
+            <a:r>
+              <a:rPr lang="en-US" sz="850" dirty="0">
+                <a:solidFill>
+                  <a:srgbClr val="9AA8B4"/>
+                </a:solidFill>
+                <a:latin typeface="Calibri" pitchFamily="34" charset="0"/>
+                <a:ea typeface="Calibri" pitchFamily="34" charset="-122"/>
+                <a:cs typeface="Calibri" pitchFamily="34" charset="-120"/>
+              </a:rPr>
+              <a:t>CP Lecture Series</a:t>
+            </a:r>
+            <a:pPr algn="r" indent="0" marL="0">
+              <a:buNone/>
+            </a:pPr>
+            <a:r>
+              <a:rPr lang="en-US" sz="850" dirty="0">
+                <a:solidFill>
+                  <a:srgbClr val="DCE4EC"/>
+                </a:solidFill>
+                <a:latin typeface="Calibri" pitchFamily="34" charset="0"/>
+                <a:ea typeface="Calibri" pitchFamily="34" charset="-122"/>
+                <a:cs typeface="Calibri" pitchFamily="34" charset="-120"/>
+              </a:rPr>
+              <a:t>   ·   </a:t>
+            </a:r>
+            <a:pPr algn="r" indent="0" marL="0">
+              <a:buNone/>
+            </a:pPr>
+            <a:r>
+              <a:rPr lang="en-US" sz="850" b="1" dirty="0">
+                <a:solidFill>
+                  <a:srgbClr val="6A1B9A"/>
+                </a:solidFill>
+                <a:latin typeface="Calibri" pitchFamily="34" charset="0"/>
+                <a:ea typeface="Calibri" pitchFamily="34" charset="-122"/>
+                <a:cs typeface="Calibri" pitchFamily="34" charset="-120"/>
+              </a:rPr>
+              <a:t>19</a:t>
+            </a:r>
+            <a:endParaRPr lang="en-US" sz="850" dirty="0"/>
+          </a:p>
+        </p:txBody>
+      </p:sp>
+    </p:spTree>
+  </p:cSld>
+  <p:clrMapOvr>
+    <a:masterClrMapping/>
+  </p:clrMapOvr>
+</p:sld>
+</file>
+
+<file path=ppt/slides/slide23.xml><?xml version="1.0" encoding="utf-8"?>
+<p:sld xmlns:a="http://schemas.openxmlformats.org/drawingml/2006/main" xmlns:r="http://schemas.openxmlformats.org/officeDocument/2006/relationships" xmlns:p="http://schemas.openxmlformats.org/presentationml/2006/main">
+  <p:cSld name="Slide 23">
+    <p:bg>
+      <p:bgPr>
+        <a:solidFill>
+          <a:srgbClr val="FFFFFF"/>
+        </a:solidFill>
+      </p:bgPr>
+    </p:bg>
+    <p:spTree>
+      <p:nvGrpSpPr>
+        <p:cNvPr id="1" name=""/>
+        <p:cNvGrpSpPr/>
+        <p:nvPr/>
+      </p:nvGrpSpPr>
+      <p:grpSpPr>
+        <a:xfrm>
+          <a:off x="0" y="0"/>
+          <a:ext cx="0" cy="0"/>
+          <a:chOff x="0" y="0"/>
+          <a:chExt cx="0" cy="0"/>
+        </a:xfrm>
+      </p:grpSpPr>
+      <p:sp>
+        <p:nvSpPr>
+          <p:cNvPr id="2" name="Text 0"/>
+          <p:cNvSpPr/>
+          <p:nvPr/>
+        </p:nvSpPr>
+        <p:spPr>
+          <a:xfrm>
+            <a:off x="566928" y="329184"/>
+            <a:ext cx="10515600" cy="310896"/>
+          </a:xfrm>
+          <a:prstGeom prst="rect">
+            <a:avLst/>
+          </a:prstGeom>
+          <a:noFill/>
+          <a:ln/>
+        </p:spPr>
+        <p:txBody>
+          <a:bodyPr wrap="square" lIns="0" tIns="0" rIns="0" bIns="0" rtlCol="0" anchor="ctr"/>
+          <a:lstStyle/>
+          <a:p>
+            <a:pPr algn="l" indent="0" marL="0">
+              <a:buNone/>
+            </a:pPr>
+            <a:r>
+              <a:rPr lang="en-US" sz="1100" b="1" spc="150" kern="0" dirty="0">
+                <a:solidFill>
+                  <a:srgbClr val="6A1B9A"/>
+                </a:solidFill>
+                <a:latin typeface="Calibri" pitchFamily="34" charset="0"/>
+                <a:ea typeface="Calibri" pitchFamily="34" charset="-122"/>
+                <a:cs typeface="Calibri" pitchFamily="34" charset="-120"/>
+              </a:rPr>
+              <a:t>IMMUNOLOGY &amp; SEROLOGY   ·   BOARD REVIEW  ·  Q4</a:t>
+            </a:r>
+            <a:endParaRPr lang="en-US" sz="1100" dirty="0"/>
+          </a:p>
+        </p:txBody>
+      </p:sp>
+      <p:sp>
+        <p:nvSpPr>
+          <p:cNvPr id="3" name="Text 1"/>
+          <p:cNvSpPr/>
+          <p:nvPr/>
+        </p:nvSpPr>
+        <p:spPr>
+          <a:xfrm>
+            <a:off x="566928" y="713232"/>
+            <a:ext cx="11064240" cy="749808"/>
+          </a:xfrm>
+          <a:prstGeom prst="rect">
+            <a:avLst/>
+          </a:prstGeom>
+          <a:noFill/>
+          <a:ln/>
+        </p:spPr>
+        <p:txBody>
+          <a:bodyPr wrap="square" lIns="0" tIns="0" rIns="0" bIns="0" rtlCol="0" anchor="ctr"/>
+          <a:lstStyle/>
+          <a:p>
+            <a:pPr algn="l" indent="0" marL="0">
+              <a:buNone/>
+            </a:pPr>
+            <a:r>
+              <a:rPr lang="en-US" sz="2600" b="1" dirty="0">
+                <a:solidFill>
+                  <a:srgbClr val="0E3A5F"/>
+                </a:solidFill>
+                <a:latin typeface="Calibri" pitchFamily="34" charset="0"/>
+                <a:ea typeface="Calibri" pitchFamily="34" charset="-122"/>
+                <a:cs typeface="Calibri" pitchFamily="34" charset="-120"/>
+              </a:rPr>
+              <a:t>Board-Style Review</a:t>
+            </a:r>
+            <a:endParaRPr lang="en-US" sz="2600" dirty="0"/>
+          </a:p>
+        </p:txBody>
+      </p:sp>
+      <p:sp>
+        <p:nvSpPr>
+          <p:cNvPr id="4" name="Text 2"/>
+          <p:cNvSpPr/>
+          <p:nvPr/>
+        </p:nvSpPr>
+        <p:spPr>
+          <a:xfrm>
+            <a:off x="566928" y="1417320"/>
+            <a:ext cx="11057839" cy="914400"/>
+          </a:xfrm>
+          <a:prstGeom prst="rect">
+            <a:avLst/>
+          </a:prstGeom>
+          <a:noFill/>
+          <a:ln/>
+        </p:spPr>
+        <p:txBody>
+          <a:bodyPr wrap="square" lIns="0" tIns="0" rIns="0" bIns="0" rtlCol="0" anchor="t"/>
+          <a:lstStyle/>
+          <a:p>
+            <a:pPr algn="l" indent="0" marL="0">
+              <a:lnSpc>
+                <a:spcPct val="105000"/>
+              </a:lnSpc>
+              <a:buNone/>
+            </a:pPr>
+            <a:r>
+              <a:rPr lang="en-US" sz="1450" b="1" dirty="0">
+                <a:solidFill>
+                  <a:srgbClr val="1B2A38"/>
+                </a:solidFill>
+                <a:latin typeface="Calibri" pitchFamily="34" charset="0"/>
+                <a:ea typeface="Calibri" pitchFamily="34" charset="-122"/>
+                <a:cs typeface="Calibri" pitchFamily="34" charset="-120"/>
+              </a:rPr>
+              <a:t>c-ANCA most commonly targets which antigen?</a:t>
+            </a:r>
+            <a:endParaRPr lang="en-US" sz="1450" dirty="0"/>
+          </a:p>
+        </p:txBody>
+      </p:sp>
+      <p:sp>
+        <p:nvSpPr>
+          <p:cNvPr id="5" name="Text 3"/>
+          <p:cNvSpPr/>
+          <p:nvPr/>
+        </p:nvSpPr>
+        <p:spPr>
+          <a:xfrm>
+            <a:off x="658368" y="2395728"/>
+            <a:ext cx="6192390" cy="3017520"/>
+          </a:xfrm>
+          <a:prstGeom prst="rect">
+            <a:avLst/>
+          </a:prstGeom>
+          <a:noFill/>
+          <a:ln/>
+        </p:spPr>
+        <p:txBody>
+          <a:bodyPr wrap="square" lIns="0" tIns="0" rIns="0" bIns="0" rtlCol="0" anchor="t"/>
+          <a:lstStyle/>
+          <a:p>
+            <a:pPr algn="l" indent="0" marL="0">
+              <a:spcAft>
+                <a:spcPts val="600"/>
+              </a:spcAft>
+              <a:buNone/>
+            </a:pPr>
+            <a:r>
+              <a:rPr lang="en-US" sz="1350" dirty="0">
+                <a:solidFill>
+                  <a:srgbClr val="33444F"/>
+                </a:solidFill>
+                <a:latin typeface="Calibri" pitchFamily="34" charset="0"/>
+                <a:ea typeface="Calibri" pitchFamily="34" charset="-122"/>
+                <a:cs typeface="Calibri" pitchFamily="34" charset="-120"/>
+              </a:rPr>
+              <a:t>A. Myeloperoxidase (MPO)</a:t>
+            </a:r>
+            <a:endParaRPr lang="en-US" sz="1350" dirty="0"/>
+          </a:p>
+          <a:p>
+            <a:pPr algn="l" indent="0" marL="0">
+              <a:spcAft>
+                <a:spcPts val="600"/>
+              </a:spcAft>
+              <a:buNone/>
+            </a:pPr>
+            <a:r>
+              <a:rPr lang="en-US" sz="1350" b="1" dirty="0">
+                <a:solidFill>
+                  <a:srgbClr val="4A1269"/>
+                </a:solidFill>
+                <a:latin typeface="Calibri" pitchFamily="34" charset="0"/>
+                <a:ea typeface="Calibri" pitchFamily="34" charset="-122"/>
+                <a:cs typeface="Calibri" pitchFamily="34" charset="-120"/>
+              </a:rPr>
+              <a:t>B. Proteinase 3 (PR3)</a:t>
+            </a:r>
+            <a:endParaRPr lang="en-US" sz="1350" dirty="0"/>
+          </a:p>
+          <a:p>
+            <a:pPr algn="l" indent="0" marL="0">
+              <a:spcAft>
+                <a:spcPts val="600"/>
+              </a:spcAft>
+              <a:buNone/>
+            </a:pPr>
+            <a:r>
+              <a:rPr lang="en-US" sz="1350" dirty="0">
+                <a:solidFill>
+                  <a:srgbClr val="33444F"/>
+                </a:solidFill>
+                <a:latin typeface="Calibri" pitchFamily="34" charset="0"/>
+                <a:ea typeface="Calibri" pitchFamily="34" charset="-122"/>
+                <a:cs typeface="Calibri" pitchFamily="34" charset="-120"/>
+              </a:rPr>
+              <a:t>C. dsDNA</a:t>
+            </a:r>
+            <a:endParaRPr lang="en-US" sz="1350" dirty="0"/>
+          </a:p>
+          <a:p>
+            <a:pPr algn="l" indent="0" marL="0">
+              <a:spcAft>
+                <a:spcPts val="600"/>
+              </a:spcAft>
+              <a:buNone/>
+            </a:pPr>
+            <a:r>
+              <a:rPr lang="en-US" sz="1350" dirty="0">
+                <a:solidFill>
+                  <a:srgbClr val="33444F"/>
+                </a:solidFill>
+                <a:latin typeface="Calibri" pitchFamily="34" charset="0"/>
+                <a:ea typeface="Calibri" pitchFamily="34" charset="-122"/>
+                <a:cs typeface="Calibri" pitchFamily="34" charset="-120"/>
+              </a:rPr>
+              <a:t>D. Histones</a:t>
+            </a:r>
+            <a:endParaRPr lang="en-US" sz="1350" dirty="0"/>
+          </a:p>
+          <a:p>
+            <a:pPr algn="l" indent="0" marL="0">
+              <a:spcAft>
+                <a:spcPts val="600"/>
+              </a:spcAft>
+              <a:buNone/>
+            </a:pPr>
+            <a:r>
+              <a:rPr lang="en-US" sz="1350" dirty="0">
+                <a:solidFill>
+                  <a:srgbClr val="33444F"/>
+                </a:solidFill>
+                <a:latin typeface="Calibri" pitchFamily="34" charset="0"/>
+                <a:ea typeface="Calibri" pitchFamily="34" charset="-122"/>
+                <a:cs typeface="Calibri" pitchFamily="34" charset="-120"/>
+              </a:rPr>
+              <a:t>E. Ro/SSA</a:t>
+            </a:r>
+            <a:endParaRPr lang="en-US" sz="1350" dirty="0"/>
+          </a:p>
+        </p:txBody>
+      </p:sp>
+      <p:sp>
+        <p:nvSpPr>
+          <p:cNvPr id="6" name="Shape 4"/>
+          <p:cNvSpPr/>
+          <p:nvPr/>
+        </p:nvSpPr>
+        <p:spPr>
+          <a:xfrm>
+            <a:off x="7201632" y="2395728"/>
+            <a:ext cx="4423136" cy="3246120"/>
+          </a:xfrm>
+          <a:prstGeom prst="roundRect">
+            <a:avLst>
+              <a:gd name="adj" fmla="val 2535"/>
+            </a:avLst>
+          </a:prstGeom>
+          <a:solidFill>
+            <a:srgbClr val="F1E8F7"/>
+          </a:solidFill>
+          <a:ln/>
+          <a:effectLst>
+            <a:outerShdw sx="100000" sy="100000" kx="0" ky="0" algn="bl" rotWithShape="0" blurRad="88900" dist="25400" dir="5400000">
+              <a:srgbClr val="22303C">
+                <a:alpha val="12000"/>
+              </a:srgbClr>
+            </a:outerShdw>
+          </a:effectLst>
+        </p:spPr>
+      </p:sp>
+      <p:sp>
+        <p:nvSpPr>
+          <p:cNvPr id="7" name="Text 5"/>
+          <p:cNvSpPr/>
+          <p:nvPr/>
+        </p:nvSpPr>
+        <p:spPr>
+          <a:xfrm>
+            <a:off x="7439376" y="2578608"/>
+            <a:ext cx="3965936" cy="457200"/>
+          </a:xfrm>
+          <a:prstGeom prst="rect">
+            <a:avLst/>
+          </a:prstGeom>
+          <a:noFill/>
+          <a:ln/>
+        </p:spPr>
+        <p:txBody>
+          <a:bodyPr wrap="square" lIns="0" tIns="0" rIns="0" bIns="0" rtlCol="0" anchor="ctr"/>
+          <a:lstStyle/>
+          <a:p>
+            <a:pPr indent="0" marL="0">
+              <a:buNone/>
+            </a:pPr>
+            <a:r>
+              <a:rPr lang="en-US" sz="1500" b="1" dirty="0">
+                <a:solidFill>
+                  <a:srgbClr val="6A1B9A"/>
+                </a:solidFill>
+                <a:latin typeface="Calibri" pitchFamily="34" charset="0"/>
+                <a:ea typeface="Calibri" pitchFamily="34" charset="-122"/>
+                <a:cs typeface="Calibri" pitchFamily="34" charset="-120"/>
+              </a:rPr>
+              <a:t>ANSWER  </a:t>
+            </a:r>
+            <a:pPr indent="0" marL="0">
+              <a:buNone/>
+            </a:pPr>
+            <a:r>
+              <a:rPr lang="en-US" sz="1500" b="1" dirty="0">
+                <a:solidFill>
+                  <a:srgbClr val="1B2A38"/>
+                </a:solidFill>
+                <a:latin typeface="Calibri" pitchFamily="34" charset="0"/>
+                <a:ea typeface="Calibri" pitchFamily="34" charset="-122"/>
+                <a:cs typeface="Calibri" pitchFamily="34" charset="-120"/>
+              </a:rPr>
+              <a:t>B — Proteinase 3 (PR3)</a:t>
+            </a:r>
+            <a:endParaRPr lang="en-US" sz="1500" dirty="0"/>
+          </a:p>
+        </p:txBody>
+      </p:sp>
+      <p:sp>
+        <p:nvSpPr>
+          <p:cNvPr id="8" name="Text 6"/>
+          <p:cNvSpPr/>
+          <p:nvPr/>
+        </p:nvSpPr>
+        <p:spPr>
+          <a:xfrm>
+            <a:off x="7439376" y="3127248"/>
+            <a:ext cx="3947648" cy="2377440"/>
+          </a:xfrm>
+          <a:prstGeom prst="rect">
+            <a:avLst/>
+          </a:prstGeom>
+          <a:noFill/>
+          <a:ln/>
+        </p:spPr>
+        <p:txBody>
+          <a:bodyPr wrap="square" lIns="0" tIns="0" rIns="0" bIns="0" rtlCol="0" anchor="t"/>
+          <a:lstStyle/>
+          <a:p>
+            <a:pPr algn="l" indent="0" marL="0">
+              <a:lnSpc>
+                <a:spcPct val="108000"/>
+              </a:lnSpc>
+              <a:buNone/>
+            </a:pPr>
+            <a:r>
+              <a:rPr lang="en-US" sz="1250" dirty="0">
+                <a:solidFill>
+                  <a:srgbClr val="33444F"/>
+                </a:solidFill>
+                <a:latin typeface="Calibri" pitchFamily="34" charset="0"/>
+                <a:ea typeface="Calibri" pitchFamily="34" charset="-122"/>
+                <a:cs typeface="Calibri" pitchFamily="34" charset="-120"/>
+              </a:rPr>
+              <a:t>c-ANCA corresponds to anti-PR3, classically associated with granulomatosis with polyangiitis; p-ANCA corresponds to anti-MPO.</a:t>
+            </a:r>
+            <a:endParaRPr lang="en-US" sz="1250" dirty="0"/>
+          </a:p>
+        </p:txBody>
+      </p:sp>
+      <p:sp>
+        <p:nvSpPr>
+          <p:cNvPr id="9" name="Text 7"/>
+          <p:cNvSpPr/>
+          <p:nvPr/>
+        </p:nvSpPr>
+        <p:spPr>
+          <a:xfrm>
+            <a:off x="566928" y="6473952"/>
+            <a:ext cx="7772400" cy="274320"/>
+          </a:xfrm>
+          <a:prstGeom prst="rect">
+            <a:avLst/>
+          </a:prstGeom>
+          <a:noFill/>
+          <a:ln/>
+        </p:spPr>
+        <p:txBody>
+          <a:bodyPr wrap="square" lIns="0" tIns="0" rIns="0" bIns="0" rtlCol="0" anchor="ctr"/>
+          <a:lstStyle/>
+          <a:p>
+            <a:pPr algn="l" indent="0" marL="0">
+              <a:buNone/>
+            </a:pPr>
+            <a:r>
+              <a:rPr lang="en-US" sz="850" dirty="0">
+                <a:solidFill>
+                  <a:srgbClr val="9AA8B4"/>
+                </a:solidFill>
+                <a:latin typeface="Calibri" pitchFamily="34" charset="0"/>
+                <a:ea typeface="Calibri" pitchFamily="34" charset="-122"/>
+                <a:cs typeface="Calibri" pitchFamily="34" charset="-120"/>
+              </a:rPr>
+              <a:t>Makassed General Hospital  ·  Department of Laboratory Medicine</a:t>
+            </a:r>
+            <a:endParaRPr lang="en-US" sz="850" dirty="0"/>
+          </a:p>
+        </p:txBody>
+      </p:sp>
+      <p:sp>
+        <p:nvSpPr>
+          <p:cNvPr id="10" name="Text 8"/>
+          <p:cNvSpPr/>
+          <p:nvPr/>
+        </p:nvSpPr>
+        <p:spPr>
+          <a:xfrm>
+            <a:off x="9814255" y="6473952"/>
+            <a:ext cx="1828800" cy="274320"/>
+          </a:xfrm>
+          <a:prstGeom prst="rect">
+            <a:avLst/>
+          </a:prstGeom>
+          <a:noFill/>
+          <a:ln/>
+        </p:spPr>
+        <p:txBody>
+          <a:bodyPr wrap="square" lIns="0" tIns="0" rIns="0" bIns="0" rtlCol="0" anchor="ctr"/>
+          <a:lstStyle/>
+          <a:p>
+            <a:pPr algn="r" indent="0" marL="0">
+              <a:buNone/>
+            </a:pPr>
+            <a:r>
+              <a:rPr lang="en-US" sz="850" dirty="0">
+                <a:solidFill>
+                  <a:srgbClr val="9AA8B4"/>
+                </a:solidFill>
+                <a:latin typeface="Calibri" pitchFamily="34" charset="0"/>
+                <a:ea typeface="Calibri" pitchFamily="34" charset="-122"/>
+                <a:cs typeface="Calibri" pitchFamily="34" charset="-120"/>
+              </a:rPr>
+              <a:t>CP Lecture Series</a:t>
+            </a:r>
+            <a:pPr algn="r" indent="0" marL="0">
+              <a:buNone/>
+            </a:pPr>
+            <a:r>
+              <a:rPr lang="en-US" sz="850" dirty="0">
+                <a:solidFill>
+                  <a:srgbClr val="DCE4EC"/>
+                </a:solidFill>
+                <a:latin typeface="Calibri" pitchFamily="34" charset="0"/>
+                <a:ea typeface="Calibri" pitchFamily="34" charset="-122"/>
+                <a:cs typeface="Calibri" pitchFamily="34" charset="-120"/>
+              </a:rPr>
+              <a:t>   ·   </a:t>
+            </a:r>
+            <a:pPr algn="r" indent="0" marL="0">
+              <a:buNone/>
+            </a:pPr>
+            <a:r>
+              <a:rPr lang="en-US" sz="850" b="1" dirty="0">
+                <a:solidFill>
+                  <a:srgbClr val="6A1B9A"/>
+                </a:solidFill>
+                <a:latin typeface="Calibri" pitchFamily="34" charset="0"/>
+                <a:ea typeface="Calibri" pitchFamily="34" charset="-122"/>
+                <a:cs typeface="Calibri" pitchFamily="34" charset="-120"/>
+              </a:rPr>
+              <a:t>20</a:t>
+            </a:r>
+            <a:endParaRPr lang="en-US" sz="850" dirty="0"/>
+          </a:p>
+        </p:txBody>
+      </p:sp>
+    </p:spTree>
+  </p:cSld>
+  <p:clrMapOvr>
+    <a:masterClrMapping/>
+  </p:clrMapOvr>
+</p:sld>
+</file>
+
+<file path=ppt/slides/slide24.xml><?xml version="1.0" encoding="utf-8"?>
+<p:sld xmlns:a="http://schemas.openxmlformats.org/drawingml/2006/main" xmlns:r="http://schemas.openxmlformats.org/officeDocument/2006/relationships" xmlns:p="http://schemas.openxmlformats.org/presentationml/2006/main">
+  <p:cSld name="Slide 24">
+    <p:bg>
+      <p:bgPr>
+        <a:solidFill>
+          <a:srgbClr val="0A2A45"/>
+        </a:solidFill>
+      </p:bgPr>
+    </p:bg>
+    <p:spTree>
+      <p:nvGrpSpPr>
+        <p:cNvPr id="1" name=""/>
+        <p:cNvGrpSpPr/>
+        <p:nvPr/>
+      </p:nvGrpSpPr>
+      <p:grpSpPr>
+        <a:xfrm>
+          <a:off x="0" y="0"/>
+          <a:ext cx="0" cy="0"/>
+          <a:chOff x="0" y="0"/>
+          <a:chExt cx="0" cy="0"/>
+        </a:xfrm>
+      </p:grpSpPr>
+      <p:sp>
+        <p:nvSpPr>
+          <p:cNvPr id="2" name="Text 0"/>
+          <p:cNvSpPr/>
+          <p:nvPr/>
+        </p:nvSpPr>
+        <p:spPr>
+          <a:xfrm>
+            <a:off x="566928" y="329184"/>
+            <a:ext cx="10058400" cy="310896"/>
+          </a:xfrm>
+          <a:prstGeom prst="rect">
+            <a:avLst/>
+          </a:prstGeom>
+          <a:noFill/>
+          <a:ln/>
+        </p:spPr>
+        <p:txBody>
+          <a:bodyPr wrap="square" lIns="0" tIns="0" rIns="0" bIns="0" rtlCol="0" anchor="ctr"/>
+          <a:lstStyle/>
+          <a:p>
+            <a:pPr indent="0" marL="0">
+              <a:buNone/>
+            </a:pPr>
+            <a:r>
+              <a:rPr lang="en-US" sz="1100" b="1" spc="150" kern="0" dirty="0">
+                <a:solidFill>
+                  <a:srgbClr val="6A1B9A"/>
+                </a:solidFill>
+                <a:latin typeface="Calibri" pitchFamily="34" charset="0"/>
+                <a:ea typeface="Calibri" pitchFamily="34" charset="-122"/>
+                <a:cs typeface="Calibri" pitchFamily="34" charset="-120"/>
+              </a:rPr>
+              <a:t>IMMUNOLOGY &amp; SEROLOGY</a:t>
+            </a:r>
+            <a:endParaRPr lang="en-US" sz="1100" dirty="0"/>
+          </a:p>
+        </p:txBody>
+      </p:sp>
+      <p:sp>
+        <p:nvSpPr>
+          <p:cNvPr id="3" name="Text 1"/>
+          <p:cNvSpPr/>
+          <p:nvPr/>
+        </p:nvSpPr>
+        <p:spPr>
+          <a:xfrm>
+            <a:off x="566928" y="676656"/>
+            <a:ext cx="10972800" cy="749808"/>
+          </a:xfrm>
+          <a:prstGeom prst="rect">
+            <a:avLst/>
+          </a:prstGeom>
+          <a:noFill/>
+          <a:ln/>
+        </p:spPr>
+        <p:txBody>
+          <a:bodyPr wrap="square" lIns="0" tIns="0" rIns="0" bIns="0" rtlCol="0" anchor="ctr"/>
+          <a:lstStyle/>
+          <a:p>
+            <a:pPr indent="0" marL="0">
+              <a:buNone/>
+            </a:pPr>
+            <a:r>
+              <a:rPr lang="en-US" sz="3000" b="1" dirty="0">
+                <a:solidFill>
+                  <a:srgbClr val="FFFFFF"/>
+                </a:solidFill>
+                <a:latin typeface="Calibri" pitchFamily="34" charset="0"/>
+                <a:ea typeface="Calibri" pitchFamily="34" charset="-122"/>
+                <a:cs typeface="Calibri" pitchFamily="34" charset="-120"/>
+              </a:rPr>
+              <a:t>Key Take-Home Points</a:t>
+            </a:r>
+            <a:endParaRPr lang="en-US" sz="3000" dirty="0"/>
+          </a:p>
+        </p:txBody>
+      </p:sp>
+      <p:sp>
+        <p:nvSpPr>
+          <p:cNvPr id="4" name="Shape 2"/>
+          <p:cNvSpPr/>
+          <p:nvPr/>
+        </p:nvSpPr>
+        <p:spPr>
+          <a:xfrm>
+            <a:off x="566928" y="1517904"/>
+            <a:ext cx="11057839" cy="841248"/>
+          </a:xfrm>
+          <a:prstGeom prst="roundRect">
+            <a:avLst>
+              <a:gd name="adj" fmla="val 7609"/>
+            </a:avLst>
+          </a:prstGeom>
+          <a:solidFill>
+            <a:srgbClr val="143651"/>
+          </a:solidFill>
+          <a:ln/>
+        </p:spPr>
+      </p:sp>
+      <p:sp>
+        <p:nvSpPr>
+          <p:cNvPr id="5" name="Shape 3"/>
+          <p:cNvSpPr/>
+          <p:nvPr/>
+        </p:nvSpPr>
+        <p:spPr>
+          <a:xfrm>
+            <a:off x="749808" y="1755648"/>
+            <a:ext cx="365760" cy="365760"/>
+          </a:xfrm>
+          <a:prstGeom prst="ellipse">
+            <a:avLst/>
+          </a:prstGeom>
+          <a:solidFill>
+            <a:srgbClr val="6A1B9A"/>
+          </a:solidFill>
+          <a:ln/>
+          <a:effectLst>
+            <a:outerShdw sx="100000" sy="100000" kx="0" ky="0" algn="bl" rotWithShape="0" blurRad="88900" dist="25400" dir="5400000">
+              <a:srgbClr val="22303C">
+                <a:alpha val="12000"/>
+              </a:srgbClr>
+            </a:outerShdw>
+          </a:effectLst>
+        </p:spPr>
+      </p:sp>
+      <p:sp>
+        <p:nvSpPr>
+          <p:cNvPr id="6" name="Text 4"/>
+          <p:cNvSpPr/>
+          <p:nvPr/>
+        </p:nvSpPr>
+        <p:spPr>
+          <a:xfrm>
+            <a:off x="749808" y="1755648"/>
+            <a:ext cx="365760" cy="365760"/>
+          </a:xfrm>
+          <a:prstGeom prst="rect">
+            <a:avLst/>
+          </a:prstGeom>
+          <a:noFill/>
+          <a:ln/>
+        </p:spPr>
+        <p:txBody>
+          <a:bodyPr wrap="square" lIns="0" tIns="0" rIns="0" bIns="0" rtlCol="0" anchor="ctr"/>
+          <a:lstStyle/>
+          <a:p>
+            <a:pPr algn="ctr" indent="0" marL="0">
+              <a:buNone/>
+            </a:pPr>
+            <a:r>
+              <a:rPr lang="en-US" sz="1500" b="1" dirty="0">
+                <a:solidFill>
+                  <a:srgbClr val="FFFFFF"/>
+                </a:solidFill>
+                <a:latin typeface="Calibri" pitchFamily="34" charset="0"/>
+                <a:ea typeface="Calibri" pitchFamily="34" charset="-122"/>
+                <a:cs typeface="Calibri" pitchFamily="34" charset="-120"/>
+              </a:rPr>
+              <a:t>1</a:t>
+            </a:r>
+            <a:endParaRPr lang="en-US" sz="1500" dirty="0"/>
+          </a:p>
+        </p:txBody>
+      </p:sp>
+      <p:sp>
+        <p:nvSpPr>
+          <p:cNvPr id="7" name="Text 5"/>
+          <p:cNvSpPr/>
+          <p:nvPr/>
+        </p:nvSpPr>
+        <p:spPr>
+          <a:xfrm>
+            <a:off x="1280160" y="1517904"/>
+            <a:ext cx="10143439" cy="841248"/>
+          </a:xfrm>
+          <a:prstGeom prst="rect">
+            <a:avLst/>
+          </a:prstGeom>
+          <a:noFill/>
+          <a:ln/>
+        </p:spPr>
+        <p:txBody>
+          <a:bodyPr wrap="square" lIns="0" tIns="0" rIns="0" bIns="0" rtlCol="0" anchor="ctr"/>
+          <a:lstStyle/>
+          <a:p>
+            <a:pPr algn="l" indent="0" marL="0">
+              <a:buNone/>
+            </a:pPr>
+            <a:r>
+              <a:rPr lang="en-US" sz="1350" dirty="0">
+                <a:solidFill>
+                  <a:srgbClr val="E7EEF4"/>
+                </a:solidFill>
+                <a:latin typeface="Calibri" pitchFamily="34" charset="0"/>
+                <a:ea typeface="Calibri" pitchFamily="34" charset="-122"/>
+                <a:cs typeface="Calibri" pitchFamily="34" charset="-120"/>
+              </a:rPr>
+              <a:t>ANA is a sensitive screen reported as titer + pattern; low-titer ANA is common in healthy people — test only with clinical suspicion.</a:t>
+            </a:r>
+            <a:endParaRPr lang="en-US" sz="1350" dirty="0"/>
+          </a:p>
+        </p:txBody>
+      </p:sp>
+      <p:sp>
+        <p:nvSpPr>
+          <p:cNvPr id="8" name="Shape 6"/>
+          <p:cNvSpPr/>
+          <p:nvPr/>
+        </p:nvSpPr>
+        <p:spPr>
+          <a:xfrm>
+            <a:off x="566928" y="2505456"/>
+            <a:ext cx="11057839" cy="841248"/>
+          </a:xfrm>
+          <a:prstGeom prst="roundRect">
+            <a:avLst>
+              <a:gd name="adj" fmla="val 7609"/>
+            </a:avLst>
+          </a:prstGeom>
+          <a:solidFill>
+            <a:srgbClr val="143651"/>
+          </a:solidFill>
+          <a:ln/>
+        </p:spPr>
+      </p:sp>
+      <p:sp>
+        <p:nvSpPr>
+          <p:cNvPr id="9" name="Shape 7"/>
+          <p:cNvSpPr/>
+          <p:nvPr/>
+        </p:nvSpPr>
+        <p:spPr>
+          <a:xfrm>
+            <a:off x="749808" y="2743200"/>
+            <a:ext cx="365760" cy="365760"/>
+          </a:xfrm>
+          <a:prstGeom prst="ellipse">
+            <a:avLst/>
+          </a:prstGeom>
+          <a:solidFill>
+            <a:srgbClr val="6A1B9A"/>
+          </a:solidFill>
+          <a:ln/>
+          <a:effectLst>
+            <a:outerShdw sx="100000" sy="100000" kx="0" ky="0" algn="bl" rotWithShape="0" blurRad="88900" dist="25400" dir="5400000">
+              <a:srgbClr val="22303C">
+                <a:alpha val="12000"/>
+              </a:srgbClr>
+            </a:outerShdw>
+          </a:effectLst>
+        </p:spPr>
+      </p:sp>
+      <p:sp>
+        <p:nvSpPr>
+          <p:cNvPr id="10" name="Text 8"/>
+          <p:cNvSpPr/>
+          <p:nvPr/>
+        </p:nvSpPr>
+        <p:spPr>
+          <a:xfrm>
+            <a:off x="749808" y="2743200"/>
+            <a:ext cx="365760" cy="365760"/>
+          </a:xfrm>
+          <a:prstGeom prst="rect">
+            <a:avLst/>
+          </a:prstGeom>
+          <a:noFill/>
+          <a:ln/>
+        </p:spPr>
+        <p:txBody>
+          <a:bodyPr wrap="square" lIns="0" tIns="0" rIns="0" bIns="0" rtlCol="0" anchor="ctr"/>
+          <a:lstStyle/>
+          <a:p>
+            <a:pPr algn="ctr" indent="0" marL="0">
+              <a:buNone/>
+            </a:pPr>
+            <a:r>
+              <a:rPr lang="en-US" sz="1500" b="1" dirty="0">
+                <a:solidFill>
+                  <a:srgbClr val="FFFFFF"/>
+                </a:solidFill>
+                <a:latin typeface="Calibri" pitchFamily="34" charset="0"/>
+                <a:ea typeface="Calibri" pitchFamily="34" charset="-122"/>
+                <a:cs typeface="Calibri" pitchFamily="34" charset="-120"/>
+              </a:rPr>
+              <a:t>2</a:t>
+            </a:r>
+            <a:endParaRPr lang="en-US" sz="1500" dirty="0"/>
+          </a:p>
+        </p:txBody>
+      </p:sp>
+      <p:sp>
+        <p:nvSpPr>
+          <p:cNvPr id="11" name="Text 9"/>
+          <p:cNvSpPr/>
+          <p:nvPr/>
+        </p:nvSpPr>
+        <p:spPr>
+          <a:xfrm>
+            <a:off x="1280160" y="2505456"/>
+            <a:ext cx="10143439" cy="841248"/>
+          </a:xfrm>
+          <a:prstGeom prst="rect">
+            <a:avLst/>
+          </a:prstGeom>
+          <a:noFill/>
+          <a:ln/>
+        </p:spPr>
+        <p:txBody>
+          <a:bodyPr wrap="square" lIns="0" tIns="0" rIns="0" bIns="0" rtlCol="0" anchor="ctr"/>
+          <a:lstStyle/>
+          <a:p>
+            <a:pPr algn="l" indent="0" marL="0">
+              <a:buNone/>
+            </a:pPr>
+            <a:r>
+              <a:rPr lang="en-US" sz="1350" dirty="0">
+                <a:solidFill>
+                  <a:srgbClr val="E7EEF4"/>
+                </a:solidFill>
+                <a:latin typeface="Calibri" pitchFamily="34" charset="0"/>
+                <a:ea typeface="Calibri" pitchFamily="34" charset="-122"/>
+                <a:cs typeface="Calibri" pitchFamily="34" charset="-120"/>
+              </a:rPr>
+              <a:t>IIF pattern guides specific-antibody testing (homogeneous → dsDNA; centromere → limited SSc; nucleolar → SSc).</a:t>
+            </a:r>
+            <a:endParaRPr lang="en-US" sz="1350" dirty="0"/>
+          </a:p>
+        </p:txBody>
+      </p:sp>
+      <p:sp>
+        <p:nvSpPr>
+          <p:cNvPr id="12" name="Shape 10"/>
+          <p:cNvSpPr/>
+          <p:nvPr/>
+        </p:nvSpPr>
+        <p:spPr>
+          <a:xfrm>
+            <a:off x="566928" y="3493008"/>
+            <a:ext cx="11057839" cy="841248"/>
+          </a:xfrm>
+          <a:prstGeom prst="roundRect">
+            <a:avLst>
+              <a:gd name="adj" fmla="val 7609"/>
+            </a:avLst>
+          </a:prstGeom>
+          <a:solidFill>
+            <a:srgbClr val="143651"/>
+          </a:solidFill>
+          <a:ln/>
+        </p:spPr>
+      </p:sp>
+      <p:sp>
+        <p:nvSpPr>
+          <p:cNvPr id="13" name="Shape 11"/>
+          <p:cNvSpPr/>
+          <p:nvPr/>
+        </p:nvSpPr>
+        <p:spPr>
+          <a:xfrm>
+            <a:off x="749808" y="3730752"/>
+            <a:ext cx="365760" cy="365760"/>
+          </a:xfrm>
+          <a:prstGeom prst="ellipse">
+            <a:avLst/>
+          </a:prstGeom>
+          <a:solidFill>
+            <a:srgbClr val="6A1B9A"/>
+          </a:solidFill>
+          <a:ln/>
+          <a:effectLst>
+            <a:outerShdw sx="100000" sy="100000" kx="0" ky="0" algn="bl" rotWithShape="0" blurRad="88900" dist="25400" dir="5400000">
+              <a:srgbClr val="22303C">
+                <a:alpha val="12000"/>
+              </a:srgbClr>
+            </a:outerShdw>
+          </a:effectLst>
+        </p:spPr>
+      </p:sp>
+      <p:sp>
+        <p:nvSpPr>
+          <p:cNvPr id="14" name="Text 12"/>
+          <p:cNvSpPr/>
+          <p:nvPr/>
+        </p:nvSpPr>
+        <p:spPr>
+          <a:xfrm>
+            <a:off x="749808" y="3730752"/>
+            <a:ext cx="365760" cy="365760"/>
+          </a:xfrm>
+          <a:prstGeom prst="rect">
+            <a:avLst/>
+          </a:prstGeom>
+          <a:noFill/>
+          <a:ln/>
+        </p:spPr>
+        <p:txBody>
+          <a:bodyPr wrap="square" lIns="0" tIns="0" rIns="0" bIns="0" rtlCol="0" anchor="ctr"/>
+          <a:lstStyle/>
+          <a:p>
+            <a:pPr algn="ctr" indent="0" marL="0">
+              <a:buNone/>
+            </a:pPr>
+            <a:r>
+              <a:rPr lang="en-US" sz="1500" b="1" dirty="0">
+                <a:solidFill>
+                  <a:srgbClr val="FFFFFF"/>
+                </a:solidFill>
+                <a:latin typeface="Calibri" pitchFamily="34" charset="0"/>
+                <a:ea typeface="Calibri" pitchFamily="34" charset="-122"/>
+                <a:cs typeface="Calibri" pitchFamily="34" charset="-120"/>
+              </a:rPr>
+              <a:t>3</a:t>
+            </a:r>
+            <a:endParaRPr lang="en-US" sz="1500" dirty="0"/>
+          </a:p>
+        </p:txBody>
+      </p:sp>
+      <p:sp>
+        <p:nvSpPr>
+          <p:cNvPr id="15" name="Text 13"/>
+          <p:cNvSpPr/>
+          <p:nvPr/>
+        </p:nvSpPr>
+        <p:spPr>
+          <a:xfrm>
+            <a:off x="1280160" y="3493008"/>
+            <a:ext cx="10143439" cy="841248"/>
+          </a:xfrm>
+          <a:prstGeom prst="rect">
+            <a:avLst/>
+          </a:prstGeom>
+          <a:noFill/>
+          <a:ln/>
+        </p:spPr>
+        <p:txBody>
+          <a:bodyPr wrap="square" lIns="0" tIns="0" rIns="0" bIns="0" rtlCol="0" anchor="ctr"/>
+          <a:lstStyle/>
+          <a:p>
+            <a:pPr algn="l" indent="0" marL="0">
+              <a:buNone/>
+            </a:pPr>
+            <a:r>
+              <a:rPr lang="en-US" sz="1350" dirty="0">
+                <a:solidFill>
+                  <a:srgbClr val="E7EEF4"/>
+                </a:solidFill>
+                <a:latin typeface="Calibri" pitchFamily="34" charset="0"/>
+                <a:ea typeface="Calibri" pitchFamily="34" charset="-122"/>
+                <a:cs typeface="Calibri" pitchFamily="34" charset="-120"/>
+              </a:rPr>
+              <a:t>Specific antibodies (dsDNA, Sm, SSA/SSB, Scl-70, Jo-1) refine the diagnosis; anti-dsDNA tracks lupus activity.</a:t>
+            </a:r>
+            <a:endParaRPr lang="en-US" sz="1350" dirty="0"/>
+          </a:p>
+        </p:txBody>
+      </p:sp>
+      <p:sp>
+        <p:nvSpPr>
+          <p:cNvPr id="16" name="Shape 14"/>
+          <p:cNvSpPr/>
+          <p:nvPr/>
+        </p:nvSpPr>
+        <p:spPr>
+          <a:xfrm>
+            <a:off x="566928" y="4480560"/>
+            <a:ext cx="11057839" cy="841248"/>
+          </a:xfrm>
+          <a:prstGeom prst="roundRect">
+            <a:avLst>
+              <a:gd name="adj" fmla="val 7609"/>
+            </a:avLst>
+          </a:prstGeom>
+          <a:solidFill>
+            <a:srgbClr val="143651"/>
+          </a:solidFill>
+          <a:ln/>
+        </p:spPr>
+      </p:sp>
+      <p:sp>
+        <p:nvSpPr>
+          <p:cNvPr id="17" name="Shape 15"/>
+          <p:cNvSpPr/>
+          <p:nvPr/>
+        </p:nvSpPr>
+        <p:spPr>
+          <a:xfrm>
+            <a:off x="749808" y="4718304"/>
+            <a:ext cx="365760" cy="365760"/>
+          </a:xfrm>
+          <a:prstGeom prst="ellipse">
+            <a:avLst/>
+          </a:prstGeom>
+          <a:solidFill>
+            <a:srgbClr val="6A1B9A"/>
+          </a:solidFill>
+          <a:ln/>
+          <a:effectLst>
+            <a:outerShdw sx="100000" sy="100000" kx="0" ky="0" algn="bl" rotWithShape="0" blurRad="88900" dist="25400" dir="5400000">
+              <a:srgbClr val="22303C">
+                <a:alpha val="12000"/>
+              </a:srgbClr>
+            </a:outerShdw>
+          </a:effectLst>
+        </p:spPr>
+      </p:sp>
+      <p:sp>
+        <p:nvSpPr>
+          <p:cNvPr id="18" name="Text 16"/>
+          <p:cNvSpPr/>
+          <p:nvPr/>
+        </p:nvSpPr>
+        <p:spPr>
+          <a:xfrm>
+            <a:off x="749808" y="4718304"/>
+            <a:ext cx="365760" cy="365760"/>
+          </a:xfrm>
+          <a:prstGeom prst="rect">
+            <a:avLst/>
+          </a:prstGeom>
+          <a:noFill/>
+          <a:ln/>
+        </p:spPr>
+        <p:txBody>
+          <a:bodyPr wrap="square" lIns="0" tIns="0" rIns="0" bIns="0" rtlCol="0" anchor="ctr"/>
+          <a:lstStyle/>
+          <a:p>
+            <a:pPr algn="ctr" indent="0" marL="0">
+              <a:buNone/>
+            </a:pPr>
+            <a:r>
+              <a:rPr lang="en-US" sz="1500" b="1" dirty="0">
+                <a:solidFill>
+                  <a:srgbClr val="FFFFFF"/>
+                </a:solidFill>
+                <a:latin typeface="Calibri" pitchFamily="34" charset="0"/>
+                <a:ea typeface="Calibri" pitchFamily="34" charset="-122"/>
+                <a:cs typeface="Calibri" pitchFamily="34" charset="-120"/>
+              </a:rPr>
+              <a:t>4</a:t>
+            </a:r>
+            <a:endParaRPr lang="en-US" sz="1500" dirty="0"/>
+          </a:p>
+        </p:txBody>
+      </p:sp>
+      <p:sp>
+        <p:nvSpPr>
+          <p:cNvPr id="19" name="Text 17"/>
+          <p:cNvSpPr/>
+          <p:nvPr/>
+        </p:nvSpPr>
+        <p:spPr>
+          <a:xfrm>
+            <a:off x="1280160" y="4480560"/>
+            <a:ext cx="10143439" cy="841248"/>
+          </a:xfrm>
+          <a:prstGeom prst="rect">
+            <a:avLst/>
+          </a:prstGeom>
+          <a:noFill/>
+          <a:ln/>
+        </p:spPr>
+        <p:txBody>
+          <a:bodyPr wrap="square" lIns="0" tIns="0" rIns="0" bIns="0" rtlCol="0" anchor="ctr"/>
+          <a:lstStyle/>
+          <a:p>
+            <a:pPr algn="l" indent="0" marL="0">
+              <a:buNone/>
+            </a:pPr>
+            <a:r>
+              <a:rPr lang="en-US" sz="1350" dirty="0">
+                <a:solidFill>
+                  <a:srgbClr val="E7EEF4"/>
+                </a:solidFill>
+                <a:latin typeface="Calibri" pitchFamily="34" charset="0"/>
+                <a:ea typeface="Calibri" pitchFamily="34" charset="-122"/>
+                <a:cs typeface="Calibri" pitchFamily="34" charset="-120"/>
+              </a:rPr>
+              <a:t>Low C3/C4 indicates active immune-complex disease; CH50/AH50 assess pathway integrity and deficiency.</a:t>
+            </a:r>
+            <a:endParaRPr lang="en-US" sz="1350" dirty="0"/>
+          </a:p>
+        </p:txBody>
+      </p:sp>
+      <p:sp>
+        <p:nvSpPr>
+          <p:cNvPr id="20" name="Shape 18"/>
+          <p:cNvSpPr/>
+          <p:nvPr/>
+        </p:nvSpPr>
+        <p:spPr>
+          <a:xfrm>
+            <a:off x="566928" y="5468112"/>
+            <a:ext cx="11057839" cy="841248"/>
+          </a:xfrm>
+          <a:prstGeom prst="roundRect">
+            <a:avLst>
+              <a:gd name="adj" fmla="val 7609"/>
+            </a:avLst>
+          </a:prstGeom>
+          <a:solidFill>
+            <a:srgbClr val="143651"/>
+          </a:solidFill>
+          <a:ln/>
+        </p:spPr>
+      </p:sp>
+      <p:sp>
+        <p:nvSpPr>
+          <p:cNvPr id="21" name="Shape 19"/>
+          <p:cNvSpPr/>
+          <p:nvPr/>
+        </p:nvSpPr>
+        <p:spPr>
+          <a:xfrm>
+            <a:off x="749808" y="5705856"/>
+            <a:ext cx="365760" cy="365760"/>
+          </a:xfrm>
+          <a:prstGeom prst="ellipse">
+            <a:avLst/>
+          </a:prstGeom>
+          <a:solidFill>
+            <a:srgbClr val="6A1B9A"/>
+          </a:solidFill>
+          <a:ln/>
+          <a:effectLst>
+            <a:outerShdw sx="100000" sy="100000" kx="0" ky="0" algn="bl" rotWithShape="0" blurRad="88900" dist="25400" dir="5400000">
+              <a:srgbClr val="22303C">
+                <a:alpha val="12000"/>
+              </a:srgbClr>
+            </a:outerShdw>
+          </a:effectLst>
+        </p:spPr>
+      </p:sp>
+      <p:sp>
+        <p:nvSpPr>
+          <p:cNvPr id="22" name="Text 20"/>
+          <p:cNvSpPr/>
+          <p:nvPr/>
+        </p:nvSpPr>
+        <p:spPr>
+          <a:xfrm>
+            <a:off x="749808" y="5705856"/>
+            <a:ext cx="365760" cy="365760"/>
+          </a:xfrm>
+          <a:prstGeom prst="rect">
+            <a:avLst/>
+          </a:prstGeom>
+          <a:noFill/>
+          <a:ln/>
+        </p:spPr>
+        <p:txBody>
+          <a:bodyPr wrap="square" lIns="0" tIns="0" rIns="0" bIns="0" rtlCol="0" anchor="ctr"/>
+          <a:lstStyle/>
+          <a:p>
+            <a:pPr algn="ctr" indent="0" marL="0">
+              <a:buNone/>
+            </a:pPr>
+            <a:r>
+              <a:rPr lang="en-US" sz="1500" b="1" dirty="0">
+                <a:solidFill>
+                  <a:srgbClr val="FFFFFF"/>
+                </a:solidFill>
+                <a:latin typeface="Calibri" pitchFamily="34" charset="0"/>
+                <a:ea typeface="Calibri" pitchFamily="34" charset="-122"/>
+                <a:cs typeface="Calibri" pitchFamily="34" charset="-120"/>
+              </a:rPr>
+              <a:t>5</a:t>
+            </a:r>
+            <a:endParaRPr lang="en-US" sz="1500" dirty="0"/>
+          </a:p>
+        </p:txBody>
+      </p:sp>
+      <p:sp>
+        <p:nvSpPr>
+          <p:cNvPr id="23" name="Text 21"/>
+          <p:cNvSpPr/>
+          <p:nvPr/>
+        </p:nvSpPr>
+        <p:spPr>
+          <a:xfrm>
+            <a:off x="1280160" y="5468112"/>
+            <a:ext cx="10143439" cy="841248"/>
+          </a:xfrm>
+          <a:prstGeom prst="rect">
+            <a:avLst/>
+          </a:prstGeom>
+          <a:noFill/>
+          <a:ln/>
+        </p:spPr>
+        <p:txBody>
+          <a:bodyPr wrap="square" lIns="0" tIns="0" rIns="0" bIns="0" rtlCol="0" anchor="ctr"/>
+          <a:lstStyle/>
+          <a:p>
+            <a:pPr algn="l" indent="0" marL="0">
+              <a:buNone/>
+            </a:pPr>
+            <a:r>
+              <a:rPr lang="en-US" sz="1350" dirty="0">
+                <a:solidFill>
+                  <a:srgbClr val="E7EEF4"/>
+                </a:solidFill>
+                <a:latin typeface="Calibri" pitchFamily="34" charset="0"/>
+                <a:ea typeface="Calibri" pitchFamily="34" charset="-122"/>
+                <a:cs typeface="Calibri" pitchFamily="34" charset="-120"/>
+              </a:rPr>
+              <a:t>ANCA: c-ANCA/PR3 and p-ANCA/MPO support vasculitis — confirm with antigen-specific testing and biopsy.</a:t>
+            </a:r>
+            <a:endParaRPr lang="en-US" sz="1350" dirty="0"/>
+          </a:p>
+        </p:txBody>
+      </p:sp>
+      <p:sp>
+        <p:nvSpPr>
+          <p:cNvPr id="24" name="Text 22"/>
+          <p:cNvSpPr/>
+          <p:nvPr/>
+        </p:nvSpPr>
+        <p:spPr>
+          <a:xfrm>
+            <a:off x="566928" y="6473952"/>
+            <a:ext cx="8229600" cy="274320"/>
+          </a:xfrm>
+          <a:prstGeom prst="rect">
+            <a:avLst/>
+          </a:prstGeom>
+          <a:noFill/>
+          <a:ln/>
+        </p:spPr>
+        <p:txBody>
+          <a:bodyPr wrap="square" lIns="0" tIns="0" rIns="0" bIns="0" rtlCol="0" anchor="ctr"/>
+          <a:lstStyle/>
+          <a:p>
+            <a:pPr indent="0" marL="0">
+              <a:buNone/>
+            </a:pPr>
+            <a:r>
+              <a:rPr lang="en-US" sz="850" dirty="0">
+                <a:solidFill>
+                  <a:srgbClr val="5E7488"/>
+                </a:solidFill>
+                <a:latin typeface="Calibri" pitchFamily="34" charset="0"/>
+                <a:ea typeface="Calibri" pitchFamily="34" charset="-122"/>
+                <a:cs typeface="Calibri" pitchFamily="34" charset="-120"/>
+              </a:rPr>
+              <a:t>Makassed General Hospital  ·  Department of Laboratory Medicine</a:t>
+            </a:r>
+            <a:endParaRPr lang="en-US" sz="850" dirty="0"/>
+          </a:p>
+        </p:txBody>
+      </p:sp>
+      <p:sp>
+        <p:nvSpPr>
+          <p:cNvPr id="25" name="Text 23"/>
+          <p:cNvSpPr/>
+          <p:nvPr/>
+        </p:nvSpPr>
+        <p:spPr>
+          <a:xfrm>
+            <a:off x="11002975" y="6473952"/>
+            <a:ext cx="640080" cy="274320"/>
+          </a:xfrm>
+          <a:prstGeom prst="rect">
+            <a:avLst/>
+          </a:prstGeom>
+          <a:noFill/>
+          <a:ln/>
+        </p:spPr>
+        <p:txBody>
+          <a:bodyPr wrap="square" lIns="0" tIns="0" rIns="0" bIns="0" rtlCol="0" anchor="ctr"/>
+          <a:lstStyle/>
+          <a:p>
+            <a:pPr algn="r" indent="0" marL="0">
+              <a:buNone/>
+            </a:pPr>
+            <a:r>
+              <a:rPr lang="en-US" sz="850" b="1" dirty="0">
+                <a:solidFill>
+                  <a:srgbClr val="6A1B9A"/>
+                </a:solidFill>
+                <a:latin typeface="Calibri" pitchFamily="34" charset="0"/>
+                <a:ea typeface="Calibri" pitchFamily="34" charset="-122"/>
+                <a:cs typeface="Calibri" pitchFamily="34" charset="-120"/>
+              </a:rPr>
+              <a:t>21</a:t>
+            </a:r>
+            <a:endParaRPr lang="en-US" sz="850" dirty="0"/>
+          </a:p>
+        </p:txBody>
+      </p:sp>
+    </p:spTree>
+  </p:cSld>
+  <p:clrMapOvr>
+    <a:masterClrMapping/>
+  </p:clrMapOvr>
+</p:sld>
+</file>
+
+<file path=ppt/slides/slide25.xml><?xml version="1.0" encoding="utf-8"?>
+<p:sld xmlns:a="http://schemas.openxmlformats.org/drawingml/2006/main" xmlns:r="http://schemas.openxmlformats.org/officeDocument/2006/relationships" xmlns:p="http://schemas.openxmlformats.org/presentationml/2006/main">
+  <p:cSld name="Slide 25">
+    <p:bg>
+      <p:bgPr>
+        <a:solidFill>
+          <a:srgbClr val="FFFFFF"/>
+        </a:solidFill>
+      </p:bgPr>
+    </p:bg>
+    <p:spTree>
+      <p:nvGrpSpPr>
+        <p:cNvPr id="1" name=""/>
+        <p:cNvGrpSpPr/>
+        <p:nvPr/>
+      </p:nvGrpSpPr>
+      <p:grpSpPr>
+        <a:xfrm>
+          <a:off x="0" y="0"/>
+          <a:ext cx="0" cy="0"/>
+          <a:chOff x="0" y="0"/>
+          <a:chExt cx="0" cy="0"/>
+        </a:xfrm>
+      </p:grpSpPr>
+      <p:sp>
+        <p:nvSpPr>
+          <p:cNvPr id="2" name="Text 0"/>
+          <p:cNvSpPr/>
+          <p:nvPr/>
+        </p:nvSpPr>
+        <p:spPr>
+          <a:xfrm>
+            <a:off x="566928" y="329184"/>
+            <a:ext cx="10515600" cy="310896"/>
+          </a:xfrm>
+          <a:prstGeom prst="rect">
+            <a:avLst/>
+          </a:prstGeom>
+          <a:noFill/>
+          <a:ln/>
+        </p:spPr>
+        <p:txBody>
+          <a:bodyPr wrap="square" lIns="0" tIns="0" rIns="0" bIns="0" rtlCol="0" anchor="ctr"/>
+          <a:lstStyle/>
+          <a:p>
+            <a:pPr algn="l" indent="0" marL="0">
+              <a:buNone/>
+            </a:pPr>
+            <a:r>
+              <a:rPr lang="en-US" sz="1100" b="1" spc="150" kern="0" dirty="0">
+                <a:solidFill>
+                  <a:srgbClr val="6A1B9A"/>
+                </a:solidFill>
+                <a:latin typeface="Calibri" pitchFamily="34" charset="0"/>
+                <a:ea typeface="Calibri" pitchFamily="34" charset="-122"/>
+                <a:cs typeface="Calibri" pitchFamily="34" charset="-120"/>
+              </a:rPr>
               <a:t>IMMUNOLOGY &amp; SEROLOGY   ·   REFERENCES &amp; FURTHER READING</a:t>
             </a:r>
             <a:endParaRPr lang="en-US" sz="1100" dirty="0"/>
@@ -9203,7 +11241,7 @@
                 <a:ea typeface="Calibri" pitchFamily="34" charset="-122"/>
                 <a:cs typeface="Calibri" pitchFamily="34" charset="-120"/>
               </a:rPr>
-              <a:t>1.   Rifai N, et al. Tietz Textbook of Clinical Chemistry, 6th ed. Elsevier, 2018.</a:t>
+              <a:t>1.   Rich RR, et al. Clinical Immunology: Principles and Practice, 5th ed.</a:t>
             </a:r>
             <a:endParaRPr lang="en-US" sz="1150" dirty="0"/>
           </a:p>
@@ -9223,7 +11261,7 @@
                 <a:ea typeface="Calibri" pitchFamily="34" charset="-122"/>
                 <a:cs typeface="Calibri" pitchFamily="34" charset="-120"/>
               </a:rPr>
-              <a:t>2.   Agmon-Levin N, et al. International recommendations for ANA testing. Ann Rheum Dis. 2014.</a:t>
+              <a:t>2.   Detrick B, et al. Manual of Molecular and Clinical Laboratory Immunology, 8th ed.</a:t>
             </a:r>
             <a:endParaRPr lang="en-US" sz="1150" dirty="0"/>
           </a:p>
@@ -9243,7 +11281,7 @@
                 <a:ea typeface="Calibri" pitchFamily="34" charset="-122"/>
                 <a:cs typeface="Calibri" pitchFamily="34" charset="-120"/>
               </a:rPr>
-              <a:t>3.   Bossuyt X, et al. ANCA testing guidelines (EUROIMMUN/consensus).</a:t>
+              <a:t>3.   ACR/EULAR classification criteria for SLE.</a:t>
             </a:r>
             <a:endParaRPr lang="en-US" sz="1150" dirty="0"/>
           </a:p>
@@ -9263,7 +11301,7 @@
                 <a:ea typeface="Calibri" pitchFamily="34" charset="-122"/>
                 <a:cs typeface="Calibri" pitchFamily="34" charset="-120"/>
               </a:rPr>
-              <a:t>4.   Miyakis S, et al. Revised classification criteria for antiphospholipid syndrome. J Thromb Haemost. 2006.</a:t>
+              <a:t>4.   Bossuyt X, et al. ANA testing harmonization. Nat Rev Rheumatol.</a:t>
             </a:r>
             <a:endParaRPr lang="en-US" sz="1150" dirty="0"/>
           </a:p>
@@ -9369,7 +11407,7 @@
                 <a:ea typeface="Calibri" pitchFamily="34" charset="-122"/>
                 <a:cs typeface="Calibri" pitchFamily="34" charset="-120"/>
               </a:rPr>
-              <a:t>18</a:t>
+              <a:t>22</a:t>
             </a:r>
             <a:endParaRPr lang="en-US" sz="850" dirty="0"/>
           </a:p>
@@ -9613,7 +11651,7 @@
                 <a:ea typeface="Calibri" pitchFamily="34" charset="-122"/>
                 <a:cs typeface="Calibri" pitchFamily="34" charset="-120"/>
               </a:rPr>
-              <a:t>Interpret ANA patterns and titers.</a:t>
+              <a:t>Describe ANA testing by indirect immunofluorescence and the meaning of titer and pattern.</a:t>
             </a:r>
             <a:endParaRPr lang="en-US" sz="1350" dirty="0"/>
           </a:p>
@@ -9747,7 +11785,7 @@
                 <a:ea typeface="Calibri" pitchFamily="34" charset="-122"/>
                 <a:cs typeface="Calibri" pitchFamily="34" charset="-120"/>
               </a:rPr>
-              <a:t>Use ENA and specific antibodies appropriately.</a:t>
+              <a:t>Map common IIF patterns to specific antibodies.</a:t>
             </a:r>
             <a:endParaRPr lang="en-US" sz="1350" dirty="0"/>
           </a:p>
@@ -9881,7 +11919,7 @@
                 <a:ea typeface="Calibri" pitchFamily="34" charset="-122"/>
                 <a:cs typeface="Calibri" pitchFamily="34" charset="-120"/>
               </a:rPr>
-              <a:t>Apply ANCA testing in vasculitis.</a:t>
+              <a:t>Interpret disease-specific autoantibodies (dsDNA, Smith, SSA/SSB, etc.).</a:t>
             </a:r>
             <a:endParaRPr lang="en-US" sz="1350" dirty="0"/>
           </a:p>
@@ -10015,7 +12053,7 @@
                 <a:ea typeface="Calibri" pitchFamily="34" charset="-122"/>
                 <a:cs typeface="Calibri" pitchFamily="34" charset="-120"/>
               </a:rPr>
-              <a:t>Interpret antiphospholipid and complement testing.</a:t>
+              <a:t>Use complement (C3/C4, CH50) in autoimmune disease.</a:t>
             </a:r>
             <a:endParaRPr lang="en-US" sz="1350" dirty="0"/>
           </a:p>
@@ -10149,7 +12187,7 @@
                 <a:ea typeface="Calibri" pitchFamily="34" charset="-122"/>
                 <a:cs typeface="Calibri" pitchFamily="34" charset="-120"/>
               </a:rPr>
-              <a:t>Recognize common overuse and misinterpretation.</a:t>
+              <a:t>Apply ANCA testing in vasculitis.</a:t>
             </a:r>
             <a:endParaRPr lang="en-US" sz="1350" dirty="0"/>
           </a:p>
@@ -10283,7 +12321,7 @@
                 <a:ea typeface="Calibri" pitchFamily="34" charset="-122"/>
                 <a:cs typeface="Calibri" pitchFamily="34" charset="-120"/>
               </a:rPr>
-              <a:t>Connect serologic patterns to specific diseases.</a:t>
+              <a:t>Avoid the pitfalls of testing low-probability patients.</a:t>
             </a:r>
             <a:endParaRPr lang="en-US" sz="1350" dirty="0"/>
           </a:p>
@@ -10633,7 +12671,7 @@
                 <a:ea typeface="Calibri" pitchFamily="34" charset="-122"/>
                 <a:cs typeface="Calibri" pitchFamily="34" charset="-120"/>
               </a:rPr>
-              <a:t>ANA testing</a:t>
+              <a:t>ANA screen</a:t>
             </a:r>
             <a:pPr algn="l" indent="0" marL="0">
               <a:buNone/>
@@ -10647,7 +12685,7 @@
                 <a:ea typeface="Calibri" pitchFamily="34" charset="-122"/>
                 <a:cs typeface="Calibri" pitchFamily="34" charset="-120"/>
               </a:rPr>
-              <a:t>   —  patterns, titers, pitfalls</a:t>
+              <a:t>   —  IIF, titer, pattern</a:t>
             </a:r>
             <a:endParaRPr lang="en-US" sz="1400" dirty="0"/>
           </a:p>
@@ -10774,7 +12812,7 @@
                 <a:ea typeface="Calibri" pitchFamily="34" charset="-122"/>
                 <a:cs typeface="Calibri" pitchFamily="34" charset="-120"/>
               </a:rPr>
-              <a:t>ENA &amp; specific antibodies</a:t>
+              <a:t>Specific antibodies</a:t>
             </a:r>
             <a:pPr algn="l" indent="0" marL="0">
               <a:buNone/>
@@ -10922,7 +12960,7 @@
                 <a:ea typeface="Calibri" pitchFamily="34" charset="-122"/>
                 <a:cs typeface="Calibri" pitchFamily="34" charset="-120"/>
               </a:rPr>
-              <a:t>ANCA &amp; vasculitis</a:t>
+              <a:t>Complement</a:t>
             </a:r>
             <a:pPr algn="l" indent="0" marL="0">
               <a:buNone/>
@@ -10936,7 +12974,7 @@
                 <a:ea typeface="Calibri" pitchFamily="34" charset="-122"/>
                 <a:cs typeface="Calibri" pitchFamily="34" charset="-120"/>
               </a:rPr>
-              <a:t>   —  PR3 vs MPO</a:t>
+              <a:t>   —  activity and monitoring</a:t>
             </a:r>
             <a:endParaRPr lang="en-US" sz="1400" dirty="0"/>
           </a:p>
@@ -11063,7 +13101,21 @@
                 <a:ea typeface="Calibri" pitchFamily="34" charset="-122"/>
                 <a:cs typeface="Calibri" pitchFamily="34" charset="-120"/>
               </a:rPr>
-              <a:t>Antiphospholipid &amp; complement</a:t>
+              <a:t>ANCA &amp; vasculitis</a:t>
+            </a:r>
+            <a:pPr algn="l" indent="0" marL="0">
+              <a:buNone/>
+            </a:pPr>
+            <a:r>
+              <a:rPr lang="en-US" sz="1200" dirty="0">
+                <a:solidFill>
+                  <a:srgbClr val="6B7B8A"/>
+                </a:solidFill>
+                <a:latin typeface="Calibri" pitchFamily="34" charset="0"/>
+                <a:ea typeface="Calibri" pitchFamily="34" charset="-122"/>
+                <a:cs typeface="Calibri" pitchFamily="34" charset="-120"/>
+              </a:rPr>
+              <a:t>   —  patterns and targets</a:t>
             </a:r>
             <a:endParaRPr lang="en-US" sz="1400" dirty="0"/>
           </a:p>
@@ -11197,7 +13249,7 @@
                 <a:ea typeface="Calibri" pitchFamily="34" charset="-122"/>
                 <a:cs typeface="Calibri" pitchFamily="34" charset="-120"/>
               </a:rPr>
-              <a:t>Cases &amp; board</a:t>
+              <a:t>Cases &amp; board review</a:t>
             </a:r>
             <a:endParaRPr lang="en-US" sz="1400" dirty="0"/>
           </a:p>
@@ -11496,7 +13548,7 @@
                 <a:ea typeface="Calibri" pitchFamily="34" charset="-122"/>
                 <a:cs typeface="Calibri" pitchFamily="34" charset="-120"/>
               </a:rPr>
-              <a:t>ANA and ENA</a:t>
+              <a:t>ANA &amp; Specific Antibodies</a:t>
             </a:r>
             <a:endParaRPr lang="en-US" sz="3800" dirty="0"/>
           </a:p>
@@ -11606,7 +13658,7 @@
                 <a:ea typeface="Calibri" pitchFamily="34" charset="-122"/>
                 <a:cs typeface="Calibri" pitchFamily="34" charset="-120"/>
               </a:rPr>
-              <a:t>ANA Immunofluorescence Patterns</a:t>
+              <a:t>ANA Indirect Immunofluorescence Patterns</a:t>
             </a:r>
             <a:endParaRPr lang="en-US" sz="3000" dirty="0"/>
           </a:p>
@@ -11620,12 +13672,12 @@
         </p:nvSpPr>
         <p:spPr>
           <a:xfrm>
-            <a:off x="1066648" y="1481328"/>
-            <a:ext cx="10058400" cy="3749040"/>
+            <a:off x="975208" y="1481328"/>
+            <a:ext cx="10241280" cy="4261104"/>
           </a:xfrm>
           <a:prstGeom prst="roundRect">
             <a:avLst>
-              <a:gd name="adj" fmla="val 2195"/>
+              <a:gd name="adj" fmla="val 1931"/>
             </a:avLst>
           </a:prstGeom>
           <a:solidFill>
@@ -11662,8 +13714,8 @@
         </p:blipFill>
         <p:spPr>
           <a:xfrm>
-            <a:off x="1194664" y="1609344"/>
-            <a:ext cx="9802368" cy="3493008"/>
+            <a:off x="1103224" y="1609344"/>
+            <a:ext cx="9985248" cy="4005072"/>
           </a:xfrm>
           <a:prstGeom prst="rect">
             <a:avLst/>
@@ -11678,7 +13730,7 @@
         </p:nvSpPr>
         <p:spPr>
           <a:xfrm>
-            <a:off x="566928" y="5303520"/>
+            <a:off x="566928" y="5815584"/>
             <a:ext cx="11057839" cy="365760"/>
           </a:xfrm>
           <a:prstGeom prst="rect">
@@ -11703,7 +13755,7 @@
                 <a:ea typeface="Calibri" pitchFamily="34" charset="-122"/>
                 <a:cs typeface="Calibri" pitchFamily="34" charset="-120"/>
               </a:rPr>
-              <a:t>Original schematic. The IFA pattern suggests target antigens and directs specific reflex testing.</a:t>
+              <a:t>Original schematic. The IIF pattern (homogeneous, speckled, centromere, nucleolar) suggests which specific antibodies to pursue.</a:t>
             </a:r>
             <a:endParaRPr lang="en-US" sz="1150" dirty="0"/>
           </a:p>
@@ -11919,7 +13971,7 @@
                 <a:ea typeface="Calibri" pitchFamily="34" charset="-122"/>
                 <a:cs typeface="Calibri" pitchFamily="34" charset="-120"/>
               </a:rPr>
-              <a:t>Reading ANA — and Its Limits</a:t>
+              <a:t>Reading the ANA</a:t>
             </a:r>
             <a:endParaRPr lang="en-US" sz="3000" dirty="0"/>
           </a:p>
@@ -11987,7 +14039,7 @@
                 <a:ea typeface="Calibri" pitchFamily="34" charset="-122"/>
                 <a:cs typeface="Calibri" pitchFamily="34" charset="-120"/>
               </a:rPr>
-              <a:t>PATTERN AND TITER</a:t>
+              <a:t>TITER AND PATTERN</a:t>
             </a:r>
             <a:endParaRPr lang="en-US" sz="1200" dirty="0"/>
           </a:p>
@@ -12030,7 +14082,7 @@
                 <a:ea typeface="Calibri" pitchFamily="34" charset="-122"/>
                 <a:cs typeface="Calibri" pitchFamily="34" charset="-120"/>
               </a:rPr>
-              <a:t>Indirect immunofluorescence on HEp-2 cells is the reference screen; report pattern and titer.</a:t>
+              <a:t>ANA is reported as a titer and a pattern; higher titers are more likely clinically meaningful.</a:t>
             </a:r>
             <a:endParaRPr lang="en-US" sz="1250" dirty="0"/>
           </a:p>
@@ -12051,7 +14103,7 @@
                 <a:ea typeface="Calibri" pitchFamily="34" charset="-122"/>
                 <a:cs typeface="Calibri" pitchFamily="34" charset="-120"/>
               </a:rPr>
-              <a:t>Homogeneous → dsDNA/histone (SLE, drug-induced); speckled → ENA; nucleolar → scleroderma; centromere → limited scleroderma.</a:t>
+              <a:t>Low-titer ANA occurs in healthy people, especially with age.</a:t>
             </a:r>
             <a:endParaRPr lang="en-US" sz="1250" dirty="0"/>
           </a:p>
@@ -12072,7 +14124,7 @@
                 <a:ea typeface="Calibri" pitchFamily="34" charset="-122"/>
                 <a:cs typeface="Calibri" pitchFamily="34" charset="-120"/>
               </a:rPr>
-              <a:t>Higher titers are more likely clinically significant.</a:t>
+              <a:t>IIF on HEp-2 cells is the reference method.</a:t>
             </a:r>
             <a:endParaRPr lang="en-US" sz="1250" dirty="0"/>
           </a:p>
@@ -12093,7 +14145,7 @@
                 <a:ea typeface="Calibri" pitchFamily="34" charset="-122"/>
                 <a:cs typeface="Calibri" pitchFamily="34" charset="-120"/>
               </a:rPr>
-              <a:t>Solid-phase ANA assays are alternatives but can miss some patterns.</a:t>
+              <a:t>A positive ANA must be interpreted with symptoms.</a:t>
             </a:r>
             <a:endParaRPr lang="en-US" sz="1250" dirty="0"/>
           </a:p>
@@ -12116,7 +14168,7 @@
             </a:avLst>
           </a:prstGeom>
           <a:solidFill>
-            <a:srgbClr val="F1E8F7"/>
+            <a:srgbClr val="F1E9F7"/>
           </a:solidFill>
           <a:ln/>
           <a:effectLst>
@@ -12161,7 +14213,7 @@
                 <a:ea typeface="Calibri" pitchFamily="34" charset="-122"/>
                 <a:cs typeface="Calibri" pitchFamily="34" charset="-120"/>
               </a:rPr>
-              <a:t>PITFALLS / OVERUSE</a:t>
+              <a:t>PATTERN → ANTIBODY</a:t>
             </a:r>
             <a:endParaRPr lang="en-US" sz="1200" dirty="0"/>
           </a:p>
@@ -12204,7 +14256,7 @@
                 <a:ea typeface="Calibri" pitchFamily="34" charset="-122"/>
                 <a:cs typeface="Calibri" pitchFamily="34" charset="-120"/>
               </a:rPr>
-              <a:t>Low-titer ANA is common in healthy people and rises with age — a positive ANA alone is not a diagnosis.</a:t>
+              <a:t>Homogeneous → dsDNA/histone; speckled → SSA/SSB, Sm, RNP.</a:t>
             </a:r>
             <a:endParaRPr lang="en-US" sz="1250" dirty="0"/>
           </a:p>
@@ -12225,7 +14277,7 @@
                 <a:ea typeface="Calibri" pitchFamily="34" charset="-122"/>
                 <a:cs typeface="Calibri" pitchFamily="34" charset="-120"/>
               </a:rPr>
-              <a:t>Order with a clinical indication; specificity comes from reflex antibodies.</a:t>
+              <a:t>Centromere → limited systemic sclerosis (CREST).</a:t>
             </a:r>
             <a:endParaRPr lang="en-US" sz="1250" dirty="0"/>
           </a:p>
@@ -12246,7 +14298,7 @@
                 <a:ea typeface="Calibri" pitchFamily="34" charset="-122"/>
                 <a:cs typeface="Calibri" pitchFamily="34" charset="-120"/>
               </a:rPr>
-              <a:t>Anti-dsDNA and anti-Sm are specific for SLE.</a:t>
+              <a:t>Nucleolar → systemic sclerosis.</a:t>
             </a:r>
             <a:endParaRPr lang="en-US" sz="1250" dirty="0"/>
           </a:p>
@@ -12267,7 +14319,7 @@
                 <a:ea typeface="Calibri" pitchFamily="34" charset="-122"/>
                 <a:cs typeface="Calibri" pitchFamily="34" charset="-120"/>
               </a:rPr>
-              <a:t>Do not repeat a known-positive ANA to follow disease activity.</a:t>
+              <a:t>Pattern guides the specific antibody panel.</a:t>
             </a:r>
             <a:endParaRPr lang="en-US" sz="1250" dirty="0"/>
           </a:p>
@@ -12444,7 +14496,7 @@
                 <a:ea typeface="Calibri" pitchFamily="34" charset="-122"/>
                 <a:cs typeface="Calibri" pitchFamily="34" charset="-120"/>
               </a:rPr>
-              <a:t>IMMUNOLOGY &amp; SEROLOGY   ·   ENA</a:t>
+              <a:t>IMMUNOLOGY &amp; SEROLOGY   ·   SPECIFIC ANTIBODIES</a:t>
             </a:r>
             <a:endParaRPr lang="en-US" sz="1100" dirty="0"/>
           </a:p>
@@ -12483,7 +14535,7 @@
                 <a:ea typeface="Calibri" pitchFamily="34" charset="-122"/>
                 <a:cs typeface="Calibri" pitchFamily="34" charset="-120"/>
               </a:rPr>
-              <a:t>Specific Antibodies and Their Associations</a:t>
+              <a:t>High-Yield Autoantibody Associations</a:t>
             </a:r>
             <a:endParaRPr lang="en-US" sz="3000" dirty="0"/>
           </a:p>
@@ -12512,10 +14564,11 @@
             <a:tbl>
               <a:tblPr/>
               <a:tblGrid>
-                <a:gridCol w="3108960"/>
-                <a:gridCol w="7946136"/>
+                <a:gridCol w="2468880"/>
+                <a:gridCol w="4206240"/>
+                <a:gridCol w="4288536"/>
               </a:tblGrid>
-              <a:tr h="475488">
+              <a:tr h="457200">
                 <a:tc>
                   <a:txBody>
                     <a:bodyPr/>
@@ -12652,8 +14705,76 @@
                     </a:solidFill>
                   </a:tcPr>
                 </a:tc>
+                <a:tc>
+                  <a:txBody>
+                    <a:bodyPr/>
+                    <a:lstStyle/>
+                    <a:p>
+                      <a:pPr algn="ctr" indent="0" marL="0">
+                        <a:buNone/>
+                      </a:pPr>
+                      <a:r>
+                        <a:rPr lang="en-US" sz="1200" b="1" dirty="0">
+                          <a:solidFill>
+                            <a:srgbClr val="FFFFFF"/>
+                          </a:solidFill>
+                          <a:latin typeface="Calibri" pitchFamily="34" charset="0"/>
+                          <a:ea typeface="Calibri" pitchFamily="34" charset="-122"/>
+                          <a:cs typeface="Calibri" pitchFamily="34" charset="-120"/>
+                        </a:rPr>
+                        <a:t>Note</a:t>
+                      </a:r>
+                      <a:endParaRPr lang="en-US" sz="1200" dirty="0">
+                        <a:latin typeface="Calibri" charset="0"/>
+                        <a:ea typeface="Calibri" charset="0"/>
+                        <a:cs typeface="Calibri" charset="0"/>
+                      </a:endParaRPr>
+                    </a:p>
+                  </a:txBody>
+                  <a:tcPr marL="91440" marR="91440" marT="45720" marB="45720" anchor="ctr">
+                    <a:lnL w="9525" cap="flat" cmpd="sng" algn="ctr">
+                      <a:solidFill>
+                        <a:srgbClr val="DCE4EC"/>
+                      </a:solidFill>
+                      <a:prstDash val="solid"/>
+                      <a:round/>
+                      <a:headEnd type="none" w="med" len="med"/>
+                      <a:tailEnd type="none" w="med" len="med"/>
+                    </a:lnL>
+                    <a:lnR w="9525" cap="flat" cmpd="sng" algn="ctr">
+                      <a:solidFill>
+                        <a:srgbClr val="DCE4EC"/>
+                      </a:solidFill>
+                      <a:prstDash val="solid"/>
+                      <a:round/>
+                      <a:headEnd type="none" w="med" len="med"/>
+                      <a:tailEnd type="none" w="med" len="med"/>
+                    </a:lnR>
+                    <a:lnT w="9525" cap="flat" cmpd="sng" algn="ctr">
+                      <a:solidFill>
+                        <a:srgbClr val="DCE4EC"/>
+                      </a:solidFill>
+                      <a:prstDash val="solid"/>
+                      <a:round/>
+                      <a:headEnd type="none" w="med" len="med"/>
+                      <a:tailEnd type="none" w="med" len="med"/>
+                    </a:lnT>
+                    <a:lnB w="9525" cap="flat" cmpd="sng" algn="ctr">
+                      <a:solidFill>
+                        <a:srgbClr val="DCE4EC"/>
+                      </a:solidFill>
+                      <a:prstDash val="solid"/>
+                      <a:round/>
+                      <a:headEnd type="none" w="med" len="med"/>
+                      <a:tailEnd type="none" w="med" len="med"/>
+                    </a:lnB>
+                    <a:solidFill>
+                      <a:srgbClr val="6A1B9A"/>
+                    </a:solidFill>
+                  </a:tcPr>
+                </a:tc>
               </a:tr>
-              <a:tr h="475488">
+              <a:tr h="457200">
                 <a:tc>
                   <a:txBody>
                     <a:bodyPr/>
@@ -12663,7 +14784,7 @@
                         <a:buNone/>
                       </a:pPr>
                       <a:r>
-                        <a:rPr lang="en-US" sz="1150" b="1" dirty="0">
+                        <a:rPr lang="en-US" sz="1100" b="1" dirty="0">
                           <a:solidFill>
                             <a:srgbClr val="1B2A38"/>
                           </a:solidFill>
@@ -12671,9 +14792,9 @@
                           <a:ea typeface="Calibri" pitchFamily="34" charset="-122"/>
                           <a:cs typeface="Calibri" pitchFamily="34" charset="-120"/>
                         </a:rPr>
-                        <a:t>Anti-dsDNA</a:t>
+                        <a:t>dsDNA</a:t>
                       </a:r>
-                      <a:endParaRPr lang="en-US" sz="1150" dirty="0">
+                      <a:endParaRPr lang="en-US" sz="1100" dirty="0">
                         <a:latin typeface="Calibri" charset="0"/>
                         <a:ea typeface="Calibri" charset="0"/>
                         <a:cs typeface="Calibri" charset="0"/>
@@ -12731,7 +14852,7 @@
                         <a:buNone/>
                       </a:pPr>
                       <a:r>
-                        <a:rPr lang="en-US" sz="1150" dirty="0">
+                        <a:rPr lang="en-US" sz="1100" dirty="0">
                           <a:solidFill>
                             <a:srgbClr val="33444F"/>
                           </a:solidFill>
@@ -12739,9 +14860,77 @@
                           <a:ea typeface="Calibri" pitchFamily="34" charset="-122"/>
                           <a:cs typeface="Calibri" pitchFamily="34" charset="-120"/>
                         </a:rPr>
-                        <a:t>SLE (specific; correlates with activity / nephritis)</a:t>
+                        <a:t>SLE (specific)</a:t>
                       </a:r>
-                      <a:endParaRPr lang="en-US" sz="1150" dirty="0">
+                      <a:endParaRPr lang="en-US" sz="1100" dirty="0">
+                        <a:latin typeface="Calibri" charset="0"/>
+                        <a:ea typeface="Calibri" charset="0"/>
+                        <a:cs typeface="Calibri" charset="0"/>
+                      </a:endParaRPr>
+                    </a:p>
+                  </a:txBody>
+                  <a:tcPr marL="91440" marR="91440" marT="45720" marB="45720" anchor="ctr">
+                    <a:lnL w="9525" cap="flat" cmpd="sng" algn="ctr">
+                      <a:solidFill>
+                        <a:srgbClr val="DCE4EC"/>
+                      </a:solidFill>
+                      <a:prstDash val="solid"/>
+                      <a:round/>
+                      <a:headEnd type="none" w="med" len="med"/>
+                      <a:tailEnd type="none" w="med" len="med"/>
+                    </a:lnL>
+                    <a:lnR w="9525" cap="flat" cmpd="sng" algn="ctr">
+                      <a:solidFill>
+                        <a:srgbClr val="DCE4EC"/>
+                      </a:solidFill>
+                      <a:prstDash val="solid"/>
+                      <a:round/>
+                      <a:headEnd type="none" w="med" len="med"/>
+                      <a:tailEnd type="none" w="med" len="med"/>
+                    </a:lnR>
+                    <a:lnT w="9525" cap="flat" cmpd="sng" algn="ctr">
+                      <a:solidFill>
+                        <a:srgbClr val="DCE4EC"/>
+                      </a:solidFill>
+                      <a:prstDash val="solid"/>
+                      <a:round/>
+                      <a:headEnd type="none" w="med" len="med"/>
+                      <a:tailEnd type="none" w="med" len="med"/>
+                    </a:lnT>
+                    <a:lnB w="9525" cap="flat" cmpd="sng" algn="ctr">
+                      <a:solidFill>
+                        <a:srgbClr val="DCE4EC"/>
+                      </a:solidFill>
+                      <a:prstDash val="solid"/>
+                      <a:round/>
+                      <a:headEnd type="none" w="med" len="med"/>
+                      <a:tailEnd type="none" w="med" len="med"/>
+                    </a:lnB>
+                    <a:solidFill>
+                      <a:srgbClr val="F3F7FA"/>
+                    </a:solidFill>
+                  </a:tcPr>
+                </a:tc>
+                <a:tc>
+                  <a:txBody>
+                    <a:bodyPr/>
+                    <a:lstStyle/>
+                    <a:p>
+                      <a:pPr algn="ctr" indent="0" marL="0">
+                        <a:buNone/>
+                      </a:pPr>
+                      <a:r>
+                        <a:rPr lang="en-US" sz="1100" dirty="0">
+                          <a:solidFill>
+                            <a:srgbClr val="33444F"/>
+                          </a:solidFill>
+                          <a:latin typeface="Calibri" pitchFamily="34" charset="0"/>
+                          <a:ea typeface="Calibri" pitchFamily="34" charset="-122"/>
+                          <a:cs typeface="Calibri" pitchFamily="34" charset="-120"/>
+                        </a:rPr>
+                        <a:t>Tracks activity/nephritis</a:t>
+                      </a:r>
+                      <a:endParaRPr lang="en-US" sz="1100" dirty="0">
                         <a:latin typeface="Calibri" charset="0"/>
                         <a:ea typeface="Calibri" charset="0"/>
                         <a:cs typeface="Calibri" charset="0"/>
@@ -12791,7 +14980,7 @@
                   </a:tcPr>
                 </a:tc>
               </a:tr>
-              <a:tr h="475488">
+              <a:tr h="457200">
                 <a:tc>
                   <a:txBody>
                     <a:bodyPr/>
@@ -12801,7 +14990,7 @@
                         <a:buNone/>
                       </a:pPr>
                       <a:r>
-                        <a:rPr lang="en-US" sz="1150" b="1" dirty="0">
+                        <a:rPr lang="en-US" sz="1100" b="1" dirty="0">
                           <a:solidFill>
                             <a:srgbClr val="1B2A38"/>
                           </a:solidFill>
@@ -12809,9 +14998,9 @@
                           <a:ea typeface="Calibri" pitchFamily="34" charset="-122"/>
                           <a:cs typeface="Calibri" pitchFamily="34" charset="-120"/>
                         </a:rPr>
-                        <a:t>Anti-Sm</a:t>
+                        <a:t>Anti-Smith</a:t>
                       </a:r>
-                      <a:endParaRPr lang="en-US" sz="1150" dirty="0">
+                      <a:endParaRPr lang="en-US" sz="1100" dirty="0">
                         <a:latin typeface="Calibri" charset="0"/>
                         <a:ea typeface="Calibri" charset="0"/>
                         <a:cs typeface="Calibri" charset="0"/>
@@ -12869,7 +15058,7 @@
                         <a:buNone/>
                       </a:pPr>
                       <a:r>
-                        <a:rPr lang="en-US" sz="1150" dirty="0">
+                        <a:rPr lang="en-US" sz="1100" dirty="0">
                           <a:solidFill>
                             <a:srgbClr val="33444F"/>
                           </a:solidFill>
@@ -12877,9 +15066,77 @@
                           <a:ea typeface="Calibri" pitchFamily="34" charset="-122"/>
                           <a:cs typeface="Calibri" pitchFamily="34" charset="-120"/>
                         </a:rPr>
-                        <a:t>SLE (highly specific)</a:t>
+                        <a:t>SLE (specific)</a:t>
                       </a:r>
-                      <a:endParaRPr lang="en-US" sz="1150" dirty="0">
+                      <a:endParaRPr lang="en-US" sz="1100" dirty="0">
+                        <a:latin typeface="Calibri" charset="0"/>
+                        <a:ea typeface="Calibri" charset="0"/>
+                        <a:cs typeface="Calibri" charset="0"/>
+                      </a:endParaRPr>
+                    </a:p>
+                  </a:txBody>
+                  <a:tcPr marL="91440" marR="91440" marT="45720" marB="45720" anchor="ctr">
+                    <a:lnL w="9525" cap="flat" cmpd="sng" algn="ctr">
+                      <a:solidFill>
+                        <a:srgbClr val="DCE4EC"/>
+                      </a:solidFill>
+                      <a:prstDash val="solid"/>
+                      <a:round/>
+                      <a:headEnd type="none" w="med" len="med"/>
+                      <a:tailEnd type="none" w="med" len="med"/>
+                    </a:lnL>
+                    <a:lnR w="9525" cap="flat" cmpd="sng" algn="ctr">
+                      <a:solidFill>
+                        <a:srgbClr val="DCE4EC"/>
+                      </a:solidFill>
+                      <a:prstDash val="solid"/>
+                      <a:round/>
+                      <a:headEnd type="none" w="med" len="med"/>
+                      <a:tailEnd type="none" w="med" len="med"/>
+                    </a:lnR>
+                    <a:lnT w="9525" cap="flat" cmpd="sng" algn="ctr">
+                      <a:solidFill>
+                        <a:srgbClr val="DCE4EC"/>
+                      </a:solidFill>
+                      <a:prstDash val="solid"/>
+                      <a:round/>
+                      <a:headEnd type="none" w="med" len="med"/>
+                      <a:tailEnd type="none" w="med" len="med"/>
+                    </a:lnT>
+                    <a:lnB w="9525" cap="flat" cmpd="sng" algn="ctr">
+                      <a:solidFill>
+                        <a:srgbClr val="DCE4EC"/>
+                      </a:solidFill>
+                      <a:prstDash val="solid"/>
+                      <a:round/>
+                      <a:headEnd type="none" w="med" len="med"/>
+                      <a:tailEnd type="none" w="med" len="med"/>
+                    </a:lnB>
+                    <a:solidFill>
+                      <a:srgbClr val="FFFFFF"/>
+                    </a:solidFill>
+                  </a:tcPr>
+                </a:tc>
+                <a:tc>
+                  <a:txBody>
+                    <a:bodyPr/>
+                    <a:lstStyle/>
+                    <a:p>
+                      <a:pPr algn="ctr" indent="0" marL="0">
+                        <a:buNone/>
+                      </a:pPr>
+                      <a:r>
+                        <a:rPr lang="en-US" sz="1100" dirty="0">
+                          <a:solidFill>
+                            <a:srgbClr val="33444F"/>
+                          </a:solidFill>
+                          <a:latin typeface="Calibri" pitchFamily="34" charset="0"/>
+                          <a:ea typeface="Calibri" pitchFamily="34" charset="-122"/>
+                          <a:cs typeface="Calibri" pitchFamily="34" charset="-120"/>
+                        </a:rPr>
+                        <a:t>Low sensitivity</a:t>
+                      </a:r>
+                      <a:endParaRPr lang="en-US" sz="1100" dirty="0">
                         <a:latin typeface="Calibri" charset="0"/>
                         <a:ea typeface="Calibri" charset="0"/>
                         <a:cs typeface="Calibri" charset="0"/>
@@ -12929,7 +15186,7 @@
                   </a:tcPr>
                 </a:tc>
               </a:tr>
-              <a:tr h="475488">
+              <a:tr h="457200">
                 <a:tc>
                   <a:txBody>
                     <a:bodyPr/>
@@ -12939,7 +15196,7 @@
                         <a:buNone/>
                       </a:pPr>
                       <a:r>
-                        <a:rPr lang="en-US" sz="1150" b="1" dirty="0">
+                        <a:rPr lang="en-US" sz="1100" b="1" dirty="0">
                           <a:solidFill>
                             <a:srgbClr val="1B2A38"/>
                           </a:solidFill>
@@ -12947,9 +15204,9 @@
                           <a:ea typeface="Calibri" pitchFamily="34" charset="-122"/>
                           <a:cs typeface="Calibri" pitchFamily="34" charset="-120"/>
                         </a:rPr>
-                        <a:t>Anti-SSA/Ro, SSB/La</a:t>
+                        <a:t>SSA/SSB</a:t>
                       </a:r>
-                      <a:endParaRPr lang="en-US" sz="1150" dirty="0">
+                      <a:endParaRPr lang="en-US" sz="1100" dirty="0">
                         <a:latin typeface="Calibri" charset="0"/>
                         <a:ea typeface="Calibri" charset="0"/>
                         <a:cs typeface="Calibri" charset="0"/>
@@ -13007,7 +15264,7 @@
                         <a:buNone/>
                       </a:pPr>
                       <a:r>
-                        <a:rPr lang="en-US" sz="1150" dirty="0">
+                        <a:rPr lang="en-US" sz="1100" dirty="0">
                           <a:solidFill>
                             <a:srgbClr val="33444F"/>
                           </a:solidFill>
@@ -13015,9 +15272,77 @@
                           <a:ea typeface="Calibri" pitchFamily="34" charset="-122"/>
                           <a:cs typeface="Calibri" pitchFamily="34" charset="-120"/>
                         </a:rPr>
-                        <a:t>Sjögren, SLE, neonatal lupus / congenital heart block</a:t>
+                        <a:t>Sjögren, SLE</a:t>
                       </a:r>
-                      <a:endParaRPr lang="en-US" sz="1150" dirty="0">
+                      <a:endParaRPr lang="en-US" sz="1100" dirty="0">
+                        <a:latin typeface="Calibri" charset="0"/>
+                        <a:ea typeface="Calibri" charset="0"/>
+                        <a:cs typeface="Calibri" charset="0"/>
+                      </a:endParaRPr>
+                    </a:p>
+                  </a:txBody>
+                  <a:tcPr marL="91440" marR="91440" marT="45720" marB="45720" anchor="ctr">
+                    <a:lnL w="9525" cap="flat" cmpd="sng" algn="ctr">
+                      <a:solidFill>
+                        <a:srgbClr val="DCE4EC"/>
+                      </a:solidFill>
+                      <a:prstDash val="solid"/>
+                      <a:round/>
+                      <a:headEnd type="none" w="med" len="med"/>
+                      <a:tailEnd type="none" w="med" len="med"/>
+                    </a:lnL>
+                    <a:lnR w="9525" cap="flat" cmpd="sng" algn="ctr">
+                      <a:solidFill>
+                        <a:srgbClr val="DCE4EC"/>
+                      </a:solidFill>
+                      <a:prstDash val="solid"/>
+                      <a:round/>
+                      <a:headEnd type="none" w="med" len="med"/>
+                      <a:tailEnd type="none" w="med" len="med"/>
+                    </a:lnR>
+                    <a:lnT w="9525" cap="flat" cmpd="sng" algn="ctr">
+                      <a:solidFill>
+                        <a:srgbClr val="DCE4EC"/>
+                      </a:solidFill>
+                      <a:prstDash val="solid"/>
+                      <a:round/>
+                      <a:headEnd type="none" w="med" len="med"/>
+                      <a:tailEnd type="none" w="med" len="med"/>
+                    </a:lnT>
+                    <a:lnB w="9525" cap="flat" cmpd="sng" algn="ctr">
+                      <a:solidFill>
+                        <a:srgbClr val="DCE4EC"/>
+                      </a:solidFill>
+                      <a:prstDash val="solid"/>
+                      <a:round/>
+                      <a:headEnd type="none" w="med" len="med"/>
+                      <a:tailEnd type="none" w="med" len="med"/>
+                    </a:lnB>
+                    <a:solidFill>
+                      <a:srgbClr val="F3F7FA"/>
+                    </a:solidFill>
+                  </a:tcPr>
+                </a:tc>
+                <a:tc>
+                  <a:txBody>
+                    <a:bodyPr/>
+                    <a:lstStyle/>
+                    <a:p>
+                      <a:pPr algn="ctr" indent="0" marL="0">
+                        <a:buNone/>
+                      </a:pPr>
+                      <a:r>
+                        <a:rPr lang="en-US" sz="1100" dirty="0">
+                          <a:solidFill>
+                            <a:srgbClr val="33444F"/>
+                          </a:solidFill>
+                          <a:latin typeface="Calibri" pitchFamily="34" charset="0"/>
+                          <a:ea typeface="Calibri" pitchFamily="34" charset="-122"/>
+                          <a:cs typeface="Calibri" pitchFamily="34" charset="-120"/>
+                        </a:rPr>
+                        <a:t>Neonatal lupus / heart block</a:t>
+                      </a:r>
+                      <a:endParaRPr lang="en-US" sz="1100" dirty="0">
                         <a:latin typeface="Calibri" charset="0"/>
                         <a:ea typeface="Calibri" charset="0"/>
                         <a:cs typeface="Calibri" charset="0"/>
@@ -13067,7 +15392,7 @@
                   </a:tcPr>
                 </a:tc>
               </a:tr>
-              <a:tr h="475488">
+              <a:tr h="457200">
                 <a:tc>
                   <a:txBody>
                     <a:bodyPr/>
@@ -13077,7 +15402,7 @@
                         <a:buNone/>
                       </a:pPr>
                       <a:r>
-                        <a:rPr lang="en-US" sz="1150" b="1" dirty="0">
+                        <a:rPr lang="en-US" sz="1100" b="1" dirty="0">
                           <a:solidFill>
                             <a:srgbClr val="1B2A38"/>
                           </a:solidFill>
@@ -13085,9 +15410,9 @@
                           <a:ea typeface="Calibri" pitchFamily="34" charset="-122"/>
                           <a:cs typeface="Calibri" pitchFamily="34" charset="-120"/>
                         </a:rPr>
-                        <a:t>Anti-Scl-70 (topoisomerase I)</a:t>
+                        <a:t>Scl-70</a:t>
                       </a:r>
-                      <a:endParaRPr lang="en-US" sz="1150" dirty="0">
+                      <a:endParaRPr lang="en-US" sz="1100" dirty="0">
                         <a:latin typeface="Calibri" charset="0"/>
                         <a:ea typeface="Calibri" charset="0"/>
                         <a:cs typeface="Calibri" charset="0"/>
@@ -13145,7 +15470,7 @@
                         <a:buNone/>
                       </a:pPr>
                       <a:r>
-                        <a:rPr lang="en-US" sz="1150" dirty="0">
+                        <a:rPr lang="en-US" sz="1100" dirty="0">
                           <a:solidFill>
                             <a:srgbClr val="33444F"/>
                           </a:solidFill>
@@ -13155,7 +15480,75 @@
                         </a:rPr>
                         <a:t>Diffuse systemic sclerosis</a:t>
                       </a:r>
-                      <a:endParaRPr lang="en-US" sz="1150" dirty="0">
+                      <a:endParaRPr lang="en-US" sz="1100" dirty="0">
+                        <a:latin typeface="Calibri" charset="0"/>
+                        <a:ea typeface="Calibri" charset="0"/>
+                        <a:cs typeface="Calibri" charset="0"/>
+                      </a:endParaRPr>
+                    </a:p>
+                  </a:txBody>
+                  <a:tcPr marL="91440" marR="91440" marT="45720" marB="45720" anchor="ctr">
+                    <a:lnL w="9525" cap="flat" cmpd="sng" algn="ctr">
+                      <a:solidFill>
+                        <a:srgbClr val="DCE4EC"/>
+                      </a:solidFill>
+                      <a:prstDash val="solid"/>
+                      <a:round/>
+                      <a:headEnd type="none" w="med" len="med"/>
+                      <a:tailEnd type="none" w="med" len="med"/>
+                    </a:lnL>
+                    <a:lnR w="9525" cap="flat" cmpd="sng" algn="ctr">
+                      <a:solidFill>
+                        <a:srgbClr val="DCE4EC"/>
+                      </a:solidFill>
+                      <a:prstDash val="solid"/>
+                      <a:round/>
+                      <a:headEnd type="none" w="med" len="med"/>
+                      <a:tailEnd type="none" w="med" len="med"/>
+                    </a:lnR>
+                    <a:lnT w="9525" cap="flat" cmpd="sng" algn="ctr">
+                      <a:solidFill>
+                        <a:srgbClr val="DCE4EC"/>
+                      </a:solidFill>
+                      <a:prstDash val="solid"/>
+                      <a:round/>
+                      <a:headEnd type="none" w="med" len="med"/>
+                      <a:tailEnd type="none" w="med" len="med"/>
+                    </a:lnT>
+                    <a:lnB w="9525" cap="flat" cmpd="sng" algn="ctr">
+                      <a:solidFill>
+                        <a:srgbClr val="DCE4EC"/>
+                      </a:solidFill>
+                      <a:prstDash val="solid"/>
+                      <a:round/>
+                      <a:headEnd type="none" w="med" len="med"/>
+                      <a:tailEnd type="none" w="med" len="med"/>
+                    </a:lnB>
+                    <a:solidFill>
+                      <a:srgbClr val="FFFFFF"/>
+                    </a:solidFill>
+                  </a:tcPr>
+                </a:tc>
+                <a:tc>
+                  <a:txBody>
+                    <a:bodyPr/>
+                    <a:lstStyle/>
+                    <a:p>
+                      <a:pPr algn="ctr" indent="0" marL="0">
+                        <a:buNone/>
+                      </a:pPr>
+                      <a:r>
+                        <a:rPr lang="en-US" sz="1100" dirty="0">
+                          <a:solidFill>
+                            <a:srgbClr val="33444F"/>
+                          </a:solidFill>
+                          <a:latin typeface="Calibri" pitchFamily="34" charset="0"/>
+                          <a:ea typeface="Calibri" pitchFamily="34" charset="-122"/>
+                          <a:cs typeface="Calibri" pitchFamily="34" charset="-120"/>
+                        </a:rPr>
+                        <a:t>Interstitial lung disease</a:t>
+                      </a:r>
+                      <a:endParaRPr lang="en-US" sz="1100" dirty="0">
                         <a:latin typeface="Calibri" charset="0"/>
                         <a:ea typeface="Calibri" charset="0"/>
                         <a:cs typeface="Calibri" charset="0"/>
@@ -13205,7 +15598,7 @@
                   </a:tcPr>
                 </a:tc>
               </a:tr>
-              <a:tr h="475488">
+              <a:tr h="457200">
                 <a:tc>
                   <a:txBody>
                     <a:bodyPr/>
@@ -13215,7 +15608,7 @@
                         <a:buNone/>
                       </a:pPr>
                       <a:r>
-                        <a:rPr lang="en-US" sz="1150" b="1" dirty="0">
+                        <a:rPr lang="en-US" sz="1100" b="1" dirty="0">
                           <a:solidFill>
                             <a:srgbClr val="1B2A38"/>
                           </a:solidFill>
@@ -13223,9 +15616,9 @@
                           <a:ea typeface="Calibri" pitchFamily="34" charset="-122"/>
                           <a:cs typeface="Calibri" pitchFamily="34" charset="-120"/>
                         </a:rPr>
-                        <a:t>Anti-centromere</a:t>
+                        <a:t>Centromere</a:t>
                       </a:r>
-                      <a:endParaRPr lang="en-US" sz="1150" dirty="0">
+                      <a:endParaRPr lang="en-US" sz="1100" dirty="0">
                         <a:latin typeface="Calibri" charset="0"/>
                         <a:ea typeface="Calibri" charset="0"/>
                         <a:cs typeface="Calibri" charset="0"/>
@@ -13283,7 +15676,7 @@
                         <a:buNone/>
                       </a:pPr>
                       <a:r>
-                        <a:rPr lang="en-US" sz="1150" dirty="0">
+                        <a:rPr lang="en-US" sz="1100" dirty="0">
                           <a:solidFill>
                             <a:srgbClr val="33444F"/>
                           </a:solidFill>
@@ -13291,9 +15684,77 @@
                           <a:ea typeface="Calibri" pitchFamily="34" charset="-122"/>
                           <a:cs typeface="Calibri" pitchFamily="34" charset="-120"/>
                         </a:rPr>
-                        <a:t>Limited cutaneous systemic sclerosis (CREST)</a:t>
+                        <a:t>Limited SSc (CREST)</a:t>
                       </a:r>
-                      <a:endParaRPr lang="en-US" sz="1150" dirty="0">
+                      <a:endParaRPr lang="en-US" sz="1100" dirty="0">
+                        <a:latin typeface="Calibri" charset="0"/>
+                        <a:ea typeface="Calibri" charset="0"/>
+                        <a:cs typeface="Calibri" charset="0"/>
+                      </a:endParaRPr>
+                    </a:p>
+                  </a:txBody>
+                  <a:tcPr marL="91440" marR="91440" marT="45720" marB="45720" anchor="ctr">
+                    <a:lnL w="9525" cap="flat" cmpd="sng" algn="ctr">
+                      <a:solidFill>
+                        <a:srgbClr val="DCE4EC"/>
+                      </a:solidFill>
+                      <a:prstDash val="solid"/>
+                      <a:round/>
+                      <a:headEnd type="none" w="med" len="med"/>
+                      <a:tailEnd type="none" w="med" len="med"/>
+                    </a:lnL>
+                    <a:lnR w="9525" cap="flat" cmpd="sng" algn="ctr">
+                      <a:solidFill>
+                        <a:srgbClr val="DCE4EC"/>
+                      </a:solidFill>
+                      <a:prstDash val="solid"/>
+                      <a:round/>
+                      <a:headEnd type="none" w="med" len="med"/>
+                      <a:tailEnd type="none" w="med" len="med"/>
+                    </a:lnR>
+                    <a:lnT w="9525" cap="flat" cmpd="sng" algn="ctr">
+                      <a:solidFill>
+                        <a:srgbClr val="DCE4EC"/>
+                      </a:solidFill>
+                      <a:prstDash val="solid"/>
+                      <a:round/>
+                      <a:headEnd type="none" w="med" len="med"/>
+                      <a:tailEnd type="none" w="med" len="med"/>
+                    </a:lnT>
+                    <a:lnB w="9525" cap="flat" cmpd="sng" algn="ctr">
+                      <a:solidFill>
+                        <a:srgbClr val="DCE4EC"/>
+                      </a:solidFill>
+                      <a:prstDash val="solid"/>
+                      <a:round/>
+                      <a:headEnd type="none" w="med" len="med"/>
+                      <a:tailEnd type="none" w="med" len="med"/>
+                    </a:lnB>
+                    <a:solidFill>
+                      <a:srgbClr val="F3F7FA"/>
+                    </a:solidFill>
+                  </a:tcPr>
+                </a:tc>
+                <a:tc>
+                  <a:txBody>
+                    <a:bodyPr/>
+                    <a:lstStyle/>
+                    <a:p>
+                      <a:pPr algn="ctr" indent="0" marL="0">
+                        <a:buNone/>
+                      </a:pPr>
+                      <a:r>
+                        <a:rPr lang="en-US" sz="1100" dirty="0">
+                          <a:solidFill>
+                            <a:srgbClr val="33444F"/>
+                          </a:solidFill>
+                          <a:latin typeface="Calibri" pitchFamily="34" charset="0"/>
+                          <a:ea typeface="Calibri" pitchFamily="34" charset="-122"/>
+                          <a:cs typeface="Calibri" pitchFamily="34" charset="-120"/>
+                        </a:rPr>
+                        <a:t>—</a:t>
+                      </a:r>
+                      <a:endParaRPr lang="en-US" sz="1100" dirty="0">
                         <a:latin typeface="Calibri" charset="0"/>
                         <a:ea typeface="Calibri" charset="0"/>
                         <a:cs typeface="Calibri" charset="0"/>
@@ -13343,7 +15804,7 @@
                   </a:tcPr>
                 </a:tc>
               </a:tr>
-              <a:tr h="475488">
+              <a:tr h="457200">
                 <a:tc>
                   <a:txBody>
                     <a:bodyPr/>
@@ -13353,7 +15814,7 @@
                         <a:buNone/>
                       </a:pPr>
                       <a:r>
-                        <a:rPr lang="en-US" sz="1150" b="1" dirty="0">
+                        <a:rPr lang="en-US" sz="1100" b="1" dirty="0">
                           <a:solidFill>
                             <a:srgbClr val="1B2A38"/>
                           </a:solidFill>
@@ -13361,9 +15822,9 @@
                           <a:ea typeface="Calibri" pitchFamily="34" charset="-122"/>
                           <a:cs typeface="Calibri" pitchFamily="34" charset="-120"/>
                         </a:rPr>
-                        <a:t>Anti-Jo-1</a:t>
+                        <a:t>Jo-1</a:t>
                       </a:r>
-                      <a:endParaRPr lang="en-US" sz="1150" dirty="0">
+                      <a:endParaRPr lang="en-US" sz="1100" dirty="0">
                         <a:latin typeface="Calibri" charset="0"/>
                         <a:ea typeface="Calibri" charset="0"/>
                         <a:cs typeface="Calibri" charset="0"/>
@@ -13421,7 +15882,7 @@
                         <a:buNone/>
                       </a:pPr>
                       <a:r>
-                        <a:rPr lang="en-US" sz="1150" dirty="0">
+                        <a:rPr lang="en-US" sz="1100" dirty="0">
                           <a:solidFill>
                             <a:srgbClr val="33444F"/>
                           </a:solidFill>
@@ -13429,9 +15890,77 @@
                           <a:ea typeface="Calibri" pitchFamily="34" charset="-122"/>
                           <a:cs typeface="Calibri" pitchFamily="34" charset="-120"/>
                         </a:rPr>
-                        <a:t>Antisynthetase / myositis</a:t>
+                        <a:t>Polymyositis</a:t>
                       </a:r>
-                      <a:endParaRPr lang="en-US" sz="1150" dirty="0">
+                      <a:endParaRPr lang="en-US" sz="1100" dirty="0">
+                        <a:latin typeface="Calibri" charset="0"/>
+                        <a:ea typeface="Calibri" charset="0"/>
+                        <a:cs typeface="Calibri" charset="0"/>
+                      </a:endParaRPr>
+                    </a:p>
+                  </a:txBody>
+                  <a:tcPr marL="91440" marR="91440" marT="45720" marB="45720" anchor="ctr">
+                    <a:lnL w="9525" cap="flat" cmpd="sng" algn="ctr">
+                      <a:solidFill>
+                        <a:srgbClr val="DCE4EC"/>
+                      </a:solidFill>
+                      <a:prstDash val="solid"/>
+                      <a:round/>
+                      <a:headEnd type="none" w="med" len="med"/>
+                      <a:tailEnd type="none" w="med" len="med"/>
+                    </a:lnL>
+                    <a:lnR w="9525" cap="flat" cmpd="sng" algn="ctr">
+                      <a:solidFill>
+                        <a:srgbClr val="DCE4EC"/>
+                      </a:solidFill>
+                      <a:prstDash val="solid"/>
+                      <a:round/>
+                      <a:headEnd type="none" w="med" len="med"/>
+                      <a:tailEnd type="none" w="med" len="med"/>
+                    </a:lnR>
+                    <a:lnT w="9525" cap="flat" cmpd="sng" algn="ctr">
+                      <a:solidFill>
+                        <a:srgbClr val="DCE4EC"/>
+                      </a:solidFill>
+                      <a:prstDash val="solid"/>
+                      <a:round/>
+                      <a:headEnd type="none" w="med" len="med"/>
+                      <a:tailEnd type="none" w="med" len="med"/>
+                    </a:lnT>
+                    <a:lnB w="9525" cap="flat" cmpd="sng" algn="ctr">
+                      <a:solidFill>
+                        <a:srgbClr val="DCE4EC"/>
+                      </a:solidFill>
+                      <a:prstDash val="solid"/>
+                      <a:round/>
+                      <a:headEnd type="none" w="med" len="med"/>
+                      <a:tailEnd type="none" w="med" len="med"/>
+                    </a:lnB>
+                    <a:solidFill>
+                      <a:srgbClr val="FFFFFF"/>
+                    </a:solidFill>
+                  </a:tcPr>
+                </a:tc>
+                <a:tc>
+                  <a:txBody>
+                    <a:bodyPr/>
+                    <a:lstStyle/>
+                    <a:p>
+                      <a:pPr algn="ctr" indent="0" marL="0">
+                        <a:buNone/>
+                      </a:pPr>
+                      <a:r>
+                        <a:rPr lang="en-US" sz="1100" dirty="0">
+                          <a:solidFill>
+                            <a:srgbClr val="33444F"/>
+                          </a:solidFill>
+                          <a:latin typeface="Calibri" pitchFamily="34" charset="0"/>
+                          <a:ea typeface="Calibri" pitchFamily="34" charset="-122"/>
+                          <a:cs typeface="Calibri" pitchFamily="34" charset="-120"/>
+                        </a:rPr>
+                        <a:t>Antisynthetase syndrome</a:t>
+                      </a:r>
+                      <a:endParaRPr lang="en-US" sz="1100" dirty="0">
                         <a:latin typeface="Calibri" charset="0"/>
                         <a:ea typeface="Calibri" charset="0"/>
                         <a:cs typeface="Calibri" charset="0"/>
@@ -13481,144 +16010,6 @@
                   </a:tcPr>
                 </a:tc>
               </a:tr>
-              <a:tr h="475488">
-                <a:tc>
-                  <a:txBody>
-                    <a:bodyPr/>
-                    <a:lstStyle/>
-                    <a:p>
-                      <a:pPr algn="l" indent="0" marL="0">
-                        <a:buNone/>
-                      </a:pPr>
-                      <a:r>
-                        <a:rPr lang="en-US" sz="1150" b="1" dirty="0">
-                          <a:solidFill>
-                            <a:srgbClr val="1B2A38"/>
-                          </a:solidFill>
-                          <a:latin typeface="Calibri" pitchFamily="34" charset="0"/>
-                          <a:ea typeface="Calibri" pitchFamily="34" charset="-122"/>
-                          <a:cs typeface="Calibri" pitchFamily="34" charset="-120"/>
-                        </a:rPr>
-                        <a:t>Anti-U1 RNP</a:t>
-                      </a:r>
-                      <a:endParaRPr lang="en-US" sz="1150" dirty="0">
-                        <a:latin typeface="Calibri" charset="0"/>
-                        <a:ea typeface="Calibri" charset="0"/>
-                        <a:cs typeface="Calibri" charset="0"/>
-                      </a:endParaRPr>
-                    </a:p>
-                  </a:txBody>
-                  <a:tcPr marL="91440" marR="91440" marT="45720" marB="45720" anchor="ctr">
-                    <a:lnL w="9525" cap="flat" cmpd="sng" algn="ctr">
-                      <a:solidFill>
-                        <a:srgbClr val="DCE4EC"/>
-                      </a:solidFill>
-                      <a:prstDash val="solid"/>
-                      <a:round/>
-                      <a:headEnd type="none" w="med" len="med"/>
-                      <a:tailEnd type="none" w="med" len="med"/>
-                    </a:lnL>
-                    <a:lnR w="9525" cap="flat" cmpd="sng" algn="ctr">
-                      <a:solidFill>
-                        <a:srgbClr val="DCE4EC"/>
-                      </a:solidFill>
-                      <a:prstDash val="solid"/>
-                      <a:round/>
-                      <a:headEnd type="none" w="med" len="med"/>
-                      <a:tailEnd type="none" w="med" len="med"/>
-                    </a:lnR>
-                    <a:lnT w="9525" cap="flat" cmpd="sng" algn="ctr">
-                      <a:solidFill>
-                        <a:srgbClr val="DCE4EC"/>
-                      </a:solidFill>
-                      <a:prstDash val="solid"/>
-                      <a:round/>
-                      <a:headEnd type="none" w="med" len="med"/>
-                      <a:tailEnd type="none" w="med" len="med"/>
-                    </a:lnT>
-                    <a:lnB w="9525" cap="flat" cmpd="sng" algn="ctr">
-                      <a:solidFill>
-                        <a:srgbClr val="DCE4EC"/>
-                      </a:solidFill>
-                      <a:prstDash val="solid"/>
-                      <a:round/>
-                      <a:headEnd type="none" w="med" len="med"/>
-                      <a:tailEnd type="none" w="med" len="med"/>
-                    </a:lnB>
-                    <a:solidFill>
-                      <a:srgbClr val="F3F7FA"/>
-                    </a:solidFill>
-                  </a:tcPr>
-                </a:tc>
-                <a:tc>
-                  <a:txBody>
-                    <a:bodyPr/>
-                    <a:lstStyle/>
-                    <a:p>
-                      <a:pPr algn="ctr" indent="0" marL="0">
-                        <a:buNone/>
-                      </a:pPr>
-                      <a:r>
-                        <a:rPr lang="en-US" sz="1150" dirty="0">
-                          <a:solidFill>
-                            <a:srgbClr val="33444F"/>
-                          </a:solidFill>
-                          <a:latin typeface="Calibri" pitchFamily="34" charset="0"/>
-                          <a:ea typeface="Calibri" pitchFamily="34" charset="-122"/>
-                          <a:cs typeface="Calibri" pitchFamily="34" charset="-120"/>
-                        </a:rPr>
-                        <a:t>Mixed connective tissue disease</a:t>
-                      </a:r>
-                      <a:endParaRPr lang="en-US" sz="1150" dirty="0">
-                        <a:latin typeface="Calibri" charset="0"/>
-                        <a:ea typeface="Calibri" charset="0"/>
-                        <a:cs typeface="Calibri" charset="0"/>
-                      </a:endParaRPr>
-                    </a:p>
-                  </a:txBody>
-                  <a:tcPr marL="91440" marR="91440" marT="45720" marB="45720" anchor="ctr">
-                    <a:lnL w="9525" cap="flat" cmpd="sng" algn="ctr">
-                      <a:solidFill>
-                        <a:srgbClr val="DCE4EC"/>
-                      </a:solidFill>
-                      <a:prstDash val="solid"/>
-                      <a:round/>
-                      <a:headEnd type="none" w="med" len="med"/>
-                      <a:tailEnd type="none" w="med" len="med"/>
-                    </a:lnL>
-                    <a:lnR w="9525" cap="flat" cmpd="sng" algn="ctr">
-                      <a:solidFill>
-                        <a:srgbClr val="DCE4EC"/>
-                      </a:solidFill>
-                      <a:prstDash val="solid"/>
-                      <a:round/>
-                      <a:headEnd type="none" w="med" len="med"/>
-                      <a:tailEnd type="none" w="med" len="med"/>
-                    </a:lnR>
-                    <a:lnT w="9525" cap="flat" cmpd="sng" algn="ctr">
-                      <a:solidFill>
-                        <a:srgbClr val="DCE4EC"/>
-                      </a:solidFill>
-                      <a:prstDash val="solid"/>
-                      <a:round/>
-                      <a:headEnd type="none" w="med" len="med"/>
-                      <a:tailEnd type="none" w="med" len="med"/>
-                    </a:lnT>
-                    <a:lnB w="9525" cap="flat" cmpd="sng" algn="ctr">
-                      <a:solidFill>
-                        <a:srgbClr val="DCE4EC"/>
-                      </a:solidFill>
-                      <a:prstDash val="solid"/>
-                      <a:round/>
-                      <a:headEnd type="none" w="med" len="med"/>
-                      <a:tailEnd type="none" w="med" len="med"/>
-                    </a:lnB>
-                    <a:solidFill>
-                      <a:srgbClr val="F3F7FA"/>
-                    </a:solidFill>
-                  </a:tcPr>
-                </a:tc>
-              </a:tr>
             </a:tbl>
           </a:graphicData>
         </a:graphic>
@@ -13631,6 +16022,45 @@
         </p:nvSpPr>
         <p:spPr>
           <a:xfrm>
+            <a:off x="566928" y="6016752"/>
+            <a:ext cx="11057839" cy="365760"/>
+          </a:xfrm>
+          <a:prstGeom prst="rect">
+            <a:avLst/>
+          </a:prstGeom>
+          <a:noFill/>
+          <a:ln/>
+        </p:spPr>
+        <p:txBody>
+          <a:bodyPr wrap="square" lIns="0" tIns="0" rIns="0" bIns="0" rtlCol="0" anchor="ctr"/>
+          <a:lstStyle/>
+          <a:p>
+            <a:pPr algn="l" indent="0" marL="0">
+              <a:buNone/>
+            </a:pPr>
+            <a:r>
+              <a:rPr lang="en-US" sz="1050" i="1" dirty="0">
+                <a:solidFill>
+                  <a:srgbClr val="6B7B8A"/>
+                </a:solidFill>
+                <a:latin typeface="Calibri" pitchFamily="34" charset="0"/>
+                <a:ea typeface="Calibri" pitchFamily="34" charset="-122"/>
+                <a:cs typeface="Calibri" pitchFamily="34" charset="-120"/>
+              </a:rPr>
+              <a:t>Specific antibodies refine an ANA-positive result into a disease-level interpretation.</a:t>
+            </a:r>
+            <a:endParaRPr lang="en-US" sz="1050" dirty="0"/>
+          </a:p>
+        </p:txBody>
+      </p:sp>
+      <p:sp>
+        <p:nvSpPr>
+          <p:cNvPr id="6" name="Text 3"/>
+          <p:cNvSpPr/>
+          <p:nvPr/>
+        </p:nvSpPr>
+        <p:spPr>
+          <a:xfrm>
             <a:off x="566928" y="6473952"/>
             <a:ext cx="7772400" cy="274320"/>
           </a:xfrm>
@@ -13664,7 +16094,7 @@
       </p:sp>
       <p:sp>
         <p:nvSpPr>
-          <p:cNvPr id="6" name="Text 3"/>
+          <p:cNvPr id="7" name="Text 4"/>
           <p:cNvSpPr/>
           <p:nvPr/>
         </p:nvSpPr>
@@ -13916,7 +16346,7 @@
                 <a:ea typeface="Calibri" pitchFamily="34" charset="-122"/>
                 <a:cs typeface="Calibri" pitchFamily="34" charset="-120"/>
               </a:rPr>
-              <a:t>ANCA, Antiphospholipid &amp; Complement</a:t>
+              <a:t>Complement &amp; ANCA</a:t>
             </a:r>
             <a:endParaRPr lang="en-US" sz="3800" dirty="0"/>
           </a:p>

--- a/decks/Immuno_02_Autoimmune-Serology.pptx
+++ b/decks/Immuno_02_Autoimmune-Serology.pptx
@@ -25,9 +25,13 @@
     <p:sldId id="273" r:id="rId19"/>
     <p:sldId id="274" r:id="rId20"/>
     <p:sldId id="275" r:id="rId21"/>
+    <p:sldId id="284" r:id="rId35"/>
     <p:sldId id="276" r:id="rId22"/>
+    <p:sldId id="283" r:id="rId34"/>
     <p:sldId id="277" r:id="rId23"/>
+    <p:sldId id="282" r:id="rId33"/>
     <p:sldId id="278" r:id="rId24"/>
+    <p:sldId id="281" r:id="rId32"/>
     <p:sldId id="279" r:id="rId25"/>
     <p:sldId id="280" r:id="rId26"/>
   </p:sldIdLst>
@@ -3032,6 +3036,10 @@
           </a:solidFill>
           <a:ln/>
         </p:spPr>
+        <p:txBody>
+          <a:bodyPr/>
+          <a:p/>
+        </p:txBody>
       </p:sp>
       <p:sp>
         <p:nvSpPr>
@@ -3054,6 +3062,10 @@
           </a:solidFill>
           <a:ln/>
         </p:spPr>
+        <p:txBody>
+          <a:bodyPr/>
+          <a:p/>
+        </p:txBody>
       </p:sp>
       <p:sp>
         <p:nvSpPr>
@@ -3076,6 +3088,10 @@
           </a:solidFill>
           <a:ln/>
         </p:spPr>
+        <p:txBody>
+          <a:bodyPr/>
+          <a:p/>
+        </p:txBody>
       </p:sp>
       <p:sp>
         <p:nvSpPr>
@@ -3098,6 +3114,10 @@
           </a:solidFill>
           <a:ln/>
         </p:spPr>
+        <p:txBody>
+          <a:bodyPr/>
+          <a:p/>
+        </p:txBody>
       </p:sp>
       <p:sp>
         <p:nvSpPr>
@@ -3519,6 +3539,10 @@
             </a:outerShdw>
           </a:effectLst>
         </p:spPr>
+        <p:txBody>
+          <a:bodyPr/>
+          <a:p/>
+        </p:txBody>
       </p:sp>
       <p:pic>
         <p:nvPicPr>
@@ -3827,6 +3851,10 @@
             </a:outerShdw>
           </a:effectLst>
         </p:spPr>
+        <p:txBody>
+          <a:bodyPr/>
+          <a:p/>
+        </p:txBody>
       </p:sp>
       <p:sp>
         <p:nvSpPr>
@@ -4001,6 +4029,10 @@
             </a:outerShdw>
           </a:effectLst>
         </p:spPr>
+        <p:txBody>
+          <a:bodyPr/>
+          <a:p/>
+        </p:txBody>
       </p:sp>
       <p:sp>
         <p:nvSpPr>
@@ -4391,6 +4423,10 @@
             </a:outerShdw>
           </a:effectLst>
         </p:spPr>
+        <p:txBody>
+          <a:bodyPr/>
+          <a:p/>
+        </p:txBody>
       </p:sp>
       <p:sp>
         <p:nvSpPr>
@@ -4565,6 +4601,10 @@
             </a:outerShdw>
           </a:effectLst>
         </p:spPr>
+        <p:txBody>
+          <a:bodyPr/>
+          <a:p/>
+        </p:txBody>
       </p:sp>
       <p:sp>
         <p:nvSpPr>
@@ -4870,6 +4910,10 @@
           </a:solidFill>
           <a:ln/>
         </p:spPr>
+        <p:txBody>
+          <a:bodyPr/>
+          <a:p/>
+        </p:txBody>
       </p:sp>
       <p:sp>
         <p:nvSpPr>
@@ -4892,6 +4936,10 @@
           </a:solidFill>
           <a:ln/>
         </p:spPr>
+        <p:txBody>
+          <a:bodyPr/>
+          <a:p/>
+        </p:txBody>
       </p:sp>
       <p:sp>
         <p:nvSpPr>
@@ -5148,6 +5196,10 @@
             </a:outerShdw>
           </a:effectLst>
         </p:spPr>
+        <p:txBody>
+          <a:bodyPr/>
+          <a:p/>
+        </p:txBody>
       </p:sp>
       <p:sp>
         <p:nvSpPr>
@@ -5258,6 +5310,10 @@
             </a:outerShdw>
           </a:effectLst>
         </p:spPr>
+        <p:txBody>
+          <a:bodyPr/>
+          <a:p/>
+        </p:txBody>
       </p:sp>
       <p:sp>
         <p:nvSpPr>
@@ -5687,6 +5743,10 @@
             </a:outerShdw>
           </a:effectLst>
         </p:spPr>
+        <p:txBody>
+          <a:bodyPr/>
+          <a:p/>
+        </p:txBody>
       </p:sp>
       <p:sp>
         <p:nvSpPr>
@@ -6013,6 +6073,10 @@
             </a:outerShdw>
           </a:effectLst>
         </p:spPr>
+        <p:txBody>
+          <a:bodyPr/>
+          <a:p/>
+        </p:txBody>
       </p:sp>
       <p:sp>
         <p:nvSpPr>
@@ -6123,6 +6187,10 @@
             </a:outerShdw>
           </a:effectLst>
         </p:spPr>
+        <p:txBody>
+          <a:bodyPr/>
+          <a:p/>
+        </p:txBody>
       </p:sp>
       <p:sp>
         <p:nvSpPr>
@@ -6552,6 +6620,10 @@
             </a:outerShdw>
           </a:effectLst>
         </p:spPr>
+        <p:txBody>
+          <a:bodyPr/>
+          <a:p/>
+        </p:txBody>
       </p:sp>
       <p:sp>
         <p:nvSpPr>
@@ -6878,6 +6950,10 @@
             </a:outerShdw>
           </a:effectLst>
         </p:spPr>
+        <p:txBody>
+          <a:bodyPr/>
+          <a:p/>
+        </p:txBody>
       </p:sp>
       <p:sp>
         <p:nvSpPr>
@@ -6988,6 +7064,10 @@
             </a:outerShdw>
           </a:effectLst>
         </p:spPr>
+        <p:txBody>
+          <a:bodyPr/>
+          <a:p/>
+        </p:txBody>
       </p:sp>
       <p:sp>
         <p:nvSpPr>
@@ -7417,6 +7497,10 @@
             </a:outerShdw>
           </a:effectLst>
         </p:spPr>
+        <p:txBody>
+          <a:bodyPr/>
+          <a:p/>
+        </p:txBody>
       </p:sp>
       <p:sp>
         <p:nvSpPr>
@@ -7743,6 +7827,10 @@
             </a:outerShdw>
           </a:effectLst>
         </p:spPr>
+        <p:txBody>
+          <a:bodyPr/>
+          <a:p/>
+        </p:txBody>
       </p:sp>
       <p:sp>
         <p:nvSpPr>
@@ -7850,6 +7938,10 @@
             </a:outerShdw>
           </a:effectLst>
         </p:spPr>
+        <p:txBody>
+          <a:bodyPr/>
+          <a:p/>
+        </p:txBody>
       </p:sp>
       <p:sp>
         <p:nvSpPr>
@@ -7957,6 +8049,10 @@
             </a:outerShdw>
           </a:effectLst>
         </p:spPr>
+        <p:txBody>
+          <a:bodyPr/>
+          <a:p/>
+        </p:txBody>
       </p:sp>
       <p:sp>
         <p:nvSpPr>
@@ -8064,6 +8160,10 @@
             </a:outerShdw>
           </a:effectLst>
         </p:spPr>
+        <p:txBody>
+          <a:bodyPr/>
+          <a:p/>
+        </p:txBody>
       </p:sp>
       <p:sp>
         <p:nvSpPr>
@@ -8456,9 +8556,9 @@
               <a:buNone/>
             </a:pPr>
             <a:r>
-              <a:rPr lang="en-US" sz="1350" b="1" dirty="0">
-                <a:solidFill>
-                  <a:srgbClr val="4A1269"/>
+              <a:rPr lang="en-US" sz="1350" b="0" dirty="0">
+                <a:solidFill>
+                  <a:srgbClr val="33444F"/>
                 </a:solidFill>
                 <a:latin typeface="Calibri" pitchFamily="34" charset="0"/>
                 <a:ea typeface="Calibri" pitchFamily="34" charset="-122"/>
@@ -8527,130 +8627,6 @@
               <a:t>E. Rheumatoid factor</a:t>
             </a:r>
             <a:endParaRPr lang="en-US" sz="1350" dirty="0"/>
-          </a:p>
-        </p:txBody>
-      </p:sp>
-      <p:sp>
-        <p:nvSpPr>
-          <p:cNvPr id="6" name="Shape 4"/>
-          <p:cNvSpPr/>
-          <p:nvPr/>
-        </p:nvSpPr>
-        <p:spPr>
-          <a:xfrm>
-            <a:off x="7201632" y="2395728"/>
-            <a:ext cx="4423136" cy="3246120"/>
-          </a:xfrm>
-          <a:prstGeom prst="roundRect">
-            <a:avLst>
-              <a:gd name="adj" fmla="val 2535"/>
-            </a:avLst>
-          </a:prstGeom>
-          <a:solidFill>
-            <a:srgbClr val="F1E8F7"/>
-          </a:solidFill>
-          <a:ln/>
-          <a:effectLst>
-            <a:outerShdw sx="100000" sy="100000" kx="0" ky="0" algn="bl" rotWithShape="0" blurRad="88900" dist="25400" dir="5400000">
-              <a:srgbClr val="22303C">
-                <a:alpha val="12000"/>
-              </a:srgbClr>
-            </a:outerShdw>
-          </a:effectLst>
-        </p:spPr>
-      </p:sp>
-      <p:sp>
-        <p:nvSpPr>
-          <p:cNvPr id="7" name="Text 5"/>
-          <p:cNvSpPr/>
-          <p:nvPr/>
-        </p:nvSpPr>
-        <p:spPr>
-          <a:xfrm>
-            <a:off x="7439376" y="2578608"/>
-            <a:ext cx="3965936" cy="457200"/>
-          </a:xfrm>
-          <a:prstGeom prst="rect">
-            <a:avLst/>
-          </a:prstGeom>
-          <a:noFill/>
-          <a:ln/>
-        </p:spPr>
-        <p:txBody>
-          <a:bodyPr wrap="square" lIns="0" tIns="0" rIns="0" bIns="0" rtlCol="0" anchor="ctr"/>
-          <a:lstStyle/>
-          <a:p>
-            <a:pPr indent="0" marL="0">
-              <a:buNone/>
-            </a:pPr>
-            <a:r>
-              <a:rPr lang="en-US" sz="1500" b="1" dirty="0">
-                <a:solidFill>
-                  <a:srgbClr val="6A1B9A"/>
-                </a:solidFill>
-                <a:latin typeface="Calibri" pitchFamily="34" charset="0"/>
-                <a:ea typeface="Calibri" pitchFamily="34" charset="-122"/>
-                <a:cs typeface="Calibri" pitchFamily="34" charset="-120"/>
-              </a:rPr>
-              <a:t>ANSWER  </a:t>
-            </a:r>
-            <a:pPr indent="0" marL="0">
-              <a:buNone/>
-            </a:pPr>
-            <a:r>
-              <a:rPr lang="en-US" sz="1500" b="1" dirty="0">
-                <a:solidFill>
-                  <a:srgbClr val="1B2A38"/>
-                </a:solidFill>
-                <a:latin typeface="Calibri" pitchFamily="34" charset="0"/>
-                <a:ea typeface="Calibri" pitchFamily="34" charset="-122"/>
-                <a:cs typeface="Calibri" pitchFamily="34" charset="-120"/>
-              </a:rPr>
-              <a:t>B — Anti-dsDNA</a:t>
-            </a:r>
-            <a:endParaRPr lang="en-US" sz="1500" dirty="0"/>
-          </a:p>
-        </p:txBody>
-      </p:sp>
-      <p:sp>
-        <p:nvSpPr>
-          <p:cNvPr id="8" name="Text 6"/>
-          <p:cNvSpPr/>
-          <p:nvPr/>
-        </p:nvSpPr>
-        <p:spPr>
-          <a:xfrm>
-            <a:off x="7439376" y="3127248"/>
-            <a:ext cx="3947648" cy="2377440"/>
-          </a:xfrm>
-          <a:prstGeom prst="rect">
-            <a:avLst/>
-          </a:prstGeom>
-          <a:noFill/>
-          <a:ln/>
-        </p:spPr>
-        <p:txBody>
-          <a:bodyPr wrap="square" lIns="0" tIns="0" rIns="0" bIns="0" rtlCol="0" anchor="t"/>
-          <a:lstStyle/>
-          <a:p>
-            <a:pPr algn="l" indent="0" marL="0">
-              <a:lnSpc>
-                <a:spcPct val="108000"/>
-              </a:lnSpc>
-              <a:buNone/>
-            </a:pPr>
-            <a:r>
-              <a:rPr lang="en-US" sz="1250" dirty="0">
-                <a:solidFill>
-                  <a:srgbClr val="33444F"/>
-                </a:solidFill>
-                <a:latin typeface="Calibri" pitchFamily="34" charset="0"/>
-                <a:ea typeface="Calibri" pitchFamily="34" charset="-122"/>
-                <a:cs typeface="Calibri" pitchFamily="34" charset="-120"/>
-              </a:rPr>
-              <a:t>Anti-dsDNA is specific for SLE and correlates with disease/renal activity; ANA is sensitive but not specific.</a:t>
-            </a:r>
-            <a:endParaRPr lang="en-US" sz="1250" dirty="0"/>
           </a:p>
         </p:txBody>
       </p:sp>
@@ -8960,9 +8936,9 @@
               <a:buNone/>
             </a:pPr>
             <a:r>
-              <a:rPr lang="en-US" sz="1350" b="1" dirty="0">
-                <a:solidFill>
-                  <a:srgbClr val="4A1269"/>
+              <a:rPr lang="en-US" sz="1350" b="0" dirty="0">
+                <a:solidFill>
+                  <a:srgbClr val="33444F"/>
                 </a:solidFill>
                 <a:latin typeface="Calibri" pitchFamily="34" charset="0"/>
                 <a:ea typeface="Calibri" pitchFamily="34" charset="-122"/>
@@ -9031,130 +9007,6 @@
               <a:t>E. Liver synthetic failure exclusively</a:t>
             </a:r>
             <a:endParaRPr lang="en-US" sz="1350" dirty="0"/>
-          </a:p>
-        </p:txBody>
-      </p:sp>
-      <p:sp>
-        <p:nvSpPr>
-          <p:cNvPr id="6" name="Shape 4"/>
-          <p:cNvSpPr/>
-          <p:nvPr/>
-        </p:nvSpPr>
-        <p:spPr>
-          <a:xfrm>
-            <a:off x="7201632" y="2395728"/>
-            <a:ext cx="4423136" cy="3246120"/>
-          </a:xfrm>
-          <a:prstGeom prst="roundRect">
-            <a:avLst>
-              <a:gd name="adj" fmla="val 2535"/>
-            </a:avLst>
-          </a:prstGeom>
-          <a:solidFill>
-            <a:srgbClr val="F1E8F7"/>
-          </a:solidFill>
-          <a:ln/>
-          <a:effectLst>
-            <a:outerShdw sx="100000" sy="100000" kx="0" ky="0" algn="bl" rotWithShape="0" blurRad="88900" dist="25400" dir="5400000">
-              <a:srgbClr val="22303C">
-                <a:alpha val="12000"/>
-              </a:srgbClr>
-            </a:outerShdw>
-          </a:effectLst>
-        </p:spPr>
-      </p:sp>
-      <p:sp>
-        <p:nvSpPr>
-          <p:cNvPr id="7" name="Text 5"/>
-          <p:cNvSpPr/>
-          <p:nvPr/>
-        </p:nvSpPr>
-        <p:spPr>
-          <a:xfrm>
-            <a:off x="7439376" y="2578608"/>
-            <a:ext cx="3965936" cy="457200"/>
-          </a:xfrm>
-          <a:prstGeom prst="rect">
-            <a:avLst/>
-          </a:prstGeom>
-          <a:noFill/>
-          <a:ln/>
-        </p:spPr>
-        <p:txBody>
-          <a:bodyPr wrap="square" lIns="0" tIns="0" rIns="0" bIns="0" rtlCol="0" anchor="ctr"/>
-          <a:lstStyle/>
-          <a:p>
-            <a:pPr indent="0" marL="0">
-              <a:buNone/>
-            </a:pPr>
-            <a:r>
-              <a:rPr lang="en-US" sz="1500" b="1" dirty="0">
-                <a:solidFill>
-                  <a:srgbClr val="6A1B9A"/>
-                </a:solidFill>
-                <a:latin typeface="Calibri" pitchFamily="34" charset="0"/>
-                <a:ea typeface="Calibri" pitchFamily="34" charset="-122"/>
-                <a:cs typeface="Calibri" pitchFamily="34" charset="-120"/>
-              </a:rPr>
-              <a:t>ANSWER  </a:t>
-            </a:r>
-            <a:pPr indent="0" marL="0">
-              <a:buNone/>
-            </a:pPr>
-            <a:r>
-              <a:rPr lang="en-US" sz="1500" b="1" dirty="0">
-                <a:solidFill>
-                  <a:srgbClr val="1B2A38"/>
-                </a:solidFill>
-                <a:latin typeface="Calibri" pitchFamily="34" charset="0"/>
-                <a:ea typeface="Calibri" pitchFamily="34" charset="-122"/>
-                <a:cs typeface="Calibri" pitchFamily="34" charset="-120"/>
-              </a:rPr>
-              <a:t>B — Consumption in active disease</a:t>
-            </a:r>
-            <a:endParaRPr lang="en-US" sz="1500" dirty="0"/>
-          </a:p>
-        </p:txBody>
-      </p:sp>
-      <p:sp>
-        <p:nvSpPr>
-          <p:cNvPr id="8" name="Text 6"/>
-          <p:cNvSpPr/>
-          <p:nvPr/>
-        </p:nvSpPr>
-        <p:spPr>
-          <a:xfrm>
-            <a:off x="7439376" y="3127248"/>
-            <a:ext cx="3947648" cy="2377440"/>
-          </a:xfrm>
-          <a:prstGeom prst="rect">
-            <a:avLst/>
-          </a:prstGeom>
-          <a:noFill/>
-          <a:ln/>
-        </p:spPr>
-        <p:txBody>
-          <a:bodyPr wrap="square" lIns="0" tIns="0" rIns="0" bIns="0" rtlCol="0" anchor="t"/>
-          <a:lstStyle/>
-          <a:p>
-            <a:pPr algn="l" indent="0" marL="0">
-              <a:lnSpc>
-                <a:spcPct val="108000"/>
-              </a:lnSpc>
-              <a:buNone/>
-            </a:pPr>
-            <a:r>
-              <a:rPr lang="en-US" sz="1250" dirty="0">
-                <a:solidFill>
-                  <a:srgbClr val="33444F"/>
-                </a:solidFill>
-                <a:latin typeface="Calibri" pitchFamily="34" charset="0"/>
-                <a:ea typeface="Calibri" pitchFamily="34" charset="-122"/>
-                <a:cs typeface="Calibri" pitchFamily="34" charset="-120"/>
-              </a:rPr>
-              <a:t>Immune-complex disease (e.g., lupus nephritis) consumes complement, lowering C3/C4; trending them monitors activity.</a:t>
-            </a:r>
-            <a:endParaRPr lang="en-US" sz="1250" dirty="0"/>
           </a:p>
         </p:txBody>
       </p:sp>
@@ -9464,9 +9316,9 @@
               <a:buNone/>
             </a:pPr>
             <a:r>
-              <a:rPr lang="en-US" sz="1350" b="1" dirty="0">
-                <a:solidFill>
-                  <a:srgbClr val="4A1269"/>
+              <a:rPr lang="en-US" sz="1350" b="0" dirty="0">
+                <a:solidFill>
+                  <a:srgbClr val="33444F"/>
                 </a:solidFill>
                 <a:latin typeface="Calibri" pitchFamily="34" charset="0"/>
                 <a:ea typeface="Calibri" pitchFamily="34" charset="-122"/>
@@ -9535,130 +9387,6 @@
               <a:t>E. Mixed connective tissue disease</a:t>
             </a:r>
             <a:endParaRPr lang="en-US" sz="1350" dirty="0"/>
-          </a:p>
-        </p:txBody>
-      </p:sp>
-      <p:sp>
-        <p:nvSpPr>
-          <p:cNvPr id="6" name="Shape 4"/>
-          <p:cNvSpPr/>
-          <p:nvPr/>
-        </p:nvSpPr>
-        <p:spPr>
-          <a:xfrm>
-            <a:off x="7201632" y="2395728"/>
-            <a:ext cx="4423136" cy="3246120"/>
-          </a:xfrm>
-          <a:prstGeom prst="roundRect">
-            <a:avLst>
-              <a:gd name="adj" fmla="val 2535"/>
-            </a:avLst>
-          </a:prstGeom>
-          <a:solidFill>
-            <a:srgbClr val="F1E8F7"/>
-          </a:solidFill>
-          <a:ln/>
-          <a:effectLst>
-            <a:outerShdw sx="100000" sy="100000" kx="0" ky="0" algn="bl" rotWithShape="0" blurRad="88900" dist="25400" dir="5400000">
-              <a:srgbClr val="22303C">
-                <a:alpha val="12000"/>
-              </a:srgbClr>
-            </a:outerShdw>
-          </a:effectLst>
-        </p:spPr>
-      </p:sp>
-      <p:sp>
-        <p:nvSpPr>
-          <p:cNvPr id="7" name="Text 5"/>
-          <p:cNvSpPr/>
-          <p:nvPr/>
-        </p:nvSpPr>
-        <p:spPr>
-          <a:xfrm>
-            <a:off x="7439376" y="2578608"/>
-            <a:ext cx="3965936" cy="457200"/>
-          </a:xfrm>
-          <a:prstGeom prst="rect">
-            <a:avLst/>
-          </a:prstGeom>
-          <a:noFill/>
-          <a:ln/>
-        </p:spPr>
-        <p:txBody>
-          <a:bodyPr wrap="square" lIns="0" tIns="0" rIns="0" bIns="0" rtlCol="0" anchor="ctr"/>
-          <a:lstStyle/>
-          <a:p>
-            <a:pPr indent="0" marL="0">
-              <a:buNone/>
-            </a:pPr>
-            <a:r>
-              <a:rPr lang="en-US" sz="1500" b="1" dirty="0">
-                <a:solidFill>
-                  <a:srgbClr val="6A1B9A"/>
-                </a:solidFill>
-                <a:latin typeface="Calibri" pitchFamily="34" charset="0"/>
-                <a:ea typeface="Calibri" pitchFamily="34" charset="-122"/>
-                <a:cs typeface="Calibri" pitchFamily="34" charset="-120"/>
-              </a:rPr>
-              <a:t>ANSWER  </a:t>
-            </a:r>
-            <a:pPr indent="0" marL="0">
-              <a:buNone/>
-            </a:pPr>
-            <a:r>
-              <a:rPr lang="en-US" sz="1500" b="1" dirty="0">
-                <a:solidFill>
-                  <a:srgbClr val="1B2A38"/>
-                </a:solidFill>
-                <a:latin typeface="Calibri" pitchFamily="34" charset="0"/>
-                <a:ea typeface="Calibri" pitchFamily="34" charset="-122"/>
-                <a:cs typeface="Calibri" pitchFamily="34" charset="-120"/>
-              </a:rPr>
-              <a:t>B — Limited systemic sclerosis (CREST)</a:t>
-            </a:r>
-            <a:endParaRPr lang="en-US" sz="1500" dirty="0"/>
-          </a:p>
-        </p:txBody>
-      </p:sp>
-      <p:sp>
-        <p:nvSpPr>
-          <p:cNvPr id="8" name="Text 6"/>
-          <p:cNvSpPr/>
-          <p:nvPr/>
-        </p:nvSpPr>
-        <p:spPr>
-          <a:xfrm>
-            <a:off x="7439376" y="3127248"/>
-            <a:ext cx="3947648" cy="2377440"/>
-          </a:xfrm>
-          <a:prstGeom prst="rect">
-            <a:avLst/>
-          </a:prstGeom>
-          <a:noFill/>
-          <a:ln/>
-        </p:spPr>
-        <p:txBody>
-          <a:bodyPr wrap="square" lIns="0" tIns="0" rIns="0" bIns="0" rtlCol="0" anchor="t"/>
-          <a:lstStyle/>
-          <a:p>
-            <a:pPr algn="l" indent="0" marL="0">
-              <a:lnSpc>
-                <a:spcPct val="108000"/>
-              </a:lnSpc>
-              <a:buNone/>
-            </a:pPr>
-            <a:r>
-              <a:rPr lang="en-US" sz="1250" dirty="0">
-                <a:solidFill>
-                  <a:srgbClr val="33444F"/>
-                </a:solidFill>
-                <a:latin typeface="Calibri" pitchFamily="34" charset="0"/>
-                <a:ea typeface="Calibri" pitchFamily="34" charset="-122"/>
-                <a:cs typeface="Calibri" pitchFamily="34" charset="-120"/>
-              </a:rPr>
-              <a:t>The centromere pattern is characteristic of limited cutaneous systemic sclerosis.</a:t>
-            </a:r>
-            <a:endParaRPr lang="en-US" sz="1250" dirty="0"/>
           </a:p>
         </p:txBody>
       </p:sp>
@@ -9968,9 +9696,9 @@
               <a:buNone/>
             </a:pPr>
             <a:r>
-              <a:rPr lang="en-US" sz="1350" b="1" dirty="0">
-                <a:solidFill>
-                  <a:srgbClr val="4A1269"/>
+              <a:rPr lang="en-US" sz="1350" b="0" dirty="0">
+                <a:solidFill>
+                  <a:srgbClr val="33444F"/>
                 </a:solidFill>
                 <a:latin typeface="Calibri" pitchFamily="34" charset="0"/>
                 <a:ea typeface="Calibri" pitchFamily="34" charset="-122"/>
@@ -10039,130 +9767,6 @@
               <a:t>E. Ro/SSA</a:t>
             </a:r>
             <a:endParaRPr lang="en-US" sz="1350" dirty="0"/>
-          </a:p>
-        </p:txBody>
-      </p:sp>
-      <p:sp>
-        <p:nvSpPr>
-          <p:cNvPr id="6" name="Shape 4"/>
-          <p:cNvSpPr/>
-          <p:nvPr/>
-        </p:nvSpPr>
-        <p:spPr>
-          <a:xfrm>
-            <a:off x="7201632" y="2395728"/>
-            <a:ext cx="4423136" cy="3246120"/>
-          </a:xfrm>
-          <a:prstGeom prst="roundRect">
-            <a:avLst>
-              <a:gd name="adj" fmla="val 2535"/>
-            </a:avLst>
-          </a:prstGeom>
-          <a:solidFill>
-            <a:srgbClr val="F1E8F7"/>
-          </a:solidFill>
-          <a:ln/>
-          <a:effectLst>
-            <a:outerShdw sx="100000" sy="100000" kx="0" ky="0" algn="bl" rotWithShape="0" blurRad="88900" dist="25400" dir="5400000">
-              <a:srgbClr val="22303C">
-                <a:alpha val="12000"/>
-              </a:srgbClr>
-            </a:outerShdw>
-          </a:effectLst>
-        </p:spPr>
-      </p:sp>
-      <p:sp>
-        <p:nvSpPr>
-          <p:cNvPr id="7" name="Text 5"/>
-          <p:cNvSpPr/>
-          <p:nvPr/>
-        </p:nvSpPr>
-        <p:spPr>
-          <a:xfrm>
-            <a:off x="7439376" y="2578608"/>
-            <a:ext cx="3965936" cy="457200"/>
-          </a:xfrm>
-          <a:prstGeom prst="rect">
-            <a:avLst/>
-          </a:prstGeom>
-          <a:noFill/>
-          <a:ln/>
-        </p:spPr>
-        <p:txBody>
-          <a:bodyPr wrap="square" lIns="0" tIns="0" rIns="0" bIns="0" rtlCol="0" anchor="ctr"/>
-          <a:lstStyle/>
-          <a:p>
-            <a:pPr indent="0" marL="0">
-              <a:buNone/>
-            </a:pPr>
-            <a:r>
-              <a:rPr lang="en-US" sz="1500" b="1" dirty="0">
-                <a:solidFill>
-                  <a:srgbClr val="6A1B9A"/>
-                </a:solidFill>
-                <a:latin typeface="Calibri" pitchFamily="34" charset="0"/>
-                <a:ea typeface="Calibri" pitchFamily="34" charset="-122"/>
-                <a:cs typeface="Calibri" pitchFamily="34" charset="-120"/>
-              </a:rPr>
-              <a:t>ANSWER  </a:t>
-            </a:r>
-            <a:pPr indent="0" marL="0">
-              <a:buNone/>
-            </a:pPr>
-            <a:r>
-              <a:rPr lang="en-US" sz="1500" b="1" dirty="0">
-                <a:solidFill>
-                  <a:srgbClr val="1B2A38"/>
-                </a:solidFill>
-                <a:latin typeface="Calibri" pitchFamily="34" charset="0"/>
-                <a:ea typeface="Calibri" pitchFamily="34" charset="-122"/>
-                <a:cs typeface="Calibri" pitchFamily="34" charset="-120"/>
-              </a:rPr>
-              <a:t>B — Proteinase 3 (PR3)</a:t>
-            </a:r>
-            <a:endParaRPr lang="en-US" sz="1500" dirty="0"/>
-          </a:p>
-        </p:txBody>
-      </p:sp>
-      <p:sp>
-        <p:nvSpPr>
-          <p:cNvPr id="8" name="Text 6"/>
-          <p:cNvSpPr/>
-          <p:nvPr/>
-        </p:nvSpPr>
-        <p:spPr>
-          <a:xfrm>
-            <a:off x="7439376" y="3127248"/>
-            <a:ext cx="3947648" cy="2377440"/>
-          </a:xfrm>
-          <a:prstGeom prst="rect">
-            <a:avLst/>
-          </a:prstGeom>
-          <a:noFill/>
-          <a:ln/>
-        </p:spPr>
-        <p:txBody>
-          <a:bodyPr wrap="square" lIns="0" tIns="0" rIns="0" bIns="0" rtlCol="0" anchor="t"/>
-          <a:lstStyle/>
-          <a:p>
-            <a:pPr algn="l" indent="0" marL="0">
-              <a:lnSpc>
-                <a:spcPct val="108000"/>
-              </a:lnSpc>
-              <a:buNone/>
-            </a:pPr>
-            <a:r>
-              <a:rPr lang="en-US" sz="1250" dirty="0">
-                <a:solidFill>
-                  <a:srgbClr val="33444F"/>
-                </a:solidFill>
-                <a:latin typeface="Calibri" pitchFamily="34" charset="0"/>
-                <a:ea typeface="Calibri" pitchFamily="34" charset="-122"/>
-                <a:cs typeface="Calibri" pitchFamily="34" charset="-120"/>
-              </a:rPr>
-              <a:t>c-ANCA corresponds to anti-PR3, classically associated with granulomatosis with polyangiitis; p-ANCA corresponds to anti-MPO.</a:t>
-            </a:r>
-            <a:endParaRPr lang="en-US" sz="1250" dirty="0"/>
           </a:p>
         </p:txBody>
       </p:sp>
@@ -10403,6 +10007,10 @@
           </a:solidFill>
           <a:ln/>
         </p:spPr>
+        <p:txBody>
+          <a:bodyPr/>
+          <a:p/>
+        </p:txBody>
       </p:sp>
       <p:sp>
         <p:nvSpPr>
@@ -10430,6 +10038,10 @@
             </a:outerShdw>
           </a:effectLst>
         </p:spPr>
+        <p:txBody>
+          <a:bodyPr/>
+          <a:p/>
+        </p:txBody>
       </p:sp>
       <p:sp>
         <p:nvSpPr>
@@ -10530,6 +10142,10 @@
           </a:solidFill>
           <a:ln/>
         </p:spPr>
+        <p:txBody>
+          <a:bodyPr/>
+          <a:p/>
+        </p:txBody>
       </p:sp>
       <p:sp>
         <p:nvSpPr>
@@ -10557,6 +10173,10 @@
             </a:outerShdw>
           </a:effectLst>
         </p:spPr>
+        <p:txBody>
+          <a:bodyPr/>
+          <a:p/>
+        </p:txBody>
       </p:sp>
       <p:sp>
         <p:nvSpPr>
@@ -10657,6 +10277,10 @@
           </a:solidFill>
           <a:ln/>
         </p:spPr>
+        <p:txBody>
+          <a:bodyPr/>
+          <a:p/>
+        </p:txBody>
       </p:sp>
       <p:sp>
         <p:nvSpPr>
@@ -10684,6 +10308,10 @@
             </a:outerShdw>
           </a:effectLst>
         </p:spPr>
+        <p:txBody>
+          <a:bodyPr/>
+          <a:p/>
+        </p:txBody>
       </p:sp>
       <p:sp>
         <p:nvSpPr>
@@ -10784,6 +10412,10 @@
           </a:solidFill>
           <a:ln/>
         </p:spPr>
+        <p:txBody>
+          <a:bodyPr/>
+          <a:p/>
+        </p:txBody>
       </p:sp>
       <p:sp>
         <p:nvSpPr>
@@ -10811,6 +10443,10 @@
             </a:outerShdw>
           </a:effectLst>
         </p:spPr>
+        <p:txBody>
+          <a:bodyPr/>
+          <a:p/>
+        </p:txBody>
       </p:sp>
       <p:sp>
         <p:nvSpPr>
@@ -10911,6 +10547,10 @@
           </a:solidFill>
           <a:ln/>
         </p:spPr>
+        <p:txBody>
+          <a:bodyPr/>
+          <a:p/>
+        </p:txBody>
       </p:sp>
       <p:sp>
         <p:nvSpPr>
@@ -10938,6 +10578,10 @@
             </a:outerShdw>
           </a:effectLst>
         </p:spPr>
+        <p:txBody>
+          <a:bodyPr/>
+          <a:p/>
+        </p:txBody>
       </p:sp>
       <p:sp>
         <p:nvSpPr>
@@ -11421,6 +11065,1982 @@
 </p:sld>
 </file>
 
+<file path=ppt/slides/slide26.xml><?xml version="1.0" encoding="utf-8"?>
+<p:sld xmlns:a="http://schemas.openxmlformats.org/drawingml/2006/main" xmlns:p="http://schemas.openxmlformats.org/presentationml/2006/main" xmlns:r="http://schemas.openxmlformats.org/officeDocument/2006/relationships">
+  <p:cSld>
+    <p:spTree>
+      <p:nvGrpSpPr>
+        <p:cNvPr id="1" name=""/>
+        <p:cNvGrpSpPr/>
+        <p:nvPr/>
+      </p:nvGrpSpPr>
+      <p:grpSpPr/>
+      <p:sp>
+        <p:nvSpPr>
+          <p:cNvPr id="2" name="Text 0"/>
+          <p:cNvSpPr/>
+          <p:nvPr/>
+        </p:nvSpPr>
+        <p:spPr>
+          <a:xfrm>
+            <a:off x="566928" y="329184"/>
+            <a:ext cx="10515600" cy="310896"/>
+          </a:xfrm>
+          <a:prstGeom prst="rect">
+            <a:avLst/>
+          </a:prstGeom>
+          <a:noFill/>
+          <a:ln/>
+        </p:spPr>
+        <p:txBody>
+          <a:bodyPr wrap="square" lIns="0" tIns="0" rIns="0" bIns="0" rtlCol="0" anchor="ctr"/>
+          <a:lstStyle/>
+          <a:p>
+            <a:pPr algn="l" indent="0" marL="0">
+              <a:buNone/>
+            </a:pPr>
+            <a:r>
+              <a:rPr lang="en-US" sz="1100" b="1" spc="150" kern="0" dirty="0">
+                <a:solidFill>
+                  <a:srgbClr val="6A1B9A"/>
+                </a:solidFill>
+                <a:latin typeface="Calibri" pitchFamily="34" charset="0"/>
+                <a:ea typeface="Calibri" pitchFamily="34" charset="-122"/>
+                <a:cs typeface="Calibri" pitchFamily="34" charset="-120"/>
+              </a:rPr>
+              <a:t>IMMUNOLOGY &amp; SEROLOGY   ·   BOARD REVIEW  ·  Q4</a:t>
+            </a:r>
+            <a:endParaRPr lang="en-US" sz="1100" dirty="0"/>
+          </a:p>
+        </p:txBody>
+      </p:sp>
+      <p:sp>
+        <p:nvSpPr>
+          <p:cNvPr id="3" name="Text 1"/>
+          <p:cNvSpPr/>
+          <p:nvPr/>
+        </p:nvSpPr>
+        <p:spPr>
+          <a:xfrm>
+            <a:off x="566928" y="713232"/>
+            <a:ext cx="11064240" cy="749808"/>
+          </a:xfrm>
+          <a:prstGeom prst="rect">
+            <a:avLst/>
+          </a:prstGeom>
+          <a:noFill/>
+          <a:ln/>
+        </p:spPr>
+        <p:txBody>
+          <a:bodyPr wrap="square" lIns="0" tIns="0" rIns="0" bIns="0" rtlCol="0" anchor="ctr"/>
+          <a:lstStyle/>
+          <a:p>
+            <a:pPr algn="l" indent="0" marL="0">
+              <a:buNone/>
+            </a:pPr>
+            <a:r>
+              <a:rPr lang="en-US" sz="2600" b="1" dirty="0">
+                <a:solidFill>
+                  <a:srgbClr val="0E3A5F"/>
+                </a:solidFill>
+                <a:latin typeface="Calibri" pitchFamily="34" charset="0"/>
+                <a:ea typeface="Calibri" pitchFamily="34" charset="-122"/>
+                <a:cs typeface="Calibri" pitchFamily="34" charset="-120"/>
+              </a:rPr>
+              <a:t>Board-Style Review</a:t>
+            </a:r>
+            <a:endParaRPr lang="en-US" sz="2600" dirty="0"/>
+          </a:p>
+        </p:txBody>
+      </p:sp>
+      <p:sp>
+        <p:nvSpPr>
+          <p:cNvPr id="4" name="Text 2"/>
+          <p:cNvSpPr/>
+          <p:nvPr/>
+        </p:nvSpPr>
+        <p:spPr>
+          <a:xfrm>
+            <a:off x="566928" y="1417320"/>
+            <a:ext cx="11057839" cy="914400"/>
+          </a:xfrm>
+          <a:prstGeom prst="rect">
+            <a:avLst/>
+          </a:prstGeom>
+          <a:noFill/>
+          <a:ln/>
+        </p:spPr>
+        <p:txBody>
+          <a:bodyPr wrap="square" lIns="0" tIns="0" rIns="0" bIns="0" rtlCol="0" anchor="t"/>
+          <a:lstStyle/>
+          <a:p>
+            <a:pPr algn="l" indent="0" marL="0">
+              <a:lnSpc>
+                <a:spcPct val="105000"/>
+              </a:lnSpc>
+              <a:buNone/>
+            </a:pPr>
+            <a:r>
+              <a:rPr lang="en-US" sz="1450" b="1" dirty="0">
+                <a:solidFill>
+                  <a:srgbClr val="1B2A38"/>
+                </a:solidFill>
+                <a:latin typeface="Calibri" pitchFamily="34" charset="0"/>
+                <a:ea typeface="Calibri" pitchFamily="34" charset="-122"/>
+                <a:cs typeface="Calibri" pitchFamily="34" charset="-120"/>
+              </a:rPr>
+              <a:t>c-ANCA most commonly targets which antigen?</a:t>
+            </a:r>
+            <a:endParaRPr lang="en-US" sz="1450" dirty="0"/>
+          </a:p>
+        </p:txBody>
+      </p:sp>
+      <p:sp>
+        <p:nvSpPr>
+          <p:cNvPr id="5" name="Text 3"/>
+          <p:cNvSpPr/>
+          <p:nvPr/>
+        </p:nvSpPr>
+        <p:spPr>
+          <a:xfrm>
+            <a:off x="658368" y="2395728"/>
+            <a:ext cx="6192390" cy="3017520"/>
+          </a:xfrm>
+          <a:prstGeom prst="rect">
+            <a:avLst/>
+          </a:prstGeom>
+          <a:noFill/>
+          <a:ln/>
+        </p:spPr>
+        <p:txBody>
+          <a:bodyPr wrap="square" lIns="0" tIns="0" rIns="0" bIns="0" rtlCol="0" anchor="t"/>
+          <a:lstStyle/>
+          <a:p>
+            <a:pPr algn="l" indent="0" marL="0">
+              <a:spcAft>
+                <a:spcPts val="600"/>
+              </a:spcAft>
+              <a:buNone/>
+            </a:pPr>
+            <a:r>
+              <a:rPr lang="en-US" sz="1350" dirty="0">
+                <a:solidFill>
+                  <a:srgbClr val="33444F"/>
+                </a:solidFill>
+                <a:latin typeface="Calibri" pitchFamily="34" charset="0"/>
+                <a:ea typeface="Calibri" pitchFamily="34" charset="-122"/>
+                <a:cs typeface="Calibri" pitchFamily="34" charset="-120"/>
+              </a:rPr>
+              <a:t>A. Myeloperoxidase (MPO)</a:t>
+            </a:r>
+            <a:endParaRPr lang="en-US" sz="1350" dirty="0"/>
+          </a:p>
+          <a:p>
+            <a:pPr algn="l" indent="0" marL="0">
+              <a:spcAft>
+                <a:spcPts val="600"/>
+              </a:spcAft>
+              <a:buNone/>
+            </a:pPr>
+            <a:r>
+              <a:rPr lang="en-US" sz="1350" b="1" dirty="0">
+                <a:solidFill>
+                  <a:srgbClr val="4A1269"/>
+                </a:solidFill>
+                <a:latin typeface="Calibri" pitchFamily="34" charset="0"/>
+                <a:ea typeface="Calibri" pitchFamily="34" charset="-122"/>
+                <a:cs typeface="Calibri" pitchFamily="34" charset="-120"/>
+              </a:rPr>
+              <a:t>B. Proteinase 3 (PR3)</a:t>
+            </a:r>
+            <a:endParaRPr lang="en-US" sz="1350" dirty="0"/>
+          </a:p>
+          <a:p>
+            <a:pPr algn="l" indent="0" marL="0">
+              <a:spcAft>
+                <a:spcPts val="600"/>
+              </a:spcAft>
+              <a:buNone/>
+            </a:pPr>
+            <a:r>
+              <a:rPr lang="en-US" sz="1350" dirty="0">
+                <a:solidFill>
+                  <a:srgbClr val="33444F"/>
+                </a:solidFill>
+                <a:latin typeface="Calibri" pitchFamily="34" charset="0"/>
+                <a:ea typeface="Calibri" pitchFamily="34" charset="-122"/>
+                <a:cs typeface="Calibri" pitchFamily="34" charset="-120"/>
+              </a:rPr>
+              <a:t>C. dsDNA</a:t>
+            </a:r>
+            <a:endParaRPr lang="en-US" sz="1350" dirty="0"/>
+          </a:p>
+          <a:p>
+            <a:pPr algn="l" indent="0" marL="0">
+              <a:spcAft>
+                <a:spcPts val="600"/>
+              </a:spcAft>
+              <a:buNone/>
+            </a:pPr>
+            <a:r>
+              <a:rPr lang="en-US" sz="1350" dirty="0">
+                <a:solidFill>
+                  <a:srgbClr val="33444F"/>
+                </a:solidFill>
+                <a:latin typeface="Calibri" pitchFamily="34" charset="0"/>
+                <a:ea typeface="Calibri" pitchFamily="34" charset="-122"/>
+                <a:cs typeface="Calibri" pitchFamily="34" charset="-120"/>
+              </a:rPr>
+              <a:t>D. Histones</a:t>
+            </a:r>
+            <a:endParaRPr lang="en-US" sz="1350" dirty="0"/>
+          </a:p>
+          <a:p>
+            <a:pPr algn="l" indent="0" marL="0">
+              <a:spcAft>
+                <a:spcPts val="600"/>
+              </a:spcAft>
+              <a:buNone/>
+            </a:pPr>
+            <a:r>
+              <a:rPr lang="en-US" sz="1350" dirty="0">
+                <a:solidFill>
+                  <a:srgbClr val="33444F"/>
+                </a:solidFill>
+                <a:latin typeface="Calibri" pitchFamily="34" charset="0"/>
+                <a:ea typeface="Calibri" pitchFamily="34" charset="-122"/>
+                <a:cs typeface="Calibri" pitchFamily="34" charset="-120"/>
+              </a:rPr>
+              <a:t>E. Ro/SSA</a:t>
+            </a:r>
+            <a:endParaRPr lang="en-US" sz="1350" dirty="0"/>
+          </a:p>
+        </p:txBody>
+      </p:sp>
+      <p:sp>
+        <p:nvSpPr>
+          <p:cNvPr id="6" name="Shape 4"/>
+          <p:cNvSpPr/>
+          <p:nvPr/>
+        </p:nvSpPr>
+        <p:spPr>
+          <a:xfrm>
+            <a:off x="7201632" y="2395728"/>
+            <a:ext cx="4423136" cy="3246120"/>
+          </a:xfrm>
+          <a:prstGeom prst="roundRect">
+            <a:avLst>
+              <a:gd name="adj" fmla="val 2535"/>
+            </a:avLst>
+          </a:prstGeom>
+          <a:solidFill>
+            <a:srgbClr val="F1E8F7"/>
+          </a:solidFill>
+          <a:ln/>
+          <a:effectLst>
+            <a:outerShdw sx="100000" sy="100000" kx="0" ky="0" algn="bl" rotWithShape="0" blurRad="88900" dist="25400" dir="5400000">
+              <a:srgbClr val="22303C">
+                <a:alpha val="12000"/>
+              </a:srgbClr>
+            </a:outerShdw>
+          </a:effectLst>
+        </p:spPr>
+        <p:txBody>
+          <a:bodyPr/>
+          <a:p/>
+        </p:txBody>
+      </p:sp>
+      <p:sp>
+        <p:nvSpPr>
+          <p:cNvPr id="7" name="Text 5"/>
+          <p:cNvSpPr/>
+          <p:nvPr/>
+        </p:nvSpPr>
+        <p:spPr>
+          <a:xfrm>
+            <a:off x="7439376" y="2578608"/>
+            <a:ext cx="3965936" cy="457200"/>
+          </a:xfrm>
+          <a:prstGeom prst="rect">
+            <a:avLst/>
+          </a:prstGeom>
+          <a:noFill/>
+          <a:ln/>
+        </p:spPr>
+        <p:txBody>
+          <a:bodyPr wrap="square" lIns="0" tIns="0" rIns="0" bIns="0" rtlCol="0" anchor="ctr"/>
+          <a:lstStyle/>
+          <a:p>
+            <a:pPr indent="0" marL="0">
+              <a:buNone/>
+            </a:pPr>
+            <a:r>
+              <a:rPr lang="en-US" sz="1500" b="1" dirty="0">
+                <a:solidFill>
+                  <a:srgbClr val="6A1B9A"/>
+                </a:solidFill>
+                <a:latin typeface="Calibri" pitchFamily="34" charset="0"/>
+                <a:ea typeface="Calibri" pitchFamily="34" charset="-122"/>
+                <a:cs typeface="Calibri" pitchFamily="34" charset="-120"/>
+              </a:rPr>
+              <a:t>ANSWER  </a:t>
+            </a:r>
+            <a:pPr indent="0" marL="0">
+              <a:buNone/>
+            </a:pPr>
+            <a:r>
+              <a:rPr lang="en-US" sz="1500" b="1" dirty="0">
+                <a:solidFill>
+                  <a:srgbClr val="1B2A38"/>
+                </a:solidFill>
+                <a:latin typeface="Calibri" pitchFamily="34" charset="0"/>
+                <a:ea typeface="Calibri" pitchFamily="34" charset="-122"/>
+                <a:cs typeface="Calibri" pitchFamily="34" charset="-120"/>
+              </a:rPr>
+              <a:t>B — Proteinase 3 (PR3)</a:t>
+            </a:r>
+            <a:endParaRPr lang="en-US" sz="1500" dirty="0"/>
+          </a:p>
+        </p:txBody>
+      </p:sp>
+      <p:sp>
+        <p:nvSpPr>
+          <p:cNvPr id="8" name="Text 6"/>
+          <p:cNvSpPr/>
+          <p:nvPr/>
+        </p:nvSpPr>
+        <p:spPr>
+          <a:xfrm>
+            <a:off x="7439376" y="3127248"/>
+            <a:ext cx="3947648" cy="2377440"/>
+          </a:xfrm>
+          <a:prstGeom prst="rect">
+            <a:avLst/>
+          </a:prstGeom>
+          <a:noFill/>
+          <a:ln/>
+        </p:spPr>
+        <p:txBody>
+          <a:bodyPr wrap="square" lIns="0" tIns="0" rIns="0" bIns="0" rtlCol="0" anchor="t"/>
+          <a:lstStyle/>
+          <a:p>
+            <a:pPr algn="l" indent="0" marL="0">
+              <a:lnSpc>
+                <a:spcPct val="108000"/>
+              </a:lnSpc>
+              <a:buNone/>
+            </a:pPr>
+            <a:r>
+              <a:rPr lang="en-US" sz="1250" dirty="0">
+                <a:solidFill>
+                  <a:srgbClr val="33444F"/>
+                </a:solidFill>
+                <a:latin typeface="Calibri" pitchFamily="34" charset="0"/>
+                <a:ea typeface="Calibri" pitchFamily="34" charset="-122"/>
+                <a:cs typeface="Calibri" pitchFamily="34" charset="-120"/>
+              </a:rPr>
+              <a:t>c-ANCA corresponds to anti-PR3, classically associated with granulomatosis with polyangiitis; p-ANCA corresponds to anti-MPO.</a:t>
+            </a:r>
+            <a:endParaRPr lang="en-US" sz="1250" dirty="0"/>
+          </a:p>
+        </p:txBody>
+      </p:sp>
+      <p:sp>
+        <p:nvSpPr>
+          <p:cNvPr id="9" name="Text 7"/>
+          <p:cNvSpPr/>
+          <p:nvPr/>
+        </p:nvSpPr>
+        <p:spPr>
+          <a:xfrm>
+            <a:off x="566928" y="6473952"/>
+            <a:ext cx="7772400" cy="274320"/>
+          </a:xfrm>
+          <a:prstGeom prst="rect">
+            <a:avLst/>
+          </a:prstGeom>
+          <a:noFill/>
+          <a:ln/>
+        </p:spPr>
+        <p:txBody>
+          <a:bodyPr wrap="square" lIns="0" tIns="0" rIns="0" bIns="0" rtlCol="0" anchor="ctr"/>
+          <a:lstStyle/>
+          <a:p>
+            <a:pPr algn="l" indent="0" marL="0">
+              <a:buNone/>
+            </a:pPr>
+            <a:r>
+              <a:rPr lang="en-US" sz="850" dirty="0">
+                <a:solidFill>
+                  <a:srgbClr val="9AA8B4"/>
+                </a:solidFill>
+                <a:latin typeface="Calibri" pitchFamily="34" charset="0"/>
+                <a:ea typeface="Calibri" pitchFamily="34" charset="-122"/>
+                <a:cs typeface="Calibri" pitchFamily="34" charset="-120"/>
+              </a:rPr>
+              <a:t>Makassed General Hospital  ·  Department of Laboratory Medicine</a:t>
+            </a:r>
+            <a:endParaRPr lang="en-US" sz="850" dirty="0"/>
+          </a:p>
+        </p:txBody>
+      </p:sp>
+      <p:sp>
+        <p:nvSpPr>
+          <p:cNvPr id="10" name="Text 8"/>
+          <p:cNvSpPr/>
+          <p:nvPr/>
+        </p:nvSpPr>
+        <p:spPr>
+          <a:xfrm>
+            <a:off x="9814255" y="6473952"/>
+            <a:ext cx="1828800" cy="274320"/>
+          </a:xfrm>
+          <a:prstGeom prst="rect">
+            <a:avLst/>
+          </a:prstGeom>
+          <a:noFill/>
+          <a:ln/>
+        </p:spPr>
+        <p:txBody>
+          <a:bodyPr wrap="square" lIns="0" tIns="0" rIns="0" bIns="0" rtlCol="0" anchor="ctr"/>
+          <a:lstStyle/>
+          <a:p>
+            <a:pPr algn="r" indent="0" marL="0">
+              <a:buNone/>
+            </a:pPr>
+            <a:r>
+              <a:rPr lang="en-US" sz="850" dirty="0">
+                <a:solidFill>
+                  <a:srgbClr val="9AA8B4"/>
+                </a:solidFill>
+                <a:latin typeface="Calibri" pitchFamily="34" charset="0"/>
+                <a:ea typeface="Calibri" pitchFamily="34" charset="-122"/>
+                <a:cs typeface="Calibri" pitchFamily="34" charset="-120"/>
+              </a:rPr>
+              <a:t>CP Lecture Series</a:t>
+            </a:r>
+            <a:pPr algn="r" indent="0" marL="0">
+              <a:buNone/>
+            </a:pPr>
+            <a:r>
+              <a:rPr lang="en-US" sz="850" dirty="0">
+                <a:solidFill>
+                  <a:srgbClr val="DCE4EC"/>
+                </a:solidFill>
+                <a:latin typeface="Calibri" pitchFamily="34" charset="0"/>
+                <a:ea typeface="Calibri" pitchFamily="34" charset="-122"/>
+                <a:cs typeface="Calibri" pitchFamily="34" charset="-120"/>
+              </a:rPr>
+              <a:t>   ·   </a:t>
+            </a:r>
+            <a:pPr algn="r" indent="0" marL="0">
+              <a:buNone/>
+            </a:pPr>
+            <a:r>
+              <a:rPr lang="en-US" sz="850" b="1" dirty="0">
+                <a:solidFill>
+                  <a:srgbClr val="6A1B9A"/>
+                </a:solidFill>
+                <a:latin typeface="Calibri" pitchFamily="34" charset="0"/>
+                <a:ea typeface="Calibri" pitchFamily="34" charset="-122"/>
+                <a:cs typeface="Calibri" pitchFamily="34" charset="-120"/>
+              </a:rPr>
+              <a:t>20</a:t>
+            </a:r>
+            <a:endParaRPr lang="en-US" sz="850" dirty="0"/>
+          </a:p>
+        </p:txBody>
+      </p:sp>
+    </p:spTree>
+  </p:cSld>
+  <p:clrMapOvr>
+    <a:masterClrMapping/>
+  </p:clrMapOvr>
+</p:sld>
+</file>
+
+<file path=ppt/slides/slide27.xml><?xml version="1.0" encoding="utf-8"?>
+<p:sld xmlns:a="http://schemas.openxmlformats.org/drawingml/2006/main" xmlns:p="http://schemas.openxmlformats.org/presentationml/2006/main" xmlns:r="http://schemas.openxmlformats.org/officeDocument/2006/relationships">
+  <p:cSld>
+    <p:spTree>
+      <p:nvGrpSpPr>
+        <p:cNvPr id="1" name=""/>
+        <p:cNvGrpSpPr/>
+        <p:nvPr/>
+      </p:nvGrpSpPr>
+      <p:grpSpPr/>
+      <p:sp>
+        <p:nvSpPr>
+          <p:cNvPr id="2" name="Text 0"/>
+          <p:cNvSpPr/>
+          <p:nvPr/>
+        </p:nvSpPr>
+        <p:spPr>
+          <a:xfrm>
+            <a:off x="566928" y="329184"/>
+            <a:ext cx="10515600" cy="310896"/>
+          </a:xfrm>
+          <a:prstGeom prst="rect">
+            <a:avLst/>
+          </a:prstGeom>
+          <a:noFill/>
+          <a:ln/>
+        </p:spPr>
+        <p:txBody>
+          <a:bodyPr wrap="square" lIns="0" tIns="0" rIns="0" bIns="0" rtlCol="0" anchor="ctr"/>
+          <a:lstStyle/>
+          <a:p>
+            <a:pPr algn="l" indent="0" marL="0">
+              <a:buNone/>
+            </a:pPr>
+            <a:r>
+              <a:rPr lang="en-US" sz="1100" b="1" spc="150" kern="0" dirty="0">
+                <a:solidFill>
+                  <a:srgbClr val="6A1B9A"/>
+                </a:solidFill>
+                <a:latin typeface="Calibri" pitchFamily="34" charset="0"/>
+                <a:ea typeface="Calibri" pitchFamily="34" charset="-122"/>
+                <a:cs typeface="Calibri" pitchFamily="34" charset="-120"/>
+              </a:rPr>
+              <a:t>IMMUNOLOGY &amp; SEROLOGY   ·   BOARD REVIEW  ·  Q3</a:t>
+            </a:r>
+            <a:endParaRPr lang="en-US" sz="1100" dirty="0"/>
+          </a:p>
+        </p:txBody>
+      </p:sp>
+      <p:sp>
+        <p:nvSpPr>
+          <p:cNvPr id="3" name="Text 1"/>
+          <p:cNvSpPr/>
+          <p:nvPr/>
+        </p:nvSpPr>
+        <p:spPr>
+          <a:xfrm>
+            <a:off x="566928" y="713232"/>
+            <a:ext cx="11064240" cy="749808"/>
+          </a:xfrm>
+          <a:prstGeom prst="rect">
+            <a:avLst/>
+          </a:prstGeom>
+          <a:noFill/>
+          <a:ln/>
+        </p:spPr>
+        <p:txBody>
+          <a:bodyPr wrap="square" lIns="0" tIns="0" rIns="0" bIns="0" rtlCol="0" anchor="ctr"/>
+          <a:lstStyle/>
+          <a:p>
+            <a:pPr algn="l" indent="0" marL="0">
+              <a:buNone/>
+            </a:pPr>
+            <a:r>
+              <a:rPr lang="en-US" sz="2600" b="1" dirty="0">
+                <a:solidFill>
+                  <a:srgbClr val="0E3A5F"/>
+                </a:solidFill>
+                <a:latin typeface="Calibri" pitchFamily="34" charset="0"/>
+                <a:ea typeface="Calibri" pitchFamily="34" charset="-122"/>
+                <a:cs typeface="Calibri" pitchFamily="34" charset="-120"/>
+              </a:rPr>
+              <a:t>Board-Style Review</a:t>
+            </a:r>
+            <a:endParaRPr lang="en-US" sz="2600" dirty="0"/>
+          </a:p>
+        </p:txBody>
+      </p:sp>
+      <p:sp>
+        <p:nvSpPr>
+          <p:cNvPr id="4" name="Text 2"/>
+          <p:cNvSpPr/>
+          <p:nvPr/>
+        </p:nvSpPr>
+        <p:spPr>
+          <a:xfrm>
+            <a:off x="566928" y="1417320"/>
+            <a:ext cx="11057839" cy="914400"/>
+          </a:xfrm>
+          <a:prstGeom prst="rect">
+            <a:avLst/>
+          </a:prstGeom>
+          <a:noFill/>
+          <a:ln/>
+        </p:spPr>
+        <p:txBody>
+          <a:bodyPr wrap="square" lIns="0" tIns="0" rIns="0" bIns="0" rtlCol="0" anchor="t"/>
+          <a:lstStyle/>
+          <a:p>
+            <a:pPr algn="l" indent="0" marL="0">
+              <a:lnSpc>
+                <a:spcPct val="105000"/>
+              </a:lnSpc>
+              <a:buNone/>
+            </a:pPr>
+            <a:r>
+              <a:rPr lang="en-US" sz="1450" b="1" dirty="0">
+                <a:solidFill>
+                  <a:srgbClr val="1B2A38"/>
+                </a:solidFill>
+                <a:latin typeface="Calibri" pitchFamily="34" charset="0"/>
+                <a:ea typeface="Calibri" pitchFamily="34" charset="-122"/>
+                <a:cs typeface="Calibri" pitchFamily="34" charset="-120"/>
+              </a:rPr>
+              <a:t>A centromere ANA pattern is most associated with:</a:t>
+            </a:r>
+            <a:endParaRPr lang="en-US" sz="1450" dirty="0"/>
+          </a:p>
+        </p:txBody>
+      </p:sp>
+      <p:sp>
+        <p:nvSpPr>
+          <p:cNvPr id="5" name="Text 3"/>
+          <p:cNvSpPr/>
+          <p:nvPr/>
+        </p:nvSpPr>
+        <p:spPr>
+          <a:xfrm>
+            <a:off x="658368" y="2395728"/>
+            <a:ext cx="6192390" cy="3017520"/>
+          </a:xfrm>
+          <a:prstGeom prst="rect">
+            <a:avLst/>
+          </a:prstGeom>
+          <a:noFill/>
+          <a:ln/>
+        </p:spPr>
+        <p:txBody>
+          <a:bodyPr wrap="square" lIns="0" tIns="0" rIns="0" bIns="0" rtlCol="0" anchor="t"/>
+          <a:lstStyle/>
+          <a:p>
+            <a:pPr algn="l" indent="0" marL="0">
+              <a:spcAft>
+                <a:spcPts val="600"/>
+              </a:spcAft>
+              <a:buNone/>
+            </a:pPr>
+            <a:r>
+              <a:rPr lang="en-US" sz="1350" dirty="0">
+                <a:solidFill>
+                  <a:srgbClr val="33444F"/>
+                </a:solidFill>
+                <a:latin typeface="Calibri" pitchFamily="34" charset="0"/>
+                <a:ea typeface="Calibri" pitchFamily="34" charset="-122"/>
+                <a:cs typeface="Calibri" pitchFamily="34" charset="-120"/>
+              </a:rPr>
+              <a:t>A. Diffuse systemic sclerosis</a:t>
+            </a:r>
+            <a:endParaRPr lang="en-US" sz="1350" dirty="0"/>
+          </a:p>
+          <a:p>
+            <a:pPr algn="l" indent="0" marL="0">
+              <a:spcAft>
+                <a:spcPts val="600"/>
+              </a:spcAft>
+              <a:buNone/>
+            </a:pPr>
+            <a:r>
+              <a:rPr lang="en-US" sz="1350" b="1" dirty="0">
+                <a:solidFill>
+                  <a:srgbClr val="4A1269"/>
+                </a:solidFill>
+                <a:latin typeface="Calibri" pitchFamily="34" charset="0"/>
+                <a:ea typeface="Calibri" pitchFamily="34" charset="-122"/>
+                <a:cs typeface="Calibri" pitchFamily="34" charset="-120"/>
+              </a:rPr>
+              <a:t>B. Limited systemic sclerosis (CREST)</a:t>
+            </a:r>
+            <a:endParaRPr lang="en-US" sz="1350" dirty="0"/>
+          </a:p>
+          <a:p>
+            <a:pPr algn="l" indent="0" marL="0">
+              <a:spcAft>
+                <a:spcPts val="600"/>
+              </a:spcAft>
+              <a:buNone/>
+            </a:pPr>
+            <a:r>
+              <a:rPr lang="en-US" sz="1350" dirty="0">
+                <a:solidFill>
+                  <a:srgbClr val="33444F"/>
+                </a:solidFill>
+                <a:latin typeface="Calibri" pitchFamily="34" charset="0"/>
+                <a:ea typeface="Calibri" pitchFamily="34" charset="-122"/>
+                <a:cs typeface="Calibri" pitchFamily="34" charset="-120"/>
+              </a:rPr>
+              <a:t>C. Polymyositis</a:t>
+            </a:r>
+            <a:endParaRPr lang="en-US" sz="1350" dirty="0"/>
+          </a:p>
+          <a:p>
+            <a:pPr algn="l" indent="0" marL="0">
+              <a:spcAft>
+                <a:spcPts val="600"/>
+              </a:spcAft>
+              <a:buNone/>
+            </a:pPr>
+            <a:r>
+              <a:rPr lang="en-US" sz="1350" dirty="0">
+                <a:solidFill>
+                  <a:srgbClr val="33444F"/>
+                </a:solidFill>
+                <a:latin typeface="Calibri" pitchFamily="34" charset="0"/>
+                <a:ea typeface="Calibri" pitchFamily="34" charset="-122"/>
+                <a:cs typeface="Calibri" pitchFamily="34" charset="-120"/>
+              </a:rPr>
+              <a:t>D. Rheumatoid arthritis</a:t>
+            </a:r>
+            <a:endParaRPr lang="en-US" sz="1350" dirty="0"/>
+          </a:p>
+          <a:p>
+            <a:pPr algn="l" indent="0" marL="0">
+              <a:spcAft>
+                <a:spcPts val="600"/>
+              </a:spcAft>
+              <a:buNone/>
+            </a:pPr>
+            <a:r>
+              <a:rPr lang="en-US" sz="1350" dirty="0">
+                <a:solidFill>
+                  <a:srgbClr val="33444F"/>
+                </a:solidFill>
+                <a:latin typeface="Calibri" pitchFamily="34" charset="0"/>
+                <a:ea typeface="Calibri" pitchFamily="34" charset="-122"/>
+                <a:cs typeface="Calibri" pitchFamily="34" charset="-120"/>
+              </a:rPr>
+              <a:t>E. Mixed connective tissue disease</a:t>
+            </a:r>
+            <a:endParaRPr lang="en-US" sz="1350" dirty="0"/>
+          </a:p>
+        </p:txBody>
+      </p:sp>
+      <p:sp>
+        <p:nvSpPr>
+          <p:cNvPr id="6" name="Shape 4"/>
+          <p:cNvSpPr/>
+          <p:nvPr/>
+        </p:nvSpPr>
+        <p:spPr>
+          <a:xfrm>
+            <a:off x="7201632" y="2395728"/>
+            <a:ext cx="4423136" cy="3246120"/>
+          </a:xfrm>
+          <a:prstGeom prst="roundRect">
+            <a:avLst>
+              <a:gd name="adj" fmla="val 2535"/>
+            </a:avLst>
+          </a:prstGeom>
+          <a:solidFill>
+            <a:srgbClr val="F1E8F7"/>
+          </a:solidFill>
+          <a:ln/>
+          <a:effectLst>
+            <a:outerShdw sx="100000" sy="100000" kx="0" ky="0" algn="bl" rotWithShape="0" blurRad="88900" dist="25400" dir="5400000">
+              <a:srgbClr val="22303C">
+                <a:alpha val="12000"/>
+              </a:srgbClr>
+            </a:outerShdw>
+          </a:effectLst>
+        </p:spPr>
+        <p:txBody>
+          <a:bodyPr/>
+          <a:p/>
+        </p:txBody>
+      </p:sp>
+      <p:sp>
+        <p:nvSpPr>
+          <p:cNvPr id="7" name="Text 5"/>
+          <p:cNvSpPr/>
+          <p:nvPr/>
+        </p:nvSpPr>
+        <p:spPr>
+          <a:xfrm>
+            <a:off x="7439376" y="2578608"/>
+            <a:ext cx="3965936" cy="457200"/>
+          </a:xfrm>
+          <a:prstGeom prst="rect">
+            <a:avLst/>
+          </a:prstGeom>
+          <a:noFill/>
+          <a:ln/>
+        </p:spPr>
+        <p:txBody>
+          <a:bodyPr wrap="square" lIns="0" tIns="0" rIns="0" bIns="0" rtlCol="0" anchor="ctr"/>
+          <a:lstStyle/>
+          <a:p>
+            <a:pPr indent="0" marL="0">
+              <a:buNone/>
+            </a:pPr>
+            <a:r>
+              <a:rPr lang="en-US" sz="1500" b="1" dirty="0">
+                <a:solidFill>
+                  <a:srgbClr val="6A1B9A"/>
+                </a:solidFill>
+                <a:latin typeface="Calibri" pitchFamily="34" charset="0"/>
+                <a:ea typeface="Calibri" pitchFamily="34" charset="-122"/>
+                <a:cs typeface="Calibri" pitchFamily="34" charset="-120"/>
+              </a:rPr>
+              <a:t>ANSWER  </a:t>
+            </a:r>
+            <a:pPr indent="0" marL="0">
+              <a:buNone/>
+            </a:pPr>
+            <a:r>
+              <a:rPr lang="en-US" sz="1500" b="1" dirty="0">
+                <a:solidFill>
+                  <a:srgbClr val="1B2A38"/>
+                </a:solidFill>
+                <a:latin typeface="Calibri" pitchFamily="34" charset="0"/>
+                <a:ea typeface="Calibri" pitchFamily="34" charset="-122"/>
+                <a:cs typeface="Calibri" pitchFamily="34" charset="-120"/>
+              </a:rPr>
+              <a:t>B — Limited systemic sclerosis (CREST)</a:t>
+            </a:r>
+            <a:endParaRPr lang="en-US" sz="1500" dirty="0"/>
+          </a:p>
+        </p:txBody>
+      </p:sp>
+      <p:sp>
+        <p:nvSpPr>
+          <p:cNvPr id="8" name="Text 6"/>
+          <p:cNvSpPr/>
+          <p:nvPr/>
+        </p:nvSpPr>
+        <p:spPr>
+          <a:xfrm>
+            <a:off x="7439376" y="3127248"/>
+            <a:ext cx="3947648" cy="2377440"/>
+          </a:xfrm>
+          <a:prstGeom prst="rect">
+            <a:avLst/>
+          </a:prstGeom>
+          <a:noFill/>
+          <a:ln/>
+        </p:spPr>
+        <p:txBody>
+          <a:bodyPr wrap="square" lIns="0" tIns="0" rIns="0" bIns="0" rtlCol="0" anchor="t"/>
+          <a:lstStyle/>
+          <a:p>
+            <a:pPr algn="l" indent="0" marL="0">
+              <a:lnSpc>
+                <a:spcPct val="108000"/>
+              </a:lnSpc>
+              <a:buNone/>
+            </a:pPr>
+            <a:r>
+              <a:rPr lang="en-US" sz="1250" dirty="0">
+                <a:solidFill>
+                  <a:srgbClr val="33444F"/>
+                </a:solidFill>
+                <a:latin typeface="Calibri" pitchFamily="34" charset="0"/>
+                <a:ea typeface="Calibri" pitchFamily="34" charset="-122"/>
+                <a:cs typeface="Calibri" pitchFamily="34" charset="-120"/>
+              </a:rPr>
+              <a:t>The centromere pattern is characteristic of limited cutaneous systemic sclerosis.</a:t>
+            </a:r>
+            <a:endParaRPr lang="en-US" sz="1250" dirty="0"/>
+          </a:p>
+        </p:txBody>
+      </p:sp>
+      <p:sp>
+        <p:nvSpPr>
+          <p:cNvPr id="9" name="Text 7"/>
+          <p:cNvSpPr/>
+          <p:nvPr/>
+        </p:nvSpPr>
+        <p:spPr>
+          <a:xfrm>
+            <a:off x="566928" y="6473952"/>
+            <a:ext cx="7772400" cy="274320"/>
+          </a:xfrm>
+          <a:prstGeom prst="rect">
+            <a:avLst/>
+          </a:prstGeom>
+          <a:noFill/>
+          <a:ln/>
+        </p:spPr>
+        <p:txBody>
+          <a:bodyPr wrap="square" lIns="0" tIns="0" rIns="0" bIns="0" rtlCol="0" anchor="ctr"/>
+          <a:lstStyle/>
+          <a:p>
+            <a:pPr algn="l" indent="0" marL="0">
+              <a:buNone/>
+            </a:pPr>
+            <a:r>
+              <a:rPr lang="en-US" sz="850" dirty="0">
+                <a:solidFill>
+                  <a:srgbClr val="9AA8B4"/>
+                </a:solidFill>
+                <a:latin typeface="Calibri" pitchFamily="34" charset="0"/>
+                <a:ea typeface="Calibri" pitchFamily="34" charset="-122"/>
+                <a:cs typeface="Calibri" pitchFamily="34" charset="-120"/>
+              </a:rPr>
+              <a:t>Makassed General Hospital  ·  Department of Laboratory Medicine</a:t>
+            </a:r>
+            <a:endParaRPr lang="en-US" sz="850" dirty="0"/>
+          </a:p>
+        </p:txBody>
+      </p:sp>
+      <p:sp>
+        <p:nvSpPr>
+          <p:cNvPr id="10" name="Text 8"/>
+          <p:cNvSpPr/>
+          <p:nvPr/>
+        </p:nvSpPr>
+        <p:spPr>
+          <a:xfrm>
+            <a:off x="9814255" y="6473952"/>
+            <a:ext cx="1828800" cy="274320"/>
+          </a:xfrm>
+          <a:prstGeom prst="rect">
+            <a:avLst/>
+          </a:prstGeom>
+          <a:noFill/>
+          <a:ln/>
+        </p:spPr>
+        <p:txBody>
+          <a:bodyPr wrap="square" lIns="0" tIns="0" rIns="0" bIns="0" rtlCol="0" anchor="ctr"/>
+          <a:lstStyle/>
+          <a:p>
+            <a:pPr algn="r" indent="0" marL="0">
+              <a:buNone/>
+            </a:pPr>
+            <a:r>
+              <a:rPr lang="en-US" sz="850" dirty="0">
+                <a:solidFill>
+                  <a:srgbClr val="9AA8B4"/>
+                </a:solidFill>
+                <a:latin typeface="Calibri" pitchFamily="34" charset="0"/>
+                <a:ea typeface="Calibri" pitchFamily="34" charset="-122"/>
+                <a:cs typeface="Calibri" pitchFamily="34" charset="-120"/>
+              </a:rPr>
+              <a:t>CP Lecture Series</a:t>
+            </a:r>
+            <a:pPr algn="r" indent="0" marL="0">
+              <a:buNone/>
+            </a:pPr>
+            <a:r>
+              <a:rPr lang="en-US" sz="850" dirty="0">
+                <a:solidFill>
+                  <a:srgbClr val="DCE4EC"/>
+                </a:solidFill>
+                <a:latin typeface="Calibri" pitchFamily="34" charset="0"/>
+                <a:ea typeface="Calibri" pitchFamily="34" charset="-122"/>
+                <a:cs typeface="Calibri" pitchFamily="34" charset="-120"/>
+              </a:rPr>
+              <a:t>   ·   </a:t>
+            </a:r>
+            <a:pPr algn="r" indent="0" marL="0">
+              <a:buNone/>
+            </a:pPr>
+            <a:r>
+              <a:rPr lang="en-US" sz="850" b="1" dirty="0">
+                <a:solidFill>
+                  <a:srgbClr val="6A1B9A"/>
+                </a:solidFill>
+                <a:latin typeface="Calibri" pitchFamily="34" charset="0"/>
+                <a:ea typeface="Calibri" pitchFamily="34" charset="-122"/>
+                <a:cs typeface="Calibri" pitchFamily="34" charset="-120"/>
+              </a:rPr>
+              <a:t>19</a:t>
+            </a:r>
+            <a:endParaRPr lang="en-US" sz="850" dirty="0"/>
+          </a:p>
+        </p:txBody>
+      </p:sp>
+    </p:spTree>
+  </p:cSld>
+  <p:clrMapOvr>
+    <a:masterClrMapping/>
+  </p:clrMapOvr>
+</p:sld>
+</file>
+
+<file path=ppt/slides/slide28.xml><?xml version="1.0" encoding="utf-8"?>
+<p:sld xmlns:a="http://schemas.openxmlformats.org/drawingml/2006/main" xmlns:p="http://schemas.openxmlformats.org/presentationml/2006/main" xmlns:r="http://schemas.openxmlformats.org/officeDocument/2006/relationships">
+  <p:cSld>
+    <p:spTree>
+      <p:nvGrpSpPr>
+        <p:cNvPr id="1" name=""/>
+        <p:cNvGrpSpPr/>
+        <p:nvPr/>
+      </p:nvGrpSpPr>
+      <p:grpSpPr/>
+      <p:sp>
+        <p:nvSpPr>
+          <p:cNvPr id="2" name="Text 0"/>
+          <p:cNvSpPr/>
+          <p:nvPr/>
+        </p:nvSpPr>
+        <p:spPr>
+          <a:xfrm>
+            <a:off x="566928" y="329184"/>
+            <a:ext cx="10515600" cy="310896"/>
+          </a:xfrm>
+          <a:prstGeom prst="rect">
+            <a:avLst/>
+          </a:prstGeom>
+          <a:noFill/>
+          <a:ln/>
+        </p:spPr>
+        <p:txBody>
+          <a:bodyPr wrap="square" lIns="0" tIns="0" rIns="0" bIns="0" rtlCol="0" anchor="ctr"/>
+          <a:lstStyle/>
+          <a:p>
+            <a:pPr algn="l" indent="0" marL="0">
+              <a:buNone/>
+            </a:pPr>
+            <a:r>
+              <a:rPr lang="en-US" sz="1100" b="1" spc="150" kern="0" dirty="0">
+                <a:solidFill>
+                  <a:srgbClr val="6A1B9A"/>
+                </a:solidFill>
+                <a:latin typeface="Calibri" pitchFamily="34" charset="0"/>
+                <a:ea typeface="Calibri" pitchFamily="34" charset="-122"/>
+                <a:cs typeface="Calibri" pitchFamily="34" charset="-120"/>
+              </a:rPr>
+              <a:t>IMMUNOLOGY &amp; SEROLOGY   ·   BOARD REVIEW  ·  Q2</a:t>
+            </a:r>
+            <a:endParaRPr lang="en-US" sz="1100" dirty="0"/>
+          </a:p>
+        </p:txBody>
+      </p:sp>
+      <p:sp>
+        <p:nvSpPr>
+          <p:cNvPr id="3" name="Text 1"/>
+          <p:cNvSpPr/>
+          <p:nvPr/>
+        </p:nvSpPr>
+        <p:spPr>
+          <a:xfrm>
+            <a:off x="566928" y="713232"/>
+            <a:ext cx="11064240" cy="749808"/>
+          </a:xfrm>
+          <a:prstGeom prst="rect">
+            <a:avLst/>
+          </a:prstGeom>
+          <a:noFill/>
+          <a:ln/>
+        </p:spPr>
+        <p:txBody>
+          <a:bodyPr wrap="square" lIns="0" tIns="0" rIns="0" bIns="0" rtlCol="0" anchor="ctr"/>
+          <a:lstStyle/>
+          <a:p>
+            <a:pPr algn="l" indent="0" marL="0">
+              <a:buNone/>
+            </a:pPr>
+            <a:r>
+              <a:rPr lang="en-US" sz="2600" b="1" dirty="0">
+                <a:solidFill>
+                  <a:srgbClr val="0E3A5F"/>
+                </a:solidFill>
+                <a:latin typeface="Calibri" pitchFamily="34" charset="0"/>
+                <a:ea typeface="Calibri" pitchFamily="34" charset="-122"/>
+                <a:cs typeface="Calibri" pitchFamily="34" charset="-120"/>
+              </a:rPr>
+              <a:t>Board-Style Review</a:t>
+            </a:r>
+            <a:endParaRPr lang="en-US" sz="2600" dirty="0"/>
+          </a:p>
+        </p:txBody>
+      </p:sp>
+      <p:sp>
+        <p:nvSpPr>
+          <p:cNvPr id="4" name="Text 2"/>
+          <p:cNvSpPr/>
+          <p:nvPr/>
+        </p:nvSpPr>
+        <p:spPr>
+          <a:xfrm>
+            <a:off x="566928" y="1417320"/>
+            <a:ext cx="11057839" cy="914400"/>
+          </a:xfrm>
+          <a:prstGeom prst="rect">
+            <a:avLst/>
+          </a:prstGeom>
+          <a:noFill/>
+          <a:ln/>
+        </p:spPr>
+        <p:txBody>
+          <a:bodyPr wrap="square" lIns="0" tIns="0" rIns="0" bIns="0" rtlCol="0" anchor="t"/>
+          <a:lstStyle/>
+          <a:p>
+            <a:pPr algn="l" indent="0" marL="0">
+              <a:lnSpc>
+                <a:spcPct val="105000"/>
+              </a:lnSpc>
+              <a:buNone/>
+            </a:pPr>
+            <a:r>
+              <a:rPr lang="en-US" sz="1450" b="1" dirty="0">
+                <a:solidFill>
+                  <a:srgbClr val="1B2A38"/>
+                </a:solidFill>
+                <a:latin typeface="Calibri" pitchFamily="34" charset="0"/>
+                <a:ea typeface="Calibri" pitchFamily="34" charset="-122"/>
+                <a:cs typeface="Calibri" pitchFamily="34" charset="-120"/>
+              </a:rPr>
+              <a:t>Low C3 and C4 in an autoimmune flare indicate:</a:t>
+            </a:r>
+            <a:endParaRPr lang="en-US" sz="1450" dirty="0"/>
+          </a:p>
+        </p:txBody>
+      </p:sp>
+      <p:sp>
+        <p:nvSpPr>
+          <p:cNvPr id="5" name="Text 3"/>
+          <p:cNvSpPr/>
+          <p:nvPr/>
+        </p:nvSpPr>
+        <p:spPr>
+          <a:xfrm>
+            <a:off x="658368" y="2395728"/>
+            <a:ext cx="6192390" cy="3017520"/>
+          </a:xfrm>
+          <a:prstGeom prst="rect">
+            <a:avLst/>
+          </a:prstGeom>
+          <a:noFill/>
+          <a:ln/>
+        </p:spPr>
+        <p:txBody>
+          <a:bodyPr wrap="square" lIns="0" tIns="0" rIns="0" bIns="0" rtlCol="0" anchor="t"/>
+          <a:lstStyle/>
+          <a:p>
+            <a:pPr algn="l" indent="0" marL="0">
+              <a:spcAft>
+                <a:spcPts val="600"/>
+              </a:spcAft>
+              <a:buNone/>
+            </a:pPr>
+            <a:r>
+              <a:rPr lang="en-US" sz="1350" dirty="0">
+                <a:solidFill>
+                  <a:srgbClr val="33444F"/>
+                </a:solidFill>
+                <a:latin typeface="Calibri" pitchFamily="34" charset="0"/>
+                <a:ea typeface="Calibri" pitchFamily="34" charset="-122"/>
+                <a:cs typeface="Calibri" pitchFamily="34" charset="-120"/>
+              </a:rPr>
+              <a:t>A. Complement deficiency only</a:t>
+            </a:r>
+            <a:endParaRPr lang="en-US" sz="1350" dirty="0"/>
+          </a:p>
+          <a:p>
+            <a:pPr algn="l" indent="0" marL="0">
+              <a:spcAft>
+                <a:spcPts val="600"/>
+              </a:spcAft>
+              <a:buNone/>
+            </a:pPr>
+            <a:r>
+              <a:rPr lang="en-US" sz="1350" b="1" dirty="0">
+                <a:solidFill>
+                  <a:srgbClr val="4A1269"/>
+                </a:solidFill>
+                <a:latin typeface="Calibri" pitchFamily="34" charset="0"/>
+                <a:ea typeface="Calibri" pitchFamily="34" charset="-122"/>
+                <a:cs typeface="Calibri" pitchFamily="34" charset="-120"/>
+              </a:rPr>
+              <a:t>B. Complement consumption in active immune-complex disease</a:t>
+            </a:r>
+            <a:endParaRPr lang="en-US" sz="1350" dirty="0"/>
+          </a:p>
+          <a:p>
+            <a:pPr algn="l" indent="0" marL="0">
+              <a:spcAft>
+                <a:spcPts val="600"/>
+              </a:spcAft>
+              <a:buNone/>
+            </a:pPr>
+            <a:r>
+              <a:rPr lang="en-US" sz="1350" dirty="0">
+                <a:solidFill>
+                  <a:srgbClr val="33444F"/>
+                </a:solidFill>
+                <a:latin typeface="Calibri" pitchFamily="34" charset="0"/>
+                <a:ea typeface="Calibri" pitchFamily="34" charset="-122"/>
+                <a:cs typeface="Calibri" pitchFamily="34" charset="-120"/>
+              </a:rPr>
+              <a:t>C. Laboratory error</a:t>
+            </a:r>
+            <a:endParaRPr lang="en-US" sz="1350" dirty="0"/>
+          </a:p>
+          <a:p>
+            <a:pPr algn="l" indent="0" marL="0">
+              <a:spcAft>
+                <a:spcPts val="600"/>
+              </a:spcAft>
+              <a:buNone/>
+            </a:pPr>
+            <a:r>
+              <a:rPr lang="en-US" sz="1350" dirty="0">
+                <a:solidFill>
+                  <a:srgbClr val="33444F"/>
+                </a:solidFill>
+                <a:latin typeface="Calibri" pitchFamily="34" charset="0"/>
+                <a:ea typeface="Calibri" pitchFamily="34" charset="-122"/>
+                <a:cs typeface="Calibri" pitchFamily="34" charset="-120"/>
+              </a:rPr>
+              <a:t>D. Hypergammaglobulinemia</a:t>
+            </a:r>
+            <a:endParaRPr lang="en-US" sz="1350" dirty="0"/>
+          </a:p>
+          <a:p>
+            <a:pPr algn="l" indent="0" marL="0">
+              <a:spcAft>
+                <a:spcPts val="600"/>
+              </a:spcAft>
+              <a:buNone/>
+            </a:pPr>
+            <a:r>
+              <a:rPr lang="en-US" sz="1350" dirty="0">
+                <a:solidFill>
+                  <a:srgbClr val="33444F"/>
+                </a:solidFill>
+                <a:latin typeface="Calibri" pitchFamily="34" charset="0"/>
+                <a:ea typeface="Calibri" pitchFamily="34" charset="-122"/>
+                <a:cs typeface="Calibri" pitchFamily="34" charset="-120"/>
+              </a:rPr>
+              <a:t>E. Liver synthetic failure exclusively</a:t>
+            </a:r>
+            <a:endParaRPr lang="en-US" sz="1350" dirty="0"/>
+          </a:p>
+        </p:txBody>
+      </p:sp>
+      <p:sp>
+        <p:nvSpPr>
+          <p:cNvPr id="6" name="Shape 4"/>
+          <p:cNvSpPr/>
+          <p:nvPr/>
+        </p:nvSpPr>
+        <p:spPr>
+          <a:xfrm>
+            <a:off x="7201632" y="2395728"/>
+            <a:ext cx="4423136" cy="3246120"/>
+          </a:xfrm>
+          <a:prstGeom prst="roundRect">
+            <a:avLst>
+              <a:gd name="adj" fmla="val 2535"/>
+            </a:avLst>
+          </a:prstGeom>
+          <a:solidFill>
+            <a:srgbClr val="F1E8F7"/>
+          </a:solidFill>
+          <a:ln/>
+          <a:effectLst>
+            <a:outerShdw sx="100000" sy="100000" kx="0" ky="0" algn="bl" rotWithShape="0" blurRad="88900" dist="25400" dir="5400000">
+              <a:srgbClr val="22303C">
+                <a:alpha val="12000"/>
+              </a:srgbClr>
+            </a:outerShdw>
+          </a:effectLst>
+        </p:spPr>
+        <p:txBody>
+          <a:bodyPr/>
+          <a:p/>
+        </p:txBody>
+      </p:sp>
+      <p:sp>
+        <p:nvSpPr>
+          <p:cNvPr id="7" name="Text 5"/>
+          <p:cNvSpPr/>
+          <p:nvPr/>
+        </p:nvSpPr>
+        <p:spPr>
+          <a:xfrm>
+            <a:off x="7439376" y="2578608"/>
+            <a:ext cx="3965936" cy="457200"/>
+          </a:xfrm>
+          <a:prstGeom prst="rect">
+            <a:avLst/>
+          </a:prstGeom>
+          <a:noFill/>
+          <a:ln/>
+        </p:spPr>
+        <p:txBody>
+          <a:bodyPr wrap="square" lIns="0" tIns="0" rIns="0" bIns="0" rtlCol="0" anchor="ctr"/>
+          <a:lstStyle/>
+          <a:p>
+            <a:pPr indent="0" marL="0">
+              <a:buNone/>
+            </a:pPr>
+            <a:r>
+              <a:rPr lang="en-US" sz="1500" b="1" dirty="0">
+                <a:solidFill>
+                  <a:srgbClr val="6A1B9A"/>
+                </a:solidFill>
+                <a:latin typeface="Calibri" pitchFamily="34" charset="0"/>
+                <a:ea typeface="Calibri" pitchFamily="34" charset="-122"/>
+                <a:cs typeface="Calibri" pitchFamily="34" charset="-120"/>
+              </a:rPr>
+              <a:t>ANSWER  </a:t>
+            </a:r>
+            <a:pPr indent="0" marL="0">
+              <a:buNone/>
+            </a:pPr>
+            <a:r>
+              <a:rPr lang="en-US" sz="1500" b="1" dirty="0">
+                <a:solidFill>
+                  <a:srgbClr val="1B2A38"/>
+                </a:solidFill>
+                <a:latin typeface="Calibri" pitchFamily="34" charset="0"/>
+                <a:ea typeface="Calibri" pitchFamily="34" charset="-122"/>
+                <a:cs typeface="Calibri" pitchFamily="34" charset="-120"/>
+              </a:rPr>
+              <a:t>B — Consumption in active disease</a:t>
+            </a:r>
+            <a:endParaRPr lang="en-US" sz="1500" dirty="0"/>
+          </a:p>
+        </p:txBody>
+      </p:sp>
+      <p:sp>
+        <p:nvSpPr>
+          <p:cNvPr id="8" name="Text 6"/>
+          <p:cNvSpPr/>
+          <p:nvPr/>
+        </p:nvSpPr>
+        <p:spPr>
+          <a:xfrm>
+            <a:off x="7439376" y="3127248"/>
+            <a:ext cx="3947648" cy="2377440"/>
+          </a:xfrm>
+          <a:prstGeom prst="rect">
+            <a:avLst/>
+          </a:prstGeom>
+          <a:noFill/>
+          <a:ln/>
+        </p:spPr>
+        <p:txBody>
+          <a:bodyPr wrap="square" lIns="0" tIns="0" rIns="0" bIns="0" rtlCol="0" anchor="t"/>
+          <a:lstStyle/>
+          <a:p>
+            <a:pPr algn="l" indent="0" marL="0">
+              <a:lnSpc>
+                <a:spcPct val="108000"/>
+              </a:lnSpc>
+              <a:buNone/>
+            </a:pPr>
+            <a:r>
+              <a:rPr lang="en-US" sz="1250" dirty="0">
+                <a:solidFill>
+                  <a:srgbClr val="33444F"/>
+                </a:solidFill>
+                <a:latin typeface="Calibri" pitchFamily="34" charset="0"/>
+                <a:ea typeface="Calibri" pitchFamily="34" charset="-122"/>
+                <a:cs typeface="Calibri" pitchFamily="34" charset="-120"/>
+              </a:rPr>
+              <a:t>Immune-complex disease (e.g., lupus nephritis) consumes complement, lowering C3/C4; trending them monitors activity.</a:t>
+            </a:r>
+            <a:endParaRPr lang="en-US" sz="1250" dirty="0"/>
+          </a:p>
+        </p:txBody>
+      </p:sp>
+      <p:sp>
+        <p:nvSpPr>
+          <p:cNvPr id="9" name="Text 7"/>
+          <p:cNvSpPr/>
+          <p:nvPr/>
+        </p:nvSpPr>
+        <p:spPr>
+          <a:xfrm>
+            <a:off x="566928" y="6473952"/>
+            <a:ext cx="7772400" cy="274320"/>
+          </a:xfrm>
+          <a:prstGeom prst="rect">
+            <a:avLst/>
+          </a:prstGeom>
+          <a:noFill/>
+          <a:ln/>
+        </p:spPr>
+        <p:txBody>
+          <a:bodyPr wrap="square" lIns="0" tIns="0" rIns="0" bIns="0" rtlCol="0" anchor="ctr"/>
+          <a:lstStyle/>
+          <a:p>
+            <a:pPr algn="l" indent="0" marL="0">
+              <a:buNone/>
+            </a:pPr>
+            <a:r>
+              <a:rPr lang="en-US" sz="850" dirty="0">
+                <a:solidFill>
+                  <a:srgbClr val="9AA8B4"/>
+                </a:solidFill>
+                <a:latin typeface="Calibri" pitchFamily="34" charset="0"/>
+                <a:ea typeface="Calibri" pitchFamily="34" charset="-122"/>
+                <a:cs typeface="Calibri" pitchFamily="34" charset="-120"/>
+              </a:rPr>
+              <a:t>Makassed General Hospital  ·  Department of Laboratory Medicine</a:t>
+            </a:r>
+            <a:endParaRPr lang="en-US" sz="850" dirty="0"/>
+          </a:p>
+        </p:txBody>
+      </p:sp>
+      <p:sp>
+        <p:nvSpPr>
+          <p:cNvPr id="10" name="Text 8"/>
+          <p:cNvSpPr/>
+          <p:nvPr/>
+        </p:nvSpPr>
+        <p:spPr>
+          <a:xfrm>
+            <a:off x="9814255" y="6473952"/>
+            <a:ext cx="1828800" cy="274320"/>
+          </a:xfrm>
+          <a:prstGeom prst="rect">
+            <a:avLst/>
+          </a:prstGeom>
+          <a:noFill/>
+          <a:ln/>
+        </p:spPr>
+        <p:txBody>
+          <a:bodyPr wrap="square" lIns="0" tIns="0" rIns="0" bIns="0" rtlCol="0" anchor="ctr"/>
+          <a:lstStyle/>
+          <a:p>
+            <a:pPr algn="r" indent="0" marL="0">
+              <a:buNone/>
+            </a:pPr>
+            <a:r>
+              <a:rPr lang="en-US" sz="850" dirty="0">
+                <a:solidFill>
+                  <a:srgbClr val="9AA8B4"/>
+                </a:solidFill>
+                <a:latin typeface="Calibri" pitchFamily="34" charset="0"/>
+                <a:ea typeface="Calibri" pitchFamily="34" charset="-122"/>
+                <a:cs typeface="Calibri" pitchFamily="34" charset="-120"/>
+              </a:rPr>
+              <a:t>CP Lecture Series</a:t>
+            </a:r>
+            <a:pPr algn="r" indent="0" marL="0">
+              <a:buNone/>
+            </a:pPr>
+            <a:r>
+              <a:rPr lang="en-US" sz="850" dirty="0">
+                <a:solidFill>
+                  <a:srgbClr val="DCE4EC"/>
+                </a:solidFill>
+                <a:latin typeface="Calibri" pitchFamily="34" charset="0"/>
+                <a:ea typeface="Calibri" pitchFamily="34" charset="-122"/>
+                <a:cs typeface="Calibri" pitchFamily="34" charset="-120"/>
+              </a:rPr>
+              <a:t>   ·   </a:t>
+            </a:r>
+            <a:pPr algn="r" indent="0" marL="0">
+              <a:buNone/>
+            </a:pPr>
+            <a:r>
+              <a:rPr lang="en-US" sz="850" b="1" dirty="0">
+                <a:solidFill>
+                  <a:srgbClr val="6A1B9A"/>
+                </a:solidFill>
+                <a:latin typeface="Calibri" pitchFamily="34" charset="0"/>
+                <a:ea typeface="Calibri" pitchFamily="34" charset="-122"/>
+                <a:cs typeface="Calibri" pitchFamily="34" charset="-120"/>
+              </a:rPr>
+              <a:t>18</a:t>
+            </a:r>
+            <a:endParaRPr lang="en-US" sz="850" dirty="0"/>
+          </a:p>
+        </p:txBody>
+      </p:sp>
+    </p:spTree>
+  </p:cSld>
+  <p:clrMapOvr>
+    <a:masterClrMapping/>
+  </p:clrMapOvr>
+</p:sld>
+</file>
+
+<file path=ppt/slides/slide29.xml><?xml version="1.0" encoding="utf-8"?>
+<p:sld xmlns:a="http://schemas.openxmlformats.org/drawingml/2006/main" xmlns:p="http://schemas.openxmlformats.org/presentationml/2006/main" xmlns:r="http://schemas.openxmlformats.org/officeDocument/2006/relationships">
+  <p:cSld>
+    <p:spTree>
+      <p:nvGrpSpPr>
+        <p:cNvPr id="1" name=""/>
+        <p:cNvGrpSpPr/>
+        <p:nvPr/>
+      </p:nvGrpSpPr>
+      <p:grpSpPr/>
+      <p:sp>
+        <p:nvSpPr>
+          <p:cNvPr id="2" name="Text 0"/>
+          <p:cNvSpPr/>
+          <p:nvPr/>
+        </p:nvSpPr>
+        <p:spPr>
+          <a:xfrm>
+            <a:off x="566928" y="329184"/>
+            <a:ext cx="10515600" cy="310896"/>
+          </a:xfrm>
+          <a:prstGeom prst="rect">
+            <a:avLst/>
+          </a:prstGeom>
+          <a:noFill/>
+          <a:ln/>
+        </p:spPr>
+        <p:txBody>
+          <a:bodyPr wrap="square" lIns="0" tIns="0" rIns="0" bIns="0" rtlCol="0" anchor="ctr"/>
+          <a:lstStyle/>
+          <a:p>
+            <a:pPr algn="l" indent="0" marL="0">
+              <a:buNone/>
+            </a:pPr>
+            <a:r>
+              <a:rPr lang="en-US" sz="1100" b="1" spc="150" kern="0" dirty="0">
+                <a:solidFill>
+                  <a:srgbClr val="6A1B9A"/>
+                </a:solidFill>
+                <a:latin typeface="Calibri" pitchFamily="34" charset="0"/>
+                <a:ea typeface="Calibri" pitchFamily="34" charset="-122"/>
+                <a:cs typeface="Calibri" pitchFamily="34" charset="-120"/>
+              </a:rPr>
+              <a:t>IMMUNOLOGY &amp; SEROLOGY   ·   BOARD REVIEW  ·  Q1</a:t>
+            </a:r>
+            <a:endParaRPr lang="en-US" sz="1100" dirty="0"/>
+          </a:p>
+        </p:txBody>
+      </p:sp>
+      <p:sp>
+        <p:nvSpPr>
+          <p:cNvPr id="3" name="Text 1"/>
+          <p:cNvSpPr/>
+          <p:nvPr/>
+        </p:nvSpPr>
+        <p:spPr>
+          <a:xfrm>
+            <a:off x="566928" y="713232"/>
+            <a:ext cx="11064240" cy="749808"/>
+          </a:xfrm>
+          <a:prstGeom prst="rect">
+            <a:avLst/>
+          </a:prstGeom>
+          <a:noFill/>
+          <a:ln/>
+        </p:spPr>
+        <p:txBody>
+          <a:bodyPr wrap="square" lIns="0" tIns="0" rIns="0" bIns="0" rtlCol="0" anchor="ctr"/>
+          <a:lstStyle/>
+          <a:p>
+            <a:pPr algn="l" indent="0" marL="0">
+              <a:buNone/>
+            </a:pPr>
+            <a:r>
+              <a:rPr lang="en-US" sz="2600" b="1" dirty="0">
+                <a:solidFill>
+                  <a:srgbClr val="0E3A5F"/>
+                </a:solidFill>
+                <a:latin typeface="Calibri" pitchFamily="34" charset="0"/>
+                <a:ea typeface="Calibri" pitchFamily="34" charset="-122"/>
+                <a:cs typeface="Calibri" pitchFamily="34" charset="-120"/>
+              </a:rPr>
+              <a:t>Board-Style Review</a:t>
+            </a:r>
+            <a:endParaRPr lang="en-US" sz="2600" dirty="0"/>
+          </a:p>
+        </p:txBody>
+      </p:sp>
+      <p:sp>
+        <p:nvSpPr>
+          <p:cNvPr id="4" name="Text 2"/>
+          <p:cNvSpPr/>
+          <p:nvPr/>
+        </p:nvSpPr>
+        <p:spPr>
+          <a:xfrm>
+            <a:off x="566928" y="1417320"/>
+            <a:ext cx="11057839" cy="914400"/>
+          </a:xfrm>
+          <a:prstGeom prst="rect">
+            <a:avLst/>
+          </a:prstGeom>
+          <a:noFill/>
+          <a:ln/>
+        </p:spPr>
+        <p:txBody>
+          <a:bodyPr wrap="square" lIns="0" tIns="0" rIns="0" bIns="0" rtlCol="0" anchor="t"/>
+          <a:lstStyle/>
+          <a:p>
+            <a:pPr algn="l" indent="0" marL="0">
+              <a:lnSpc>
+                <a:spcPct val="105000"/>
+              </a:lnSpc>
+              <a:buNone/>
+            </a:pPr>
+            <a:r>
+              <a:rPr lang="en-US" sz="1450" b="1" dirty="0">
+                <a:solidFill>
+                  <a:srgbClr val="1B2A38"/>
+                </a:solidFill>
+                <a:latin typeface="Calibri" pitchFamily="34" charset="0"/>
+                <a:ea typeface="Calibri" pitchFamily="34" charset="-122"/>
+                <a:cs typeface="Calibri" pitchFamily="34" charset="-120"/>
+              </a:rPr>
+              <a:t>Which autoantibody is most specific for SLE and tracks nephritis activity?</a:t>
+            </a:r>
+            <a:endParaRPr lang="en-US" sz="1450" dirty="0"/>
+          </a:p>
+        </p:txBody>
+      </p:sp>
+      <p:sp>
+        <p:nvSpPr>
+          <p:cNvPr id="5" name="Text 3"/>
+          <p:cNvSpPr/>
+          <p:nvPr/>
+        </p:nvSpPr>
+        <p:spPr>
+          <a:xfrm>
+            <a:off x="658368" y="2395728"/>
+            <a:ext cx="6192390" cy="3017520"/>
+          </a:xfrm>
+          <a:prstGeom prst="rect">
+            <a:avLst/>
+          </a:prstGeom>
+          <a:noFill/>
+          <a:ln/>
+        </p:spPr>
+        <p:txBody>
+          <a:bodyPr wrap="square" lIns="0" tIns="0" rIns="0" bIns="0" rtlCol="0" anchor="t"/>
+          <a:lstStyle/>
+          <a:p>
+            <a:pPr algn="l" indent="0" marL="0">
+              <a:spcAft>
+                <a:spcPts val="600"/>
+              </a:spcAft>
+              <a:buNone/>
+            </a:pPr>
+            <a:r>
+              <a:rPr lang="en-US" sz="1350" dirty="0">
+                <a:solidFill>
+                  <a:srgbClr val="33444F"/>
+                </a:solidFill>
+                <a:latin typeface="Calibri" pitchFamily="34" charset="0"/>
+                <a:ea typeface="Calibri" pitchFamily="34" charset="-122"/>
+                <a:cs typeface="Calibri" pitchFamily="34" charset="-120"/>
+              </a:rPr>
+              <a:t>A. Anti-SSA</a:t>
+            </a:r>
+            <a:endParaRPr lang="en-US" sz="1350" dirty="0"/>
+          </a:p>
+          <a:p>
+            <a:pPr algn="l" indent="0" marL="0">
+              <a:spcAft>
+                <a:spcPts val="600"/>
+              </a:spcAft>
+              <a:buNone/>
+            </a:pPr>
+            <a:r>
+              <a:rPr lang="en-US" sz="1350" b="1" dirty="0">
+                <a:solidFill>
+                  <a:srgbClr val="4A1269"/>
+                </a:solidFill>
+                <a:latin typeface="Calibri" pitchFamily="34" charset="0"/>
+                <a:ea typeface="Calibri" pitchFamily="34" charset="-122"/>
+                <a:cs typeface="Calibri" pitchFamily="34" charset="-120"/>
+              </a:rPr>
+              <a:t>B. Anti-dsDNA</a:t>
+            </a:r>
+            <a:endParaRPr lang="en-US" sz="1350" dirty="0"/>
+          </a:p>
+          <a:p>
+            <a:pPr algn="l" indent="0" marL="0">
+              <a:spcAft>
+                <a:spcPts val="600"/>
+              </a:spcAft>
+              <a:buNone/>
+            </a:pPr>
+            <a:r>
+              <a:rPr lang="en-US" sz="1350" dirty="0">
+                <a:solidFill>
+                  <a:srgbClr val="33444F"/>
+                </a:solidFill>
+                <a:latin typeface="Calibri" pitchFamily="34" charset="0"/>
+                <a:ea typeface="Calibri" pitchFamily="34" charset="-122"/>
+                <a:cs typeface="Calibri" pitchFamily="34" charset="-120"/>
+              </a:rPr>
+              <a:t>C. ANA (homogeneous)</a:t>
+            </a:r>
+            <a:endParaRPr lang="en-US" sz="1350" dirty="0"/>
+          </a:p>
+          <a:p>
+            <a:pPr algn="l" indent="0" marL="0">
+              <a:spcAft>
+                <a:spcPts val="600"/>
+              </a:spcAft>
+              <a:buNone/>
+            </a:pPr>
+            <a:r>
+              <a:rPr lang="en-US" sz="1350" dirty="0">
+                <a:solidFill>
+                  <a:srgbClr val="33444F"/>
+                </a:solidFill>
+                <a:latin typeface="Calibri" pitchFamily="34" charset="0"/>
+                <a:ea typeface="Calibri" pitchFamily="34" charset="-122"/>
+                <a:cs typeface="Calibri" pitchFamily="34" charset="-120"/>
+              </a:rPr>
+              <a:t>D. Anti-centromere</a:t>
+            </a:r>
+            <a:endParaRPr lang="en-US" sz="1350" dirty="0"/>
+          </a:p>
+          <a:p>
+            <a:pPr algn="l" indent="0" marL="0">
+              <a:spcAft>
+                <a:spcPts val="600"/>
+              </a:spcAft>
+              <a:buNone/>
+            </a:pPr>
+            <a:r>
+              <a:rPr lang="en-US" sz="1350" dirty="0">
+                <a:solidFill>
+                  <a:srgbClr val="33444F"/>
+                </a:solidFill>
+                <a:latin typeface="Calibri" pitchFamily="34" charset="0"/>
+                <a:ea typeface="Calibri" pitchFamily="34" charset="-122"/>
+                <a:cs typeface="Calibri" pitchFamily="34" charset="-120"/>
+              </a:rPr>
+              <a:t>E. Rheumatoid factor</a:t>
+            </a:r>
+            <a:endParaRPr lang="en-US" sz="1350" dirty="0"/>
+          </a:p>
+        </p:txBody>
+      </p:sp>
+      <p:sp>
+        <p:nvSpPr>
+          <p:cNvPr id="6" name="Shape 4"/>
+          <p:cNvSpPr/>
+          <p:nvPr/>
+        </p:nvSpPr>
+        <p:spPr>
+          <a:xfrm>
+            <a:off x="7201632" y="2395728"/>
+            <a:ext cx="4423136" cy="3246120"/>
+          </a:xfrm>
+          <a:prstGeom prst="roundRect">
+            <a:avLst>
+              <a:gd name="adj" fmla="val 2535"/>
+            </a:avLst>
+          </a:prstGeom>
+          <a:solidFill>
+            <a:srgbClr val="F1E8F7"/>
+          </a:solidFill>
+          <a:ln/>
+          <a:effectLst>
+            <a:outerShdw sx="100000" sy="100000" kx="0" ky="0" algn="bl" rotWithShape="0" blurRad="88900" dist="25400" dir="5400000">
+              <a:srgbClr val="22303C">
+                <a:alpha val="12000"/>
+              </a:srgbClr>
+            </a:outerShdw>
+          </a:effectLst>
+        </p:spPr>
+        <p:txBody>
+          <a:bodyPr/>
+          <a:p/>
+        </p:txBody>
+      </p:sp>
+      <p:sp>
+        <p:nvSpPr>
+          <p:cNvPr id="7" name="Text 5"/>
+          <p:cNvSpPr/>
+          <p:nvPr/>
+        </p:nvSpPr>
+        <p:spPr>
+          <a:xfrm>
+            <a:off x="7439376" y="2578608"/>
+            <a:ext cx="3965936" cy="457200"/>
+          </a:xfrm>
+          <a:prstGeom prst="rect">
+            <a:avLst/>
+          </a:prstGeom>
+          <a:noFill/>
+          <a:ln/>
+        </p:spPr>
+        <p:txBody>
+          <a:bodyPr wrap="square" lIns="0" tIns="0" rIns="0" bIns="0" rtlCol="0" anchor="ctr"/>
+          <a:lstStyle/>
+          <a:p>
+            <a:pPr indent="0" marL="0">
+              <a:buNone/>
+            </a:pPr>
+            <a:r>
+              <a:rPr lang="en-US" sz="1500" b="1" dirty="0">
+                <a:solidFill>
+                  <a:srgbClr val="6A1B9A"/>
+                </a:solidFill>
+                <a:latin typeface="Calibri" pitchFamily="34" charset="0"/>
+                <a:ea typeface="Calibri" pitchFamily="34" charset="-122"/>
+                <a:cs typeface="Calibri" pitchFamily="34" charset="-120"/>
+              </a:rPr>
+              <a:t>ANSWER  </a:t>
+            </a:r>
+            <a:pPr indent="0" marL="0">
+              <a:buNone/>
+            </a:pPr>
+            <a:r>
+              <a:rPr lang="en-US" sz="1500" b="1" dirty="0">
+                <a:solidFill>
+                  <a:srgbClr val="1B2A38"/>
+                </a:solidFill>
+                <a:latin typeface="Calibri" pitchFamily="34" charset="0"/>
+                <a:ea typeface="Calibri" pitchFamily="34" charset="-122"/>
+                <a:cs typeface="Calibri" pitchFamily="34" charset="-120"/>
+              </a:rPr>
+              <a:t>B — Anti-dsDNA</a:t>
+            </a:r>
+            <a:endParaRPr lang="en-US" sz="1500" dirty="0"/>
+          </a:p>
+        </p:txBody>
+      </p:sp>
+      <p:sp>
+        <p:nvSpPr>
+          <p:cNvPr id="8" name="Text 6"/>
+          <p:cNvSpPr/>
+          <p:nvPr/>
+        </p:nvSpPr>
+        <p:spPr>
+          <a:xfrm>
+            <a:off x="7439376" y="3127248"/>
+            <a:ext cx="3947648" cy="2377440"/>
+          </a:xfrm>
+          <a:prstGeom prst="rect">
+            <a:avLst/>
+          </a:prstGeom>
+          <a:noFill/>
+          <a:ln/>
+        </p:spPr>
+        <p:txBody>
+          <a:bodyPr wrap="square" lIns="0" tIns="0" rIns="0" bIns="0" rtlCol="0" anchor="t"/>
+          <a:lstStyle/>
+          <a:p>
+            <a:pPr algn="l" indent="0" marL="0">
+              <a:lnSpc>
+                <a:spcPct val="108000"/>
+              </a:lnSpc>
+              <a:buNone/>
+            </a:pPr>
+            <a:r>
+              <a:rPr lang="en-US" sz="1250" dirty="0">
+                <a:solidFill>
+                  <a:srgbClr val="33444F"/>
+                </a:solidFill>
+                <a:latin typeface="Calibri" pitchFamily="34" charset="0"/>
+                <a:ea typeface="Calibri" pitchFamily="34" charset="-122"/>
+                <a:cs typeface="Calibri" pitchFamily="34" charset="-120"/>
+              </a:rPr>
+              <a:t>Anti-dsDNA is specific for SLE and correlates with disease/renal activity; ANA is sensitive but not specific.</a:t>
+            </a:r>
+            <a:endParaRPr lang="en-US" sz="1250" dirty="0"/>
+          </a:p>
+        </p:txBody>
+      </p:sp>
+      <p:sp>
+        <p:nvSpPr>
+          <p:cNvPr id="9" name="Text 7"/>
+          <p:cNvSpPr/>
+          <p:nvPr/>
+        </p:nvSpPr>
+        <p:spPr>
+          <a:xfrm>
+            <a:off x="566928" y="6473952"/>
+            <a:ext cx="7772400" cy="274320"/>
+          </a:xfrm>
+          <a:prstGeom prst="rect">
+            <a:avLst/>
+          </a:prstGeom>
+          <a:noFill/>
+          <a:ln/>
+        </p:spPr>
+        <p:txBody>
+          <a:bodyPr wrap="square" lIns="0" tIns="0" rIns="0" bIns="0" rtlCol="0" anchor="ctr"/>
+          <a:lstStyle/>
+          <a:p>
+            <a:pPr algn="l" indent="0" marL="0">
+              <a:buNone/>
+            </a:pPr>
+            <a:r>
+              <a:rPr lang="en-US" sz="850" dirty="0">
+                <a:solidFill>
+                  <a:srgbClr val="9AA8B4"/>
+                </a:solidFill>
+                <a:latin typeface="Calibri" pitchFamily="34" charset="0"/>
+                <a:ea typeface="Calibri" pitchFamily="34" charset="-122"/>
+                <a:cs typeface="Calibri" pitchFamily="34" charset="-120"/>
+              </a:rPr>
+              <a:t>Makassed General Hospital  ·  Department of Laboratory Medicine</a:t>
+            </a:r>
+            <a:endParaRPr lang="en-US" sz="850" dirty="0"/>
+          </a:p>
+        </p:txBody>
+      </p:sp>
+      <p:sp>
+        <p:nvSpPr>
+          <p:cNvPr id="10" name="Text 8"/>
+          <p:cNvSpPr/>
+          <p:nvPr/>
+        </p:nvSpPr>
+        <p:spPr>
+          <a:xfrm>
+            <a:off x="9814255" y="6473952"/>
+            <a:ext cx="1828800" cy="274320"/>
+          </a:xfrm>
+          <a:prstGeom prst="rect">
+            <a:avLst/>
+          </a:prstGeom>
+          <a:noFill/>
+          <a:ln/>
+        </p:spPr>
+        <p:txBody>
+          <a:bodyPr wrap="square" lIns="0" tIns="0" rIns="0" bIns="0" rtlCol="0" anchor="ctr"/>
+          <a:lstStyle/>
+          <a:p>
+            <a:pPr algn="r" indent="0" marL="0">
+              <a:buNone/>
+            </a:pPr>
+            <a:r>
+              <a:rPr lang="en-US" sz="850" dirty="0">
+                <a:solidFill>
+                  <a:srgbClr val="9AA8B4"/>
+                </a:solidFill>
+                <a:latin typeface="Calibri" pitchFamily="34" charset="0"/>
+                <a:ea typeface="Calibri" pitchFamily="34" charset="-122"/>
+                <a:cs typeface="Calibri" pitchFamily="34" charset="-120"/>
+              </a:rPr>
+              <a:t>CP Lecture Series</a:t>
+            </a:r>
+            <a:pPr algn="r" indent="0" marL="0">
+              <a:buNone/>
+            </a:pPr>
+            <a:r>
+              <a:rPr lang="en-US" sz="850" dirty="0">
+                <a:solidFill>
+                  <a:srgbClr val="DCE4EC"/>
+                </a:solidFill>
+                <a:latin typeface="Calibri" pitchFamily="34" charset="0"/>
+                <a:ea typeface="Calibri" pitchFamily="34" charset="-122"/>
+                <a:cs typeface="Calibri" pitchFamily="34" charset="-120"/>
+              </a:rPr>
+              <a:t>   ·   </a:t>
+            </a:r>
+            <a:pPr algn="r" indent="0" marL="0">
+              <a:buNone/>
+            </a:pPr>
+            <a:r>
+              <a:rPr lang="en-US" sz="850" b="1" dirty="0">
+                <a:solidFill>
+                  <a:srgbClr val="6A1B9A"/>
+                </a:solidFill>
+                <a:latin typeface="Calibri" pitchFamily="34" charset="0"/>
+                <a:ea typeface="Calibri" pitchFamily="34" charset="-122"/>
+                <a:cs typeface="Calibri" pitchFamily="34" charset="-120"/>
+              </a:rPr>
+              <a:t>17</a:t>
+            </a:r>
+            <a:endParaRPr lang="en-US" sz="850" dirty="0"/>
+          </a:p>
+        </p:txBody>
+      </p:sp>
+    </p:spTree>
+  </p:cSld>
+  <p:clrMapOvr>
+    <a:masterClrMapping/>
+  </p:clrMapOvr>
+</p:sld>
+</file>
+
 <file path=ppt/slides/slide3.xml><?xml version="1.0" encoding="utf-8"?>
 <p:sld xmlns:a="http://schemas.openxmlformats.org/drawingml/2006/main" xmlns:r="http://schemas.openxmlformats.org/officeDocument/2006/relationships" xmlns:p="http://schemas.openxmlformats.org/presentationml/2006/main">
   <p:cSld name="Slide 3">
@@ -11551,6 +13171,10 @@
             </a:outerShdw>
           </a:effectLst>
         </p:spPr>
+        <p:txBody>
+          <a:bodyPr/>
+          <a:p/>
+        </p:txBody>
       </p:sp>
       <p:sp>
         <p:nvSpPr>
@@ -11578,6 +13202,10 @@
             </a:outerShdw>
           </a:effectLst>
         </p:spPr>
+        <p:txBody>
+          <a:bodyPr/>
+          <a:p/>
+        </p:txBody>
       </p:sp>
       <p:sp>
         <p:nvSpPr>
@@ -11685,6 +13313,10 @@
             </a:outerShdw>
           </a:effectLst>
         </p:spPr>
+        <p:txBody>
+          <a:bodyPr/>
+          <a:p/>
+        </p:txBody>
       </p:sp>
       <p:sp>
         <p:nvSpPr>
@@ -11712,6 +13344,10 @@
             </a:outerShdw>
           </a:effectLst>
         </p:spPr>
+        <p:txBody>
+          <a:bodyPr/>
+          <a:p/>
+        </p:txBody>
       </p:sp>
       <p:sp>
         <p:nvSpPr>
@@ -11819,6 +13455,10 @@
             </a:outerShdw>
           </a:effectLst>
         </p:spPr>
+        <p:txBody>
+          <a:bodyPr/>
+          <a:p/>
+        </p:txBody>
       </p:sp>
       <p:sp>
         <p:nvSpPr>
@@ -11846,6 +13486,10 @@
             </a:outerShdw>
           </a:effectLst>
         </p:spPr>
+        <p:txBody>
+          <a:bodyPr/>
+          <a:p/>
+        </p:txBody>
       </p:sp>
       <p:sp>
         <p:nvSpPr>
@@ -11953,6 +13597,10 @@
             </a:outerShdw>
           </a:effectLst>
         </p:spPr>
+        <p:txBody>
+          <a:bodyPr/>
+          <a:p/>
+        </p:txBody>
       </p:sp>
       <p:sp>
         <p:nvSpPr>
@@ -11980,6 +13628,10 @@
             </a:outerShdw>
           </a:effectLst>
         </p:spPr>
+        <p:txBody>
+          <a:bodyPr/>
+          <a:p/>
+        </p:txBody>
       </p:sp>
       <p:sp>
         <p:nvSpPr>
@@ -12087,6 +13739,10 @@
             </a:outerShdw>
           </a:effectLst>
         </p:spPr>
+        <p:txBody>
+          <a:bodyPr/>
+          <a:p/>
+        </p:txBody>
       </p:sp>
       <p:sp>
         <p:nvSpPr>
@@ -12114,6 +13770,10 @@
             </a:outerShdw>
           </a:effectLst>
         </p:spPr>
+        <p:txBody>
+          <a:bodyPr/>
+          <a:p/>
+        </p:txBody>
       </p:sp>
       <p:sp>
         <p:nvSpPr>
@@ -12221,6 +13881,10 @@
             </a:outerShdw>
           </a:effectLst>
         </p:spPr>
+        <p:txBody>
+          <a:bodyPr/>
+          <a:p/>
+        </p:txBody>
       </p:sp>
       <p:sp>
         <p:nvSpPr>
@@ -12248,6 +13912,10 @@
             </a:outerShdw>
           </a:effectLst>
         </p:spPr>
+        <p:txBody>
+          <a:bodyPr/>
+          <a:p/>
+        </p:txBody>
       </p:sp>
       <p:sp>
         <p:nvSpPr>
@@ -12571,6 +14239,10 @@
             </a:outerShdw>
           </a:effectLst>
         </p:spPr>
+        <p:txBody>
+          <a:bodyPr/>
+          <a:p/>
+        </p:txBody>
       </p:sp>
       <p:sp>
         <p:nvSpPr>
@@ -12598,6 +14270,10 @@
             </a:outerShdw>
           </a:effectLst>
         </p:spPr>
+        <p:txBody>
+          <a:bodyPr/>
+          <a:p/>
+        </p:txBody>
       </p:sp>
       <p:sp>
         <p:nvSpPr>
@@ -12712,6 +14388,10 @@
           </a:solidFill>
           <a:ln/>
         </p:spPr>
+        <p:txBody>
+          <a:bodyPr/>
+          <a:p/>
+        </p:txBody>
       </p:sp>
       <p:sp>
         <p:nvSpPr>
@@ -12739,6 +14419,10 @@
             </a:outerShdw>
           </a:effectLst>
         </p:spPr>
+        <p:txBody>
+          <a:bodyPr/>
+          <a:p/>
+        </p:txBody>
       </p:sp>
       <p:sp>
         <p:nvSpPr>
@@ -12860,6 +14544,10 @@
             </a:outerShdw>
           </a:effectLst>
         </p:spPr>
+        <p:txBody>
+          <a:bodyPr/>
+          <a:p/>
+        </p:txBody>
       </p:sp>
       <p:sp>
         <p:nvSpPr>
@@ -12887,6 +14575,10 @@
             </a:outerShdw>
           </a:effectLst>
         </p:spPr>
+        <p:txBody>
+          <a:bodyPr/>
+          <a:p/>
+        </p:txBody>
       </p:sp>
       <p:sp>
         <p:nvSpPr>
@@ -13001,6 +14693,10 @@
           </a:solidFill>
           <a:ln/>
         </p:spPr>
+        <p:txBody>
+          <a:bodyPr/>
+          <a:p/>
+        </p:txBody>
       </p:sp>
       <p:sp>
         <p:nvSpPr>
@@ -13028,6 +14724,10 @@
             </a:outerShdw>
           </a:effectLst>
         </p:spPr>
+        <p:txBody>
+          <a:bodyPr/>
+          <a:p/>
+        </p:txBody>
       </p:sp>
       <p:sp>
         <p:nvSpPr>
@@ -13149,6 +14849,10 @@
             </a:outerShdw>
           </a:effectLst>
         </p:spPr>
+        <p:txBody>
+          <a:bodyPr/>
+          <a:p/>
+        </p:txBody>
       </p:sp>
       <p:sp>
         <p:nvSpPr>
@@ -13176,6 +14880,10 @@
             </a:outerShdw>
           </a:effectLst>
         </p:spPr>
+        <p:txBody>
+          <a:bodyPr/>
+          <a:p/>
+        </p:txBody>
       </p:sp>
       <p:sp>
         <p:nvSpPr>
@@ -13414,6 +15122,10 @@
           </a:solidFill>
           <a:ln/>
         </p:spPr>
+        <p:txBody>
+          <a:bodyPr/>
+          <a:p/>
+        </p:txBody>
       </p:sp>
       <p:sp>
         <p:nvSpPr>
@@ -13436,6 +15148,10 @@
           </a:solidFill>
           <a:ln/>
         </p:spPr>
+        <p:txBody>
+          <a:bodyPr/>
+          <a:p/>
+        </p:txBody>
       </p:sp>
       <p:sp>
         <p:nvSpPr>
@@ -13697,6 +15413,10 @@
             </a:outerShdw>
           </a:effectLst>
         </p:spPr>
+        <p:txBody>
+          <a:bodyPr/>
+          <a:p/>
+        </p:txBody>
       </p:sp>
       <p:pic>
         <p:nvPicPr>
@@ -14005,6 +15725,10 @@
             </a:outerShdw>
           </a:effectLst>
         </p:spPr>
+        <p:txBody>
+          <a:bodyPr/>
+          <a:p/>
+        </p:txBody>
       </p:sp>
       <p:sp>
         <p:nvSpPr>
@@ -14179,6 +15903,10 @@
             </a:outerShdw>
           </a:effectLst>
         </p:spPr>
+        <p:txBody>
+          <a:bodyPr/>
+          <a:p/>
+        </p:txBody>
       </p:sp>
       <p:sp>
         <p:nvSpPr>
@@ -16212,6 +17940,10 @@
           </a:solidFill>
           <a:ln/>
         </p:spPr>
+        <p:txBody>
+          <a:bodyPr/>
+          <a:p/>
+        </p:txBody>
       </p:sp>
       <p:sp>
         <p:nvSpPr>
@@ -16234,6 +17966,10 @@
           </a:solidFill>
           <a:ln/>
         </p:spPr>
+        <p:txBody>
+          <a:bodyPr/>
+          <a:p/>
+        </p:txBody>
       </p:sp>
       <p:sp>
         <p:nvSpPr>
